--- a/tema2_bleeding/Кровотечение_и_обзорный_осмотр.pptx
+++ b/tema2_bleeding/Кровотечение_и_обзорный_осмотр.pptx
@@ -3112,7 +3112,7 @@
             <a:avLst/>
           </a:prstGeom>
           <a:solidFill>
-            <a:srgbClr val="F7F7F7"/>
+            <a:srgbClr val="FFFFFF"/>
           </a:solidFill>
           <a:ln>
             <a:noFill/>
@@ -3148,14 +3148,14 @@
         </p:nvSpPr>
         <p:spPr>
           <a:xfrm>
-            <a:off x="0" y="2800000"/>
-            <a:ext cx="3500000" cy="2200000"/>
+            <a:off x="0" y="0"/>
+            <a:ext cx="24384000" cy="120000"/>
           </a:xfrm>
           <a:prstGeom prst="rect">
             <a:avLst/>
           </a:prstGeom>
           <a:solidFill>
-            <a:srgbClr val="D9D9D9"/>
+            <a:srgbClr val="DDDDDD"/>
           </a:solidFill>
           <a:ln>
             <a:noFill/>
@@ -3191,14 +3191,14 @@
         </p:nvSpPr>
         <p:spPr>
           <a:xfrm>
-            <a:off x="23000000" y="0"/>
-            <a:ext cx="1384000" cy="13716000"/>
+            <a:off x="0" y="4200000"/>
+            <a:ext cx="24384000" cy="2800000"/>
           </a:xfrm>
           <a:prstGeom prst="rect">
             <a:avLst/>
           </a:prstGeom>
           <a:solidFill>
-            <a:srgbClr val="D9D9D9"/>
+            <a:srgbClr val="FAFAFA"/>
           </a:solidFill>
           <a:ln>
             <a:noFill/>
@@ -3234,8 +3234,8 @@
         </p:nvSpPr>
         <p:spPr>
           <a:xfrm>
-            <a:off x="900000" y="3000000"/>
-            <a:ext cx="20000000" cy="1800000"/>
+            <a:off x="800000" y="4600000"/>
+            <a:ext cx="22800000" cy="1400000"/>
           </a:xfrm>
           <a:prstGeom prst="rect">
             <a:avLst/>
@@ -3243,16 +3243,20 @@
           <a:noFill/>
         </p:spPr>
         <p:txBody>
-          <a:bodyPr wrap="square" anchor="t"/>
+          <a:bodyPr wrap="square" anchor="t">
+            <a:spAutoFit/>
+          </a:bodyPr>
           <a:lstStyle/>
           <a:p>
             <a:pPr algn="l"/>
             <a:r>
-              <a:rPr sz="3200" b="1">
-                <a:solidFill>
-                  <a:srgbClr val="2C2C2C"/>
-                </a:solidFill>
-                <a:latin typeface="Arial"/>
+              <a:rPr sz="4600" b="1">
+                <a:solidFill>
+                  <a:srgbClr val="333333"/>
+                </a:solidFill>
+                <a:latin typeface="Open Sans"/>
+                <a:ea typeface="Open Sans"/>
+                <a:cs typeface="Open Sans"/>
               </a:rPr>
               <a:t>КРОВОТЕЧЕНИЕ И ОБЗОРНЫЙ ОСМОТР ПОСТРАДАВШЕГО</a:t>
             </a:r>
@@ -3267,14 +3271,14 @@
         </p:nvSpPr>
         <p:spPr>
           <a:xfrm>
-            <a:off x="900000" y="4900000"/>
-            <a:ext cx="16000000" cy="25000"/>
+            <a:off x="800000" y="6200000"/>
+            <a:ext cx="12000000" cy="20000"/>
           </a:xfrm>
           <a:prstGeom prst="rect">
             <a:avLst/>
           </a:prstGeom>
           <a:solidFill>
-            <a:srgbClr val="2C2C2C"/>
+            <a:srgbClr val="0055AA"/>
           </a:solidFill>
           <a:ln>
             <a:noFill/>
@@ -3310,8 +3314,8 @@
         </p:nvSpPr>
         <p:spPr>
           <a:xfrm>
-            <a:off x="900000" y="5100000"/>
-            <a:ext cx="20000000" cy="500000"/>
+            <a:off x="800000" y="6500000"/>
+            <a:ext cx="22800000" cy="600000"/>
           </a:xfrm>
           <a:prstGeom prst="rect">
             <a:avLst/>
@@ -3319,18 +3323,22 @@
           <a:noFill/>
         </p:spPr>
         <p:txBody>
-          <a:bodyPr wrap="square" anchor="t"/>
+          <a:bodyPr wrap="square" anchor="t">
+            <a:spAutoFit/>
+          </a:bodyPr>
           <a:lstStyle/>
           <a:p>
             <a:pPr algn="l"/>
             <a:r>
-              <a:rPr sz="1600" b="0">
-                <a:solidFill>
-                  <a:srgbClr val="555555"/>
-                </a:solidFill>
-                <a:latin typeface="Arial"/>
+              <a:rPr sz="2600" b="0">
+                <a:solidFill>
+                  <a:srgbClr val="0055AA"/>
+                </a:solidFill>
+                <a:latin typeface="Open Sans"/>
+                <a:ea typeface="Open Sans"/>
+                <a:cs typeface="Open Sans"/>
               </a:rPr>
-              <a:t>Теоретический модуль · п. 2.1 Приложения № 2 к ПП РФ № 2464</a:t>
+              <a:t>Теоретический модуль · п. 2.1</a:t>
             </a:r>
           </a:p>
         </p:txBody>
@@ -3343,8 +3351,8 @@
         </p:nvSpPr>
         <p:spPr>
           <a:xfrm>
-            <a:off x="900000" y="5800000"/>
-            <a:ext cx="20000000" cy="400000"/>
+            <a:off x="800000" y="7200000"/>
+            <a:ext cx="22800000" cy="500000"/>
           </a:xfrm>
           <a:prstGeom prst="rect">
             <a:avLst/>
@@ -3352,18 +3360,22 @@
           <a:noFill/>
         </p:spPr>
         <p:txBody>
-          <a:bodyPr wrap="square" anchor="t"/>
+          <a:bodyPr wrap="square" anchor="t">
+            <a:spAutoFit/>
+          </a:bodyPr>
           <a:lstStyle/>
           <a:p>
             <a:pPr algn="l"/>
             <a:r>
-              <a:rPr sz="1200" b="0">
-                <a:solidFill>
-                  <a:srgbClr val="6F6F6F"/>
-                </a:solidFill>
-                <a:latin typeface="Arial"/>
+              <a:rPr sz="2000" b="0">
+                <a:solidFill>
+                  <a:srgbClr val="333333"/>
+                </a:solidFill>
+                <a:latin typeface="Open Sans"/>
+                <a:ea typeface="Open Sans"/>
+                <a:cs typeface="Open Sans"/>
               </a:rPr>
-              <a:t>Курс первой помощи · Тема 2</a:t>
+              <a:t>Тема 2 · Оказание первой помощи при наружных кровотечениях</a:t>
             </a:r>
           </a:p>
         </p:txBody>
@@ -3401,7 +3413,7 @@
             <a:avLst/>
           </a:prstGeom>
           <a:solidFill>
-            <a:srgbClr val="F7F7F7"/>
+            <a:srgbClr val="FFFFFF"/>
           </a:solidFill>
           <a:ln>
             <a:noFill/>
@@ -3437,14 +3449,14 @@
         </p:nvSpPr>
         <p:spPr>
           <a:xfrm>
-            <a:off x="23000000" y="0"/>
-            <a:ext cx="1384000" cy="13716000"/>
+            <a:off x="0" y="0"/>
+            <a:ext cx="24384000" cy="120000"/>
           </a:xfrm>
           <a:prstGeom prst="rect">
             <a:avLst/>
           </a:prstGeom>
           <a:solidFill>
-            <a:srgbClr val="D9D9D9"/>
+            <a:srgbClr val="DDDDDD"/>
           </a:solidFill>
           <a:ln>
             <a:noFill/>
@@ -3480,8 +3492,8 @@
         </p:nvSpPr>
         <p:spPr>
           <a:xfrm>
-            <a:off x="900000" y="5200000"/>
-            <a:ext cx="20000000" cy="1000000"/>
+            <a:off x="800000" y="5500000"/>
+            <a:ext cx="22800000" cy="1200000"/>
           </a:xfrm>
           <a:prstGeom prst="rect">
             <a:avLst/>
@@ -3489,18 +3501,22 @@
           <a:noFill/>
         </p:spPr>
         <p:txBody>
-          <a:bodyPr wrap="square" anchor="t"/>
+          <a:bodyPr wrap="square" anchor="t">
+            <a:spAutoFit/>
+          </a:bodyPr>
           <a:lstStyle/>
           <a:p>
             <a:pPr algn="l"/>
             <a:r>
-              <a:rPr sz="3600" b="1">
-                <a:solidFill>
-                  <a:srgbClr val="2C2C2C"/>
-                </a:solidFill>
-                <a:latin typeface="Arial"/>
+              <a:rPr sz="4600" b="1">
+                <a:solidFill>
+                  <a:srgbClr val="333333"/>
+                </a:solidFill>
+                <a:latin typeface="Open Sans"/>
+                <a:ea typeface="Open Sans"/>
+                <a:cs typeface="Open Sans"/>
               </a:rPr>
-              <a:t>БЛАГОДАРИМ ЗА ВНИМАНИЕ</a:t>
+              <a:t>Спасибо за внимание</a:t>
             </a:r>
           </a:p>
         </p:txBody>
@@ -3513,14 +3529,14 @@
         </p:nvSpPr>
         <p:spPr>
           <a:xfrm>
-            <a:off x="900000" y="6400000"/>
-            <a:ext cx="10000000" cy="25000"/>
+            <a:off x="800000" y="6900000"/>
+            <a:ext cx="10000000" cy="20000"/>
           </a:xfrm>
           <a:prstGeom prst="rect">
             <a:avLst/>
           </a:prstGeom>
           <a:solidFill>
-            <a:srgbClr val="2C2C2C"/>
+            <a:srgbClr val="0055AA"/>
           </a:solidFill>
           <a:ln>
             <a:noFill/>
@@ -3556,8 +3572,8 @@
         </p:nvSpPr>
         <p:spPr>
           <a:xfrm>
-            <a:off x="900000" y="6700000"/>
-            <a:ext cx="20000000" cy="500000"/>
+            <a:off x="800000" y="7200000"/>
+            <a:ext cx="22800000" cy="500000"/>
           </a:xfrm>
           <a:prstGeom prst="rect">
             <a:avLst/>
@@ -3565,16 +3581,20 @@
           <a:noFill/>
         </p:spPr>
         <p:txBody>
-          <a:bodyPr wrap="square" anchor="t"/>
+          <a:bodyPr wrap="square" anchor="t">
+            <a:spAutoFit/>
+          </a:bodyPr>
           <a:lstStyle/>
           <a:p>
             <a:pPr algn="l"/>
             <a:r>
-              <a:rPr sz="1400" b="0">
-                <a:solidFill>
-                  <a:srgbClr val="6F6F6F"/>
-                </a:solidFill>
-                <a:latin typeface="Arial"/>
+              <a:rPr sz="2000" b="0">
+                <a:solidFill>
+                  <a:srgbClr val="333333"/>
+                </a:solidFill>
+                <a:latin typeface="Open Sans"/>
+                <a:ea typeface="Open Sans"/>
+                <a:cs typeface="Open Sans"/>
               </a:rPr>
               <a:t>Тема 2 · Оказание первой помощи при наружных кровотечениях</a:t>
             </a:r>
@@ -3614,7 +3634,7 @@
             <a:avLst/>
           </a:prstGeom>
           <a:solidFill>
-            <a:srgbClr val="F7F7F7"/>
+            <a:srgbClr val="FFFFFF"/>
           </a:solidFill>
           <a:ln>
             <a:noFill/>
@@ -3650,14 +3670,14 @@
         </p:nvSpPr>
         <p:spPr>
           <a:xfrm>
-            <a:off x="23000000" y="0"/>
-            <a:ext cx="1384000" cy="13716000"/>
+            <a:off x="0" y="0"/>
+            <a:ext cx="24384000" cy="120000"/>
           </a:xfrm>
           <a:prstGeom prst="rect">
             <a:avLst/>
           </a:prstGeom>
           <a:solidFill>
-            <a:srgbClr val="D9D9D9"/>
+            <a:srgbClr val="DDDDDD"/>
           </a:solidFill>
           <a:ln>
             <a:noFill/>
@@ -3687,20 +3707,57 @@
       </p:sp>
       <p:sp>
         <p:nvSpPr>
-          <p:cNvPr id="4" name="Rectangle 3"/>
+          <p:cNvPr id="4" name="TextBox 3"/>
+          <p:cNvSpPr txBox="1"/>
+          <p:nvPr/>
+        </p:nvSpPr>
+        <p:spPr>
+          <a:xfrm>
+            <a:off x="800000" y="350000"/>
+            <a:ext cx="22800000" cy="1000000"/>
+          </a:xfrm>
+          <a:prstGeom prst="rect">
+            <a:avLst/>
+          </a:prstGeom>
+          <a:noFill/>
+        </p:spPr>
+        <p:txBody>
+          <a:bodyPr wrap="square" anchor="t">
+            <a:spAutoFit/>
+          </a:bodyPr>
+          <a:lstStyle/>
+          <a:p>
+            <a:pPr algn="l"/>
+            <a:r>
+              <a:rPr sz="4600" b="1">
+                <a:solidFill>
+                  <a:srgbClr val="333333"/>
+                </a:solidFill>
+                <a:latin typeface="Open Sans"/>
+                <a:ea typeface="Open Sans"/>
+                <a:cs typeface="Open Sans"/>
+              </a:rPr>
+              <a:t>Содержание</a:t>
+            </a:r>
+          </a:p>
+        </p:txBody>
+      </p:sp>
+      <p:sp>
+        <p:nvSpPr>
+          <p:cNvPr id="5" name="Rectangle 4"/>
           <p:cNvSpPr/>
           <p:nvPr/>
         </p:nvSpPr>
         <p:spPr>
           <a:xfrm>
-            <a:off x="0" y="5600000"/>
-            <a:ext cx="700000" cy="700000"/>
+            <a:off x="800000" y="1450000"/>
+            <a:ext cx="22800000" cy="20000"/>
           </a:xfrm>
           <a:prstGeom prst="rect">
             <a:avLst/>
           </a:prstGeom>
           <a:solidFill>
-            <a:srgbClr val="4D4D4D"/>
+            <a:srgbClr val="E1E1E1"/>
           </a:solidFill>
           <a:ln>
             <a:noFill/>
@@ -3730,119 +3787,20 @@
       </p:sp>
       <p:sp>
         <p:nvSpPr>
-          <p:cNvPr id="5" name="TextBox 4"/>
-          <p:cNvSpPr txBox="1"/>
-          <p:nvPr/>
-        </p:nvSpPr>
-        <p:spPr>
-          <a:xfrm>
-            <a:off x="0" y="5680000"/>
-            <a:ext cx="700000" cy="550000"/>
-          </a:xfrm>
-          <a:prstGeom prst="rect">
-            <a:avLst/>
-          </a:prstGeom>
-          <a:noFill/>
-        </p:spPr>
-        <p:txBody>
-          <a:bodyPr wrap="square" anchor="ctr"/>
-          <a:lstStyle/>
-          <a:p>
-            <a:pPr algn="ctr"/>
-            <a:r>
-              <a:rPr sz="1800" b="1">
-                <a:solidFill>
-                  <a:srgbClr val="FFFFFF"/>
-                </a:solidFill>
-                <a:latin typeface="Arial"/>
-              </a:rPr>
-              <a:t>2</a:t>
-            </a:r>
-          </a:p>
-        </p:txBody>
-      </p:sp>
-      <p:sp>
-        <p:nvSpPr>
-          <p:cNvPr id="6" name="TextBox 5"/>
-          <p:cNvSpPr txBox="1"/>
-          <p:nvPr/>
-        </p:nvSpPr>
-        <p:spPr>
-          <a:xfrm>
-            <a:off x="900000" y="1450000"/>
-            <a:ext cx="20000000" cy="350000"/>
-          </a:xfrm>
-          <a:prstGeom prst="rect">
-            <a:avLst/>
-          </a:prstGeom>
-          <a:noFill/>
-        </p:spPr>
-        <p:txBody>
-          <a:bodyPr wrap="square" anchor="t"/>
-          <a:lstStyle/>
-          <a:p>
-            <a:pPr algn="l"/>
-            <a:r>
-              <a:rPr sz="1200" b="0">
-                <a:solidFill>
-                  <a:srgbClr val="6F6F6F"/>
-                </a:solidFill>
-                <a:latin typeface="Arial"/>
-              </a:rPr>
-              <a:t>Тема 2 · Оказание первой помощи при наружных кровотечениях</a:t>
-            </a:r>
-          </a:p>
-        </p:txBody>
-      </p:sp>
-      <p:sp>
-        <p:nvSpPr>
-          <p:cNvPr id="7" name="TextBox 6"/>
-          <p:cNvSpPr txBox="1"/>
-          <p:nvPr/>
-        </p:nvSpPr>
-        <p:spPr>
-          <a:xfrm>
-            <a:off x="900000" y="500000"/>
-            <a:ext cx="21000000" cy="900000"/>
-          </a:xfrm>
-          <a:prstGeom prst="rect">
-            <a:avLst/>
-          </a:prstGeom>
-          <a:noFill/>
-        </p:spPr>
-        <p:txBody>
-          <a:bodyPr wrap="square" anchor="t"/>
-          <a:lstStyle/>
-          <a:p>
-            <a:pPr algn="l"/>
-            <a:r>
-              <a:rPr sz="2800" b="1">
-                <a:solidFill>
-                  <a:srgbClr val="2C2C2C"/>
-                </a:solidFill>
-                <a:latin typeface="Arial"/>
-              </a:rPr>
-              <a:t>СОДЕРЖАНИЕ</a:t>
-            </a:r>
-          </a:p>
-        </p:txBody>
-      </p:sp>
-      <p:sp>
-        <p:nvSpPr>
-          <p:cNvPr id="8" name="Rectangle 7"/>
+          <p:cNvPr id="6" name="Rounded Rectangle 5"/>
           <p:cNvSpPr/>
           <p:nvPr/>
         </p:nvSpPr>
         <p:spPr>
           <a:xfrm>
-            <a:off x="900000" y="1350000"/>
-            <a:ext cx="20000000" cy="25000"/>
-          </a:xfrm>
-          <a:prstGeom prst="rect">
+            <a:off x="800000" y="1950000"/>
+            <a:ext cx="900000" cy="900000"/>
+          </a:xfrm>
+          <a:prstGeom prst="roundRect">
             <a:avLst/>
           </a:prstGeom>
           <a:solidFill>
-            <a:srgbClr val="B8B8B8"/>
+            <a:srgbClr val="0055AA"/>
           </a:solidFill>
           <a:ln>
             <a:noFill/>
@@ -3872,14 +3830,14 @@
       </p:sp>
       <p:sp>
         <p:nvSpPr>
-          <p:cNvPr id="9" name="TextBox 8"/>
+          <p:cNvPr id="7" name="TextBox 6"/>
           <p:cNvSpPr txBox="1"/>
           <p:nvPr/>
         </p:nvSpPr>
         <p:spPr>
           <a:xfrm>
-            <a:off x="900000" y="1450000"/>
-            <a:ext cx="20000000" cy="350000"/>
+            <a:off x="800000" y="1950000"/>
+            <a:ext cx="900000" cy="900000"/>
           </a:xfrm>
           <a:prstGeom prst="rect">
             <a:avLst/>
@@ -3887,41 +3845,47 @@
           <a:noFill/>
         </p:spPr>
         <p:txBody>
-          <a:bodyPr wrap="square" anchor="t"/>
-          <a:lstStyle/>
-          <a:p>
-            <a:pPr algn="l"/>
-            <a:r>
-              <a:rPr sz="1200" b="0">
-                <a:solidFill>
-                  <a:srgbClr val="6F6F6F"/>
-                </a:solidFill>
-                <a:latin typeface="Arial"/>
+          <a:bodyPr wrap="square" anchor="ctr">
+            <a:spAutoFit/>
+          </a:bodyPr>
+          <a:lstStyle/>
+          <a:p>
+            <a:pPr algn="ctr"/>
+            <a:r>
+              <a:rPr sz="3200" b="1">
+                <a:solidFill>
+                  <a:srgbClr val="FFFFFF"/>
+                </a:solidFill>
+                <a:latin typeface="Open Sans"/>
+                <a:ea typeface="Open Sans"/>
+                <a:cs typeface="Open Sans"/>
               </a:rPr>
-              <a:t>Оказание первой помощи при наружных кровотечениях</a:t>
-            </a:r>
-          </a:p>
-        </p:txBody>
-      </p:sp>
-      <p:sp>
-        <p:nvSpPr>
-          <p:cNvPr id="10" name="Rectangle 9"/>
+              <a:t>1</a:t>
+            </a:r>
+          </a:p>
+        </p:txBody>
+      </p:sp>
+      <p:sp>
+        <p:nvSpPr>
+          <p:cNvPr id="8" name="Rectangle 7"/>
           <p:cNvSpPr/>
           <p:nvPr/>
         </p:nvSpPr>
         <p:spPr>
           <a:xfrm>
-            <a:off x="900000" y="2000000"/>
-            <a:ext cx="700000" cy="700000"/>
+            <a:off x="1900000" y="1950000"/>
+            <a:ext cx="20500000" cy="900000"/>
           </a:xfrm>
           <a:prstGeom prst="rect">
             <a:avLst/>
           </a:prstGeom>
           <a:solidFill>
-            <a:srgbClr val="0082B9"/>
+            <a:srgbClr val="FFFFFF"/>
           </a:solidFill>
-          <a:ln>
-            <a:noFill/>
+          <a:ln w="12700">
+            <a:solidFill>
+              <a:srgbClr val="E1E1E1"/>
+            </a:solidFill>
           </a:ln>
         </p:spPr>
         <p:style>
@@ -3948,14 +3912,14 @@
       </p:sp>
       <p:sp>
         <p:nvSpPr>
-          <p:cNvPr id="11" name="TextBox 10"/>
+          <p:cNvPr id="9" name="TextBox 8"/>
           <p:cNvSpPr txBox="1"/>
           <p:nvPr/>
         </p:nvSpPr>
         <p:spPr>
           <a:xfrm>
-            <a:off x="900000" y="2000000"/>
-            <a:ext cx="700000" cy="700000"/>
+            <a:off x="2200000" y="1950000"/>
+            <a:ext cx="19500000" cy="900000"/>
           </a:xfrm>
           <a:prstGeom prst="rect">
             <a:avLst/>
@@ -3963,43 +3927,45 @@
           <a:noFill/>
         </p:spPr>
         <p:txBody>
-          <a:bodyPr wrap="square" anchor="ctr"/>
-          <a:lstStyle/>
-          <a:p>
-            <a:pPr algn="ctr"/>
-            <a:r>
-              <a:rPr sz="2200" b="1">
-                <a:solidFill>
-                  <a:srgbClr val="FFFFFF"/>
-                </a:solidFill>
-                <a:latin typeface="Arial"/>
+          <a:bodyPr wrap="square" anchor="ctr">
+            <a:spAutoFit/>
+          </a:bodyPr>
+          <a:lstStyle/>
+          <a:p>
+            <a:pPr algn="l"/>
+            <a:r>
+              <a:rPr sz="3200" b="0">
+                <a:solidFill>
+                  <a:srgbClr val="333333"/>
+                </a:solidFill>
+                <a:latin typeface="Open Sans"/>
+                <a:ea typeface="Open Sans"/>
+                <a:cs typeface="Open Sans"/>
               </a:rPr>
-              <a:t>1</a:t>
-            </a:r>
-          </a:p>
-        </p:txBody>
-      </p:sp>
-      <p:sp>
-        <p:nvSpPr>
-          <p:cNvPr id="12" name="Rectangle 11"/>
+              <a:t>Определение кровотечения и признаки кровопотери</a:t>
+            </a:r>
+          </a:p>
+        </p:txBody>
+      </p:sp>
+      <p:sp>
+        <p:nvSpPr>
+          <p:cNvPr id="10" name="Rounded Rectangle 9"/>
           <p:cNvSpPr/>
           <p:nvPr/>
         </p:nvSpPr>
         <p:spPr>
           <a:xfrm>
-            <a:off x="1700000" y="2000000"/>
-            <a:ext cx="19000000" cy="700000"/>
-          </a:xfrm>
-          <a:prstGeom prst="rect">
+            <a:off x="800000" y="3150000"/>
+            <a:ext cx="900000" cy="900000"/>
+          </a:xfrm>
+          <a:prstGeom prst="roundRect">
             <a:avLst/>
           </a:prstGeom>
           <a:solidFill>
-            <a:srgbClr val="FFFFFF"/>
+            <a:srgbClr val="0055AA"/>
           </a:solidFill>
           <a:ln>
-            <a:solidFill>
-              <a:srgbClr val="B8B8B8"/>
-            </a:solidFill>
+            <a:noFill/>
           </a:ln>
         </p:spPr>
         <p:style>
@@ -4026,14 +3992,14 @@
       </p:sp>
       <p:sp>
         <p:nvSpPr>
-          <p:cNvPr id="13" name="TextBox 12"/>
+          <p:cNvPr id="11" name="TextBox 10"/>
           <p:cNvSpPr txBox="1"/>
           <p:nvPr/>
         </p:nvSpPr>
         <p:spPr>
           <a:xfrm>
-            <a:off x="2000000" y="2000000"/>
-            <a:ext cx="18000000" cy="700000"/>
+            <a:off x="800000" y="3150000"/>
+            <a:ext cx="900000" cy="900000"/>
           </a:xfrm>
           <a:prstGeom prst="rect">
             <a:avLst/>
@@ -4041,41 +4007,47 @@
           <a:noFill/>
         </p:spPr>
         <p:txBody>
-          <a:bodyPr wrap="square" anchor="ctr"/>
-          <a:lstStyle/>
-          <a:p>
-            <a:pPr algn="l"/>
-            <a:r>
-              <a:rPr sz="1800" b="0">
-                <a:solidFill>
-                  <a:srgbClr val="2C2C2C"/>
-                </a:solidFill>
-                <a:latin typeface="Arial"/>
+          <a:bodyPr wrap="square" anchor="ctr">
+            <a:spAutoFit/>
+          </a:bodyPr>
+          <a:lstStyle/>
+          <a:p>
+            <a:pPr algn="ctr"/>
+            <a:r>
+              <a:rPr sz="3200" b="1">
+                <a:solidFill>
+                  <a:srgbClr val="FFFFFF"/>
+                </a:solidFill>
+                <a:latin typeface="Open Sans"/>
+                <a:ea typeface="Open Sans"/>
+                <a:cs typeface="Open Sans"/>
               </a:rPr>
-              <a:t>Определение кровотечения и признаки острой кровопотери</a:t>
-            </a:r>
-          </a:p>
-        </p:txBody>
-      </p:sp>
-      <p:sp>
-        <p:nvSpPr>
-          <p:cNvPr id="14" name="Rectangle 13"/>
+              <a:t>2</a:t>
+            </a:r>
+          </a:p>
+        </p:txBody>
+      </p:sp>
+      <p:sp>
+        <p:nvSpPr>
+          <p:cNvPr id="12" name="Rectangle 11"/>
           <p:cNvSpPr/>
           <p:nvPr/>
         </p:nvSpPr>
         <p:spPr>
           <a:xfrm>
-            <a:off x="900000" y="2950000"/>
-            <a:ext cx="700000" cy="700000"/>
+            <a:off x="1900000" y="3150000"/>
+            <a:ext cx="20500000" cy="900000"/>
           </a:xfrm>
           <a:prstGeom prst="rect">
             <a:avLst/>
           </a:prstGeom>
           <a:solidFill>
-            <a:srgbClr val="0082B9"/>
+            <a:srgbClr val="FFFFFF"/>
           </a:solidFill>
-          <a:ln>
-            <a:noFill/>
+          <a:ln w="12700">
+            <a:solidFill>
+              <a:srgbClr val="E1E1E1"/>
+            </a:solidFill>
           </a:ln>
         </p:spPr>
         <p:style>
@@ -4102,14 +4074,14 @@
       </p:sp>
       <p:sp>
         <p:nvSpPr>
-          <p:cNvPr id="15" name="TextBox 14"/>
+          <p:cNvPr id="13" name="TextBox 12"/>
           <p:cNvSpPr txBox="1"/>
           <p:nvPr/>
         </p:nvSpPr>
         <p:spPr>
           <a:xfrm>
-            <a:off x="900000" y="2950000"/>
-            <a:ext cx="700000" cy="700000"/>
+            <a:off x="2200000" y="3150000"/>
+            <a:ext cx="19500000" cy="900000"/>
           </a:xfrm>
           <a:prstGeom prst="rect">
             <a:avLst/>
@@ -4117,43 +4089,45 @@
           <a:noFill/>
         </p:spPr>
         <p:txBody>
-          <a:bodyPr wrap="square" anchor="ctr"/>
-          <a:lstStyle/>
-          <a:p>
-            <a:pPr algn="ctr"/>
-            <a:r>
-              <a:rPr sz="2200" b="1">
-                <a:solidFill>
-                  <a:srgbClr val="FFFFFF"/>
-                </a:solidFill>
-                <a:latin typeface="Arial"/>
+          <a:bodyPr wrap="square" anchor="ctr">
+            <a:spAutoFit/>
+          </a:bodyPr>
+          <a:lstStyle/>
+          <a:p>
+            <a:pPr algn="l"/>
+            <a:r>
+              <a:rPr sz="3200" b="0">
+                <a:solidFill>
+                  <a:srgbClr val="333333"/>
+                </a:solidFill>
+                <a:latin typeface="Open Sans"/>
+                <a:ea typeface="Open Sans"/>
+                <a:cs typeface="Open Sans"/>
               </a:rPr>
-              <a:t>2</a:t>
-            </a:r>
-          </a:p>
-        </p:txBody>
-      </p:sp>
-      <p:sp>
-        <p:nvSpPr>
-          <p:cNvPr id="16" name="Rectangle 15"/>
+              <a:t>Цель и порядок обзорного осмотра</a:t>
+            </a:r>
+          </a:p>
+        </p:txBody>
+      </p:sp>
+      <p:sp>
+        <p:nvSpPr>
+          <p:cNvPr id="14" name="Rounded Rectangle 13"/>
           <p:cNvSpPr/>
           <p:nvPr/>
         </p:nvSpPr>
         <p:spPr>
           <a:xfrm>
-            <a:off x="1700000" y="2950000"/>
-            <a:ext cx="19000000" cy="700000"/>
-          </a:xfrm>
-          <a:prstGeom prst="rect">
+            <a:off x="800000" y="4350000"/>
+            <a:ext cx="900000" cy="900000"/>
+          </a:xfrm>
+          <a:prstGeom prst="roundRect">
             <a:avLst/>
           </a:prstGeom>
           <a:solidFill>
-            <a:srgbClr val="FFFFFF"/>
+            <a:srgbClr val="0055AA"/>
           </a:solidFill>
           <a:ln>
-            <a:solidFill>
-              <a:srgbClr val="B8B8B8"/>
-            </a:solidFill>
+            <a:noFill/>
           </a:ln>
         </p:spPr>
         <p:style>
@@ -4180,14 +4154,14 @@
       </p:sp>
       <p:sp>
         <p:nvSpPr>
-          <p:cNvPr id="17" name="TextBox 16"/>
+          <p:cNvPr id="15" name="TextBox 14"/>
           <p:cNvSpPr txBox="1"/>
           <p:nvPr/>
         </p:nvSpPr>
         <p:spPr>
           <a:xfrm>
-            <a:off x="2000000" y="2950000"/>
-            <a:ext cx="18000000" cy="700000"/>
+            <a:off x="800000" y="4350000"/>
+            <a:ext cx="900000" cy="900000"/>
           </a:xfrm>
           <a:prstGeom prst="rect">
             <a:avLst/>
@@ -4195,41 +4169,47 @@
           <a:noFill/>
         </p:spPr>
         <p:txBody>
-          <a:bodyPr wrap="square" anchor="ctr"/>
-          <a:lstStyle/>
-          <a:p>
-            <a:pPr algn="l"/>
-            <a:r>
-              <a:rPr sz="1800" b="0">
-                <a:solidFill>
-                  <a:srgbClr val="2C2C2C"/>
-                </a:solidFill>
-                <a:latin typeface="Arial"/>
+          <a:bodyPr wrap="square" anchor="ctr">
+            <a:spAutoFit/>
+          </a:bodyPr>
+          <a:lstStyle/>
+          <a:p>
+            <a:pPr algn="ctr"/>
+            <a:r>
+              <a:rPr sz="3200" b="1">
+                <a:solidFill>
+                  <a:srgbClr val="FFFFFF"/>
+                </a:solidFill>
+                <a:latin typeface="Open Sans"/>
+                <a:ea typeface="Open Sans"/>
+                <a:cs typeface="Open Sans"/>
               </a:rPr>
-              <a:t>Цель и порядок обзорного осмотра</a:t>
-            </a:r>
-          </a:p>
-        </p:txBody>
-      </p:sp>
-      <p:sp>
-        <p:nvSpPr>
-          <p:cNvPr id="18" name="Rectangle 17"/>
+              <a:t>3</a:t>
+            </a:r>
+          </a:p>
+        </p:txBody>
+      </p:sp>
+      <p:sp>
+        <p:nvSpPr>
+          <p:cNvPr id="16" name="Rectangle 15"/>
           <p:cNvSpPr/>
           <p:nvPr/>
         </p:nvSpPr>
         <p:spPr>
           <a:xfrm>
-            <a:off x="900000" y="3900000"/>
-            <a:ext cx="700000" cy="700000"/>
+            <a:off x="1900000" y="4350000"/>
+            <a:ext cx="20500000" cy="900000"/>
           </a:xfrm>
           <a:prstGeom prst="rect">
             <a:avLst/>
           </a:prstGeom>
           <a:solidFill>
-            <a:srgbClr val="0082B9"/>
+            <a:srgbClr val="FFFFFF"/>
           </a:solidFill>
-          <a:ln>
-            <a:noFill/>
+          <a:ln w="12700">
+            <a:solidFill>
+              <a:srgbClr val="E1E1E1"/>
+            </a:solidFill>
           </a:ln>
         </p:spPr>
         <p:style>
@@ -4256,14 +4236,14 @@
       </p:sp>
       <p:sp>
         <p:nvSpPr>
-          <p:cNvPr id="19" name="TextBox 18"/>
+          <p:cNvPr id="17" name="TextBox 16"/>
           <p:cNvSpPr txBox="1"/>
           <p:nvPr/>
         </p:nvSpPr>
         <p:spPr>
           <a:xfrm>
-            <a:off x="900000" y="3900000"/>
-            <a:ext cx="700000" cy="700000"/>
+            <a:off x="2200000" y="4350000"/>
+            <a:ext cx="19500000" cy="900000"/>
           </a:xfrm>
           <a:prstGeom prst="rect">
             <a:avLst/>
@@ -4271,43 +4251,45 @@
           <a:noFill/>
         </p:spPr>
         <p:txBody>
-          <a:bodyPr wrap="square" anchor="ctr"/>
-          <a:lstStyle/>
-          <a:p>
-            <a:pPr algn="ctr"/>
-            <a:r>
-              <a:rPr sz="2200" b="1">
-                <a:solidFill>
-                  <a:srgbClr val="FFFFFF"/>
-                </a:solidFill>
-                <a:latin typeface="Arial"/>
+          <a:bodyPr wrap="square" anchor="ctr">
+            <a:spAutoFit/>
+          </a:bodyPr>
+          <a:lstStyle/>
+          <a:p>
+            <a:pPr algn="l"/>
+            <a:r>
+              <a:rPr sz="3200" b="0">
+                <a:solidFill>
+                  <a:srgbClr val="333333"/>
+                </a:solidFill>
+                <a:latin typeface="Open Sans"/>
+                <a:ea typeface="Open Sans"/>
+                <a:cs typeface="Open Sans"/>
               </a:rPr>
-              <a:t>3</a:t>
-            </a:r>
-          </a:p>
-        </p:txBody>
-      </p:sp>
-      <p:sp>
-        <p:nvSpPr>
-          <p:cNvPr id="20" name="Rectangle 19"/>
+              <a:t>Обзорный и подробный осмотр: различия</a:t>
+            </a:r>
+          </a:p>
+        </p:txBody>
+      </p:sp>
+      <p:sp>
+        <p:nvSpPr>
+          <p:cNvPr id="18" name="Rounded Rectangle 17"/>
           <p:cNvSpPr/>
           <p:nvPr/>
         </p:nvSpPr>
         <p:spPr>
           <a:xfrm>
-            <a:off x="1700000" y="3900000"/>
-            <a:ext cx="19000000" cy="700000"/>
-          </a:xfrm>
-          <a:prstGeom prst="rect">
+            <a:off x="800000" y="5550000"/>
+            <a:ext cx="900000" cy="900000"/>
+          </a:xfrm>
+          <a:prstGeom prst="roundRect">
             <a:avLst/>
           </a:prstGeom>
           <a:solidFill>
-            <a:srgbClr val="FFFFFF"/>
+            <a:srgbClr val="0055AA"/>
           </a:solidFill>
           <a:ln>
-            <a:solidFill>
-              <a:srgbClr val="B8B8B8"/>
-            </a:solidFill>
+            <a:noFill/>
           </a:ln>
         </p:spPr>
         <p:style>
@@ -4334,14 +4316,14 @@
       </p:sp>
       <p:sp>
         <p:nvSpPr>
-          <p:cNvPr id="21" name="TextBox 20"/>
+          <p:cNvPr id="19" name="TextBox 18"/>
           <p:cNvSpPr txBox="1"/>
           <p:nvPr/>
         </p:nvSpPr>
         <p:spPr>
           <a:xfrm>
-            <a:off x="2000000" y="3900000"/>
-            <a:ext cx="18000000" cy="700000"/>
+            <a:off x="800000" y="5550000"/>
+            <a:ext cx="900000" cy="900000"/>
           </a:xfrm>
           <a:prstGeom prst="rect">
             <a:avLst/>
@@ -4349,41 +4331,47 @@
           <a:noFill/>
         </p:spPr>
         <p:txBody>
-          <a:bodyPr wrap="square" anchor="ctr"/>
-          <a:lstStyle/>
-          <a:p>
-            <a:pPr algn="l"/>
-            <a:r>
-              <a:rPr sz="1800" b="0">
-                <a:solidFill>
-                  <a:srgbClr val="2C2C2C"/>
-                </a:solidFill>
-                <a:latin typeface="Arial"/>
+          <a:bodyPr wrap="square" anchor="ctr">
+            <a:spAutoFit/>
+          </a:bodyPr>
+          <a:lstStyle/>
+          <a:p>
+            <a:pPr algn="ctr"/>
+            <a:r>
+              <a:rPr sz="3200" b="1">
+                <a:solidFill>
+                  <a:srgbClr val="FFFFFF"/>
+                </a:solidFill>
+                <a:latin typeface="Open Sans"/>
+                <a:ea typeface="Open Sans"/>
+                <a:cs typeface="Open Sans"/>
               </a:rPr>
-              <a:t>Обзорный и подробный осмотр: в чём различие</a:t>
-            </a:r>
-          </a:p>
-        </p:txBody>
-      </p:sp>
-      <p:sp>
-        <p:nvSpPr>
-          <p:cNvPr id="22" name="Rectangle 21"/>
+              <a:t>4</a:t>
+            </a:r>
+          </a:p>
+        </p:txBody>
+      </p:sp>
+      <p:sp>
+        <p:nvSpPr>
+          <p:cNvPr id="20" name="Rectangle 19"/>
           <p:cNvSpPr/>
           <p:nvPr/>
         </p:nvSpPr>
         <p:spPr>
           <a:xfrm>
-            <a:off x="900000" y="4850000"/>
-            <a:ext cx="700000" cy="700000"/>
+            <a:off x="1900000" y="5550000"/>
+            <a:ext cx="20500000" cy="900000"/>
           </a:xfrm>
           <a:prstGeom prst="rect">
             <a:avLst/>
           </a:prstGeom>
           <a:solidFill>
-            <a:srgbClr val="0082B9"/>
+            <a:srgbClr val="FFFFFF"/>
           </a:solidFill>
-          <a:ln>
-            <a:noFill/>
+          <a:ln w="12700">
+            <a:solidFill>
+              <a:srgbClr val="E1E1E1"/>
+            </a:solidFill>
           </a:ln>
         </p:spPr>
         <p:style>
@@ -4410,14 +4398,14 @@
       </p:sp>
       <p:sp>
         <p:nvSpPr>
-          <p:cNvPr id="23" name="TextBox 22"/>
+          <p:cNvPr id="21" name="TextBox 20"/>
           <p:cNvSpPr txBox="1"/>
           <p:nvPr/>
         </p:nvSpPr>
         <p:spPr>
           <a:xfrm>
-            <a:off x="900000" y="4850000"/>
-            <a:ext cx="700000" cy="700000"/>
+            <a:off x="2200000" y="5550000"/>
+            <a:ext cx="19500000" cy="900000"/>
           </a:xfrm>
           <a:prstGeom prst="rect">
             <a:avLst/>
@@ -4425,94 +4413,20 @@
           <a:noFill/>
         </p:spPr>
         <p:txBody>
-          <a:bodyPr wrap="square" anchor="ctr"/>
-          <a:lstStyle/>
-          <a:p>
-            <a:pPr algn="ctr"/>
-            <a:r>
-              <a:rPr sz="2200" b="1">
-                <a:solidFill>
-                  <a:srgbClr val="FFFFFF"/>
-                </a:solidFill>
-                <a:latin typeface="Arial"/>
-              </a:rPr>
-              <a:t>4</a:t>
-            </a:r>
-          </a:p>
-        </p:txBody>
-      </p:sp>
-      <p:sp>
-        <p:nvSpPr>
-          <p:cNvPr id="24" name="Rectangle 23"/>
-          <p:cNvSpPr/>
-          <p:nvPr/>
-        </p:nvSpPr>
-        <p:spPr>
-          <a:xfrm>
-            <a:off x="1700000" y="4850000"/>
-            <a:ext cx="19000000" cy="700000"/>
-          </a:xfrm>
-          <a:prstGeom prst="rect">
-            <a:avLst/>
-          </a:prstGeom>
-          <a:solidFill>
-            <a:srgbClr val="FFFFFF"/>
-          </a:solidFill>
-          <a:ln>
-            <a:solidFill>
-              <a:srgbClr val="B8B8B8"/>
-            </a:solidFill>
-          </a:ln>
-        </p:spPr>
-        <p:style>
-          <a:lnRef idx="1">
-            <a:schemeClr val="accent1"/>
-          </a:lnRef>
-          <a:fillRef idx="3">
-            <a:schemeClr val="accent1"/>
-          </a:fillRef>
-          <a:effectRef idx="2">
-            <a:schemeClr val="accent1"/>
-          </a:effectRef>
-          <a:fontRef idx="minor">
-            <a:schemeClr val="lt1"/>
-          </a:fontRef>
-        </p:style>
-        <p:txBody>
-          <a:bodyPr rtlCol="0" anchor="ctr"/>
-          <a:lstStyle/>
-          <a:p>
-            <a:pPr algn="ctr"/>
-          </a:p>
-        </p:txBody>
-      </p:sp>
-      <p:sp>
-        <p:nvSpPr>
-          <p:cNvPr id="25" name="TextBox 24"/>
-          <p:cNvSpPr txBox="1"/>
-          <p:nvPr/>
-        </p:nvSpPr>
-        <p:spPr>
-          <a:xfrm>
-            <a:off x="2000000" y="4850000"/>
-            <a:ext cx="18000000" cy="700000"/>
-          </a:xfrm>
-          <a:prstGeom prst="rect">
-            <a:avLst/>
-          </a:prstGeom>
-          <a:noFill/>
-        </p:spPr>
-        <p:txBody>
-          <a:bodyPr wrap="square" anchor="ctr"/>
+          <a:bodyPr wrap="square" anchor="ctr">
+            <a:spAutoFit/>
+          </a:bodyPr>
           <a:lstStyle/>
           <a:p>
             <a:pPr algn="l"/>
             <a:r>
-              <a:rPr sz="1800" b="0">
-                <a:solidFill>
-                  <a:srgbClr val="2C2C2C"/>
-                </a:solidFill>
-                <a:latin typeface="Arial"/>
+              <a:rPr sz="3200" b="0">
+                <a:solidFill>
+                  <a:srgbClr val="333333"/>
+                </a:solidFill>
+                <a:latin typeface="Open Sans"/>
+                <a:ea typeface="Open Sans"/>
+                <a:cs typeface="Open Sans"/>
               </a:rPr>
               <a:t>Когда обзорный осмотр критически важен</a:t>
             </a:r>
@@ -4537,20 +4451,12 @@
         <p:nvPr/>
       </p:nvGrpSpPr>
       <p:grpSpPr/>
-      <p:pic>
-        <p:nvPicPr>
-          <p:cNvPr id="2" name="Picture 1" descr="page_02.png"/>
-          <p:cNvPicPr>
-            <a:picLocks noChangeAspect="1"/>
-          </p:cNvPicPr>
-          <p:nvPr/>
-        </p:nvPicPr>
-        <p:blipFill>
-          <a:blip r:embed="rId2"/>
-          <a:stretch>
-            <a:fillRect/>
-          </a:stretch>
-        </p:blipFill>
+      <p:sp>
+        <p:nvSpPr>
+          <p:cNvPr id="2" name="Rectangle 1"/>
+          <p:cNvSpPr/>
+          <p:nvPr/>
+        </p:nvSpPr>
         <p:spPr>
           <a:xfrm>
             <a:off x="0" y="0"/>
@@ -4559,8 +4465,253 @@
           <a:prstGeom prst="rect">
             <a:avLst/>
           </a:prstGeom>
-        </p:spPr>
-      </p:pic>
+          <a:solidFill>
+            <a:srgbClr val="FFFFFF"/>
+          </a:solidFill>
+          <a:ln>
+            <a:noFill/>
+          </a:ln>
+        </p:spPr>
+        <p:style>
+          <a:lnRef idx="1">
+            <a:schemeClr val="accent1"/>
+          </a:lnRef>
+          <a:fillRef idx="3">
+            <a:schemeClr val="accent1"/>
+          </a:fillRef>
+          <a:effectRef idx="2">
+            <a:schemeClr val="accent1"/>
+          </a:effectRef>
+          <a:fontRef idx="minor">
+            <a:schemeClr val="lt1"/>
+          </a:fontRef>
+        </p:style>
+        <p:txBody>
+          <a:bodyPr rtlCol="0" anchor="ctr"/>
+          <a:lstStyle/>
+          <a:p>
+            <a:pPr algn="ctr"/>
+          </a:p>
+        </p:txBody>
+      </p:sp>
+      <p:sp>
+        <p:nvSpPr>
+          <p:cNvPr id="3" name="Rectangle 2"/>
+          <p:cNvSpPr/>
+          <p:nvPr/>
+        </p:nvSpPr>
+        <p:spPr>
+          <a:xfrm>
+            <a:off x="0" y="0"/>
+            <a:ext cx="24384000" cy="120000"/>
+          </a:xfrm>
+          <a:prstGeom prst="rect">
+            <a:avLst/>
+          </a:prstGeom>
+          <a:solidFill>
+            <a:srgbClr val="DDDDDD"/>
+          </a:solidFill>
+          <a:ln>
+            <a:noFill/>
+          </a:ln>
+        </p:spPr>
+        <p:style>
+          <a:lnRef idx="1">
+            <a:schemeClr val="accent1"/>
+          </a:lnRef>
+          <a:fillRef idx="3">
+            <a:schemeClr val="accent1"/>
+          </a:fillRef>
+          <a:effectRef idx="2">
+            <a:schemeClr val="accent1"/>
+          </a:effectRef>
+          <a:fontRef idx="minor">
+            <a:schemeClr val="lt1"/>
+          </a:fontRef>
+        </p:style>
+        <p:txBody>
+          <a:bodyPr rtlCol="0" anchor="ctr"/>
+          <a:lstStyle/>
+          <a:p>
+            <a:pPr algn="ctr"/>
+          </a:p>
+        </p:txBody>
+      </p:sp>
+      <p:sp>
+        <p:nvSpPr>
+          <p:cNvPr id="4" name="TextBox 3"/>
+          <p:cNvSpPr txBox="1"/>
+          <p:nvPr/>
+        </p:nvSpPr>
+        <p:spPr>
+          <a:xfrm>
+            <a:off x="800000" y="350000"/>
+            <a:ext cx="22800000" cy="1000000"/>
+          </a:xfrm>
+          <a:prstGeom prst="rect">
+            <a:avLst/>
+          </a:prstGeom>
+          <a:noFill/>
+        </p:spPr>
+        <p:txBody>
+          <a:bodyPr wrap="square" anchor="t">
+            <a:spAutoFit/>
+          </a:bodyPr>
+          <a:lstStyle/>
+          <a:p>
+            <a:pPr algn="l"/>
+            <a:r>
+              <a:rPr sz="4600" b="1">
+                <a:solidFill>
+                  <a:srgbClr val="333333"/>
+                </a:solidFill>
+                <a:latin typeface="Open Sans"/>
+                <a:ea typeface="Open Sans"/>
+                <a:cs typeface="Open Sans"/>
+              </a:rPr>
+              <a:t>Понятие «кровотечение»</a:t>
+            </a:r>
+          </a:p>
+        </p:txBody>
+      </p:sp>
+      <p:sp>
+        <p:nvSpPr>
+          <p:cNvPr id="5" name="Rectangle 4"/>
+          <p:cNvSpPr/>
+          <p:nvPr/>
+        </p:nvSpPr>
+        <p:spPr>
+          <a:xfrm>
+            <a:off x="800000" y="1450000"/>
+            <a:ext cx="22800000" cy="20000"/>
+          </a:xfrm>
+          <a:prstGeom prst="rect">
+            <a:avLst/>
+          </a:prstGeom>
+          <a:solidFill>
+            <a:srgbClr val="E1E1E1"/>
+          </a:solidFill>
+          <a:ln>
+            <a:noFill/>
+          </a:ln>
+        </p:spPr>
+        <p:style>
+          <a:lnRef idx="1">
+            <a:schemeClr val="accent1"/>
+          </a:lnRef>
+          <a:fillRef idx="3">
+            <a:schemeClr val="accent1"/>
+          </a:fillRef>
+          <a:effectRef idx="2">
+            <a:schemeClr val="accent1"/>
+          </a:effectRef>
+          <a:fontRef idx="minor">
+            <a:schemeClr val="lt1"/>
+          </a:fontRef>
+        </p:style>
+        <p:txBody>
+          <a:bodyPr rtlCol="0" anchor="ctr"/>
+          <a:lstStyle/>
+          <a:p>
+            <a:pPr algn="ctr"/>
+          </a:p>
+        </p:txBody>
+      </p:sp>
+      <p:sp>
+        <p:nvSpPr>
+          <p:cNvPr id="6" name="TextBox 5"/>
+          <p:cNvSpPr txBox="1"/>
+          <p:nvPr/>
+        </p:nvSpPr>
+        <p:spPr>
+          <a:xfrm>
+            <a:off x="800000" y="1950000"/>
+            <a:ext cx="22800000" cy="8500000"/>
+          </a:xfrm>
+          <a:prstGeom prst="rect">
+            <a:avLst/>
+          </a:prstGeom>
+          <a:noFill/>
+        </p:spPr>
+        <p:txBody>
+          <a:bodyPr wrap="square">
+            <a:spAutoFit/>
+          </a:bodyPr>
+          <a:lstStyle/>
+          <a:p>
+            <a:pPr algn="l">
+              <a:spcAft>
+                <a:spcPts val="1000"/>
+              </a:spcAft>
+            </a:pPr>
+            <a:r>
+              <a:rPr sz="3200" b="0">
+                <a:solidFill>
+                  <a:srgbClr val="333333"/>
+                </a:solidFill>
+                <a:latin typeface="Open Sans"/>
+                <a:ea typeface="Open Sans"/>
+                <a:cs typeface="Open Sans"/>
+              </a:rPr>
+              <a:t>•  Кровотечение — выход крови из сосудистого русла.</a:t>
+            </a:r>
+          </a:p>
+          <a:p>
+            <a:pPr algn="l">
+              <a:spcAft>
+                <a:spcPts val="1000"/>
+              </a:spcAft>
+            </a:pPr>
+            <a:r>
+              <a:rPr sz="3200" b="0">
+                <a:solidFill>
+                  <a:srgbClr val="333333"/>
+                </a:solidFill>
+                <a:latin typeface="Open Sans"/>
+                <a:ea typeface="Open Sans"/>
+                <a:cs typeface="Open Sans"/>
+              </a:rPr>
+              <a:t>•  Приводит к острой кровопотере и угрозе жизни.</a:t>
+            </a:r>
+          </a:p>
+          <a:p>
+            <a:pPr algn="l">
+              <a:spcAft>
+                <a:spcPts val="1000"/>
+              </a:spcAft>
+            </a:pPr>
+            <a:r>
+              <a:rPr sz="3200" b="0">
+                <a:solidFill>
+                  <a:srgbClr val="333333"/>
+                </a:solidFill>
+                <a:latin typeface="Open Sans"/>
+                <a:ea typeface="Open Sans"/>
+                <a:cs typeface="Open Sans"/>
+              </a:rPr>
+              <a:t>•  Наружное кровотечение видно снаружи (рана, истечение крови).</a:t>
+            </a:r>
+          </a:p>
+          <a:p>
+            <a:pPr algn="l">
+              <a:spcAft>
+                <a:spcPts val="1000"/>
+              </a:spcAft>
+            </a:pPr>
+            <a:r>
+              <a:rPr sz="3200" b="0">
+                <a:solidFill>
+                  <a:srgbClr val="333333"/>
+                </a:solidFill>
+                <a:latin typeface="Open Sans"/>
+                <a:ea typeface="Open Sans"/>
+                <a:cs typeface="Open Sans"/>
+              </a:rPr>
+              <a:t>•  Требует немедленной временной остановки.</a:t>
+            </a:r>
+          </a:p>
+        </p:txBody>
+      </p:sp>
     </p:spTree>
   </p:cSld>
   <p:clrMapOvr>
@@ -4594,7 +4745,7 @@
             <a:avLst/>
           </a:prstGeom>
           <a:solidFill>
-            <a:srgbClr val="F7F7F7"/>
+            <a:srgbClr val="FFFFFF"/>
           </a:solidFill>
           <a:ln>
             <a:noFill/>
@@ -4630,14 +4781,14 @@
         </p:nvSpPr>
         <p:spPr>
           <a:xfrm>
-            <a:off x="23000000" y="0"/>
-            <a:ext cx="1384000" cy="13716000"/>
+            <a:off x="0" y="0"/>
+            <a:ext cx="24384000" cy="120000"/>
           </a:xfrm>
           <a:prstGeom prst="rect">
             <a:avLst/>
           </a:prstGeom>
           <a:solidFill>
-            <a:srgbClr val="D9D9D9"/>
+            <a:srgbClr val="DDDDDD"/>
           </a:solidFill>
           <a:ln>
             <a:noFill/>
@@ -4667,20 +4818,57 @@
       </p:sp>
       <p:sp>
         <p:nvSpPr>
-          <p:cNvPr id="4" name="Rectangle 3"/>
+          <p:cNvPr id="4" name="TextBox 3"/>
+          <p:cNvSpPr txBox="1"/>
+          <p:nvPr/>
+        </p:nvSpPr>
+        <p:spPr>
+          <a:xfrm>
+            <a:off x="800000" y="350000"/>
+            <a:ext cx="22800000" cy="1000000"/>
+          </a:xfrm>
+          <a:prstGeom prst="rect">
+            <a:avLst/>
+          </a:prstGeom>
+          <a:noFill/>
+        </p:spPr>
+        <p:txBody>
+          <a:bodyPr wrap="square" anchor="t">
+            <a:spAutoFit/>
+          </a:bodyPr>
+          <a:lstStyle/>
+          <a:p>
+            <a:pPr algn="l"/>
+            <a:r>
+              <a:rPr sz="4600" b="1">
+                <a:solidFill>
+                  <a:srgbClr val="333333"/>
+                </a:solidFill>
+                <a:latin typeface="Open Sans"/>
+                <a:ea typeface="Open Sans"/>
+                <a:cs typeface="Open Sans"/>
+              </a:rPr>
+              <a:t>Основные признаки острой кровопотери</a:t>
+            </a:r>
+          </a:p>
+        </p:txBody>
+      </p:sp>
+      <p:sp>
+        <p:nvSpPr>
+          <p:cNvPr id="5" name="Rectangle 4"/>
           <p:cNvSpPr/>
           <p:nvPr/>
         </p:nvSpPr>
         <p:spPr>
           <a:xfrm>
-            <a:off x="0" y="5600000"/>
-            <a:ext cx="700000" cy="700000"/>
+            <a:off x="800000" y="1450000"/>
+            <a:ext cx="22800000" cy="20000"/>
           </a:xfrm>
           <a:prstGeom prst="rect">
             <a:avLst/>
           </a:prstGeom>
           <a:solidFill>
-            <a:srgbClr val="4D4D4D"/>
+            <a:srgbClr val="E1E1E1"/>
           </a:solidFill>
           <a:ln>
             <a:noFill/>
@@ -4710,89 +4898,25 @@
       </p:sp>
       <p:sp>
         <p:nvSpPr>
-          <p:cNvPr id="5" name="TextBox 4"/>
-          <p:cNvSpPr txBox="1"/>
-          <p:nvPr/>
-        </p:nvSpPr>
-        <p:spPr>
-          <a:xfrm>
-            <a:off x="0" y="5680000"/>
-            <a:ext cx="700000" cy="550000"/>
-          </a:xfrm>
-          <a:prstGeom prst="rect">
-            <a:avLst/>
-          </a:prstGeom>
-          <a:noFill/>
-        </p:spPr>
-        <p:txBody>
-          <a:bodyPr wrap="square" anchor="ctr"/>
-          <a:lstStyle/>
-          <a:p>
-            <a:pPr algn="ctr"/>
-            <a:r>
-              <a:rPr sz="1800" b="1">
-                <a:solidFill>
-                  <a:srgbClr val="FFFFFF"/>
-                </a:solidFill>
-                <a:latin typeface="Arial"/>
-              </a:rPr>
-              <a:t>4</a:t>
-            </a:r>
-          </a:p>
-        </p:txBody>
-      </p:sp>
-      <p:sp>
-        <p:nvSpPr>
-          <p:cNvPr id="6" name="TextBox 5"/>
-          <p:cNvSpPr txBox="1"/>
-          <p:nvPr/>
-        </p:nvSpPr>
-        <p:spPr>
-          <a:xfrm>
-            <a:off x="900000" y="500000"/>
-            <a:ext cx="21000000" cy="900000"/>
-          </a:xfrm>
-          <a:prstGeom prst="rect">
-            <a:avLst/>
-          </a:prstGeom>
-          <a:noFill/>
-        </p:spPr>
-        <p:txBody>
-          <a:bodyPr wrap="square" anchor="t"/>
-          <a:lstStyle/>
-          <a:p>
-            <a:pPr algn="l"/>
-            <a:r>
-              <a:rPr sz="2800" b="1">
-                <a:solidFill>
-                  <a:srgbClr val="2C2C2C"/>
-                </a:solidFill>
-                <a:latin typeface="Arial"/>
-              </a:rPr>
-              <a:t>ЧТО ТАКОЕ ОБЗОРНЫЙ ОСМОТР</a:t>
-            </a:r>
-          </a:p>
-        </p:txBody>
-      </p:sp>
-      <p:sp>
-        <p:nvSpPr>
-          <p:cNvPr id="7" name="Rectangle 6"/>
+          <p:cNvPr id="6" name="Rectangle 5"/>
           <p:cNvSpPr/>
           <p:nvPr/>
         </p:nvSpPr>
         <p:spPr>
           <a:xfrm>
-            <a:off x="900000" y="1350000"/>
-            <a:ext cx="20000000" cy="25000"/>
+            <a:off x="800000" y="2050000"/>
+            <a:ext cx="7000000" cy="3200000"/>
           </a:xfrm>
           <a:prstGeom prst="rect">
             <a:avLst/>
           </a:prstGeom>
           <a:solidFill>
-            <a:srgbClr val="B8B8B8"/>
+            <a:srgbClr val="FFFFFF"/>
           </a:solidFill>
-          <a:ln>
-            <a:noFill/>
+          <a:ln w="12700">
+            <a:solidFill>
+              <a:srgbClr val="E1E1E1"/>
+            </a:solidFill>
           </a:ln>
         </p:spPr>
         <p:style>
@@ -4819,172 +4943,20 @@
       </p:sp>
       <p:sp>
         <p:nvSpPr>
-          <p:cNvPr id="8" name="TextBox 7"/>
-          <p:cNvSpPr txBox="1"/>
-          <p:nvPr/>
-        </p:nvSpPr>
-        <p:spPr>
-          <a:xfrm>
-            <a:off x="900000" y="1450000"/>
-            <a:ext cx="20000000" cy="350000"/>
-          </a:xfrm>
-          <a:prstGeom prst="rect">
-            <a:avLst/>
-          </a:prstGeom>
-          <a:noFill/>
-        </p:spPr>
-        <p:txBody>
-          <a:bodyPr wrap="square" anchor="t"/>
-          <a:lstStyle/>
-          <a:p>
-            <a:pPr algn="l"/>
-            <a:r>
-              <a:rPr sz="1200" b="0">
-                <a:solidFill>
-                  <a:srgbClr val="6F6F6F"/>
-                </a:solidFill>
-                <a:latin typeface="Arial"/>
-              </a:rPr>
-              <a:t>Оказание первой помощи при наружных кровотечениях</a:t>
-            </a:r>
-          </a:p>
-        </p:txBody>
-      </p:sp>
-      <p:sp>
-        <p:nvSpPr>
-          <p:cNvPr id="9" name="TextBox 8"/>
-          <p:cNvSpPr txBox="1"/>
-          <p:nvPr/>
-        </p:nvSpPr>
-        <p:spPr>
-          <a:xfrm>
-            <a:off x="900000" y="2000000"/>
-            <a:ext cx="20500000" cy="7500000"/>
-          </a:xfrm>
-          <a:prstGeom prst="rect">
-            <a:avLst/>
-          </a:prstGeom>
-          <a:noFill/>
-        </p:spPr>
-        <p:txBody>
-          <a:bodyPr wrap="square">
-            <a:spAutoFit/>
-          </a:bodyPr>
-          <a:lstStyle/>
-          <a:p>
-            <a:pPr algn="l">
-              <a:spcAft>
-                <a:spcPts val="600"/>
-              </a:spcAft>
-            </a:pPr>
-            <a:r>
-              <a:rPr sz="1700" b="0">
-                <a:solidFill>
-                  <a:srgbClr val="2C2C2C"/>
-                </a:solidFill>
-                <a:latin typeface="Arial"/>
-              </a:rPr>
-              <a:t>•  Быстрая визуальная оценка пострадавшего с головы до ног.</a:t>
-            </a:r>
-          </a:p>
-          <a:p>
-            <a:pPr algn="l">
-              <a:spcAft>
-                <a:spcPts val="600"/>
-              </a:spcAft>
-            </a:pPr>
-            <a:r>
-              <a:rPr sz="1700" b="0">
-                <a:solidFill>
-                  <a:srgbClr val="2C2C2C"/>
-                </a:solidFill>
-                <a:latin typeface="Arial"/>
-              </a:rPr>
-              <a:t>•  Цель — выявить продолжающееся наружное кровотечение, угрожающее жизни.</a:t>
-            </a:r>
-          </a:p>
-          <a:p>
-            <a:pPr algn="l">
-              <a:spcAft>
-                <a:spcPts val="600"/>
-              </a:spcAft>
-            </a:pPr>
-            <a:r>
-              <a:rPr sz="1700" b="0">
-                <a:solidFill>
-                  <a:srgbClr val="2C2C2C"/>
-                </a:solidFill>
-                <a:latin typeface="Arial"/>
-              </a:rPr>
-              <a:t>•  Выполняется сразу после оценки обстановки и обеспечения безопасности.</a:t>
-            </a:r>
-          </a:p>
-          <a:p>
-            <a:pPr algn="l">
-              <a:spcAft>
-                <a:spcPts val="600"/>
-              </a:spcAft>
-            </a:pPr>
-            <a:r>
-              <a:rPr sz="1700" b="0">
-                <a:solidFill>
-                  <a:srgbClr val="2C2C2C"/>
-                </a:solidFill>
-                <a:latin typeface="Arial"/>
-              </a:rPr>
-              <a:t>•  Длительность: около 1–2 секунд (по учебным материалам).</a:t>
-            </a:r>
-          </a:p>
-          <a:p>
-            <a:pPr algn="l">
-              <a:spcAft>
-                <a:spcPts val="600"/>
-              </a:spcAft>
-            </a:pPr>
-            <a:r>
-              <a:rPr sz="1700" b="0">
-                <a:solidFill>
-                  <a:srgbClr val="2C2C2C"/>
-                </a:solidFill>
-                <a:latin typeface="Arial"/>
-              </a:rPr>
-              <a:t>•  При обнаружении кровотечения — немедленно приступить к его временной остановке.</a:t>
-            </a:r>
-          </a:p>
-          <a:p>
-            <a:pPr algn="l">
-              <a:spcAft>
-                <a:spcPts val="600"/>
-              </a:spcAft>
-            </a:pPr>
-            <a:r>
-              <a:rPr sz="1700" b="0">
-                <a:solidFill>
-                  <a:srgbClr val="2C2C2C"/>
-                </a:solidFill>
-                <a:latin typeface="Arial"/>
-              </a:rPr>
-              <a:t>•  Проводится до подробного осмотра и до оценки признаков жизни (Приказ Минздрава № 220н).</a:t>
-            </a:r>
-          </a:p>
-        </p:txBody>
-      </p:sp>
-      <p:sp>
-        <p:nvSpPr>
-          <p:cNvPr id="10" name="Rectangle 9"/>
+          <p:cNvPr id="7" name="Oval 6"/>
           <p:cNvSpPr/>
           <p:nvPr/>
         </p:nvSpPr>
         <p:spPr>
           <a:xfrm>
-            <a:off x="900000" y="10500000"/>
-            <a:ext cx="20500000" cy="1800000"/>
-          </a:xfrm>
-          <a:prstGeom prst="rect">
+            <a:off x="1050000" y="2450000"/>
+            <a:ext cx="900000" cy="900000"/>
+          </a:xfrm>
+          <a:prstGeom prst="ellipse">
             <a:avLst/>
           </a:prstGeom>
           <a:solidFill>
-            <a:srgbClr val="F5F0E1"/>
+            <a:srgbClr val="0055AA"/>
           </a:solidFill>
           <a:ln>
             <a:noFill/>
@@ -5014,14 +4986,14 @@
       </p:sp>
       <p:sp>
         <p:nvSpPr>
-          <p:cNvPr id="11" name="TextBox 10"/>
+          <p:cNvPr id="8" name="TextBox 7"/>
           <p:cNvSpPr txBox="1"/>
           <p:nvPr/>
         </p:nvSpPr>
         <p:spPr>
           <a:xfrm>
-            <a:off x="1100000" y="10800000"/>
-            <a:ext cx="20000000" cy="1400000"/>
+            <a:off x="1050000" y="2450000"/>
+            <a:ext cx="900000" cy="900000"/>
           </a:xfrm>
           <a:prstGeom prst="rect">
             <a:avLst/>
@@ -5029,18 +5001,869 @@
           <a:noFill/>
         </p:spPr>
         <p:txBody>
-          <a:bodyPr wrap="square" anchor="t"/>
+          <a:bodyPr wrap="square" anchor="ctr">
+            <a:spAutoFit/>
+          </a:bodyPr>
+          <a:lstStyle/>
+          <a:p>
+            <a:pPr algn="ctr"/>
+            <a:r>
+              <a:rPr sz="2000" b="1">
+                <a:solidFill>
+                  <a:srgbClr val="FFFFFF"/>
+                </a:solidFill>
+                <a:latin typeface="Open Sans"/>
+                <a:ea typeface="Open Sans"/>
+                <a:cs typeface="Open Sans"/>
+              </a:rPr>
+              <a:t>1</a:t>
+            </a:r>
+          </a:p>
+        </p:txBody>
+      </p:sp>
+      <p:sp>
+        <p:nvSpPr>
+          <p:cNvPr id="9" name="TextBox 8"/>
+          <p:cNvSpPr txBox="1"/>
+          <p:nvPr/>
+        </p:nvSpPr>
+        <p:spPr>
+          <a:xfrm>
+            <a:off x="1050000" y="3650000"/>
+            <a:ext cx="6500000" cy="1300000"/>
+          </a:xfrm>
+          <a:prstGeom prst="rect">
+            <a:avLst/>
+          </a:prstGeom>
+          <a:noFill/>
+        </p:spPr>
+        <p:txBody>
+          <a:bodyPr wrap="square" anchor="t">
+            <a:spAutoFit/>
+          </a:bodyPr>
           <a:lstStyle/>
           <a:p>
             <a:pPr algn="l"/>
             <a:r>
-              <a:rPr sz="1400" b="1">
-                <a:solidFill>
-                  <a:srgbClr val="C02828"/>
-                </a:solidFill>
-                <a:latin typeface="Arial"/>
+              <a:rPr sz="2400" b="0">
+                <a:solidFill>
+                  <a:srgbClr val="333333"/>
+                </a:solidFill>
+                <a:latin typeface="Open Sans"/>
+                <a:ea typeface="Open Sans"/>
+                <a:cs typeface="Open Sans"/>
               </a:rPr>
-              <a:t>Приоритет: сначала угрожающее жизни кровотечение, затем — остальные мероприятия.</a:t>
+              <a:t>Слабость, жажда, головокружение</a:t>
+            </a:r>
+          </a:p>
+        </p:txBody>
+      </p:sp>
+      <p:sp>
+        <p:nvSpPr>
+          <p:cNvPr id="10" name="Rectangle 9"/>
+          <p:cNvSpPr/>
+          <p:nvPr/>
+        </p:nvSpPr>
+        <p:spPr>
+          <a:xfrm>
+            <a:off x="8500000" y="2050000"/>
+            <a:ext cx="7000000" cy="3200000"/>
+          </a:xfrm>
+          <a:prstGeom prst="rect">
+            <a:avLst/>
+          </a:prstGeom>
+          <a:solidFill>
+            <a:srgbClr val="FFFFFF"/>
+          </a:solidFill>
+          <a:ln w="12700">
+            <a:solidFill>
+              <a:srgbClr val="E1E1E1"/>
+            </a:solidFill>
+          </a:ln>
+        </p:spPr>
+        <p:style>
+          <a:lnRef idx="1">
+            <a:schemeClr val="accent1"/>
+          </a:lnRef>
+          <a:fillRef idx="3">
+            <a:schemeClr val="accent1"/>
+          </a:fillRef>
+          <a:effectRef idx="2">
+            <a:schemeClr val="accent1"/>
+          </a:effectRef>
+          <a:fontRef idx="minor">
+            <a:schemeClr val="lt1"/>
+          </a:fontRef>
+        </p:style>
+        <p:txBody>
+          <a:bodyPr rtlCol="0" anchor="ctr"/>
+          <a:lstStyle/>
+          <a:p>
+            <a:pPr algn="ctr"/>
+          </a:p>
+        </p:txBody>
+      </p:sp>
+      <p:sp>
+        <p:nvSpPr>
+          <p:cNvPr id="11" name="Oval 10"/>
+          <p:cNvSpPr/>
+          <p:nvPr/>
+        </p:nvSpPr>
+        <p:spPr>
+          <a:xfrm>
+            <a:off x="8750000" y="2450000"/>
+            <a:ext cx="900000" cy="900000"/>
+          </a:xfrm>
+          <a:prstGeom prst="ellipse">
+            <a:avLst/>
+          </a:prstGeom>
+          <a:solidFill>
+            <a:srgbClr val="0055AA"/>
+          </a:solidFill>
+          <a:ln>
+            <a:noFill/>
+          </a:ln>
+        </p:spPr>
+        <p:style>
+          <a:lnRef idx="1">
+            <a:schemeClr val="accent1"/>
+          </a:lnRef>
+          <a:fillRef idx="3">
+            <a:schemeClr val="accent1"/>
+          </a:fillRef>
+          <a:effectRef idx="2">
+            <a:schemeClr val="accent1"/>
+          </a:effectRef>
+          <a:fontRef idx="minor">
+            <a:schemeClr val="lt1"/>
+          </a:fontRef>
+        </p:style>
+        <p:txBody>
+          <a:bodyPr rtlCol="0" anchor="ctr"/>
+          <a:lstStyle/>
+          <a:p>
+            <a:pPr algn="ctr"/>
+          </a:p>
+        </p:txBody>
+      </p:sp>
+      <p:sp>
+        <p:nvSpPr>
+          <p:cNvPr id="12" name="TextBox 11"/>
+          <p:cNvSpPr txBox="1"/>
+          <p:nvPr/>
+        </p:nvSpPr>
+        <p:spPr>
+          <a:xfrm>
+            <a:off x="8750000" y="2450000"/>
+            <a:ext cx="900000" cy="900000"/>
+          </a:xfrm>
+          <a:prstGeom prst="rect">
+            <a:avLst/>
+          </a:prstGeom>
+          <a:noFill/>
+        </p:spPr>
+        <p:txBody>
+          <a:bodyPr wrap="square" anchor="ctr">
+            <a:spAutoFit/>
+          </a:bodyPr>
+          <a:lstStyle/>
+          <a:p>
+            <a:pPr algn="ctr"/>
+            <a:r>
+              <a:rPr sz="2000" b="1">
+                <a:solidFill>
+                  <a:srgbClr val="FFFFFF"/>
+                </a:solidFill>
+                <a:latin typeface="Open Sans"/>
+                <a:ea typeface="Open Sans"/>
+                <a:cs typeface="Open Sans"/>
+              </a:rPr>
+              <a:t>2</a:t>
+            </a:r>
+          </a:p>
+        </p:txBody>
+      </p:sp>
+      <p:sp>
+        <p:nvSpPr>
+          <p:cNvPr id="13" name="TextBox 12"/>
+          <p:cNvSpPr txBox="1"/>
+          <p:nvPr/>
+        </p:nvSpPr>
+        <p:spPr>
+          <a:xfrm>
+            <a:off x="8750000" y="3650000"/>
+            <a:ext cx="6500000" cy="1300000"/>
+          </a:xfrm>
+          <a:prstGeom prst="rect">
+            <a:avLst/>
+          </a:prstGeom>
+          <a:noFill/>
+        </p:spPr>
+        <p:txBody>
+          <a:bodyPr wrap="square" anchor="t">
+            <a:spAutoFit/>
+          </a:bodyPr>
+          <a:lstStyle/>
+          <a:p>
+            <a:pPr algn="l"/>
+            <a:r>
+              <a:rPr sz="2400" b="0">
+                <a:solidFill>
+                  <a:srgbClr val="333333"/>
+                </a:solidFill>
+                <a:latin typeface="Open Sans"/>
+                <a:ea typeface="Open Sans"/>
+                <a:cs typeface="Open Sans"/>
+              </a:rPr>
+              <a:t>«Мушки» перед глазами, обморок</a:t>
+            </a:r>
+          </a:p>
+        </p:txBody>
+      </p:sp>
+      <p:sp>
+        <p:nvSpPr>
+          <p:cNvPr id="14" name="Rectangle 13"/>
+          <p:cNvSpPr/>
+          <p:nvPr/>
+        </p:nvSpPr>
+        <p:spPr>
+          <a:xfrm>
+            <a:off x="16200000" y="2050000"/>
+            <a:ext cx="7000000" cy="3200000"/>
+          </a:xfrm>
+          <a:prstGeom prst="rect">
+            <a:avLst/>
+          </a:prstGeom>
+          <a:solidFill>
+            <a:srgbClr val="FFFFFF"/>
+          </a:solidFill>
+          <a:ln w="12700">
+            <a:solidFill>
+              <a:srgbClr val="E1E1E1"/>
+            </a:solidFill>
+          </a:ln>
+        </p:spPr>
+        <p:style>
+          <a:lnRef idx="1">
+            <a:schemeClr val="accent1"/>
+          </a:lnRef>
+          <a:fillRef idx="3">
+            <a:schemeClr val="accent1"/>
+          </a:fillRef>
+          <a:effectRef idx="2">
+            <a:schemeClr val="accent1"/>
+          </a:effectRef>
+          <a:fontRef idx="minor">
+            <a:schemeClr val="lt1"/>
+          </a:fontRef>
+        </p:style>
+        <p:txBody>
+          <a:bodyPr rtlCol="0" anchor="ctr"/>
+          <a:lstStyle/>
+          <a:p>
+            <a:pPr algn="ctr"/>
+          </a:p>
+        </p:txBody>
+      </p:sp>
+      <p:sp>
+        <p:nvSpPr>
+          <p:cNvPr id="15" name="Oval 14"/>
+          <p:cNvSpPr/>
+          <p:nvPr/>
+        </p:nvSpPr>
+        <p:spPr>
+          <a:xfrm>
+            <a:off x="16450000" y="2450000"/>
+            <a:ext cx="900000" cy="900000"/>
+          </a:xfrm>
+          <a:prstGeom prst="ellipse">
+            <a:avLst/>
+          </a:prstGeom>
+          <a:solidFill>
+            <a:srgbClr val="0055AA"/>
+          </a:solidFill>
+          <a:ln>
+            <a:noFill/>
+          </a:ln>
+        </p:spPr>
+        <p:style>
+          <a:lnRef idx="1">
+            <a:schemeClr val="accent1"/>
+          </a:lnRef>
+          <a:fillRef idx="3">
+            <a:schemeClr val="accent1"/>
+          </a:fillRef>
+          <a:effectRef idx="2">
+            <a:schemeClr val="accent1"/>
+          </a:effectRef>
+          <a:fontRef idx="minor">
+            <a:schemeClr val="lt1"/>
+          </a:fontRef>
+        </p:style>
+        <p:txBody>
+          <a:bodyPr rtlCol="0" anchor="ctr"/>
+          <a:lstStyle/>
+          <a:p>
+            <a:pPr algn="ctr"/>
+          </a:p>
+        </p:txBody>
+      </p:sp>
+      <p:sp>
+        <p:nvSpPr>
+          <p:cNvPr id="16" name="TextBox 15"/>
+          <p:cNvSpPr txBox="1"/>
+          <p:nvPr/>
+        </p:nvSpPr>
+        <p:spPr>
+          <a:xfrm>
+            <a:off x="16450000" y="2450000"/>
+            <a:ext cx="900000" cy="900000"/>
+          </a:xfrm>
+          <a:prstGeom prst="rect">
+            <a:avLst/>
+          </a:prstGeom>
+          <a:noFill/>
+        </p:spPr>
+        <p:txBody>
+          <a:bodyPr wrap="square" anchor="ctr">
+            <a:spAutoFit/>
+          </a:bodyPr>
+          <a:lstStyle/>
+          <a:p>
+            <a:pPr algn="ctr"/>
+            <a:r>
+              <a:rPr sz="2000" b="1">
+                <a:solidFill>
+                  <a:srgbClr val="FFFFFF"/>
+                </a:solidFill>
+                <a:latin typeface="Open Sans"/>
+                <a:ea typeface="Open Sans"/>
+                <a:cs typeface="Open Sans"/>
+              </a:rPr>
+              <a:t>3</a:t>
+            </a:r>
+          </a:p>
+        </p:txBody>
+      </p:sp>
+      <p:sp>
+        <p:nvSpPr>
+          <p:cNvPr id="17" name="TextBox 16"/>
+          <p:cNvSpPr txBox="1"/>
+          <p:nvPr/>
+        </p:nvSpPr>
+        <p:spPr>
+          <a:xfrm>
+            <a:off x="16450000" y="3650000"/>
+            <a:ext cx="6500000" cy="1300000"/>
+          </a:xfrm>
+          <a:prstGeom prst="rect">
+            <a:avLst/>
+          </a:prstGeom>
+          <a:noFill/>
+        </p:spPr>
+        <p:txBody>
+          <a:bodyPr wrap="square" anchor="t">
+            <a:spAutoFit/>
+          </a:bodyPr>
+          <a:lstStyle/>
+          <a:p>
+            <a:pPr algn="l"/>
+            <a:r>
+              <a:rPr sz="2400" b="0">
+                <a:solidFill>
+                  <a:srgbClr val="333333"/>
+                </a:solidFill>
+                <a:latin typeface="Open Sans"/>
+                <a:ea typeface="Open Sans"/>
+                <a:cs typeface="Open Sans"/>
+              </a:rPr>
+              <a:t>Бледная, влажная, холодная кожа</a:t>
+            </a:r>
+          </a:p>
+        </p:txBody>
+      </p:sp>
+      <p:sp>
+        <p:nvSpPr>
+          <p:cNvPr id="18" name="Rectangle 17"/>
+          <p:cNvSpPr/>
+          <p:nvPr/>
+        </p:nvSpPr>
+        <p:spPr>
+          <a:xfrm>
+            <a:off x="800000" y="5950000"/>
+            <a:ext cx="7000000" cy="3200000"/>
+          </a:xfrm>
+          <a:prstGeom prst="rect">
+            <a:avLst/>
+          </a:prstGeom>
+          <a:solidFill>
+            <a:srgbClr val="FFFFFF"/>
+          </a:solidFill>
+          <a:ln w="12700">
+            <a:solidFill>
+              <a:srgbClr val="E1E1E1"/>
+            </a:solidFill>
+          </a:ln>
+        </p:spPr>
+        <p:style>
+          <a:lnRef idx="1">
+            <a:schemeClr val="accent1"/>
+          </a:lnRef>
+          <a:fillRef idx="3">
+            <a:schemeClr val="accent1"/>
+          </a:fillRef>
+          <a:effectRef idx="2">
+            <a:schemeClr val="accent1"/>
+          </a:effectRef>
+          <a:fontRef idx="minor">
+            <a:schemeClr val="lt1"/>
+          </a:fontRef>
+        </p:style>
+        <p:txBody>
+          <a:bodyPr rtlCol="0" anchor="ctr"/>
+          <a:lstStyle/>
+          <a:p>
+            <a:pPr algn="ctr"/>
+          </a:p>
+        </p:txBody>
+      </p:sp>
+      <p:sp>
+        <p:nvSpPr>
+          <p:cNvPr id="19" name="Oval 18"/>
+          <p:cNvSpPr/>
+          <p:nvPr/>
+        </p:nvSpPr>
+        <p:spPr>
+          <a:xfrm>
+            <a:off x="1050000" y="6350000"/>
+            <a:ext cx="900000" cy="900000"/>
+          </a:xfrm>
+          <a:prstGeom prst="ellipse">
+            <a:avLst/>
+          </a:prstGeom>
+          <a:solidFill>
+            <a:srgbClr val="0055AA"/>
+          </a:solidFill>
+          <a:ln>
+            <a:noFill/>
+          </a:ln>
+        </p:spPr>
+        <p:style>
+          <a:lnRef idx="1">
+            <a:schemeClr val="accent1"/>
+          </a:lnRef>
+          <a:fillRef idx="3">
+            <a:schemeClr val="accent1"/>
+          </a:fillRef>
+          <a:effectRef idx="2">
+            <a:schemeClr val="accent1"/>
+          </a:effectRef>
+          <a:fontRef idx="minor">
+            <a:schemeClr val="lt1"/>
+          </a:fontRef>
+        </p:style>
+        <p:txBody>
+          <a:bodyPr rtlCol="0" anchor="ctr"/>
+          <a:lstStyle/>
+          <a:p>
+            <a:pPr algn="ctr"/>
+          </a:p>
+        </p:txBody>
+      </p:sp>
+      <p:sp>
+        <p:nvSpPr>
+          <p:cNvPr id="20" name="TextBox 19"/>
+          <p:cNvSpPr txBox="1"/>
+          <p:nvPr/>
+        </p:nvSpPr>
+        <p:spPr>
+          <a:xfrm>
+            <a:off x="1050000" y="6350000"/>
+            <a:ext cx="900000" cy="900000"/>
+          </a:xfrm>
+          <a:prstGeom prst="rect">
+            <a:avLst/>
+          </a:prstGeom>
+          <a:noFill/>
+        </p:spPr>
+        <p:txBody>
+          <a:bodyPr wrap="square" anchor="ctr">
+            <a:spAutoFit/>
+          </a:bodyPr>
+          <a:lstStyle/>
+          <a:p>
+            <a:pPr algn="ctr"/>
+            <a:r>
+              <a:rPr sz="2000" b="1">
+                <a:solidFill>
+                  <a:srgbClr val="FFFFFF"/>
+                </a:solidFill>
+                <a:latin typeface="Open Sans"/>
+                <a:ea typeface="Open Sans"/>
+                <a:cs typeface="Open Sans"/>
+              </a:rPr>
+              <a:t>4</a:t>
+            </a:r>
+          </a:p>
+        </p:txBody>
+      </p:sp>
+      <p:sp>
+        <p:nvSpPr>
+          <p:cNvPr id="21" name="TextBox 20"/>
+          <p:cNvSpPr txBox="1"/>
+          <p:nvPr/>
+        </p:nvSpPr>
+        <p:spPr>
+          <a:xfrm>
+            <a:off x="1050000" y="7550000"/>
+            <a:ext cx="6500000" cy="1300000"/>
+          </a:xfrm>
+          <a:prstGeom prst="rect">
+            <a:avLst/>
+          </a:prstGeom>
+          <a:noFill/>
+        </p:spPr>
+        <p:txBody>
+          <a:bodyPr wrap="square" anchor="t">
+            <a:spAutoFit/>
+          </a:bodyPr>
+          <a:lstStyle/>
+          <a:p>
+            <a:pPr algn="l"/>
+            <a:r>
+              <a:rPr sz="2400" b="0">
+                <a:solidFill>
+                  <a:srgbClr val="333333"/>
+                </a:solidFill>
+                <a:latin typeface="Open Sans"/>
+                <a:ea typeface="Open Sans"/>
+                <a:cs typeface="Open Sans"/>
+              </a:rPr>
+              <a:t>Учащённое сердцебиение</a:t>
+            </a:r>
+          </a:p>
+        </p:txBody>
+      </p:sp>
+      <p:sp>
+        <p:nvSpPr>
+          <p:cNvPr id="22" name="Rectangle 21"/>
+          <p:cNvSpPr/>
+          <p:nvPr/>
+        </p:nvSpPr>
+        <p:spPr>
+          <a:xfrm>
+            <a:off x="8500000" y="5950000"/>
+            <a:ext cx="7000000" cy="3200000"/>
+          </a:xfrm>
+          <a:prstGeom prst="rect">
+            <a:avLst/>
+          </a:prstGeom>
+          <a:solidFill>
+            <a:srgbClr val="FFFFFF"/>
+          </a:solidFill>
+          <a:ln w="12700">
+            <a:solidFill>
+              <a:srgbClr val="E1E1E1"/>
+            </a:solidFill>
+          </a:ln>
+        </p:spPr>
+        <p:style>
+          <a:lnRef idx="1">
+            <a:schemeClr val="accent1"/>
+          </a:lnRef>
+          <a:fillRef idx="3">
+            <a:schemeClr val="accent1"/>
+          </a:fillRef>
+          <a:effectRef idx="2">
+            <a:schemeClr val="accent1"/>
+          </a:effectRef>
+          <a:fontRef idx="minor">
+            <a:schemeClr val="lt1"/>
+          </a:fontRef>
+        </p:style>
+        <p:txBody>
+          <a:bodyPr rtlCol="0" anchor="ctr"/>
+          <a:lstStyle/>
+          <a:p>
+            <a:pPr algn="ctr"/>
+          </a:p>
+        </p:txBody>
+      </p:sp>
+      <p:sp>
+        <p:nvSpPr>
+          <p:cNvPr id="23" name="Oval 22"/>
+          <p:cNvSpPr/>
+          <p:nvPr/>
+        </p:nvSpPr>
+        <p:spPr>
+          <a:xfrm>
+            <a:off x="8750000" y="6350000"/>
+            <a:ext cx="900000" cy="900000"/>
+          </a:xfrm>
+          <a:prstGeom prst="ellipse">
+            <a:avLst/>
+          </a:prstGeom>
+          <a:solidFill>
+            <a:srgbClr val="0055AA"/>
+          </a:solidFill>
+          <a:ln>
+            <a:noFill/>
+          </a:ln>
+        </p:spPr>
+        <p:style>
+          <a:lnRef idx="1">
+            <a:schemeClr val="accent1"/>
+          </a:lnRef>
+          <a:fillRef idx="3">
+            <a:schemeClr val="accent1"/>
+          </a:fillRef>
+          <a:effectRef idx="2">
+            <a:schemeClr val="accent1"/>
+          </a:effectRef>
+          <a:fontRef idx="minor">
+            <a:schemeClr val="lt1"/>
+          </a:fontRef>
+        </p:style>
+        <p:txBody>
+          <a:bodyPr rtlCol="0" anchor="ctr"/>
+          <a:lstStyle/>
+          <a:p>
+            <a:pPr algn="ctr"/>
+          </a:p>
+        </p:txBody>
+      </p:sp>
+      <p:sp>
+        <p:nvSpPr>
+          <p:cNvPr id="24" name="TextBox 23"/>
+          <p:cNvSpPr txBox="1"/>
+          <p:nvPr/>
+        </p:nvSpPr>
+        <p:spPr>
+          <a:xfrm>
+            <a:off x="8750000" y="6350000"/>
+            <a:ext cx="900000" cy="900000"/>
+          </a:xfrm>
+          <a:prstGeom prst="rect">
+            <a:avLst/>
+          </a:prstGeom>
+          <a:noFill/>
+        </p:spPr>
+        <p:txBody>
+          <a:bodyPr wrap="square" anchor="ctr">
+            <a:spAutoFit/>
+          </a:bodyPr>
+          <a:lstStyle/>
+          <a:p>
+            <a:pPr algn="ctr"/>
+            <a:r>
+              <a:rPr sz="2000" b="1">
+                <a:solidFill>
+                  <a:srgbClr val="FFFFFF"/>
+                </a:solidFill>
+                <a:latin typeface="Open Sans"/>
+                <a:ea typeface="Open Sans"/>
+                <a:cs typeface="Open Sans"/>
+              </a:rPr>
+              <a:t>5</a:t>
+            </a:r>
+          </a:p>
+        </p:txBody>
+      </p:sp>
+      <p:sp>
+        <p:nvSpPr>
+          <p:cNvPr id="25" name="TextBox 24"/>
+          <p:cNvSpPr txBox="1"/>
+          <p:nvPr/>
+        </p:nvSpPr>
+        <p:spPr>
+          <a:xfrm>
+            <a:off x="8750000" y="7550000"/>
+            <a:ext cx="6500000" cy="1300000"/>
+          </a:xfrm>
+          <a:prstGeom prst="rect">
+            <a:avLst/>
+          </a:prstGeom>
+          <a:noFill/>
+        </p:spPr>
+        <p:txBody>
+          <a:bodyPr wrap="square" anchor="t">
+            <a:spAutoFit/>
+          </a:bodyPr>
+          <a:lstStyle/>
+          <a:p>
+            <a:pPr algn="l"/>
+            <a:r>
+              <a:rPr sz="2400" b="0">
+                <a:solidFill>
+                  <a:srgbClr val="333333"/>
+                </a:solidFill>
+                <a:latin typeface="Open Sans"/>
+                <a:ea typeface="Open Sans"/>
+                <a:cs typeface="Open Sans"/>
+              </a:rPr>
+              <a:t>Частое дыхание</a:t>
+            </a:r>
+          </a:p>
+        </p:txBody>
+      </p:sp>
+      <p:sp>
+        <p:nvSpPr>
+          <p:cNvPr id="26" name="Rectangle 25"/>
+          <p:cNvSpPr/>
+          <p:nvPr/>
+        </p:nvSpPr>
+        <p:spPr>
+          <a:xfrm>
+            <a:off x="16200000" y="5950000"/>
+            <a:ext cx="7000000" cy="3200000"/>
+          </a:xfrm>
+          <a:prstGeom prst="rect">
+            <a:avLst/>
+          </a:prstGeom>
+          <a:solidFill>
+            <a:srgbClr val="FFFFFF"/>
+          </a:solidFill>
+          <a:ln w="12700">
+            <a:solidFill>
+              <a:srgbClr val="E1E1E1"/>
+            </a:solidFill>
+          </a:ln>
+        </p:spPr>
+        <p:style>
+          <a:lnRef idx="1">
+            <a:schemeClr val="accent1"/>
+          </a:lnRef>
+          <a:fillRef idx="3">
+            <a:schemeClr val="accent1"/>
+          </a:fillRef>
+          <a:effectRef idx="2">
+            <a:schemeClr val="accent1"/>
+          </a:effectRef>
+          <a:fontRef idx="minor">
+            <a:schemeClr val="lt1"/>
+          </a:fontRef>
+        </p:style>
+        <p:txBody>
+          <a:bodyPr rtlCol="0" anchor="ctr"/>
+          <a:lstStyle/>
+          <a:p>
+            <a:pPr algn="ctr"/>
+          </a:p>
+        </p:txBody>
+      </p:sp>
+      <p:sp>
+        <p:nvSpPr>
+          <p:cNvPr id="27" name="Oval 26"/>
+          <p:cNvSpPr/>
+          <p:nvPr/>
+        </p:nvSpPr>
+        <p:spPr>
+          <a:xfrm>
+            <a:off x="16450000" y="6350000"/>
+            <a:ext cx="900000" cy="900000"/>
+          </a:xfrm>
+          <a:prstGeom prst="ellipse">
+            <a:avLst/>
+          </a:prstGeom>
+          <a:solidFill>
+            <a:srgbClr val="0055AA"/>
+          </a:solidFill>
+          <a:ln>
+            <a:noFill/>
+          </a:ln>
+        </p:spPr>
+        <p:style>
+          <a:lnRef idx="1">
+            <a:schemeClr val="accent1"/>
+          </a:lnRef>
+          <a:fillRef idx="3">
+            <a:schemeClr val="accent1"/>
+          </a:fillRef>
+          <a:effectRef idx="2">
+            <a:schemeClr val="accent1"/>
+          </a:effectRef>
+          <a:fontRef idx="minor">
+            <a:schemeClr val="lt1"/>
+          </a:fontRef>
+        </p:style>
+        <p:txBody>
+          <a:bodyPr rtlCol="0" anchor="ctr"/>
+          <a:lstStyle/>
+          <a:p>
+            <a:pPr algn="ctr"/>
+          </a:p>
+        </p:txBody>
+      </p:sp>
+      <p:sp>
+        <p:nvSpPr>
+          <p:cNvPr id="28" name="TextBox 27"/>
+          <p:cNvSpPr txBox="1"/>
+          <p:nvPr/>
+        </p:nvSpPr>
+        <p:spPr>
+          <a:xfrm>
+            <a:off x="16450000" y="6350000"/>
+            <a:ext cx="900000" cy="900000"/>
+          </a:xfrm>
+          <a:prstGeom prst="rect">
+            <a:avLst/>
+          </a:prstGeom>
+          <a:noFill/>
+        </p:spPr>
+        <p:txBody>
+          <a:bodyPr wrap="square" anchor="ctr">
+            <a:spAutoFit/>
+          </a:bodyPr>
+          <a:lstStyle/>
+          <a:p>
+            <a:pPr algn="ctr"/>
+            <a:r>
+              <a:rPr sz="2000" b="1">
+                <a:solidFill>
+                  <a:srgbClr val="FFFFFF"/>
+                </a:solidFill>
+                <a:latin typeface="Open Sans"/>
+                <a:ea typeface="Open Sans"/>
+                <a:cs typeface="Open Sans"/>
+              </a:rPr>
+              <a:t>6</a:t>
+            </a:r>
+          </a:p>
+        </p:txBody>
+      </p:sp>
+      <p:sp>
+        <p:nvSpPr>
+          <p:cNvPr id="29" name="TextBox 28"/>
+          <p:cNvSpPr txBox="1"/>
+          <p:nvPr/>
+        </p:nvSpPr>
+        <p:spPr>
+          <a:xfrm>
+            <a:off x="16450000" y="7550000"/>
+            <a:ext cx="6500000" cy="1300000"/>
+          </a:xfrm>
+          <a:prstGeom prst="rect">
+            <a:avLst/>
+          </a:prstGeom>
+          <a:noFill/>
+        </p:spPr>
+        <p:txBody>
+          <a:bodyPr wrap="square" anchor="t">
+            <a:spAutoFit/>
+          </a:bodyPr>
+          <a:lstStyle/>
+          <a:p>
+            <a:pPr algn="l"/>
+            <a:r>
+              <a:rPr sz="2400" b="0">
+                <a:solidFill>
+                  <a:srgbClr val="333333"/>
+                </a:solidFill>
+                <a:latin typeface="Open Sans"/>
+                <a:ea typeface="Open Sans"/>
+                <a:cs typeface="Open Sans"/>
+              </a:rPr>
+              <a:t>Возбуждение → апатия</a:t>
             </a:r>
           </a:p>
         </p:txBody>
@@ -5063,20 +5886,12 @@
         <p:nvPr/>
       </p:nvGrpSpPr>
       <p:grpSpPr/>
-      <p:pic>
-        <p:nvPicPr>
-          <p:cNvPr id="2" name="Picture 1" descr="page_04.png"/>
-          <p:cNvPicPr>
-            <a:picLocks noChangeAspect="1"/>
-          </p:cNvPicPr>
-          <p:nvPr/>
-        </p:nvPicPr>
-        <p:blipFill>
-          <a:blip r:embed="rId2"/>
-          <a:stretch>
-            <a:fillRect/>
-          </a:stretch>
-        </p:blipFill>
+      <p:sp>
+        <p:nvSpPr>
+          <p:cNvPr id="2" name="Rectangle 1"/>
+          <p:cNvSpPr/>
+          <p:nvPr/>
+        </p:nvSpPr>
         <p:spPr>
           <a:xfrm>
             <a:off x="0" y="0"/>
@@ -5085,8 +5900,412 @@
           <a:prstGeom prst="rect">
             <a:avLst/>
           </a:prstGeom>
-        </p:spPr>
-      </p:pic>
+          <a:solidFill>
+            <a:srgbClr val="FFFFFF"/>
+          </a:solidFill>
+          <a:ln>
+            <a:noFill/>
+          </a:ln>
+        </p:spPr>
+        <p:style>
+          <a:lnRef idx="1">
+            <a:schemeClr val="accent1"/>
+          </a:lnRef>
+          <a:fillRef idx="3">
+            <a:schemeClr val="accent1"/>
+          </a:fillRef>
+          <a:effectRef idx="2">
+            <a:schemeClr val="accent1"/>
+          </a:effectRef>
+          <a:fontRef idx="minor">
+            <a:schemeClr val="lt1"/>
+          </a:fontRef>
+        </p:style>
+        <p:txBody>
+          <a:bodyPr rtlCol="0" anchor="ctr"/>
+          <a:lstStyle/>
+          <a:p>
+            <a:pPr algn="ctr"/>
+          </a:p>
+        </p:txBody>
+      </p:sp>
+      <p:sp>
+        <p:nvSpPr>
+          <p:cNvPr id="3" name="Rectangle 2"/>
+          <p:cNvSpPr/>
+          <p:nvPr/>
+        </p:nvSpPr>
+        <p:spPr>
+          <a:xfrm>
+            <a:off x="0" y="0"/>
+            <a:ext cx="24384000" cy="120000"/>
+          </a:xfrm>
+          <a:prstGeom prst="rect">
+            <a:avLst/>
+          </a:prstGeom>
+          <a:solidFill>
+            <a:srgbClr val="DDDDDD"/>
+          </a:solidFill>
+          <a:ln>
+            <a:noFill/>
+          </a:ln>
+        </p:spPr>
+        <p:style>
+          <a:lnRef idx="1">
+            <a:schemeClr val="accent1"/>
+          </a:lnRef>
+          <a:fillRef idx="3">
+            <a:schemeClr val="accent1"/>
+          </a:fillRef>
+          <a:effectRef idx="2">
+            <a:schemeClr val="accent1"/>
+          </a:effectRef>
+          <a:fontRef idx="minor">
+            <a:schemeClr val="lt1"/>
+          </a:fontRef>
+        </p:style>
+        <p:txBody>
+          <a:bodyPr rtlCol="0" anchor="ctr"/>
+          <a:lstStyle/>
+          <a:p>
+            <a:pPr algn="ctr"/>
+          </a:p>
+        </p:txBody>
+      </p:sp>
+      <p:sp>
+        <p:nvSpPr>
+          <p:cNvPr id="4" name="TextBox 3"/>
+          <p:cNvSpPr txBox="1"/>
+          <p:nvPr/>
+        </p:nvSpPr>
+        <p:spPr>
+          <a:xfrm>
+            <a:off x="800000" y="350000"/>
+            <a:ext cx="22800000" cy="1000000"/>
+          </a:xfrm>
+          <a:prstGeom prst="rect">
+            <a:avLst/>
+          </a:prstGeom>
+          <a:noFill/>
+        </p:spPr>
+        <p:txBody>
+          <a:bodyPr wrap="square" anchor="t">
+            <a:spAutoFit/>
+          </a:bodyPr>
+          <a:lstStyle/>
+          <a:p>
+            <a:pPr algn="l"/>
+            <a:r>
+              <a:rPr sz="4600" b="1">
+                <a:solidFill>
+                  <a:srgbClr val="333333"/>
+                </a:solidFill>
+                <a:latin typeface="Open Sans"/>
+                <a:ea typeface="Open Sans"/>
+                <a:cs typeface="Open Sans"/>
+              </a:rPr>
+              <a:t>Что такое обзорный осмотр</a:t>
+            </a:r>
+          </a:p>
+        </p:txBody>
+      </p:sp>
+      <p:sp>
+        <p:nvSpPr>
+          <p:cNvPr id="5" name="Rectangle 4"/>
+          <p:cNvSpPr/>
+          <p:nvPr/>
+        </p:nvSpPr>
+        <p:spPr>
+          <a:xfrm>
+            <a:off x="800000" y="1450000"/>
+            <a:ext cx="22800000" cy="20000"/>
+          </a:xfrm>
+          <a:prstGeom prst="rect">
+            <a:avLst/>
+          </a:prstGeom>
+          <a:solidFill>
+            <a:srgbClr val="E1E1E1"/>
+          </a:solidFill>
+          <a:ln>
+            <a:noFill/>
+          </a:ln>
+        </p:spPr>
+        <p:style>
+          <a:lnRef idx="1">
+            <a:schemeClr val="accent1"/>
+          </a:lnRef>
+          <a:fillRef idx="3">
+            <a:schemeClr val="accent1"/>
+          </a:fillRef>
+          <a:effectRef idx="2">
+            <a:schemeClr val="accent1"/>
+          </a:effectRef>
+          <a:fontRef idx="minor">
+            <a:schemeClr val="lt1"/>
+          </a:fontRef>
+        </p:style>
+        <p:txBody>
+          <a:bodyPr rtlCol="0" anchor="ctr"/>
+          <a:lstStyle/>
+          <a:p>
+            <a:pPr algn="ctr"/>
+          </a:p>
+        </p:txBody>
+      </p:sp>
+      <p:sp>
+        <p:nvSpPr>
+          <p:cNvPr id="6" name="TextBox 5"/>
+          <p:cNvSpPr txBox="1"/>
+          <p:nvPr/>
+        </p:nvSpPr>
+        <p:spPr>
+          <a:xfrm>
+            <a:off x="800000" y="1950000"/>
+            <a:ext cx="22800000" cy="7000000"/>
+          </a:xfrm>
+          <a:prstGeom prst="rect">
+            <a:avLst/>
+          </a:prstGeom>
+          <a:noFill/>
+        </p:spPr>
+        <p:txBody>
+          <a:bodyPr wrap="square">
+            <a:spAutoFit/>
+          </a:bodyPr>
+          <a:lstStyle/>
+          <a:p>
+            <a:pPr algn="l">
+              <a:spcAft>
+                <a:spcPts val="1000"/>
+              </a:spcAft>
+            </a:pPr>
+            <a:r>
+              <a:rPr sz="3200" b="0">
+                <a:solidFill>
+                  <a:srgbClr val="333333"/>
+                </a:solidFill>
+                <a:latin typeface="Open Sans"/>
+                <a:ea typeface="Open Sans"/>
+                <a:cs typeface="Open Sans"/>
+              </a:rPr>
+              <a:t>•  Быстрая визуальная оценка пострадавшего с головы до ног.</a:t>
+            </a:r>
+          </a:p>
+          <a:p>
+            <a:pPr algn="l">
+              <a:spcAft>
+                <a:spcPts val="1000"/>
+              </a:spcAft>
+            </a:pPr>
+            <a:r>
+              <a:rPr sz="3200" b="0">
+                <a:solidFill>
+                  <a:srgbClr val="333333"/>
+                </a:solidFill>
+                <a:latin typeface="Open Sans"/>
+                <a:ea typeface="Open Sans"/>
+                <a:cs typeface="Open Sans"/>
+              </a:rPr>
+              <a:t>•  Цель — выявить продолжающееся наружное кровотечение.</a:t>
+            </a:r>
+          </a:p>
+          <a:p>
+            <a:pPr algn="l">
+              <a:spcAft>
+                <a:spcPts val="1000"/>
+              </a:spcAft>
+            </a:pPr>
+            <a:r>
+              <a:rPr sz="3200" b="0">
+                <a:solidFill>
+                  <a:srgbClr val="333333"/>
+                </a:solidFill>
+                <a:latin typeface="Open Sans"/>
+                <a:ea typeface="Open Sans"/>
+                <a:cs typeface="Open Sans"/>
+              </a:rPr>
+              <a:t>•  Выполняется сразу после оценки обстановки и безопасности.</a:t>
+            </a:r>
+          </a:p>
+          <a:p>
+            <a:pPr algn="l">
+              <a:spcAft>
+                <a:spcPts val="1000"/>
+              </a:spcAft>
+            </a:pPr>
+            <a:r>
+              <a:rPr sz="3200" b="0">
+                <a:solidFill>
+                  <a:srgbClr val="333333"/>
+                </a:solidFill>
+                <a:latin typeface="Open Sans"/>
+                <a:ea typeface="Open Sans"/>
+                <a:cs typeface="Open Sans"/>
+              </a:rPr>
+              <a:t>•  Длительность: около 1–2 секунд.</a:t>
+            </a:r>
+          </a:p>
+          <a:p>
+            <a:pPr algn="l">
+              <a:spcAft>
+                <a:spcPts val="1000"/>
+              </a:spcAft>
+            </a:pPr>
+            <a:r>
+              <a:rPr sz="3200" b="0">
+                <a:solidFill>
+                  <a:srgbClr val="333333"/>
+                </a:solidFill>
+                <a:latin typeface="Open Sans"/>
+                <a:ea typeface="Open Sans"/>
+                <a:cs typeface="Open Sans"/>
+              </a:rPr>
+              <a:t>•  При кровотечении — немедленно начать его остановку.</a:t>
+            </a:r>
+          </a:p>
+          <a:p>
+            <a:pPr algn="l">
+              <a:spcAft>
+                <a:spcPts val="1000"/>
+              </a:spcAft>
+            </a:pPr>
+            <a:r>
+              <a:rPr sz="3200" b="0">
+                <a:solidFill>
+                  <a:srgbClr val="333333"/>
+                </a:solidFill>
+                <a:latin typeface="Open Sans"/>
+                <a:ea typeface="Open Sans"/>
+                <a:cs typeface="Open Sans"/>
+              </a:rPr>
+              <a:t>•  По Приказу Минздрава № 220н — до подробного осмотра.</a:t>
+            </a:r>
+          </a:p>
+        </p:txBody>
+      </p:sp>
+      <p:sp>
+        <p:nvSpPr>
+          <p:cNvPr id="7" name="Rounded Rectangle 6"/>
+          <p:cNvSpPr/>
+          <p:nvPr/>
+        </p:nvSpPr>
+        <p:spPr>
+          <a:xfrm>
+            <a:off x="800000" y="11000000"/>
+            <a:ext cx="22800000" cy="1800000"/>
+          </a:xfrm>
+          <a:prstGeom prst="roundRect">
+            <a:avLst/>
+          </a:prstGeom>
+          <a:solidFill>
+            <a:srgbClr val="FAFAFA"/>
+          </a:solidFill>
+          <a:ln>
+            <a:noFill/>
+          </a:ln>
+        </p:spPr>
+        <p:style>
+          <a:lnRef idx="1">
+            <a:schemeClr val="accent1"/>
+          </a:lnRef>
+          <a:fillRef idx="3">
+            <a:schemeClr val="accent1"/>
+          </a:fillRef>
+          <a:effectRef idx="2">
+            <a:schemeClr val="accent1"/>
+          </a:effectRef>
+          <a:fontRef idx="minor">
+            <a:schemeClr val="lt1"/>
+          </a:fontRef>
+        </p:style>
+        <p:txBody>
+          <a:bodyPr rtlCol="0" anchor="ctr"/>
+          <a:lstStyle/>
+          <a:p>
+            <a:pPr algn="ctr"/>
+          </a:p>
+        </p:txBody>
+      </p:sp>
+      <p:sp>
+        <p:nvSpPr>
+          <p:cNvPr id="8" name="Rectangle 7"/>
+          <p:cNvSpPr/>
+          <p:nvPr/>
+        </p:nvSpPr>
+        <p:spPr>
+          <a:xfrm>
+            <a:off x="800000" y="11000000"/>
+            <a:ext cx="120000" cy="1800000"/>
+          </a:xfrm>
+          <a:prstGeom prst="rect">
+            <a:avLst/>
+          </a:prstGeom>
+          <a:solidFill>
+            <a:srgbClr val="CC0000"/>
+          </a:solidFill>
+          <a:ln>
+            <a:noFill/>
+          </a:ln>
+        </p:spPr>
+        <p:style>
+          <a:lnRef idx="1">
+            <a:schemeClr val="accent1"/>
+          </a:lnRef>
+          <a:fillRef idx="3">
+            <a:schemeClr val="accent1"/>
+          </a:fillRef>
+          <a:effectRef idx="2">
+            <a:schemeClr val="accent1"/>
+          </a:effectRef>
+          <a:fontRef idx="minor">
+            <a:schemeClr val="lt1"/>
+          </a:fontRef>
+        </p:style>
+        <p:txBody>
+          <a:bodyPr rtlCol="0" anchor="ctr"/>
+          <a:lstStyle/>
+          <a:p>
+            <a:pPr algn="ctr"/>
+          </a:p>
+        </p:txBody>
+      </p:sp>
+      <p:sp>
+        <p:nvSpPr>
+          <p:cNvPr id="9" name="TextBox 8"/>
+          <p:cNvSpPr txBox="1"/>
+          <p:nvPr/>
+        </p:nvSpPr>
+        <p:spPr>
+          <a:xfrm>
+            <a:off x="1200000" y="11300000"/>
+            <a:ext cx="21800000" cy="1400000"/>
+          </a:xfrm>
+          <a:prstGeom prst="rect">
+            <a:avLst/>
+          </a:prstGeom>
+          <a:noFill/>
+        </p:spPr>
+        <p:txBody>
+          <a:bodyPr wrap="square" anchor="ctr">
+            <a:spAutoFit/>
+          </a:bodyPr>
+          <a:lstStyle/>
+          <a:p>
+            <a:pPr algn="l"/>
+            <a:r>
+              <a:rPr sz="2600" b="1">
+                <a:solidFill>
+                  <a:srgbClr val="CC0000"/>
+                </a:solidFill>
+                <a:latin typeface="Open Sans"/>
+                <a:ea typeface="Open Sans"/>
+                <a:cs typeface="Open Sans"/>
+              </a:rPr>
+              <a:t>Приоритет: сначала угрожающее жизни кровотечение.</a:t>
+            </a:r>
+          </a:p>
+        </p:txBody>
+      </p:sp>
     </p:spTree>
   </p:cSld>
   <p:clrMapOvr>
@@ -5120,7 +6339,7 @@
             <a:avLst/>
           </a:prstGeom>
           <a:solidFill>
-            <a:srgbClr val="F7F7F7"/>
+            <a:srgbClr val="FFFFFF"/>
           </a:solidFill>
           <a:ln>
             <a:noFill/>
@@ -5156,14 +6375,14 @@
         </p:nvSpPr>
         <p:spPr>
           <a:xfrm>
-            <a:off x="23000000" y="0"/>
-            <a:ext cx="1384000" cy="13716000"/>
+            <a:off x="0" y="0"/>
+            <a:ext cx="24384000" cy="120000"/>
           </a:xfrm>
           <a:prstGeom prst="rect">
             <a:avLst/>
           </a:prstGeom>
           <a:solidFill>
-            <a:srgbClr val="D9D9D9"/>
+            <a:srgbClr val="DDDDDD"/>
           </a:solidFill>
           <a:ln>
             <a:noFill/>
@@ -5193,20 +6412,57 @@
       </p:sp>
       <p:sp>
         <p:nvSpPr>
-          <p:cNvPr id="4" name="Rectangle 3"/>
+          <p:cNvPr id="4" name="TextBox 3"/>
+          <p:cNvSpPr txBox="1"/>
+          <p:nvPr/>
+        </p:nvSpPr>
+        <p:spPr>
+          <a:xfrm>
+            <a:off x="800000" y="350000"/>
+            <a:ext cx="22800000" cy="1000000"/>
+          </a:xfrm>
+          <a:prstGeom prst="rect">
+            <a:avLst/>
+          </a:prstGeom>
+          <a:noFill/>
+        </p:spPr>
+        <p:txBody>
+          <a:bodyPr wrap="square" anchor="t">
+            <a:spAutoFit/>
+          </a:bodyPr>
+          <a:lstStyle/>
+          <a:p>
+            <a:pPr algn="l"/>
+            <a:r>
+              <a:rPr sz="4600" b="1">
+                <a:solidFill>
+                  <a:srgbClr val="333333"/>
+                </a:solidFill>
+                <a:latin typeface="Open Sans"/>
+                <a:ea typeface="Open Sans"/>
+                <a:cs typeface="Open Sans"/>
+              </a:rPr>
+              <a:t>Порядок обзорного осмотра</a:t>
+            </a:r>
+          </a:p>
+        </p:txBody>
+      </p:sp>
+      <p:sp>
+        <p:nvSpPr>
+          <p:cNvPr id="5" name="Rectangle 4"/>
           <p:cNvSpPr/>
           <p:nvPr/>
         </p:nvSpPr>
         <p:spPr>
           <a:xfrm>
-            <a:off x="0" y="5600000"/>
-            <a:ext cx="700000" cy="700000"/>
+            <a:off x="800000" y="1450000"/>
+            <a:ext cx="22800000" cy="20000"/>
           </a:xfrm>
           <a:prstGeom prst="rect">
             <a:avLst/>
           </a:prstGeom>
           <a:solidFill>
-            <a:srgbClr val="4D4D4D"/>
+            <a:srgbClr val="E1E1E1"/>
           </a:solidFill>
           <a:ln>
             <a:noFill/>
@@ -5236,156 +6492,14 @@
       </p:sp>
       <p:sp>
         <p:nvSpPr>
-          <p:cNvPr id="5" name="TextBox 4"/>
-          <p:cNvSpPr txBox="1"/>
-          <p:nvPr/>
-        </p:nvSpPr>
-        <p:spPr>
-          <a:xfrm>
-            <a:off x="0" y="5680000"/>
-            <a:ext cx="700000" cy="550000"/>
-          </a:xfrm>
-          <a:prstGeom prst="rect">
-            <a:avLst/>
-          </a:prstGeom>
-          <a:noFill/>
-        </p:spPr>
-        <p:txBody>
-          <a:bodyPr wrap="square" anchor="ctr"/>
-          <a:lstStyle/>
-          <a:p>
-            <a:pPr algn="ctr"/>
-            <a:r>
-              <a:rPr sz="1800" b="1">
-                <a:solidFill>
-                  <a:srgbClr val="FFFFFF"/>
-                </a:solidFill>
-                <a:latin typeface="Arial"/>
-              </a:rPr>
-              <a:t>6</a:t>
-            </a:r>
-          </a:p>
-        </p:txBody>
-      </p:sp>
-      <p:sp>
-        <p:nvSpPr>
           <p:cNvPr id="6" name="TextBox 5"/>
           <p:cNvSpPr txBox="1"/>
           <p:nvPr/>
         </p:nvSpPr>
         <p:spPr>
           <a:xfrm>
-            <a:off x="900000" y="500000"/>
-            <a:ext cx="21000000" cy="900000"/>
-          </a:xfrm>
-          <a:prstGeom prst="rect">
-            <a:avLst/>
-          </a:prstGeom>
-          <a:noFill/>
-        </p:spPr>
-        <p:txBody>
-          <a:bodyPr wrap="square" anchor="t"/>
-          <a:lstStyle/>
-          <a:p>
-            <a:pPr algn="l"/>
-            <a:r>
-              <a:rPr sz="2800" b="1">
-                <a:solidFill>
-                  <a:srgbClr val="2C2C2C"/>
-                </a:solidFill>
-                <a:latin typeface="Arial"/>
-              </a:rPr>
-              <a:t>ПОРЯДОК ОБЗОРНОГО ОСМОТРА</a:t>
-            </a:r>
-          </a:p>
-        </p:txBody>
-      </p:sp>
-      <p:sp>
-        <p:nvSpPr>
-          <p:cNvPr id="7" name="Rectangle 6"/>
-          <p:cNvSpPr/>
-          <p:nvPr/>
-        </p:nvSpPr>
-        <p:spPr>
-          <a:xfrm>
-            <a:off x="900000" y="1350000"/>
-            <a:ext cx="20000000" cy="25000"/>
-          </a:xfrm>
-          <a:prstGeom prst="rect">
-            <a:avLst/>
-          </a:prstGeom>
-          <a:solidFill>
-            <a:srgbClr val="B8B8B8"/>
-          </a:solidFill>
-          <a:ln>
-            <a:noFill/>
-          </a:ln>
-        </p:spPr>
-        <p:style>
-          <a:lnRef idx="1">
-            <a:schemeClr val="accent1"/>
-          </a:lnRef>
-          <a:fillRef idx="3">
-            <a:schemeClr val="accent1"/>
-          </a:fillRef>
-          <a:effectRef idx="2">
-            <a:schemeClr val="accent1"/>
-          </a:effectRef>
-          <a:fontRef idx="minor">
-            <a:schemeClr val="lt1"/>
-          </a:fontRef>
-        </p:style>
-        <p:txBody>
-          <a:bodyPr rtlCol="0" anchor="ctr"/>
-          <a:lstStyle/>
-          <a:p>
-            <a:pPr algn="ctr"/>
-          </a:p>
-        </p:txBody>
-      </p:sp>
-      <p:sp>
-        <p:nvSpPr>
-          <p:cNvPr id="8" name="TextBox 7"/>
-          <p:cNvSpPr txBox="1"/>
-          <p:nvPr/>
-        </p:nvSpPr>
-        <p:spPr>
-          <a:xfrm>
-            <a:off x="900000" y="1450000"/>
-            <a:ext cx="20000000" cy="350000"/>
-          </a:xfrm>
-          <a:prstGeom prst="rect">
-            <a:avLst/>
-          </a:prstGeom>
-          <a:noFill/>
-        </p:spPr>
-        <p:txBody>
-          <a:bodyPr wrap="square" anchor="t"/>
-          <a:lstStyle/>
-          <a:p>
-            <a:pPr algn="l"/>
-            <a:r>
-              <a:rPr sz="1200" b="0">
-                <a:solidFill>
-                  <a:srgbClr val="6F6F6F"/>
-                </a:solidFill>
-                <a:latin typeface="Arial"/>
-              </a:rPr>
-              <a:t>Оказание первой помощи при наружных кровотечениях</a:t>
-            </a:r>
-          </a:p>
-        </p:txBody>
-      </p:sp>
-      <p:sp>
-        <p:nvSpPr>
-          <p:cNvPr id="9" name="TextBox 8"/>
-          <p:cNvSpPr txBox="1"/>
-          <p:nvPr/>
-        </p:nvSpPr>
-        <p:spPr>
-          <a:xfrm>
-            <a:off x="900000" y="2000000"/>
-            <a:ext cx="20500000" cy="7500000"/>
+            <a:off x="800000" y="1950000"/>
+            <a:ext cx="22800000" cy="8500000"/>
           </a:xfrm>
           <a:prstGeom prst="rect">
             <a:avLst/>
@@ -5400,97 +6514,109 @@
           <a:p>
             <a:pPr algn="l">
               <a:spcAft>
-                <a:spcPts val="600"/>
+                <a:spcPts val="1000"/>
               </a:spcAft>
             </a:pPr>
             <a:r>
-              <a:rPr sz="1700" b="0">
-                <a:solidFill>
-                  <a:srgbClr val="2C2C2C"/>
-                </a:solidFill>
-                <a:latin typeface="Arial"/>
+              <a:rPr sz="3200" b="0">
+                <a:solidFill>
+                  <a:srgbClr val="333333"/>
+                </a:solidFill>
+                <a:latin typeface="Open Sans"/>
+                <a:ea typeface="Open Sans"/>
+                <a:cs typeface="Open Sans"/>
               </a:rPr>
-              <a:t>•  1. Убедиться в собственной безопасности и безопасности пострадавшего.</a:t>
+              <a:t>•  Убедиться в собственной безопасности (перчатки / СИЗ).</a:t>
             </a:r>
           </a:p>
           <a:p>
             <a:pPr algn="l">
               <a:spcAft>
-                <a:spcPts val="600"/>
+                <a:spcPts val="1000"/>
               </a:spcAft>
             </a:pPr>
             <a:r>
-              <a:rPr sz="1700" b="0">
-                <a:solidFill>
-                  <a:srgbClr val="2C2C2C"/>
-                </a:solidFill>
-                <a:latin typeface="Arial"/>
+              <a:rPr sz="3200" b="0">
+                <a:solidFill>
+                  <a:srgbClr val="333333"/>
+                </a:solidFill>
+                <a:latin typeface="Open Sans"/>
+                <a:ea typeface="Open Sans"/>
+                <a:cs typeface="Open Sans"/>
               </a:rPr>
-              <a:t>•  2. Быстро осмотреть пострадавшего с головы до ног.</a:t>
+              <a:t>•  Быстро осмотреть пострадавшего с головы до ног.</a:t>
             </a:r>
           </a:p>
           <a:p>
             <a:pPr algn="l">
               <a:spcAft>
-                <a:spcPts val="600"/>
+                <a:spcPts val="1000"/>
               </a:spcAft>
             </a:pPr>
             <a:r>
-              <a:rPr sz="1700" b="0">
-                <a:solidFill>
-                  <a:srgbClr val="2C2C2C"/>
-                </a:solidFill>
-                <a:latin typeface="Arial"/>
+              <a:rPr sz="3200" b="0">
+                <a:solidFill>
+                  <a:srgbClr val="333333"/>
+                </a:solidFill>
+                <a:latin typeface="Open Sans"/>
+                <a:ea typeface="Open Sans"/>
+                <a:cs typeface="Open Sans"/>
               </a:rPr>
-              <a:t>•  3. Обратить внимание на пропитанную кровью одежду, лужи крови, пульсирующую струю.</a:t>
+              <a:t>•  Искать кровь на одежде, лужи крови, пульсирующую струю.</a:t>
             </a:r>
           </a:p>
           <a:p>
             <a:pPr algn="l">
               <a:spcAft>
-                <a:spcPts val="600"/>
+                <a:spcPts val="1000"/>
               </a:spcAft>
             </a:pPr>
             <a:r>
-              <a:rPr sz="1700" b="0">
-                <a:solidFill>
-                  <a:srgbClr val="2C2C2C"/>
-                </a:solidFill>
-                <a:latin typeface="Arial"/>
+              <a:rPr sz="3200" b="0">
+                <a:solidFill>
+                  <a:srgbClr val="333333"/>
+                </a:solidFill>
+                <a:latin typeface="Open Sans"/>
+                <a:ea typeface="Open Sans"/>
+                <a:cs typeface="Open Sans"/>
               </a:rPr>
-              <a:t>•  4. При нескольких пострадавших — осмотреть всех, приоритет — детям и тяжелым.</a:t>
+              <a:t>•  При нескольких пострадавших — осмотреть всех.</a:t>
             </a:r>
           </a:p>
           <a:p>
             <a:pPr algn="l">
               <a:spcAft>
-                <a:spcPts val="600"/>
+                <a:spcPts val="1000"/>
               </a:spcAft>
             </a:pPr>
             <a:r>
-              <a:rPr sz="1700" b="0">
-                <a:solidFill>
-                  <a:srgbClr val="2C2C2C"/>
-                </a:solidFill>
-                <a:latin typeface="Arial"/>
+              <a:rPr sz="3200" b="0">
+                <a:solidFill>
+                  <a:srgbClr val="333333"/>
+                </a:solidFill>
+                <a:latin typeface="Open Sans"/>
+                <a:ea typeface="Open Sans"/>
+                <a:cs typeface="Open Sans"/>
               </a:rPr>
-              <a:t>•  5. При выявлении кровотечения — начать временную остановку (прямое давление и др.).</a:t>
+              <a:t>•  Приоритет — детям и пострадавшим с массивным кровотечением.</a:t>
             </a:r>
           </a:p>
           <a:p>
             <a:pPr algn="l">
               <a:spcAft>
-                <a:spcPts val="600"/>
+                <a:spcPts val="1000"/>
               </a:spcAft>
             </a:pPr>
             <a:r>
-              <a:rPr sz="1700" b="0">
-                <a:solidFill>
-                  <a:srgbClr val="2C2C2C"/>
-                </a:solidFill>
-                <a:latin typeface="Arial"/>
+              <a:rPr sz="3200" b="0">
+                <a:solidFill>
+                  <a:srgbClr val="333333"/>
+                </a:solidFill>
+                <a:latin typeface="Open Sans"/>
+                <a:ea typeface="Open Sans"/>
+                <a:cs typeface="Open Sans"/>
               </a:rPr>
-              <a:t>•  6. Только после устранения угрожающего кровотечения — переходить к оценке сознания/дыхания и подробному осмотру.</a:t>
+              <a:t>•  После остановки крови — оценка сознания / дыхания и подробный осмотр.</a:t>
             </a:r>
           </a:p>
         </p:txBody>
@@ -5528,7 +6654,7 @@
             <a:avLst/>
           </a:prstGeom>
           <a:solidFill>
-            <a:srgbClr val="F7F7F7"/>
+            <a:srgbClr val="FFFFFF"/>
           </a:solidFill>
           <a:ln>
             <a:noFill/>
@@ -5564,14 +6690,14 @@
         </p:nvSpPr>
         <p:spPr>
           <a:xfrm>
-            <a:off x="23000000" y="0"/>
-            <a:ext cx="1384000" cy="13716000"/>
+            <a:off x="0" y="0"/>
+            <a:ext cx="24384000" cy="120000"/>
           </a:xfrm>
           <a:prstGeom prst="rect">
             <a:avLst/>
           </a:prstGeom>
           <a:solidFill>
-            <a:srgbClr val="D9D9D9"/>
+            <a:srgbClr val="DDDDDD"/>
           </a:solidFill>
           <a:ln>
             <a:noFill/>
@@ -5601,20 +6727,57 @@
       </p:sp>
       <p:sp>
         <p:nvSpPr>
-          <p:cNvPr id="4" name="Rectangle 3"/>
+          <p:cNvPr id="4" name="TextBox 3"/>
+          <p:cNvSpPr txBox="1"/>
+          <p:nvPr/>
+        </p:nvSpPr>
+        <p:spPr>
+          <a:xfrm>
+            <a:off x="800000" y="350000"/>
+            <a:ext cx="22800000" cy="1000000"/>
+          </a:xfrm>
+          <a:prstGeom prst="rect">
+            <a:avLst/>
+          </a:prstGeom>
+          <a:noFill/>
+        </p:spPr>
+        <p:txBody>
+          <a:bodyPr wrap="square" anchor="t">
+            <a:spAutoFit/>
+          </a:bodyPr>
+          <a:lstStyle/>
+          <a:p>
+            <a:pPr algn="l"/>
+            <a:r>
+              <a:rPr sz="4600" b="1">
+                <a:solidFill>
+                  <a:srgbClr val="333333"/>
+                </a:solidFill>
+                <a:latin typeface="Open Sans"/>
+                <a:ea typeface="Open Sans"/>
+                <a:cs typeface="Open Sans"/>
+              </a:rPr>
+              <a:t>Обзорный и подробный осмотр</a:t>
+            </a:r>
+          </a:p>
+        </p:txBody>
+      </p:sp>
+      <p:sp>
+        <p:nvSpPr>
+          <p:cNvPr id="5" name="Rectangle 4"/>
           <p:cNvSpPr/>
           <p:nvPr/>
         </p:nvSpPr>
         <p:spPr>
           <a:xfrm>
-            <a:off x="0" y="5600000"/>
-            <a:ext cx="700000" cy="700000"/>
+            <a:off x="800000" y="1450000"/>
+            <a:ext cx="22800000" cy="20000"/>
           </a:xfrm>
           <a:prstGeom prst="rect">
             <a:avLst/>
           </a:prstGeom>
           <a:solidFill>
-            <a:srgbClr val="4D4D4D"/>
+            <a:srgbClr val="E1E1E1"/>
           </a:solidFill>
           <a:ln>
             <a:noFill/>
@@ -5644,89 +6807,25 @@
       </p:sp>
       <p:sp>
         <p:nvSpPr>
-          <p:cNvPr id="5" name="TextBox 4"/>
-          <p:cNvSpPr txBox="1"/>
-          <p:nvPr/>
-        </p:nvSpPr>
-        <p:spPr>
-          <a:xfrm>
-            <a:off x="0" y="5680000"/>
-            <a:ext cx="700000" cy="550000"/>
-          </a:xfrm>
-          <a:prstGeom prst="rect">
-            <a:avLst/>
-          </a:prstGeom>
-          <a:noFill/>
-        </p:spPr>
-        <p:txBody>
-          <a:bodyPr wrap="square" anchor="ctr"/>
-          <a:lstStyle/>
-          <a:p>
-            <a:pPr algn="ctr"/>
-            <a:r>
-              <a:rPr sz="1800" b="1">
-                <a:solidFill>
-                  <a:srgbClr val="FFFFFF"/>
-                </a:solidFill>
-                <a:latin typeface="Arial"/>
-              </a:rPr>
-              <a:t>7</a:t>
-            </a:r>
-          </a:p>
-        </p:txBody>
-      </p:sp>
-      <p:sp>
-        <p:nvSpPr>
-          <p:cNvPr id="6" name="TextBox 5"/>
-          <p:cNvSpPr txBox="1"/>
-          <p:nvPr/>
-        </p:nvSpPr>
-        <p:spPr>
-          <a:xfrm>
-            <a:off x="900000" y="500000"/>
-            <a:ext cx="21000000" cy="900000"/>
-          </a:xfrm>
-          <a:prstGeom prst="rect">
-            <a:avLst/>
-          </a:prstGeom>
-          <a:noFill/>
-        </p:spPr>
-        <p:txBody>
-          <a:bodyPr wrap="square" anchor="t"/>
-          <a:lstStyle/>
-          <a:p>
-            <a:pPr algn="l"/>
-            <a:r>
-              <a:rPr sz="2800" b="1">
-                <a:solidFill>
-                  <a:srgbClr val="2C2C2C"/>
-                </a:solidFill>
-                <a:latin typeface="Arial"/>
-              </a:rPr>
-              <a:t>ОБЗОРНЫЙ И ПОДРОБНЫЙ ОСМОТР — РАЗЛИЧИЯ</a:t>
-            </a:r>
-          </a:p>
-        </p:txBody>
-      </p:sp>
-      <p:sp>
-        <p:nvSpPr>
-          <p:cNvPr id="7" name="Rectangle 6"/>
+          <p:cNvPr id="6" name="Rectangle 5"/>
           <p:cNvSpPr/>
           <p:nvPr/>
         </p:nvSpPr>
         <p:spPr>
           <a:xfrm>
-            <a:off x="900000" y="1350000"/>
-            <a:ext cx="20000000" cy="25000"/>
+            <a:off x="800000" y="1950000"/>
+            <a:ext cx="10800000" cy="9500000"/>
           </a:xfrm>
           <a:prstGeom prst="rect">
             <a:avLst/>
           </a:prstGeom>
           <a:solidFill>
-            <a:srgbClr val="B8B8B8"/>
+            <a:srgbClr val="FFFFFF"/>
           </a:solidFill>
-          <a:ln>
-            <a:noFill/>
+          <a:ln w="12700">
+            <a:solidFill>
+              <a:srgbClr val="E1E1E1"/>
+            </a:solidFill>
           </a:ln>
         </p:spPr>
         <p:style>
@@ -5753,47 +6852,14 @@
       </p:sp>
       <p:sp>
         <p:nvSpPr>
-          <p:cNvPr id="8" name="TextBox 7"/>
-          <p:cNvSpPr txBox="1"/>
-          <p:nvPr/>
-        </p:nvSpPr>
-        <p:spPr>
-          <a:xfrm>
-            <a:off x="900000" y="1450000"/>
-            <a:ext cx="20000000" cy="350000"/>
-          </a:xfrm>
-          <a:prstGeom prst="rect">
-            <a:avLst/>
-          </a:prstGeom>
-          <a:noFill/>
-        </p:spPr>
-        <p:txBody>
-          <a:bodyPr wrap="square" anchor="t"/>
-          <a:lstStyle/>
-          <a:p>
-            <a:pPr algn="l"/>
-            <a:r>
-              <a:rPr sz="1200" b="0">
-                <a:solidFill>
-                  <a:srgbClr val="6F6F6F"/>
-                </a:solidFill>
-                <a:latin typeface="Arial"/>
-              </a:rPr>
-              <a:t>Оказание первой помощи при наружных кровотечениях</a:t>
-            </a:r>
-          </a:p>
-        </p:txBody>
-      </p:sp>
-      <p:sp>
-        <p:nvSpPr>
-          <p:cNvPr id="9" name="Rectangle 8"/>
+          <p:cNvPr id="7" name="Rectangle 6"/>
           <p:cNvSpPr/>
           <p:nvPr/>
         </p:nvSpPr>
         <p:spPr>
           <a:xfrm>
-            <a:off x="900000" y="1950000"/>
-            <a:ext cx="10000000" cy="8500000"/>
+            <a:off x="12800000" y="1950000"/>
+            <a:ext cx="10800000" cy="9500000"/>
           </a:xfrm>
           <a:prstGeom prst="rect">
             <a:avLst/>
@@ -5801,9 +6867,9 @@
           <a:solidFill>
             <a:srgbClr val="FFFFFF"/>
           </a:solidFill>
-          <a:ln>
+          <a:ln w="12700">
             <a:solidFill>
-              <a:srgbClr val="B8B8B8"/>
+              <a:srgbClr val="E1E1E1"/>
             </a:solidFill>
           </a:ln>
         </p:spPr>
@@ -5831,25 +6897,23 @@
       </p:sp>
       <p:sp>
         <p:nvSpPr>
-          <p:cNvPr id="10" name="Rectangle 9"/>
+          <p:cNvPr id="8" name="Rectangle 7"/>
           <p:cNvSpPr/>
           <p:nvPr/>
         </p:nvSpPr>
         <p:spPr>
           <a:xfrm>
-            <a:off x="11500000" y="1950000"/>
-            <a:ext cx="10000000" cy="8500000"/>
+            <a:off x="800000" y="1950000"/>
+            <a:ext cx="10800000" cy="900000"/>
           </a:xfrm>
           <a:prstGeom prst="rect">
             <a:avLst/>
           </a:prstGeom>
           <a:solidFill>
-            <a:srgbClr val="FFFFFF"/>
+            <a:srgbClr val="0055AA"/>
           </a:solidFill>
           <a:ln>
-            <a:solidFill>
-              <a:srgbClr val="B8B8B8"/>
-            </a:solidFill>
+            <a:noFill/>
           </a:ln>
         </p:spPr>
         <p:style>
@@ -5876,14 +6940,131 @@
       </p:sp>
       <p:sp>
         <p:nvSpPr>
+          <p:cNvPr id="9" name="Rectangle 8"/>
+          <p:cNvSpPr/>
+          <p:nvPr/>
+        </p:nvSpPr>
+        <p:spPr>
+          <a:xfrm>
+            <a:off x="12800000" y="1950000"/>
+            <a:ext cx="10800000" cy="900000"/>
+          </a:xfrm>
+          <a:prstGeom prst="rect">
+            <a:avLst/>
+          </a:prstGeom>
+          <a:solidFill>
+            <a:srgbClr val="DDDDDD"/>
+          </a:solidFill>
+          <a:ln>
+            <a:noFill/>
+          </a:ln>
+        </p:spPr>
+        <p:style>
+          <a:lnRef idx="1">
+            <a:schemeClr val="accent1"/>
+          </a:lnRef>
+          <a:fillRef idx="3">
+            <a:schemeClr val="accent1"/>
+          </a:fillRef>
+          <a:effectRef idx="2">
+            <a:schemeClr val="accent1"/>
+          </a:effectRef>
+          <a:fontRef idx="minor">
+            <a:schemeClr val="lt1"/>
+          </a:fontRef>
+        </p:style>
+        <p:txBody>
+          <a:bodyPr rtlCol="0" anchor="ctr"/>
+          <a:lstStyle/>
+          <a:p>
+            <a:pPr algn="ctr"/>
+          </a:p>
+        </p:txBody>
+      </p:sp>
+      <p:sp>
+        <p:nvSpPr>
+          <p:cNvPr id="10" name="TextBox 9"/>
+          <p:cNvSpPr txBox="1"/>
+          <p:nvPr/>
+        </p:nvSpPr>
+        <p:spPr>
+          <a:xfrm>
+            <a:off x="1000000" y="2100000"/>
+            <a:ext cx="10000000" cy="600000"/>
+          </a:xfrm>
+          <a:prstGeom prst="rect">
+            <a:avLst/>
+          </a:prstGeom>
+          <a:noFill/>
+        </p:spPr>
+        <p:txBody>
+          <a:bodyPr wrap="square" anchor="t">
+            <a:spAutoFit/>
+          </a:bodyPr>
+          <a:lstStyle/>
+          <a:p>
+            <a:pPr algn="l"/>
+            <a:r>
+              <a:rPr sz="2600" b="1">
+                <a:solidFill>
+                  <a:srgbClr val="FFFFFF"/>
+                </a:solidFill>
+                <a:latin typeface="Open Sans"/>
+                <a:ea typeface="Open Sans"/>
+                <a:cs typeface="Open Sans"/>
+              </a:rPr>
+              <a:t>Обзорный осмотр</a:t>
+            </a:r>
+          </a:p>
+        </p:txBody>
+      </p:sp>
+      <p:sp>
+        <p:nvSpPr>
           <p:cNvPr id="11" name="TextBox 10"/>
           <p:cNvSpPr txBox="1"/>
           <p:nvPr/>
         </p:nvSpPr>
         <p:spPr>
           <a:xfrm>
-            <a:off x="1100000" y="2150000"/>
-            <a:ext cx="9500000" cy="8000000"/>
+            <a:off x="13000000" y="2100000"/>
+            <a:ext cx="10000000" cy="600000"/>
+          </a:xfrm>
+          <a:prstGeom prst="rect">
+            <a:avLst/>
+          </a:prstGeom>
+          <a:noFill/>
+        </p:spPr>
+        <p:txBody>
+          <a:bodyPr wrap="square" anchor="t">
+            <a:spAutoFit/>
+          </a:bodyPr>
+          <a:lstStyle/>
+          <a:p>
+            <a:pPr algn="l"/>
+            <a:r>
+              <a:rPr sz="2600" b="1">
+                <a:solidFill>
+                  <a:srgbClr val="333333"/>
+                </a:solidFill>
+                <a:latin typeface="Open Sans"/>
+                <a:ea typeface="Open Sans"/>
+                <a:cs typeface="Open Sans"/>
+              </a:rPr>
+              <a:t>Подробный осмотр</a:t>
+            </a:r>
+          </a:p>
+        </p:txBody>
+      </p:sp>
+      <p:sp>
+        <p:nvSpPr>
+          <p:cNvPr id="12" name="TextBox 11"/>
+          <p:cNvSpPr txBox="1"/>
+          <p:nvPr/>
+        </p:nvSpPr>
+        <p:spPr>
+          <a:xfrm>
+            <a:off x="1000000" y="3150000"/>
+            <a:ext cx="10000000" cy="8000000"/>
           </a:xfrm>
           <a:prstGeom prst="rect">
             <a:avLst/>
@@ -5898,111 +7079,105 @@
           <a:p>
             <a:pPr algn="l">
               <a:spcAft>
-                <a:spcPts val="600"/>
+                <a:spcPts val="1000"/>
               </a:spcAft>
             </a:pPr>
             <a:r>
-              <a:rPr sz="1500" b="0">
-                <a:solidFill>
-                  <a:srgbClr val="2C2C2C"/>
-                </a:solidFill>
-                <a:latin typeface="Arial"/>
+              <a:rPr sz="2400" b="0">
+                <a:solidFill>
+                  <a:srgbClr val="333333"/>
+                </a:solidFill>
+                <a:latin typeface="Open Sans"/>
+                <a:ea typeface="Open Sans"/>
+                <a:cs typeface="Open Sans"/>
               </a:rPr>
-              <a:t>•  ОБЗОРНЫЙ ОСМОТР</a:t>
+              <a:t>•  Цель: найти наружное кровотечение</a:t>
             </a:r>
           </a:p>
           <a:p>
             <a:pPr algn="l">
               <a:spcAft>
-                <a:spcPts val="600"/>
+                <a:spcPts val="1000"/>
               </a:spcAft>
             </a:pPr>
             <a:r>
-              <a:rPr sz="1500" b="0">
-                <a:solidFill>
-                  <a:srgbClr val="2C2C2C"/>
-                </a:solidFill>
-                <a:latin typeface="Arial"/>
+              <a:rPr sz="2400" b="0">
+                <a:solidFill>
+                  <a:srgbClr val="333333"/>
+                </a:solidFill>
+                <a:latin typeface="Open Sans"/>
+                <a:ea typeface="Open Sans"/>
+                <a:cs typeface="Open Sans"/>
               </a:rPr>
-              <a:t>•  Цель: найти наружное кровотечение</a:t>
+              <a:t>•  Время: 1–2 секунды</a:t>
             </a:r>
           </a:p>
           <a:p>
             <a:pPr algn="l">
               <a:spcAft>
-                <a:spcPts val="600"/>
+                <a:spcPts val="1000"/>
               </a:spcAft>
             </a:pPr>
             <a:r>
-              <a:rPr sz="1500" b="0">
-                <a:solidFill>
-                  <a:srgbClr val="2C2C2C"/>
-                </a:solidFill>
-                <a:latin typeface="Arial"/>
+              <a:rPr sz="2400" b="0">
+                <a:solidFill>
+                  <a:srgbClr val="333333"/>
+                </a:solidFill>
+                <a:latin typeface="Open Sans"/>
+                <a:ea typeface="Open Sans"/>
+                <a:cs typeface="Open Sans"/>
               </a:rPr>
-              <a:t>•  Время: секунды (1–2 с)</a:t>
+              <a:t>•  Объём: быстрый взгляд с головы до ног</a:t>
             </a:r>
           </a:p>
           <a:p>
             <a:pPr algn="l">
               <a:spcAft>
-                <a:spcPts val="600"/>
+                <a:spcPts val="1000"/>
               </a:spcAft>
             </a:pPr>
             <a:r>
-              <a:rPr sz="1500" b="0">
-                <a:solidFill>
-                  <a:srgbClr val="2C2C2C"/>
-                </a:solidFill>
-                <a:latin typeface="Arial"/>
+              <a:rPr sz="2400" b="0">
+                <a:solidFill>
+                  <a:srgbClr val="333333"/>
+                </a:solidFill>
+                <a:latin typeface="Open Sans"/>
+                <a:ea typeface="Open Sans"/>
+                <a:cs typeface="Open Sans"/>
               </a:rPr>
-              <a:t>•  Объём: быстрый взгляд с головы до ног</a:t>
+              <a:t>•  Когда: сразу после оценки обстановки</a:t>
             </a:r>
           </a:p>
           <a:p>
             <a:pPr algn="l">
               <a:spcAft>
-                <a:spcPts val="600"/>
+                <a:spcPts val="1000"/>
               </a:spcAft>
             </a:pPr>
             <a:r>
-              <a:rPr sz="1500" b="0">
-                <a:solidFill>
-                  <a:srgbClr val="2C2C2C"/>
-                </a:solidFill>
-                <a:latin typeface="Arial"/>
+              <a:rPr sz="2400" b="0">
+                <a:solidFill>
+                  <a:srgbClr val="333333"/>
+                </a:solidFill>
+                <a:latin typeface="Open Sans"/>
+                <a:ea typeface="Open Sans"/>
+                <a:cs typeface="Open Sans"/>
               </a:rPr>
-              <a:t>•  Когда: сразу после оценки обстановки</a:t>
-            </a:r>
-          </a:p>
-          <a:p>
-            <a:pPr algn="l">
-              <a:spcAft>
-                <a:spcPts val="600"/>
-              </a:spcAft>
-            </a:pPr>
-            <a:r>
-              <a:rPr sz="1500" b="0">
-                <a:solidFill>
-                  <a:srgbClr val="2C2C2C"/>
-                </a:solidFill>
-                <a:latin typeface="Arial"/>
-              </a:rPr>
-              <a:t>•  Результат: решение — останавливать кровь или нет</a:t>
-            </a:r>
-          </a:p>
-        </p:txBody>
-      </p:sp>
-      <p:sp>
-        <p:nvSpPr>
-          <p:cNvPr id="12" name="TextBox 11"/>
+              <a:t>•  Результат: останавливать кровь или нет</a:t>
+            </a:r>
+          </a:p>
+        </p:txBody>
+      </p:sp>
+      <p:sp>
+        <p:nvSpPr>
+          <p:cNvPr id="13" name="TextBox 12"/>
           <p:cNvSpPr txBox="1"/>
           <p:nvPr/>
         </p:nvSpPr>
         <p:spPr>
           <a:xfrm>
-            <a:off x="11700000" y="2150000"/>
-            <a:ext cx="9500000" cy="8000000"/>
+            <a:off x="13000000" y="3150000"/>
+            <a:ext cx="10000000" cy="8000000"/>
           </a:xfrm>
           <a:prstGeom prst="rect">
             <a:avLst/>
@@ -6017,97 +7192,91 @@
           <a:p>
             <a:pPr algn="l">
               <a:spcAft>
-                <a:spcPts val="600"/>
+                <a:spcPts val="1000"/>
               </a:spcAft>
             </a:pPr>
             <a:r>
-              <a:rPr sz="1500" b="0">
-                <a:solidFill>
-                  <a:srgbClr val="2C2C2C"/>
-                </a:solidFill>
-                <a:latin typeface="Arial"/>
+              <a:rPr sz="2400" b="0">
+                <a:solidFill>
+                  <a:srgbClr val="333333"/>
+                </a:solidFill>
+                <a:latin typeface="Open Sans"/>
+                <a:ea typeface="Open Sans"/>
+                <a:cs typeface="Open Sans"/>
               </a:rPr>
-              <a:t>•  ПОДРОБНЫЙ ОСМОТР</a:t>
+              <a:t>•  Цель: выявить травмы и другие угрозы</a:t>
             </a:r>
           </a:p>
           <a:p>
             <a:pPr algn="l">
               <a:spcAft>
-                <a:spcPts val="600"/>
+                <a:spcPts val="1000"/>
               </a:spcAft>
             </a:pPr>
             <a:r>
-              <a:rPr sz="1500" b="0">
-                <a:solidFill>
-                  <a:srgbClr val="2C2C2C"/>
-                </a:solidFill>
-                <a:latin typeface="Arial"/>
+              <a:rPr sz="2400" b="0">
+                <a:solidFill>
+                  <a:srgbClr val="333333"/>
+                </a:solidFill>
+                <a:latin typeface="Open Sans"/>
+                <a:ea typeface="Open Sans"/>
+                <a:cs typeface="Open Sans"/>
               </a:rPr>
-              <a:t>•  Цель: выявить травмы и другие угрозы</a:t>
+              <a:t>•  Время: несколько минут</a:t>
             </a:r>
           </a:p>
           <a:p>
             <a:pPr algn="l">
               <a:spcAft>
-                <a:spcPts val="600"/>
+                <a:spcPts val="1000"/>
               </a:spcAft>
             </a:pPr>
             <a:r>
-              <a:rPr sz="1500" b="0">
-                <a:solidFill>
-                  <a:srgbClr val="2C2C2C"/>
-                </a:solidFill>
-                <a:latin typeface="Arial"/>
+              <a:rPr sz="2400" b="0">
+                <a:solidFill>
+                  <a:srgbClr val="333333"/>
+                </a:solidFill>
+                <a:latin typeface="Open Sans"/>
+                <a:ea typeface="Open Sans"/>
+                <a:cs typeface="Open Sans"/>
               </a:rPr>
-              <a:t>•  Время: несколько минут</a:t>
+              <a:t>•  Объём: голова → шея → грудь → … → руки</a:t>
             </a:r>
           </a:p>
           <a:p>
             <a:pPr algn="l">
               <a:spcAft>
-                <a:spcPts val="600"/>
+                <a:spcPts val="1000"/>
               </a:spcAft>
             </a:pPr>
             <a:r>
-              <a:rPr sz="1500" b="0">
-                <a:solidFill>
-                  <a:srgbClr val="2C2C2C"/>
-                </a:solidFill>
-                <a:latin typeface="Arial"/>
+              <a:rPr sz="2400" b="0">
+                <a:solidFill>
+                  <a:srgbClr val="333333"/>
+                </a:solidFill>
+                <a:latin typeface="Open Sans"/>
+                <a:ea typeface="Open Sans"/>
+                <a:cs typeface="Open Sans"/>
               </a:rPr>
-              <a:t>•  Объём: голова → шея → грудь → живот → таз → ноги → руки</a:t>
+              <a:t>•  Когда: после остановки кровотечения</a:t>
             </a:r>
           </a:p>
           <a:p>
             <a:pPr algn="l">
               <a:spcAft>
-                <a:spcPts val="600"/>
+                <a:spcPts val="1000"/>
               </a:spcAft>
             </a:pPr>
             <a:r>
-              <a:rPr sz="1500" b="0">
-                <a:solidFill>
-                  <a:srgbClr val="2C2C2C"/>
-                </a:solidFill>
-                <a:latin typeface="Arial"/>
+              <a:rPr sz="2400" b="0">
+                <a:solidFill>
+                  <a:srgbClr val="333333"/>
+                </a:solidFill>
+                <a:latin typeface="Open Sans"/>
+                <a:ea typeface="Open Sans"/>
+                <a:cs typeface="Open Sans"/>
               </a:rPr>
-              <a:t>•  Когда: после остановки кровотечения и оценки признаков жизни</a:t>
-            </a:r>
-          </a:p>
-          <a:p>
-            <a:pPr algn="l">
-              <a:spcAft>
-                <a:spcPts val="600"/>
-              </a:spcAft>
-            </a:pPr>
-            <a:r>
-              <a:rPr sz="1500" b="0">
-                <a:solidFill>
-                  <a:srgbClr val="2C2C2C"/>
-                </a:solidFill>
-                <a:latin typeface="Arial"/>
-              </a:rPr>
-              <a:t>•  Результат: повязки, иммобилизация, положение тела</a:t>
+              <a:t>•  Результат: повязки, иммобилизация</a:t>
             </a:r>
           </a:p>
         </p:txBody>
@@ -6145,7 +7314,7 @@
             <a:avLst/>
           </a:prstGeom>
           <a:solidFill>
-            <a:srgbClr val="F7F7F7"/>
+            <a:srgbClr val="FFFFFF"/>
           </a:solidFill>
           <a:ln>
             <a:noFill/>
@@ -6181,14 +7350,14 @@
         </p:nvSpPr>
         <p:spPr>
           <a:xfrm>
-            <a:off x="23000000" y="0"/>
-            <a:ext cx="1384000" cy="13716000"/>
+            <a:off x="0" y="0"/>
+            <a:ext cx="24384000" cy="120000"/>
           </a:xfrm>
           <a:prstGeom prst="rect">
             <a:avLst/>
           </a:prstGeom>
           <a:solidFill>
-            <a:srgbClr val="D9D9D9"/>
+            <a:srgbClr val="DDDDDD"/>
           </a:solidFill>
           <a:ln>
             <a:noFill/>
@@ -6218,20 +7387,57 @@
       </p:sp>
       <p:sp>
         <p:nvSpPr>
-          <p:cNvPr id="4" name="Rectangle 3"/>
+          <p:cNvPr id="4" name="TextBox 3"/>
+          <p:cNvSpPr txBox="1"/>
+          <p:nvPr/>
+        </p:nvSpPr>
+        <p:spPr>
+          <a:xfrm>
+            <a:off x="800000" y="350000"/>
+            <a:ext cx="22800000" cy="1000000"/>
+          </a:xfrm>
+          <a:prstGeom prst="rect">
+            <a:avLst/>
+          </a:prstGeom>
+          <a:noFill/>
+        </p:spPr>
+        <p:txBody>
+          <a:bodyPr wrap="square" anchor="t">
+            <a:spAutoFit/>
+          </a:bodyPr>
+          <a:lstStyle/>
+          <a:p>
+            <a:pPr algn="l"/>
+            <a:r>
+              <a:rPr sz="4600" b="1">
+                <a:solidFill>
+                  <a:srgbClr val="333333"/>
+                </a:solidFill>
+                <a:latin typeface="Open Sans"/>
+                <a:ea typeface="Open Sans"/>
+                <a:cs typeface="Open Sans"/>
+              </a:rPr>
+              <a:t>Когда обзорный осмотр критически важен</a:t>
+            </a:r>
+          </a:p>
+        </p:txBody>
+      </p:sp>
+      <p:sp>
+        <p:nvSpPr>
+          <p:cNvPr id="5" name="Rectangle 4"/>
           <p:cNvSpPr/>
           <p:nvPr/>
         </p:nvSpPr>
         <p:spPr>
           <a:xfrm>
-            <a:off x="0" y="5600000"/>
-            <a:ext cx="700000" cy="700000"/>
+            <a:off x="800000" y="1450000"/>
+            <a:ext cx="22800000" cy="20000"/>
           </a:xfrm>
           <a:prstGeom prst="rect">
             <a:avLst/>
           </a:prstGeom>
           <a:solidFill>
-            <a:srgbClr val="4D4D4D"/>
+            <a:srgbClr val="E1E1E1"/>
           </a:solidFill>
           <a:ln>
             <a:noFill/>
@@ -6261,156 +7467,14 @@
       </p:sp>
       <p:sp>
         <p:nvSpPr>
-          <p:cNvPr id="5" name="TextBox 4"/>
-          <p:cNvSpPr txBox="1"/>
-          <p:nvPr/>
-        </p:nvSpPr>
-        <p:spPr>
-          <a:xfrm>
-            <a:off x="0" y="5680000"/>
-            <a:ext cx="700000" cy="550000"/>
-          </a:xfrm>
-          <a:prstGeom prst="rect">
-            <a:avLst/>
-          </a:prstGeom>
-          <a:noFill/>
-        </p:spPr>
-        <p:txBody>
-          <a:bodyPr wrap="square" anchor="ctr"/>
-          <a:lstStyle/>
-          <a:p>
-            <a:pPr algn="ctr"/>
-            <a:r>
-              <a:rPr sz="1800" b="1">
-                <a:solidFill>
-                  <a:srgbClr val="FFFFFF"/>
-                </a:solidFill>
-                <a:latin typeface="Arial"/>
-              </a:rPr>
-              <a:t>8</a:t>
-            </a:r>
-          </a:p>
-        </p:txBody>
-      </p:sp>
-      <p:sp>
-        <p:nvSpPr>
           <p:cNvPr id="6" name="TextBox 5"/>
           <p:cNvSpPr txBox="1"/>
           <p:nvPr/>
         </p:nvSpPr>
         <p:spPr>
           <a:xfrm>
-            <a:off x="900000" y="500000"/>
-            <a:ext cx="21000000" cy="900000"/>
-          </a:xfrm>
-          <a:prstGeom prst="rect">
-            <a:avLst/>
-          </a:prstGeom>
-          <a:noFill/>
-        </p:spPr>
-        <p:txBody>
-          <a:bodyPr wrap="square" anchor="t"/>
-          <a:lstStyle/>
-          <a:p>
-            <a:pPr algn="l"/>
-            <a:r>
-              <a:rPr sz="2800" b="1">
-                <a:solidFill>
-                  <a:srgbClr val="2C2C2C"/>
-                </a:solidFill>
-                <a:latin typeface="Arial"/>
-              </a:rPr>
-              <a:t>КОГДА ОБЗОРНЫЙ ОСМОТР КРИТИЧЕСКИ ВАЖЕН</a:t>
-            </a:r>
-          </a:p>
-        </p:txBody>
-      </p:sp>
-      <p:sp>
-        <p:nvSpPr>
-          <p:cNvPr id="7" name="Rectangle 6"/>
-          <p:cNvSpPr/>
-          <p:nvPr/>
-        </p:nvSpPr>
-        <p:spPr>
-          <a:xfrm>
-            <a:off x="900000" y="1350000"/>
-            <a:ext cx="20000000" cy="25000"/>
-          </a:xfrm>
-          <a:prstGeom prst="rect">
-            <a:avLst/>
-          </a:prstGeom>
-          <a:solidFill>
-            <a:srgbClr val="B8B8B8"/>
-          </a:solidFill>
-          <a:ln>
-            <a:noFill/>
-          </a:ln>
-        </p:spPr>
-        <p:style>
-          <a:lnRef idx="1">
-            <a:schemeClr val="accent1"/>
-          </a:lnRef>
-          <a:fillRef idx="3">
-            <a:schemeClr val="accent1"/>
-          </a:fillRef>
-          <a:effectRef idx="2">
-            <a:schemeClr val="accent1"/>
-          </a:effectRef>
-          <a:fontRef idx="minor">
-            <a:schemeClr val="lt1"/>
-          </a:fontRef>
-        </p:style>
-        <p:txBody>
-          <a:bodyPr rtlCol="0" anchor="ctr"/>
-          <a:lstStyle/>
-          <a:p>
-            <a:pPr algn="ctr"/>
-          </a:p>
-        </p:txBody>
-      </p:sp>
-      <p:sp>
-        <p:nvSpPr>
-          <p:cNvPr id="8" name="TextBox 7"/>
-          <p:cNvSpPr txBox="1"/>
-          <p:nvPr/>
-        </p:nvSpPr>
-        <p:spPr>
-          <a:xfrm>
-            <a:off x="900000" y="1450000"/>
-            <a:ext cx="20000000" cy="350000"/>
-          </a:xfrm>
-          <a:prstGeom prst="rect">
-            <a:avLst/>
-          </a:prstGeom>
-          <a:noFill/>
-        </p:spPr>
-        <p:txBody>
-          <a:bodyPr wrap="square" anchor="t"/>
-          <a:lstStyle/>
-          <a:p>
-            <a:pPr algn="l"/>
-            <a:r>
-              <a:rPr sz="1200" b="0">
-                <a:solidFill>
-                  <a:srgbClr val="6F6F6F"/>
-                </a:solidFill>
-                <a:latin typeface="Arial"/>
-              </a:rPr>
-              <a:t>Оказание первой помощи при наружных кровотечениях</a:t>
-            </a:r>
-          </a:p>
-        </p:txBody>
-      </p:sp>
-      <p:sp>
-        <p:nvSpPr>
-          <p:cNvPr id="9" name="TextBox 8"/>
-          <p:cNvSpPr txBox="1"/>
-          <p:nvPr/>
-        </p:nvSpPr>
-        <p:spPr>
-          <a:xfrm>
-            <a:off x="900000" y="2000000"/>
-            <a:ext cx="20500000" cy="7500000"/>
+            <a:off x="800000" y="1950000"/>
+            <a:ext cx="22800000" cy="8500000"/>
           </a:xfrm>
           <a:prstGeom prst="rect">
             <a:avLst/>
@@ -6425,97 +7489,109 @@
           <a:p>
             <a:pPr algn="l">
               <a:spcAft>
-                <a:spcPts val="600"/>
+                <a:spcPts val="1000"/>
               </a:spcAft>
             </a:pPr>
             <a:r>
-              <a:rPr sz="1700" b="0">
-                <a:solidFill>
-                  <a:srgbClr val="2C2C2C"/>
-                </a:solidFill>
-                <a:latin typeface="Arial"/>
+              <a:rPr sz="3200" b="0">
+                <a:solidFill>
+                  <a:srgbClr val="333333"/>
+                </a:solidFill>
+                <a:latin typeface="Open Sans"/>
+                <a:ea typeface="Open Sans"/>
+                <a:cs typeface="Open Sans"/>
               </a:rPr>
-              <a:t>•  ДТП — скрытые раны под одеждой, кровотечение из конечностей и живота.</a:t>
+              <a:t>•  ДТП — раны под одеждой, кровотечение из конечностей.</a:t>
             </a:r>
           </a:p>
           <a:p>
             <a:pPr algn="l">
               <a:spcAft>
-                <a:spcPts val="600"/>
+                <a:spcPts val="1000"/>
               </a:spcAft>
             </a:pPr>
             <a:r>
-              <a:rPr sz="1700" b="0">
-                <a:solidFill>
-                  <a:srgbClr val="2C2C2C"/>
-                </a:solidFill>
-                <a:latin typeface="Arial"/>
+              <a:rPr sz="3200" b="0">
+                <a:solidFill>
+                  <a:srgbClr val="333333"/>
+                </a:solidFill>
+                <a:latin typeface="Open Sans"/>
+                <a:ea typeface="Open Sans"/>
+                <a:cs typeface="Open Sans"/>
               </a:rPr>
-              <a:t>•  Падение с высоты — множественные повреждения, риск массивной кровопотери.</a:t>
+              <a:t>•  Падение с высоты — множественные повреждения.</a:t>
             </a:r>
           </a:p>
           <a:p>
             <a:pPr algn="l">
               <a:spcAft>
-                <a:spcPts val="600"/>
+                <a:spcPts val="1000"/>
               </a:spcAft>
             </a:pPr>
             <a:r>
-              <a:rPr sz="1700" b="0">
-                <a:solidFill>
-                  <a:srgbClr val="2C2C2C"/>
-                </a:solidFill>
-                <a:latin typeface="Arial"/>
+              <a:rPr sz="3200" b="0">
+                <a:solidFill>
+                  <a:srgbClr val="333333"/>
+                </a:solidFill>
+                <a:latin typeface="Open Sans"/>
+                <a:ea typeface="Open Sans"/>
+                <a:cs typeface="Open Sans"/>
               </a:rPr>
-              <a:t>•  Производственные травмы (механизмы, режущий инструмент) — артериальное кровотечение.</a:t>
+              <a:t>•  Производственные травмы — риск артериального кровотечения.</a:t>
             </a:r>
           </a:p>
           <a:p>
             <a:pPr algn="l">
               <a:spcAft>
-                <a:spcPts val="600"/>
+                <a:spcPts val="1000"/>
               </a:spcAft>
             </a:pPr>
             <a:r>
-              <a:rPr sz="1700" b="0">
-                <a:solidFill>
-                  <a:srgbClr val="2C2C2C"/>
-                </a:solidFill>
-                <a:latin typeface="Arial"/>
+              <a:rPr sz="3200" b="0">
+                <a:solidFill>
+                  <a:srgbClr val="333333"/>
+                </a:solidFill>
+                <a:latin typeface="Open Sans"/>
+                <a:ea typeface="Open Sans"/>
+                <a:cs typeface="Open Sans"/>
               </a:rPr>
-              <a:t>•  Взрыв, обрушение, ЧС с несколькими пострадавшими — нужна быстрая сортировка.</a:t>
+              <a:t>•  ЧС с несколькими пострадавшими — быстрая сортировка.</a:t>
             </a:r>
           </a:p>
           <a:p>
             <a:pPr algn="l">
               <a:spcAft>
-                <a:spcPts val="600"/>
+                <a:spcPts val="1000"/>
               </a:spcAft>
             </a:pPr>
             <a:r>
-              <a:rPr sz="1700" b="0">
-                <a:solidFill>
-                  <a:srgbClr val="2C2C2C"/>
-                </a:solidFill>
-                <a:latin typeface="Arial"/>
+              <a:rPr sz="3200" b="0">
+                <a:solidFill>
+                  <a:srgbClr val="333333"/>
+                </a:solidFill>
+                <a:latin typeface="Open Sans"/>
+                <a:ea typeface="Open Sans"/>
+                <a:cs typeface="Open Sans"/>
               </a:rPr>
-              <a:t>•  Огнестрельные и колото-резаные ранения — кровь может скапливаться в одежде.</a:t>
+              <a:t>•  Огнестрельные и колото-резаные ранения.</a:t>
             </a:r>
           </a:p>
           <a:p>
             <a:pPr algn="l">
               <a:spcAft>
-                <a:spcPts val="600"/>
+                <a:spcPts val="1000"/>
               </a:spcAft>
             </a:pPr>
             <a:r>
-              <a:rPr sz="1700" b="0">
-                <a:solidFill>
-                  <a:srgbClr val="2C2C2C"/>
-                </a:solidFill>
-                <a:latin typeface="Arial"/>
+              <a:rPr sz="3200" b="0">
+                <a:solidFill>
+                  <a:srgbClr val="333333"/>
+                </a:solidFill>
+                <a:latin typeface="Open Sans"/>
+                <a:ea typeface="Open Sans"/>
+                <a:cs typeface="Open Sans"/>
               </a:rPr>
-              <a:t>•  Правило: если видна кровь или одежда пропитана — действуйте немедленно.</a:t>
+              <a:t>•  Правило: видна кровь или одежда пропитана — действуйте сразу.</a:t>
             </a:r>
           </a:p>
         </p:txBody>
@@ -6553,7 +7629,7 @@
             <a:avLst/>
           </a:prstGeom>
           <a:solidFill>
-            <a:srgbClr val="F7F7F7"/>
+            <a:srgbClr val="FFFFFF"/>
           </a:solidFill>
           <a:ln>
             <a:noFill/>
@@ -6589,14 +7665,14 @@
         </p:nvSpPr>
         <p:spPr>
           <a:xfrm>
-            <a:off x="23000000" y="0"/>
-            <a:ext cx="1384000" cy="13716000"/>
+            <a:off x="0" y="0"/>
+            <a:ext cx="24384000" cy="120000"/>
           </a:xfrm>
           <a:prstGeom prst="rect">
             <a:avLst/>
           </a:prstGeom>
           <a:solidFill>
-            <a:srgbClr val="D9D9D9"/>
+            <a:srgbClr val="DDDDDD"/>
           </a:solidFill>
           <a:ln>
             <a:noFill/>
@@ -6626,20 +7702,57 @@
       </p:sp>
       <p:sp>
         <p:nvSpPr>
-          <p:cNvPr id="4" name="Rectangle 3"/>
+          <p:cNvPr id="4" name="TextBox 3"/>
+          <p:cNvSpPr txBox="1"/>
+          <p:nvPr/>
+        </p:nvSpPr>
+        <p:spPr>
+          <a:xfrm>
+            <a:off x="800000" y="350000"/>
+            <a:ext cx="22800000" cy="1000000"/>
+          </a:xfrm>
+          <a:prstGeom prst="rect">
+            <a:avLst/>
+          </a:prstGeom>
+          <a:noFill/>
+        </p:spPr>
+        <p:txBody>
+          <a:bodyPr wrap="square" anchor="t">
+            <a:spAutoFit/>
+          </a:bodyPr>
+          <a:lstStyle/>
+          <a:p>
+            <a:pPr algn="l"/>
+            <a:r>
+              <a:rPr sz="4600" b="1">
+                <a:solidFill>
+                  <a:srgbClr val="333333"/>
+                </a:solidFill>
+                <a:latin typeface="Open Sans"/>
+                <a:ea typeface="Open Sans"/>
+                <a:cs typeface="Open Sans"/>
+              </a:rPr>
+              <a:t>Краткое резюме</a:t>
+            </a:r>
+          </a:p>
+        </p:txBody>
+      </p:sp>
+      <p:sp>
+        <p:nvSpPr>
+          <p:cNvPr id="5" name="Rectangle 4"/>
           <p:cNvSpPr/>
           <p:nvPr/>
         </p:nvSpPr>
         <p:spPr>
           <a:xfrm>
-            <a:off x="0" y="5600000"/>
-            <a:ext cx="700000" cy="700000"/>
+            <a:off x="800000" y="1450000"/>
+            <a:ext cx="22800000" cy="20000"/>
           </a:xfrm>
           <a:prstGeom prst="rect">
             <a:avLst/>
           </a:prstGeom>
           <a:solidFill>
-            <a:srgbClr val="4D4D4D"/>
+            <a:srgbClr val="E1E1E1"/>
           </a:solidFill>
           <a:ln>
             <a:noFill/>
@@ -6669,89 +7782,25 @@
       </p:sp>
       <p:sp>
         <p:nvSpPr>
-          <p:cNvPr id="5" name="TextBox 4"/>
-          <p:cNvSpPr txBox="1"/>
-          <p:nvPr/>
-        </p:nvSpPr>
-        <p:spPr>
-          <a:xfrm>
-            <a:off x="0" y="5680000"/>
-            <a:ext cx="700000" cy="550000"/>
-          </a:xfrm>
-          <a:prstGeom prst="rect">
-            <a:avLst/>
-          </a:prstGeom>
-          <a:noFill/>
-        </p:spPr>
-        <p:txBody>
-          <a:bodyPr wrap="square" anchor="ctr"/>
-          <a:lstStyle/>
-          <a:p>
-            <a:pPr algn="ctr"/>
-            <a:r>
-              <a:rPr sz="1800" b="1">
-                <a:solidFill>
-                  <a:srgbClr val="FFFFFF"/>
-                </a:solidFill>
-                <a:latin typeface="Arial"/>
-              </a:rPr>
-              <a:t>9</a:t>
-            </a:r>
-          </a:p>
-        </p:txBody>
-      </p:sp>
-      <p:sp>
-        <p:nvSpPr>
-          <p:cNvPr id="6" name="TextBox 5"/>
-          <p:cNvSpPr txBox="1"/>
-          <p:nvPr/>
-        </p:nvSpPr>
-        <p:spPr>
-          <a:xfrm>
-            <a:off x="900000" y="500000"/>
-            <a:ext cx="21000000" cy="900000"/>
-          </a:xfrm>
-          <a:prstGeom prst="rect">
-            <a:avLst/>
-          </a:prstGeom>
-          <a:noFill/>
-        </p:spPr>
-        <p:txBody>
-          <a:bodyPr wrap="square" anchor="t"/>
-          <a:lstStyle/>
-          <a:p>
-            <a:pPr algn="l"/>
-            <a:r>
-              <a:rPr sz="2800" b="1">
-                <a:solidFill>
-                  <a:srgbClr val="2C2C2C"/>
-                </a:solidFill>
-                <a:latin typeface="Arial"/>
-              </a:rPr>
-              <a:t>КРАТКОЕ РЕЗЮМЕ</a:t>
-            </a:r>
-          </a:p>
-        </p:txBody>
-      </p:sp>
-      <p:sp>
-        <p:nvSpPr>
-          <p:cNvPr id="7" name="Rectangle 6"/>
+          <p:cNvPr id="6" name="Rectangle 5"/>
           <p:cNvSpPr/>
           <p:nvPr/>
         </p:nvSpPr>
         <p:spPr>
           <a:xfrm>
-            <a:off x="900000" y="1350000"/>
-            <a:ext cx="20000000" cy="25000"/>
+            <a:off x="800000" y="1950000"/>
+            <a:ext cx="22800000" cy="1600000"/>
           </a:xfrm>
           <a:prstGeom prst="rect">
             <a:avLst/>
           </a:prstGeom>
           <a:solidFill>
-            <a:srgbClr val="B8B8B8"/>
+            <a:srgbClr val="FFFFFF"/>
           </a:solidFill>
-          <a:ln>
-            <a:noFill/>
+          <a:ln w="12700">
+            <a:solidFill>
+              <a:srgbClr val="E1E1E1"/>
+            </a:solidFill>
           </a:ln>
         </p:spPr>
         <p:style>
@@ -6778,58 +7827,23 @@
       </p:sp>
       <p:sp>
         <p:nvSpPr>
-          <p:cNvPr id="8" name="TextBox 7"/>
-          <p:cNvSpPr txBox="1"/>
-          <p:nvPr/>
-        </p:nvSpPr>
-        <p:spPr>
-          <a:xfrm>
-            <a:off x="900000" y="1450000"/>
-            <a:ext cx="20000000" cy="350000"/>
-          </a:xfrm>
-          <a:prstGeom prst="rect">
-            <a:avLst/>
-          </a:prstGeom>
-          <a:noFill/>
-        </p:spPr>
-        <p:txBody>
-          <a:bodyPr wrap="square" anchor="t"/>
-          <a:lstStyle/>
-          <a:p>
-            <a:pPr algn="l"/>
-            <a:r>
-              <a:rPr sz="1200" b="0">
-                <a:solidFill>
-                  <a:srgbClr val="6F6F6F"/>
-                </a:solidFill>
-                <a:latin typeface="Arial"/>
-              </a:rPr>
-              <a:t>Оказание первой помощи при наружных кровотечениях</a:t>
-            </a:r>
-          </a:p>
-        </p:txBody>
-      </p:sp>
-      <p:sp>
-        <p:nvSpPr>
-          <p:cNvPr id="9" name="Rectangle 8"/>
+          <p:cNvPr id="7" name="Rectangle 6"/>
           <p:cNvSpPr/>
           <p:nvPr/>
         </p:nvSpPr>
         <p:spPr>
           <a:xfrm>
-            <a:off x="900000" y="2000000"/>
-            <a:ext cx="20500000" cy="1400000"/>
+            <a:off x="800000" y="1950000"/>
+            <a:ext cx="120000" cy="1600000"/>
           </a:xfrm>
           <a:prstGeom prst="rect">
             <a:avLst/>
           </a:prstGeom>
           <a:solidFill>
-            <a:srgbClr val="FFFFFF"/>
+            <a:srgbClr val="0055AA"/>
           </a:solidFill>
           <a:ln>
-            <a:solidFill>
-              <a:srgbClr val="B8B8B8"/>
-            </a:solidFill>
+            <a:noFill/>
           </a:ln>
         </p:spPr>
         <p:style>
@@ -6856,23 +7870,62 @@
       </p:sp>
       <p:sp>
         <p:nvSpPr>
-          <p:cNvPr id="10" name="Rectangle 9"/>
+          <p:cNvPr id="8" name="TextBox 7"/>
+          <p:cNvSpPr txBox="1"/>
+          <p:nvPr/>
+        </p:nvSpPr>
+        <p:spPr>
+          <a:xfrm>
+            <a:off x="1200000" y="2250000"/>
+            <a:ext cx="21800000" cy="1100000"/>
+          </a:xfrm>
+          <a:prstGeom prst="rect">
+            <a:avLst/>
+          </a:prstGeom>
+          <a:noFill/>
+        </p:spPr>
+        <p:txBody>
+          <a:bodyPr wrap="square" anchor="ctr">
+            <a:spAutoFit/>
+          </a:bodyPr>
+          <a:lstStyle/>
+          <a:p>
+            <a:pPr algn="l"/>
+            <a:r>
+              <a:rPr sz="2600" b="0">
+                <a:solidFill>
+                  <a:srgbClr val="333333"/>
+                </a:solidFill>
+                <a:latin typeface="Open Sans"/>
+                <a:ea typeface="Open Sans"/>
+                <a:cs typeface="Open Sans"/>
+              </a:rPr>
+              <a:t>Кровотечение — выход крови из сосудов с риском острой кровопотери.</a:t>
+            </a:r>
+          </a:p>
+        </p:txBody>
+      </p:sp>
+      <p:sp>
+        <p:nvSpPr>
+          <p:cNvPr id="9" name="Rectangle 8"/>
           <p:cNvSpPr/>
           <p:nvPr/>
         </p:nvSpPr>
         <p:spPr>
           <a:xfrm>
-            <a:off x="900000" y="2000000"/>
-            <a:ext cx="120000" cy="1400000"/>
+            <a:off x="800000" y="3850000"/>
+            <a:ext cx="22800000" cy="1600000"/>
           </a:xfrm>
           <a:prstGeom prst="rect">
             <a:avLst/>
           </a:prstGeom>
           <a:solidFill>
-            <a:srgbClr val="0082B9"/>
+            <a:srgbClr val="FFFFFF"/>
           </a:solidFill>
-          <a:ln>
-            <a:noFill/>
+          <a:ln w="12700">
+            <a:solidFill>
+              <a:srgbClr val="E1E1E1"/>
+            </a:solidFill>
           </a:ln>
         </p:spPr>
         <p:style>
@@ -6899,58 +7952,23 @@
       </p:sp>
       <p:sp>
         <p:nvSpPr>
-          <p:cNvPr id="11" name="TextBox 10"/>
-          <p:cNvSpPr txBox="1"/>
-          <p:nvPr/>
-        </p:nvSpPr>
-        <p:spPr>
-          <a:xfrm>
-            <a:off x="1300000" y="2350000"/>
-            <a:ext cx="19000000" cy="800000"/>
-          </a:xfrm>
-          <a:prstGeom prst="rect">
-            <a:avLst/>
-          </a:prstGeom>
-          <a:noFill/>
-        </p:spPr>
-        <p:txBody>
-          <a:bodyPr wrap="square" anchor="ctr"/>
-          <a:lstStyle/>
-          <a:p>
-            <a:pPr algn="l"/>
-            <a:r>
-              <a:rPr sz="1600" b="0">
-                <a:solidFill>
-                  <a:srgbClr val="2C2C2C"/>
-                </a:solidFill>
-                <a:latin typeface="Arial"/>
-              </a:rPr>
-              <a:t>Кровотечение — выход крови из сосудистого русла с риском острой кровопотери.</a:t>
-            </a:r>
-          </a:p>
-        </p:txBody>
-      </p:sp>
-      <p:sp>
-        <p:nvSpPr>
-          <p:cNvPr id="12" name="Rectangle 11"/>
+          <p:cNvPr id="10" name="Rectangle 9"/>
           <p:cNvSpPr/>
           <p:nvPr/>
         </p:nvSpPr>
         <p:spPr>
           <a:xfrm>
-            <a:off x="900000" y="3650000"/>
-            <a:ext cx="20500000" cy="1400000"/>
+            <a:off x="800000" y="3850000"/>
+            <a:ext cx="120000" cy="1600000"/>
           </a:xfrm>
           <a:prstGeom prst="rect">
             <a:avLst/>
           </a:prstGeom>
           <a:solidFill>
-            <a:srgbClr val="FFFFFF"/>
+            <a:srgbClr val="0055AA"/>
           </a:solidFill>
           <a:ln>
-            <a:solidFill>
-              <a:srgbClr val="B8B8B8"/>
-            </a:solidFill>
+            <a:noFill/>
           </a:ln>
         </p:spPr>
         <p:style>
@@ -6977,23 +7995,62 @@
       </p:sp>
       <p:sp>
         <p:nvSpPr>
-          <p:cNvPr id="13" name="Rectangle 12"/>
+          <p:cNvPr id="11" name="TextBox 10"/>
+          <p:cNvSpPr txBox="1"/>
+          <p:nvPr/>
+        </p:nvSpPr>
+        <p:spPr>
+          <a:xfrm>
+            <a:off x="1200000" y="4150000"/>
+            <a:ext cx="21800000" cy="1100000"/>
+          </a:xfrm>
+          <a:prstGeom prst="rect">
+            <a:avLst/>
+          </a:prstGeom>
+          <a:noFill/>
+        </p:spPr>
+        <p:txBody>
+          <a:bodyPr wrap="square" anchor="ctr">
+            <a:spAutoFit/>
+          </a:bodyPr>
+          <a:lstStyle/>
+          <a:p>
+            <a:pPr algn="l"/>
+            <a:r>
+              <a:rPr sz="2600" b="0">
+                <a:solidFill>
+                  <a:srgbClr val="333333"/>
+                </a:solidFill>
+                <a:latin typeface="Open Sans"/>
+                <a:ea typeface="Open Sans"/>
+                <a:cs typeface="Open Sans"/>
+              </a:rPr>
+              <a:t>Обзорный осмотр — быстрый поиск кровотечения с головы до ног (1–2 с).</a:t>
+            </a:r>
+          </a:p>
+        </p:txBody>
+      </p:sp>
+      <p:sp>
+        <p:nvSpPr>
+          <p:cNvPr id="12" name="Rectangle 11"/>
           <p:cNvSpPr/>
           <p:nvPr/>
         </p:nvSpPr>
         <p:spPr>
           <a:xfrm>
-            <a:off x="900000" y="3650000"/>
-            <a:ext cx="120000" cy="1400000"/>
+            <a:off x="800000" y="5750000"/>
+            <a:ext cx="22800000" cy="1600000"/>
           </a:xfrm>
           <a:prstGeom prst="rect">
             <a:avLst/>
           </a:prstGeom>
           <a:solidFill>
-            <a:srgbClr val="0082B9"/>
+            <a:srgbClr val="FFFFFF"/>
           </a:solidFill>
-          <a:ln>
-            <a:noFill/>
+          <a:ln w="12700">
+            <a:solidFill>
+              <a:srgbClr val="E1E1E1"/>
+            </a:solidFill>
           </a:ln>
         </p:spPr>
         <p:style>
@@ -7020,58 +8077,23 @@
       </p:sp>
       <p:sp>
         <p:nvSpPr>
-          <p:cNvPr id="14" name="TextBox 13"/>
-          <p:cNvSpPr txBox="1"/>
-          <p:nvPr/>
-        </p:nvSpPr>
-        <p:spPr>
-          <a:xfrm>
-            <a:off x="1300000" y="4000000"/>
-            <a:ext cx="19000000" cy="800000"/>
-          </a:xfrm>
-          <a:prstGeom prst="rect">
-            <a:avLst/>
-          </a:prstGeom>
-          <a:noFill/>
-        </p:spPr>
-        <p:txBody>
-          <a:bodyPr wrap="square" anchor="ctr"/>
-          <a:lstStyle/>
-          <a:p>
-            <a:pPr algn="l"/>
-            <a:r>
-              <a:rPr sz="1600" b="0">
-                <a:solidFill>
-                  <a:srgbClr val="2C2C2C"/>
-                </a:solidFill>
-                <a:latin typeface="Arial"/>
-              </a:rPr>
-              <a:t>Обзорный осмотр — быстрый поиск наружного кровотечения с головы до ног (1–2 с).</a:t>
-            </a:r>
-          </a:p>
-        </p:txBody>
-      </p:sp>
-      <p:sp>
-        <p:nvSpPr>
-          <p:cNvPr id="15" name="Rectangle 14"/>
+          <p:cNvPr id="13" name="Rectangle 12"/>
           <p:cNvSpPr/>
           <p:nvPr/>
         </p:nvSpPr>
         <p:spPr>
           <a:xfrm>
-            <a:off x="900000" y="5300000"/>
-            <a:ext cx="20500000" cy="1400000"/>
+            <a:off x="800000" y="5750000"/>
+            <a:ext cx="120000" cy="1600000"/>
           </a:xfrm>
           <a:prstGeom prst="rect">
             <a:avLst/>
           </a:prstGeom>
           <a:solidFill>
-            <a:srgbClr val="FFFFFF"/>
+            <a:srgbClr val="0055AA"/>
           </a:solidFill>
           <a:ln>
-            <a:solidFill>
-              <a:srgbClr val="B8B8B8"/>
-            </a:solidFill>
+            <a:noFill/>
           </a:ln>
         </p:spPr>
         <p:style>
@@ -7098,23 +8120,62 @@
       </p:sp>
       <p:sp>
         <p:nvSpPr>
-          <p:cNvPr id="16" name="Rectangle 15"/>
+          <p:cNvPr id="14" name="TextBox 13"/>
+          <p:cNvSpPr txBox="1"/>
+          <p:nvPr/>
+        </p:nvSpPr>
+        <p:spPr>
+          <a:xfrm>
+            <a:off x="1200000" y="6050000"/>
+            <a:ext cx="21800000" cy="1100000"/>
+          </a:xfrm>
+          <a:prstGeom prst="rect">
+            <a:avLst/>
+          </a:prstGeom>
+          <a:noFill/>
+        </p:spPr>
+        <p:txBody>
+          <a:bodyPr wrap="square" anchor="ctr">
+            <a:spAutoFit/>
+          </a:bodyPr>
+          <a:lstStyle/>
+          <a:p>
+            <a:pPr algn="l"/>
+            <a:r>
+              <a:rPr sz="2600" b="0">
+                <a:solidFill>
+                  <a:srgbClr val="333333"/>
+                </a:solidFill>
+                <a:latin typeface="Open Sans"/>
+                <a:ea typeface="Open Sans"/>
+                <a:cs typeface="Open Sans"/>
+              </a:rPr>
+              <a:t>Сначала останавливаем кровь, затем проводим подробный осмотр.</a:t>
+            </a:r>
+          </a:p>
+        </p:txBody>
+      </p:sp>
+      <p:sp>
+        <p:nvSpPr>
+          <p:cNvPr id="15" name="Rectangle 14"/>
           <p:cNvSpPr/>
           <p:nvPr/>
         </p:nvSpPr>
         <p:spPr>
           <a:xfrm>
-            <a:off x="900000" y="5300000"/>
-            <a:ext cx="120000" cy="1400000"/>
+            <a:off x="800000" y="7650000"/>
+            <a:ext cx="22800000" cy="1600000"/>
           </a:xfrm>
           <a:prstGeom prst="rect">
             <a:avLst/>
           </a:prstGeom>
           <a:solidFill>
-            <a:srgbClr val="0082B9"/>
+            <a:srgbClr val="FFFFFF"/>
           </a:solidFill>
-          <a:ln>
-            <a:noFill/>
+          <a:ln w="12700">
+            <a:solidFill>
+              <a:srgbClr val="E1E1E1"/>
+            </a:solidFill>
           </a:ln>
         </p:spPr>
         <p:style>
@@ -7141,58 +8202,23 @@
       </p:sp>
       <p:sp>
         <p:nvSpPr>
-          <p:cNvPr id="17" name="TextBox 16"/>
-          <p:cNvSpPr txBox="1"/>
-          <p:nvPr/>
-        </p:nvSpPr>
-        <p:spPr>
-          <a:xfrm>
-            <a:off x="1300000" y="5650000"/>
-            <a:ext cx="19000000" cy="800000"/>
-          </a:xfrm>
-          <a:prstGeom prst="rect">
-            <a:avLst/>
-          </a:prstGeom>
-          <a:noFill/>
-        </p:spPr>
-        <p:txBody>
-          <a:bodyPr wrap="square" anchor="ctr"/>
-          <a:lstStyle/>
-          <a:p>
-            <a:pPr algn="l"/>
-            <a:r>
-              <a:rPr sz="1600" b="0">
-                <a:solidFill>
-                  <a:srgbClr val="2C2C2C"/>
-                </a:solidFill>
-                <a:latin typeface="Arial"/>
-              </a:rPr>
-              <a:t>При кровотечении сначала останавливаем кровь, затем проводим подробный осмотр.</a:t>
-            </a:r>
-          </a:p>
-        </p:txBody>
-      </p:sp>
-      <p:sp>
-        <p:nvSpPr>
-          <p:cNvPr id="18" name="Rectangle 17"/>
+          <p:cNvPr id="16" name="Rectangle 15"/>
           <p:cNvSpPr/>
           <p:nvPr/>
         </p:nvSpPr>
         <p:spPr>
           <a:xfrm>
-            <a:off x="900000" y="6950000"/>
-            <a:ext cx="20500000" cy="1400000"/>
+            <a:off x="800000" y="7650000"/>
+            <a:ext cx="120000" cy="1600000"/>
           </a:xfrm>
           <a:prstGeom prst="rect">
             <a:avLst/>
           </a:prstGeom>
           <a:solidFill>
-            <a:srgbClr val="FFFFFF"/>
+            <a:srgbClr val="0055AA"/>
           </a:solidFill>
           <a:ln>
-            <a:solidFill>
-              <a:srgbClr val="B8B8B8"/>
-            </a:solidFill>
+            <a:noFill/>
           </a:ln>
         </p:spPr>
         <p:style>
@@ -7219,57 +8245,14 @@
       </p:sp>
       <p:sp>
         <p:nvSpPr>
-          <p:cNvPr id="19" name="Rectangle 18"/>
-          <p:cNvSpPr/>
-          <p:nvPr/>
-        </p:nvSpPr>
-        <p:spPr>
-          <a:xfrm>
-            <a:off x="900000" y="6950000"/>
-            <a:ext cx="120000" cy="1400000"/>
-          </a:xfrm>
-          <a:prstGeom prst="rect">
-            <a:avLst/>
-          </a:prstGeom>
-          <a:solidFill>
-            <a:srgbClr val="0082B9"/>
-          </a:solidFill>
-          <a:ln>
-            <a:noFill/>
-          </a:ln>
-        </p:spPr>
-        <p:style>
-          <a:lnRef idx="1">
-            <a:schemeClr val="accent1"/>
-          </a:lnRef>
-          <a:fillRef idx="3">
-            <a:schemeClr val="accent1"/>
-          </a:fillRef>
-          <a:effectRef idx="2">
-            <a:schemeClr val="accent1"/>
-          </a:effectRef>
-          <a:fontRef idx="minor">
-            <a:schemeClr val="lt1"/>
-          </a:fontRef>
-        </p:style>
-        <p:txBody>
-          <a:bodyPr rtlCol="0" anchor="ctr"/>
-          <a:lstStyle/>
-          <a:p>
-            <a:pPr algn="ctr"/>
-          </a:p>
-        </p:txBody>
-      </p:sp>
-      <p:sp>
-        <p:nvSpPr>
-          <p:cNvPr id="20" name="TextBox 19"/>
+          <p:cNvPr id="17" name="TextBox 16"/>
           <p:cNvSpPr txBox="1"/>
           <p:nvPr/>
         </p:nvSpPr>
         <p:spPr>
           <a:xfrm>
-            <a:off x="1300000" y="7300000"/>
-            <a:ext cx="19000000" cy="800000"/>
+            <a:off x="1200000" y="7950000"/>
+            <a:ext cx="21800000" cy="1100000"/>
           </a:xfrm>
           <a:prstGeom prst="rect">
             <a:avLst/>
@@ -7277,16 +8260,20 @@
           <a:noFill/>
         </p:spPr>
         <p:txBody>
-          <a:bodyPr wrap="square" anchor="ctr"/>
+          <a:bodyPr wrap="square" anchor="ctr">
+            <a:spAutoFit/>
+          </a:bodyPr>
           <a:lstStyle/>
           <a:p>
             <a:pPr algn="l"/>
             <a:r>
-              <a:rPr sz="1600" b="0">
-                <a:solidFill>
-                  <a:srgbClr val="2C2C2C"/>
-                </a:solidFill>
-                <a:latin typeface="Arial"/>
+              <a:rPr sz="2600" b="0">
+                <a:solidFill>
+                  <a:srgbClr val="333333"/>
+                </a:solidFill>
+                <a:latin typeface="Open Sans"/>
+                <a:ea typeface="Open Sans"/>
+                <a:cs typeface="Open Sans"/>
               </a:rPr>
               <a:t>Особенно важен при ДТП, падении с высоты и множественных пострадавших.</a:t>
             </a:r>

--- a/tema2_bleeding/Кровотечение_и_обзорный_осмотр.pptx
+++ b/tema2_bleeding/Кровотечение_и_обзорный_осмотр.pptx
@@ -6061,7 +6061,7 @@
         <p:spPr>
           <a:xfrm>
             <a:off x="800000" y="1950000"/>
-            <a:ext cx="22800000" cy="7000000"/>
+            <a:ext cx="12000000" cy="6000000"/>
           </a:xfrm>
           <a:prstGeom prst="rect">
             <a:avLst/>
@@ -6080,7 +6080,7 @@
               </a:spcAft>
             </a:pPr>
             <a:r>
-              <a:rPr sz="3200" b="0">
+              <a:rPr sz="2800" b="0">
                 <a:solidFill>
                   <a:srgbClr val="333333"/>
                 </a:solidFill>
@@ -6088,7 +6088,7 @@
                 <a:ea typeface="Open Sans"/>
                 <a:cs typeface="Open Sans"/>
               </a:rPr>
-              <a:t>•  Быстрая визуальная оценка пострадавшего с головы до ног.</a:t>
+              <a:t>•  Быстрая визуальная оценка с головы до ног.</a:t>
             </a:r>
           </a:p>
           <a:p>
@@ -6098,7 +6098,7 @@
               </a:spcAft>
             </a:pPr>
             <a:r>
-              <a:rPr sz="3200" b="0">
+              <a:rPr sz="2800" b="0">
                 <a:solidFill>
                   <a:srgbClr val="333333"/>
                 </a:solidFill>
@@ -6106,7 +6106,7 @@
                 <a:ea typeface="Open Sans"/>
                 <a:cs typeface="Open Sans"/>
               </a:rPr>
-              <a:t>•  Цель — выявить продолжающееся наружное кровотечение.</a:t>
+              <a:t>•  Цель — выявить наружное кровотечение.</a:t>
             </a:r>
           </a:p>
           <a:p>
@@ -6116,7 +6116,7 @@
               </a:spcAft>
             </a:pPr>
             <a:r>
-              <a:rPr sz="3200" b="0">
+              <a:rPr sz="2800" b="0">
                 <a:solidFill>
                   <a:srgbClr val="333333"/>
                 </a:solidFill>
@@ -6124,7 +6124,7 @@
                 <a:ea typeface="Open Sans"/>
                 <a:cs typeface="Open Sans"/>
               </a:rPr>
-              <a:t>•  Выполняется сразу после оценки обстановки и безопасности.</a:t>
+              <a:t>•  Сразу после оценки обстановки и безопасности.</a:t>
             </a:r>
           </a:p>
           <a:p>
@@ -6134,7 +6134,7 @@
               </a:spcAft>
             </a:pPr>
             <a:r>
-              <a:rPr sz="3200" b="0">
+              <a:rPr sz="2800" b="0">
                 <a:solidFill>
                   <a:srgbClr val="333333"/>
                 </a:solidFill>
@@ -6152,7 +6152,7 @@
               </a:spcAft>
             </a:pPr>
             <a:r>
-              <a:rPr sz="3200" b="0">
+              <a:rPr sz="2800" b="0">
                 <a:solidFill>
                   <a:srgbClr val="333333"/>
                 </a:solidFill>
@@ -6160,7 +6160,7 @@
                 <a:ea typeface="Open Sans"/>
                 <a:cs typeface="Open Sans"/>
               </a:rPr>
-              <a:t>•  При кровотечении — немедленно начать его остановку.</a:t>
+              <a:t>•  При кровотечении — немедленно начать остановку.</a:t>
             </a:r>
           </a:p>
           <a:p>
@@ -6170,7 +6170,7 @@
               </a:spcAft>
             </a:pPr>
             <a:r>
-              <a:rPr sz="3200" b="0">
+              <a:rPr sz="2800" b="0">
                 <a:solidFill>
                   <a:srgbClr val="333333"/>
                 </a:solidFill>
@@ -6178,30 +6178,32 @@
                 <a:ea typeface="Open Sans"/>
                 <a:cs typeface="Open Sans"/>
               </a:rPr>
-              <a:t>•  По Приказу Минздрава № 220н — до подробного осмотра.</a:t>
-            </a:r>
-          </a:p>
-        </p:txBody>
-      </p:sp>
-      <p:sp>
-        <p:nvSpPr>
-          <p:cNvPr id="7" name="Rounded Rectangle 6"/>
+              <a:t>•  По Приказу № 220н — до подробного осмотра.</a:t>
+            </a:r>
+          </a:p>
+        </p:txBody>
+      </p:sp>
+      <p:sp>
+        <p:nvSpPr>
+          <p:cNvPr id="7" name="Rectangle 6"/>
           <p:cNvSpPr/>
           <p:nvPr/>
         </p:nvSpPr>
         <p:spPr>
           <a:xfrm>
-            <a:off x="800000" y="11000000"/>
-            <a:ext cx="22800000" cy="1800000"/>
-          </a:xfrm>
-          <a:prstGeom prst="roundRect">
-            <a:avLst/>
-          </a:prstGeom>
-          <a:solidFill>
-            <a:srgbClr val="FAFAFA"/>
-          </a:solidFill>
-          <a:ln>
-            <a:noFill/>
+            <a:off x="13500000" y="1950000"/>
+            <a:ext cx="10000000" cy="8500000"/>
+          </a:xfrm>
+          <a:prstGeom prst="rect">
+            <a:avLst/>
+          </a:prstGeom>
+          <a:solidFill>
+            <a:srgbClr val="FFFFFF"/>
+          </a:solidFill>
+          <a:ln w="12700">
+            <a:solidFill>
+              <a:srgbClr val="E1E1E1"/>
+            </a:solidFill>
           </a:ln>
         </p:spPr>
         <p:style>
@@ -6226,22 +6228,46 @@
           </a:p>
         </p:txBody>
       </p:sp>
-      <p:sp>
-        <p:nvSpPr>
-          <p:cNvPr id="8" name="Rectangle 7"/>
+      <p:pic>
+        <p:nvPicPr>
+          <p:cNvPr id="8" name="Picture 7" descr="overview_exam.png"/>
+          <p:cNvPicPr>
+            <a:picLocks noChangeAspect="1"/>
+          </p:cNvPicPr>
+          <p:nvPr/>
+        </p:nvPicPr>
+        <p:blipFill>
+          <a:blip r:embed="rId2"/>
+          <a:stretch>
+            <a:fillRect/>
+          </a:stretch>
+        </p:blipFill>
+        <p:spPr>
+          <a:xfrm>
+            <a:off x="13650000" y="2371053"/>
+            <a:ext cx="9700000" cy="7657894"/>
+          </a:xfrm>
+          <a:prstGeom prst="rect">
+            <a:avLst/>
+          </a:prstGeom>
+        </p:spPr>
+      </p:pic>
+      <p:sp>
+        <p:nvSpPr>
+          <p:cNvPr id="9" name="Rounded Rectangle 8"/>
           <p:cNvSpPr/>
           <p:nvPr/>
         </p:nvSpPr>
         <p:spPr>
           <a:xfrm>
-            <a:off x="800000" y="11000000"/>
-            <a:ext cx="120000" cy="1800000"/>
-          </a:xfrm>
-          <a:prstGeom prst="rect">
-            <a:avLst/>
-          </a:prstGeom>
-          <a:solidFill>
-            <a:srgbClr val="CC0000"/>
+            <a:off x="800000" y="11200000"/>
+            <a:ext cx="22800000" cy="1600000"/>
+          </a:xfrm>
+          <a:prstGeom prst="roundRect">
+            <a:avLst/>
+          </a:prstGeom>
+          <a:solidFill>
+            <a:srgbClr val="FAFAFA"/>
           </a:solidFill>
           <a:ln>
             <a:noFill/>
@@ -6271,14 +6297,57 @@
       </p:sp>
       <p:sp>
         <p:nvSpPr>
-          <p:cNvPr id="9" name="TextBox 8"/>
+          <p:cNvPr id="10" name="Rectangle 9"/>
+          <p:cNvSpPr/>
+          <p:nvPr/>
+        </p:nvSpPr>
+        <p:spPr>
+          <a:xfrm>
+            <a:off x="800000" y="11200000"/>
+            <a:ext cx="120000" cy="1600000"/>
+          </a:xfrm>
+          <a:prstGeom prst="rect">
+            <a:avLst/>
+          </a:prstGeom>
+          <a:solidFill>
+            <a:srgbClr val="CC0000"/>
+          </a:solidFill>
+          <a:ln>
+            <a:noFill/>
+          </a:ln>
+        </p:spPr>
+        <p:style>
+          <a:lnRef idx="1">
+            <a:schemeClr val="accent1"/>
+          </a:lnRef>
+          <a:fillRef idx="3">
+            <a:schemeClr val="accent1"/>
+          </a:fillRef>
+          <a:effectRef idx="2">
+            <a:schemeClr val="accent1"/>
+          </a:effectRef>
+          <a:fontRef idx="minor">
+            <a:schemeClr val="lt1"/>
+          </a:fontRef>
+        </p:style>
+        <p:txBody>
+          <a:bodyPr rtlCol="0" anchor="ctr"/>
+          <a:lstStyle/>
+          <a:p>
+            <a:pPr algn="ctr"/>
+          </a:p>
+        </p:txBody>
+      </p:sp>
+      <p:sp>
+        <p:nvSpPr>
+          <p:cNvPr id="11" name="TextBox 10"/>
           <p:cNvSpPr txBox="1"/>
           <p:nvPr/>
         </p:nvSpPr>
         <p:spPr>
           <a:xfrm>
-            <a:off x="1200000" y="11300000"/>
-            <a:ext cx="21800000" cy="1400000"/>
+            <a:off x="1200000" y="11400000"/>
+            <a:ext cx="21800000" cy="1200000"/>
           </a:xfrm>
           <a:prstGeom prst="rect">
             <a:avLst/>
@@ -6293,7 +6362,7 @@
           <a:p>
             <a:pPr algn="l"/>
             <a:r>
-              <a:rPr sz="2600" b="1">
+              <a:rPr sz="2400" b="1">
                 <a:solidFill>
                   <a:srgbClr val="CC0000"/>
                 </a:solidFill>

--- a/tema2_bleeding/Кровотечение_и_обзорный_осмотр.pptx
+++ b/tema2_bleeding/Кровотечение_и_обзорный_осмотр.pptx
@@ -3142,100 +3142,14 @@
       </p:sp>
       <p:sp>
         <p:nvSpPr>
-          <p:cNvPr id="3" name="Rectangle 2"/>
-          <p:cNvSpPr/>
-          <p:nvPr/>
-        </p:nvSpPr>
-        <p:spPr>
-          <a:xfrm>
-            <a:off x="0" y="0"/>
-            <a:ext cx="24384000" cy="120000"/>
-          </a:xfrm>
-          <a:prstGeom prst="rect">
-            <a:avLst/>
-          </a:prstGeom>
-          <a:solidFill>
-            <a:srgbClr val="DDDDDD"/>
-          </a:solidFill>
-          <a:ln>
-            <a:noFill/>
-          </a:ln>
-        </p:spPr>
-        <p:style>
-          <a:lnRef idx="1">
-            <a:schemeClr val="accent1"/>
-          </a:lnRef>
-          <a:fillRef idx="3">
-            <a:schemeClr val="accent1"/>
-          </a:fillRef>
-          <a:effectRef idx="2">
-            <a:schemeClr val="accent1"/>
-          </a:effectRef>
-          <a:fontRef idx="minor">
-            <a:schemeClr val="lt1"/>
-          </a:fontRef>
-        </p:style>
-        <p:txBody>
-          <a:bodyPr rtlCol="0" anchor="ctr"/>
-          <a:lstStyle/>
-          <a:p>
-            <a:pPr algn="ctr"/>
-          </a:p>
-        </p:txBody>
-      </p:sp>
-      <p:sp>
-        <p:nvSpPr>
-          <p:cNvPr id="4" name="Rectangle 3"/>
-          <p:cNvSpPr/>
-          <p:nvPr/>
-        </p:nvSpPr>
-        <p:spPr>
-          <a:xfrm>
-            <a:off x="0" y="4200000"/>
-            <a:ext cx="24384000" cy="2800000"/>
-          </a:xfrm>
-          <a:prstGeom prst="rect">
-            <a:avLst/>
-          </a:prstGeom>
-          <a:solidFill>
-            <a:srgbClr val="FAFAFA"/>
-          </a:solidFill>
-          <a:ln>
-            <a:noFill/>
-          </a:ln>
-        </p:spPr>
-        <p:style>
-          <a:lnRef idx="1">
-            <a:schemeClr val="accent1"/>
-          </a:lnRef>
-          <a:fillRef idx="3">
-            <a:schemeClr val="accent1"/>
-          </a:fillRef>
-          <a:effectRef idx="2">
-            <a:schemeClr val="accent1"/>
-          </a:effectRef>
-          <a:fontRef idx="minor">
-            <a:schemeClr val="lt1"/>
-          </a:fontRef>
-        </p:style>
-        <p:txBody>
-          <a:bodyPr rtlCol="0" anchor="ctr"/>
-          <a:lstStyle/>
-          <a:p>
-            <a:pPr algn="ctr"/>
-          </a:p>
-        </p:txBody>
-      </p:sp>
-      <p:sp>
-        <p:nvSpPr>
-          <p:cNvPr id="5" name="TextBox 4"/>
+          <p:cNvPr id="3" name="TextBox 2"/>
           <p:cNvSpPr txBox="1"/>
           <p:nvPr/>
         </p:nvSpPr>
         <p:spPr>
           <a:xfrm>
-            <a:off x="800000" y="4600000"/>
-            <a:ext cx="22800000" cy="1400000"/>
+            <a:off x="360000" y="4800000"/>
+            <a:ext cx="23664000" cy="1600000"/>
           </a:xfrm>
           <a:prstGeom prst="rect">
             <a:avLst/>
@@ -3248,7 +3162,7 @@
           </a:bodyPr>
           <a:lstStyle/>
           <a:p>
-            <a:pPr algn="l"/>
+            <a:pPr algn="ctr"/>
             <a:r>
               <a:rPr sz="4600" b="1">
                 <a:solidFill>
@@ -3265,14 +3179,14 @@
       </p:sp>
       <p:sp>
         <p:nvSpPr>
-          <p:cNvPr id="6" name="Rectangle 5"/>
+          <p:cNvPr id="4" name="Rectangle 3"/>
           <p:cNvSpPr/>
           <p:nvPr/>
         </p:nvSpPr>
         <p:spPr>
           <a:xfrm>
-            <a:off x="800000" y="6200000"/>
-            <a:ext cx="12000000" cy="20000"/>
+            <a:off x="7000000" y="6600000"/>
+            <a:ext cx="10000000" cy="25000"/>
           </a:xfrm>
           <a:prstGeom prst="rect">
             <a:avLst/>
@@ -3308,14 +3222,14 @@
       </p:sp>
       <p:sp>
         <p:nvSpPr>
-          <p:cNvPr id="7" name="TextBox 6"/>
+          <p:cNvPr id="5" name="TextBox 4"/>
           <p:cNvSpPr txBox="1"/>
           <p:nvPr/>
         </p:nvSpPr>
         <p:spPr>
           <a:xfrm>
-            <a:off x="800000" y="6500000"/>
-            <a:ext cx="22800000" cy="600000"/>
+            <a:off x="360000" y="6900000"/>
+            <a:ext cx="23664000" cy="800000"/>
           </a:xfrm>
           <a:prstGeom prst="rect">
             <a:avLst/>
@@ -3328,11 +3242,11 @@
           </a:bodyPr>
           <a:lstStyle/>
           <a:p>
-            <a:pPr algn="l"/>
+            <a:pPr algn="ctr"/>
             <a:r>
               <a:rPr sz="2600" b="0">
                 <a:solidFill>
-                  <a:srgbClr val="0055AA"/>
+                  <a:srgbClr val="333333"/>
                 </a:solidFill>
                 <a:latin typeface="Open Sans"/>
                 <a:ea typeface="Open Sans"/>
@@ -3345,14 +3259,14 @@
       </p:sp>
       <p:sp>
         <p:nvSpPr>
-          <p:cNvPr id="8" name="TextBox 7"/>
+          <p:cNvPr id="6" name="TextBox 5"/>
           <p:cNvSpPr txBox="1"/>
           <p:nvPr/>
         </p:nvSpPr>
         <p:spPr>
           <a:xfrm>
-            <a:off x="800000" y="7200000"/>
-            <a:ext cx="22800000" cy="500000"/>
+            <a:off x="360000" y="7800000"/>
+            <a:ext cx="23664000" cy="500000"/>
           </a:xfrm>
           <a:prstGeom prst="rect">
             <a:avLst/>
@@ -3365,11 +3279,11 @@
           </a:bodyPr>
           <a:lstStyle/>
           <a:p>
-            <a:pPr algn="l"/>
+            <a:pPr algn="ctr"/>
             <a:r>
               <a:rPr sz="2000" b="0">
                 <a:solidFill>
-                  <a:srgbClr val="333333"/>
+                  <a:srgbClr val="0055AA"/>
                 </a:solidFill>
                 <a:latin typeface="Open Sans"/>
                 <a:ea typeface="Open Sans"/>
@@ -3443,57 +3357,14 @@
       </p:sp>
       <p:sp>
         <p:nvSpPr>
-          <p:cNvPr id="3" name="Rectangle 2"/>
-          <p:cNvSpPr/>
-          <p:nvPr/>
-        </p:nvSpPr>
-        <p:spPr>
-          <a:xfrm>
-            <a:off x="0" y="0"/>
-            <a:ext cx="24384000" cy="120000"/>
-          </a:xfrm>
-          <a:prstGeom prst="rect">
-            <a:avLst/>
-          </a:prstGeom>
-          <a:solidFill>
-            <a:srgbClr val="DDDDDD"/>
-          </a:solidFill>
-          <a:ln>
-            <a:noFill/>
-          </a:ln>
-        </p:spPr>
-        <p:style>
-          <a:lnRef idx="1">
-            <a:schemeClr val="accent1"/>
-          </a:lnRef>
-          <a:fillRef idx="3">
-            <a:schemeClr val="accent1"/>
-          </a:fillRef>
-          <a:effectRef idx="2">
-            <a:schemeClr val="accent1"/>
-          </a:effectRef>
-          <a:fontRef idx="minor">
-            <a:schemeClr val="lt1"/>
-          </a:fontRef>
-        </p:style>
-        <p:txBody>
-          <a:bodyPr rtlCol="0" anchor="ctr"/>
-          <a:lstStyle/>
-          <a:p>
-            <a:pPr algn="ctr"/>
-          </a:p>
-        </p:txBody>
-      </p:sp>
-      <p:sp>
-        <p:nvSpPr>
-          <p:cNvPr id="4" name="TextBox 3"/>
+          <p:cNvPr id="3" name="TextBox 2"/>
           <p:cNvSpPr txBox="1"/>
           <p:nvPr/>
         </p:nvSpPr>
         <p:spPr>
           <a:xfrm>
-            <a:off x="800000" y="5500000"/>
-            <a:ext cx="22800000" cy="1200000"/>
+            <a:off x="360000" y="5500000"/>
+            <a:ext cx="23664000" cy="1200000"/>
           </a:xfrm>
           <a:prstGeom prst="rect">
             <a:avLst/>
@@ -3506,7 +3377,7 @@
           </a:bodyPr>
           <a:lstStyle/>
           <a:p>
-            <a:pPr algn="l"/>
+            <a:pPr algn="ctr"/>
             <a:r>
               <a:rPr sz="4600" b="1">
                 <a:solidFill>
@@ -3516,21 +3387,21 @@
                 <a:ea typeface="Open Sans"/>
                 <a:cs typeface="Open Sans"/>
               </a:rPr>
-              <a:t>Спасибо за внимание</a:t>
-            </a:r>
-          </a:p>
-        </p:txBody>
-      </p:sp>
-      <p:sp>
-        <p:nvSpPr>
-          <p:cNvPr id="5" name="Rectangle 4"/>
+              <a:t>Благодарим за внимание</a:t>
+            </a:r>
+          </a:p>
+        </p:txBody>
+      </p:sp>
+      <p:sp>
+        <p:nvSpPr>
+          <p:cNvPr id="4" name="Rectangle 3"/>
           <p:cNvSpPr/>
           <p:nvPr/>
         </p:nvSpPr>
         <p:spPr>
           <a:xfrm>
-            <a:off x="800000" y="6900000"/>
-            <a:ext cx="10000000" cy="20000"/>
+            <a:off x="7000000" y="7000000"/>
+            <a:ext cx="10000000" cy="25000"/>
           </a:xfrm>
           <a:prstGeom prst="rect">
             <a:avLst/>
@@ -3566,14 +3437,14 @@
       </p:sp>
       <p:sp>
         <p:nvSpPr>
-          <p:cNvPr id="6" name="TextBox 5"/>
+          <p:cNvPr id="5" name="TextBox 4"/>
           <p:cNvSpPr txBox="1"/>
           <p:nvPr/>
         </p:nvSpPr>
         <p:spPr>
           <a:xfrm>
-            <a:off x="800000" y="7200000"/>
-            <a:ext cx="22800000" cy="500000"/>
+            <a:off x="360000" y="7400000"/>
+            <a:ext cx="23664000" cy="500000"/>
           </a:xfrm>
           <a:prstGeom prst="rect">
             <a:avLst/>
@@ -3586,7 +3457,7 @@
           </a:bodyPr>
           <a:lstStyle/>
           <a:p>
-            <a:pPr algn="l"/>
+            <a:pPr algn="ctr"/>
             <a:r>
               <a:rPr sz="2000" b="0">
                 <a:solidFill>
@@ -3664,14 +3535,562 @@
       </p:sp>
       <p:sp>
         <p:nvSpPr>
-          <p:cNvPr id="3" name="Rectangle 2"/>
+          <p:cNvPr id="3" name="TextBox 2"/>
+          <p:cNvSpPr txBox="1"/>
+          <p:nvPr/>
+        </p:nvSpPr>
+        <p:spPr>
+          <a:xfrm>
+            <a:off x="360000" y="350000"/>
+            <a:ext cx="23664000" cy="1100000"/>
+          </a:xfrm>
+          <a:prstGeom prst="rect">
+            <a:avLst/>
+          </a:prstGeom>
+          <a:noFill/>
+        </p:spPr>
+        <p:txBody>
+          <a:bodyPr wrap="square" anchor="t">
+            <a:spAutoFit/>
+          </a:bodyPr>
+          <a:lstStyle/>
+          <a:p>
+            <a:pPr algn="ctr"/>
+            <a:r>
+              <a:rPr sz="4600" b="1">
+                <a:solidFill>
+                  <a:srgbClr val="333333"/>
+                </a:solidFill>
+                <a:latin typeface="Open Sans"/>
+                <a:ea typeface="Open Sans"/>
+                <a:cs typeface="Open Sans"/>
+              </a:rPr>
+              <a:t>Содержание</a:t>
+            </a:r>
+          </a:p>
+        </p:txBody>
+      </p:sp>
+      <p:sp>
+        <p:nvSpPr>
+          <p:cNvPr id="4" name="Rectangle 3"/>
           <p:cNvSpPr/>
           <p:nvPr/>
         </p:nvSpPr>
         <p:spPr>
           <a:xfrm>
-            <a:off x="0" y="0"/>
-            <a:ext cx="24384000" cy="120000"/>
+            <a:off x="360000" y="1450000"/>
+            <a:ext cx="23664000" cy="20000"/>
+          </a:xfrm>
+          <a:prstGeom prst="rect">
+            <a:avLst/>
+          </a:prstGeom>
+          <a:solidFill>
+            <a:srgbClr val="E1E1E1"/>
+          </a:solidFill>
+          <a:ln>
+            <a:noFill/>
+          </a:ln>
+        </p:spPr>
+        <p:style>
+          <a:lnRef idx="1">
+            <a:schemeClr val="accent1"/>
+          </a:lnRef>
+          <a:fillRef idx="3">
+            <a:schemeClr val="accent1"/>
+          </a:fillRef>
+          <a:effectRef idx="2">
+            <a:schemeClr val="accent1"/>
+          </a:effectRef>
+          <a:fontRef idx="minor">
+            <a:schemeClr val="lt1"/>
+          </a:fontRef>
+        </p:style>
+        <p:txBody>
+          <a:bodyPr rtlCol="0" anchor="ctr"/>
+          <a:lstStyle/>
+          <a:p>
+            <a:pPr algn="ctr"/>
+          </a:p>
+        </p:txBody>
+      </p:sp>
+      <p:sp>
+        <p:nvSpPr>
+          <p:cNvPr id="5" name="Oval 4"/>
+          <p:cNvSpPr/>
+          <p:nvPr/>
+        </p:nvSpPr>
+        <p:spPr>
+          <a:xfrm>
+            <a:off x="2360000" y="2000000"/>
+            <a:ext cx="700000" cy="700000"/>
+          </a:xfrm>
+          <a:prstGeom prst="ellipse">
+            <a:avLst/>
+          </a:prstGeom>
+          <a:solidFill>
+            <a:srgbClr val="0055AA"/>
+          </a:solidFill>
+          <a:ln>
+            <a:noFill/>
+          </a:ln>
+        </p:spPr>
+        <p:style>
+          <a:lnRef idx="1">
+            <a:schemeClr val="accent1"/>
+          </a:lnRef>
+          <a:fillRef idx="3">
+            <a:schemeClr val="accent1"/>
+          </a:fillRef>
+          <a:effectRef idx="2">
+            <a:schemeClr val="accent1"/>
+          </a:effectRef>
+          <a:fontRef idx="minor">
+            <a:schemeClr val="lt1"/>
+          </a:fontRef>
+        </p:style>
+        <p:txBody>
+          <a:bodyPr rtlCol="0" anchor="ctr"/>
+          <a:lstStyle/>
+          <a:p>
+            <a:pPr algn="ctr"/>
+          </a:p>
+        </p:txBody>
+      </p:sp>
+      <p:sp>
+        <p:nvSpPr>
+          <p:cNvPr id="6" name="TextBox 5"/>
+          <p:cNvSpPr txBox="1"/>
+          <p:nvPr/>
+        </p:nvSpPr>
+        <p:spPr>
+          <a:xfrm>
+            <a:off x="2360000" y="2000000"/>
+            <a:ext cx="700000" cy="700000"/>
+          </a:xfrm>
+          <a:prstGeom prst="rect">
+            <a:avLst/>
+          </a:prstGeom>
+          <a:noFill/>
+        </p:spPr>
+        <p:txBody>
+          <a:bodyPr wrap="square" anchor="ctr">
+            <a:spAutoFit/>
+          </a:bodyPr>
+          <a:lstStyle/>
+          <a:p>
+            <a:pPr algn="ctr"/>
+            <a:r>
+              <a:rPr sz="2600" b="1">
+                <a:solidFill>
+                  <a:srgbClr val="FFFFFF"/>
+                </a:solidFill>
+                <a:latin typeface="Open Sans"/>
+                <a:ea typeface="Open Sans"/>
+                <a:cs typeface="Open Sans"/>
+              </a:rPr>
+              <a:t>1</a:t>
+            </a:r>
+          </a:p>
+        </p:txBody>
+      </p:sp>
+      <p:sp>
+        <p:nvSpPr>
+          <p:cNvPr id="7" name="TextBox 6"/>
+          <p:cNvSpPr txBox="1"/>
+          <p:nvPr/>
+        </p:nvSpPr>
+        <p:spPr>
+          <a:xfrm>
+            <a:off x="3360000" y="2000000"/>
+            <a:ext cx="14000000" cy="700000"/>
+          </a:xfrm>
+          <a:prstGeom prst="rect">
+            <a:avLst/>
+          </a:prstGeom>
+          <a:noFill/>
+        </p:spPr>
+        <p:txBody>
+          <a:bodyPr wrap="square" anchor="ctr">
+            <a:spAutoFit/>
+          </a:bodyPr>
+          <a:lstStyle/>
+          <a:p>
+            <a:pPr algn="l"/>
+            <a:r>
+              <a:rPr sz="3200" b="0">
+                <a:solidFill>
+                  <a:srgbClr val="333333"/>
+                </a:solidFill>
+                <a:latin typeface="Open Sans"/>
+                <a:ea typeface="Open Sans"/>
+                <a:cs typeface="Open Sans"/>
+              </a:rPr>
+              <a:t>Определение кровотечения и признаки кровопотери</a:t>
+            </a:r>
+          </a:p>
+        </p:txBody>
+      </p:sp>
+      <p:sp>
+        <p:nvSpPr>
+          <p:cNvPr id="8" name="Oval 7"/>
+          <p:cNvSpPr/>
+          <p:nvPr/>
+        </p:nvSpPr>
+        <p:spPr>
+          <a:xfrm>
+            <a:off x="2360000" y="3400000"/>
+            <a:ext cx="700000" cy="700000"/>
+          </a:xfrm>
+          <a:prstGeom prst="ellipse">
+            <a:avLst/>
+          </a:prstGeom>
+          <a:solidFill>
+            <a:srgbClr val="0055AA"/>
+          </a:solidFill>
+          <a:ln>
+            <a:noFill/>
+          </a:ln>
+        </p:spPr>
+        <p:style>
+          <a:lnRef idx="1">
+            <a:schemeClr val="accent1"/>
+          </a:lnRef>
+          <a:fillRef idx="3">
+            <a:schemeClr val="accent1"/>
+          </a:fillRef>
+          <a:effectRef idx="2">
+            <a:schemeClr val="accent1"/>
+          </a:effectRef>
+          <a:fontRef idx="minor">
+            <a:schemeClr val="lt1"/>
+          </a:fontRef>
+        </p:style>
+        <p:txBody>
+          <a:bodyPr rtlCol="0" anchor="ctr"/>
+          <a:lstStyle/>
+          <a:p>
+            <a:pPr algn="ctr"/>
+          </a:p>
+        </p:txBody>
+      </p:sp>
+      <p:sp>
+        <p:nvSpPr>
+          <p:cNvPr id="9" name="TextBox 8"/>
+          <p:cNvSpPr txBox="1"/>
+          <p:nvPr/>
+        </p:nvSpPr>
+        <p:spPr>
+          <a:xfrm>
+            <a:off x="2360000" y="3400000"/>
+            <a:ext cx="700000" cy="700000"/>
+          </a:xfrm>
+          <a:prstGeom prst="rect">
+            <a:avLst/>
+          </a:prstGeom>
+          <a:noFill/>
+        </p:spPr>
+        <p:txBody>
+          <a:bodyPr wrap="square" anchor="ctr">
+            <a:spAutoFit/>
+          </a:bodyPr>
+          <a:lstStyle/>
+          <a:p>
+            <a:pPr algn="ctr"/>
+            <a:r>
+              <a:rPr sz="2600" b="1">
+                <a:solidFill>
+                  <a:srgbClr val="FFFFFF"/>
+                </a:solidFill>
+                <a:latin typeface="Open Sans"/>
+                <a:ea typeface="Open Sans"/>
+                <a:cs typeface="Open Sans"/>
+              </a:rPr>
+              <a:t>2</a:t>
+            </a:r>
+          </a:p>
+        </p:txBody>
+      </p:sp>
+      <p:sp>
+        <p:nvSpPr>
+          <p:cNvPr id="10" name="TextBox 9"/>
+          <p:cNvSpPr txBox="1"/>
+          <p:nvPr/>
+        </p:nvSpPr>
+        <p:spPr>
+          <a:xfrm>
+            <a:off x="3360000" y="3400000"/>
+            <a:ext cx="14000000" cy="700000"/>
+          </a:xfrm>
+          <a:prstGeom prst="rect">
+            <a:avLst/>
+          </a:prstGeom>
+          <a:noFill/>
+        </p:spPr>
+        <p:txBody>
+          <a:bodyPr wrap="square" anchor="ctr">
+            <a:spAutoFit/>
+          </a:bodyPr>
+          <a:lstStyle/>
+          <a:p>
+            <a:pPr algn="l"/>
+            <a:r>
+              <a:rPr sz="3200" b="0">
+                <a:solidFill>
+                  <a:srgbClr val="333333"/>
+                </a:solidFill>
+                <a:latin typeface="Open Sans"/>
+                <a:ea typeface="Open Sans"/>
+                <a:cs typeface="Open Sans"/>
+              </a:rPr>
+              <a:t>Цель и порядок обзорного осмотра</a:t>
+            </a:r>
+          </a:p>
+        </p:txBody>
+      </p:sp>
+      <p:sp>
+        <p:nvSpPr>
+          <p:cNvPr id="11" name="Oval 10"/>
+          <p:cNvSpPr/>
+          <p:nvPr/>
+        </p:nvSpPr>
+        <p:spPr>
+          <a:xfrm>
+            <a:off x="2360000" y="4800000"/>
+            <a:ext cx="700000" cy="700000"/>
+          </a:xfrm>
+          <a:prstGeom prst="ellipse">
+            <a:avLst/>
+          </a:prstGeom>
+          <a:solidFill>
+            <a:srgbClr val="0055AA"/>
+          </a:solidFill>
+          <a:ln>
+            <a:noFill/>
+          </a:ln>
+        </p:spPr>
+        <p:style>
+          <a:lnRef idx="1">
+            <a:schemeClr val="accent1"/>
+          </a:lnRef>
+          <a:fillRef idx="3">
+            <a:schemeClr val="accent1"/>
+          </a:fillRef>
+          <a:effectRef idx="2">
+            <a:schemeClr val="accent1"/>
+          </a:effectRef>
+          <a:fontRef idx="minor">
+            <a:schemeClr val="lt1"/>
+          </a:fontRef>
+        </p:style>
+        <p:txBody>
+          <a:bodyPr rtlCol="0" anchor="ctr"/>
+          <a:lstStyle/>
+          <a:p>
+            <a:pPr algn="ctr"/>
+          </a:p>
+        </p:txBody>
+      </p:sp>
+      <p:sp>
+        <p:nvSpPr>
+          <p:cNvPr id="12" name="TextBox 11"/>
+          <p:cNvSpPr txBox="1"/>
+          <p:nvPr/>
+        </p:nvSpPr>
+        <p:spPr>
+          <a:xfrm>
+            <a:off x="2360000" y="4800000"/>
+            <a:ext cx="700000" cy="700000"/>
+          </a:xfrm>
+          <a:prstGeom prst="rect">
+            <a:avLst/>
+          </a:prstGeom>
+          <a:noFill/>
+        </p:spPr>
+        <p:txBody>
+          <a:bodyPr wrap="square" anchor="ctr">
+            <a:spAutoFit/>
+          </a:bodyPr>
+          <a:lstStyle/>
+          <a:p>
+            <a:pPr algn="ctr"/>
+            <a:r>
+              <a:rPr sz="2600" b="1">
+                <a:solidFill>
+                  <a:srgbClr val="FFFFFF"/>
+                </a:solidFill>
+                <a:latin typeface="Open Sans"/>
+                <a:ea typeface="Open Sans"/>
+                <a:cs typeface="Open Sans"/>
+              </a:rPr>
+              <a:t>3</a:t>
+            </a:r>
+          </a:p>
+        </p:txBody>
+      </p:sp>
+      <p:sp>
+        <p:nvSpPr>
+          <p:cNvPr id="13" name="TextBox 12"/>
+          <p:cNvSpPr txBox="1"/>
+          <p:nvPr/>
+        </p:nvSpPr>
+        <p:spPr>
+          <a:xfrm>
+            <a:off x="3360000" y="4800000"/>
+            <a:ext cx="14000000" cy="700000"/>
+          </a:xfrm>
+          <a:prstGeom prst="rect">
+            <a:avLst/>
+          </a:prstGeom>
+          <a:noFill/>
+        </p:spPr>
+        <p:txBody>
+          <a:bodyPr wrap="square" anchor="ctr">
+            <a:spAutoFit/>
+          </a:bodyPr>
+          <a:lstStyle/>
+          <a:p>
+            <a:pPr algn="l"/>
+            <a:r>
+              <a:rPr sz="3200" b="0">
+                <a:solidFill>
+                  <a:srgbClr val="333333"/>
+                </a:solidFill>
+                <a:latin typeface="Open Sans"/>
+                <a:ea typeface="Open Sans"/>
+                <a:cs typeface="Open Sans"/>
+              </a:rPr>
+              <a:t>Обзорный и подробный осмотр: различия</a:t>
+            </a:r>
+          </a:p>
+        </p:txBody>
+      </p:sp>
+      <p:sp>
+        <p:nvSpPr>
+          <p:cNvPr id="14" name="Oval 13"/>
+          <p:cNvSpPr/>
+          <p:nvPr/>
+        </p:nvSpPr>
+        <p:spPr>
+          <a:xfrm>
+            <a:off x="2360000" y="6200000"/>
+            <a:ext cx="700000" cy="700000"/>
+          </a:xfrm>
+          <a:prstGeom prst="ellipse">
+            <a:avLst/>
+          </a:prstGeom>
+          <a:solidFill>
+            <a:srgbClr val="0055AA"/>
+          </a:solidFill>
+          <a:ln>
+            <a:noFill/>
+          </a:ln>
+        </p:spPr>
+        <p:style>
+          <a:lnRef idx="1">
+            <a:schemeClr val="accent1"/>
+          </a:lnRef>
+          <a:fillRef idx="3">
+            <a:schemeClr val="accent1"/>
+          </a:fillRef>
+          <a:effectRef idx="2">
+            <a:schemeClr val="accent1"/>
+          </a:effectRef>
+          <a:fontRef idx="minor">
+            <a:schemeClr val="lt1"/>
+          </a:fontRef>
+        </p:style>
+        <p:txBody>
+          <a:bodyPr rtlCol="0" anchor="ctr"/>
+          <a:lstStyle/>
+          <a:p>
+            <a:pPr algn="ctr"/>
+          </a:p>
+        </p:txBody>
+      </p:sp>
+      <p:sp>
+        <p:nvSpPr>
+          <p:cNvPr id="15" name="TextBox 14"/>
+          <p:cNvSpPr txBox="1"/>
+          <p:nvPr/>
+        </p:nvSpPr>
+        <p:spPr>
+          <a:xfrm>
+            <a:off x="2360000" y="6200000"/>
+            <a:ext cx="700000" cy="700000"/>
+          </a:xfrm>
+          <a:prstGeom prst="rect">
+            <a:avLst/>
+          </a:prstGeom>
+          <a:noFill/>
+        </p:spPr>
+        <p:txBody>
+          <a:bodyPr wrap="square" anchor="ctr">
+            <a:spAutoFit/>
+          </a:bodyPr>
+          <a:lstStyle/>
+          <a:p>
+            <a:pPr algn="ctr"/>
+            <a:r>
+              <a:rPr sz="2600" b="1">
+                <a:solidFill>
+                  <a:srgbClr val="FFFFFF"/>
+                </a:solidFill>
+                <a:latin typeface="Open Sans"/>
+                <a:ea typeface="Open Sans"/>
+                <a:cs typeface="Open Sans"/>
+              </a:rPr>
+              <a:t>4</a:t>
+            </a:r>
+          </a:p>
+        </p:txBody>
+      </p:sp>
+      <p:sp>
+        <p:nvSpPr>
+          <p:cNvPr id="16" name="TextBox 15"/>
+          <p:cNvSpPr txBox="1"/>
+          <p:nvPr/>
+        </p:nvSpPr>
+        <p:spPr>
+          <a:xfrm>
+            <a:off x="3360000" y="6200000"/>
+            <a:ext cx="14000000" cy="700000"/>
+          </a:xfrm>
+          <a:prstGeom prst="rect">
+            <a:avLst/>
+          </a:prstGeom>
+          <a:noFill/>
+        </p:spPr>
+        <p:txBody>
+          <a:bodyPr wrap="square" anchor="ctr">
+            <a:spAutoFit/>
+          </a:bodyPr>
+          <a:lstStyle/>
+          <a:p>
+            <a:pPr algn="l"/>
+            <a:r>
+              <a:rPr sz="3200" b="0">
+                <a:solidFill>
+                  <a:srgbClr val="333333"/>
+                </a:solidFill>
+                <a:latin typeface="Open Sans"/>
+                <a:ea typeface="Open Sans"/>
+                <a:cs typeface="Open Sans"/>
+              </a:rPr>
+              <a:t>Когда обзорный осмотр критически важен</a:t>
+            </a:r>
+          </a:p>
+        </p:txBody>
+      </p:sp>
+      <p:sp>
+        <p:nvSpPr>
+          <p:cNvPr id="17" name="Rectangle 16"/>
+          <p:cNvSpPr/>
+          <p:nvPr/>
+        </p:nvSpPr>
+        <p:spPr>
+          <a:xfrm>
+            <a:off x="22000000" y="1600000"/>
+            <a:ext cx="80000" cy="9000000"/>
           </a:xfrm>
           <a:prstGeom prst="rect">
             <a:avLst/>
@@ -3702,734 +4121,6 @@
           <a:lstStyle/>
           <a:p>
             <a:pPr algn="ctr"/>
-          </a:p>
-        </p:txBody>
-      </p:sp>
-      <p:sp>
-        <p:nvSpPr>
-          <p:cNvPr id="4" name="TextBox 3"/>
-          <p:cNvSpPr txBox="1"/>
-          <p:nvPr/>
-        </p:nvSpPr>
-        <p:spPr>
-          <a:xfrm>
-            <a:off x="800000" y="350000"/>
-            <a:ext cx="22800000" cy="1000000"/>
-          </a:xfrm>
-          <a:prstGeom prst="rect">
-            <a:avLst/>
-          </a:prstGeom>
-          <a:noFill/>
-        </p:spPr>
-        <p:txBody>
-          <a:bodyPr wrap="square" anchor="t">
-            <a:spAutoFit/>
-          </a:bodyPr>
-          <a:lstStyle/>
-          <a:p>
-            <a:pPr algn="l"/>
-            <a:r>
-              <a:rPr sz="4600" b="1">
-                <a:solidFill>
-                  <a:srgbClr val="333333"/>
-                </a:solidFill>
-                <a:latin typeface="Open Sans"/>
-                <a:ea typeface="Open Sans"/>
-                <a:cs typeface="Open Sans"/>
-              </a:rPr>
-              <a:t>Содержание</a:t>
-            </a:r>
-          </a:p>
-        </p:txBody>
-      </p:sp>
-      <p:sp>
-        <p:nvSpPr>
-          <p:cNvPr id="5" name="Rectangle 4"/>
-          <p:cNvSpPr/>
-          <p:nvPr/>
-        </p:nvSpPr>
-        <p:spPr>
-          <a:xfrm>
-            <a:off x="800000" y="1450000"/>
-            <a:ext cx="22800000" cy="20000"/>
-          </a:xfrm>
-          <a:prstGeom prst="rect">
-            <a:avLst/>
-          </a:prstGeom>
-          <a:solidFill>
-            <a:srgbClr val="E1E1E1"/>
-          </a:solidFill>
-          <a:ln>
-            <a:noFill/>
-          </a:ln>
-        </p:spPr>
-        <p:style>
-          <a:lnRef idx="1">
-            <a:schemeClr val="accent1"/>
-          </a:lnRef>
-          <a:fillRef idx="3">
-            <a:schemeClr val="accent1"/>
-          </a:fillRef>
-          <a:effectRef idx="2">
-            <a:schemeClr val="accent1"/>
-          </a:effectRef>
-          <a:fontRef idx="minor">
-            <a:schemeClr val="lt1"/>
-          </a:fontRef>
-        </p:style>
-        <p:txBody>
-          <a:bodyPr rtlCol="0" anchor="ctr"/>
-          <a:lstStyle/>
-          <a:p>
-            <a:pPr algn="ctr"/>
-          </a:p>
-        </p:txBody>
-      </p:sp>
-      <p:sp>
-        <p:nvSpPr>
-          <p:cNvPr id="6" name="Rounded Rectangle 5"/>
-          <p:cNvSpPr/>
-          <p:nvPr/>
-        </p:nvSpPr>
-        <p:spPr>
-          <a:xfrm>
-            <a:off x="800000" y="1950000"/>
-            <a:ext cx="900000" cy="900000"/>
-          </a:xfrm>
-          <a:prstGeom prst="roundRect">
-            <a:avLst/>
-          </a:prstGeom>
-          <a:solidFill>
-            <a:srgbClr val="0055AA"/>
-          </a:solidFill>
-          <a:ln>
-            <a:noFill/>
-          </a:ln>
-        </p:spPr>
-        <p:style>
-          <a:lnRef idx="1">
-            <a:schemeClr val="accent1"/>
-          </a:lnRef>
-          <a:fillRef idx="3">
-            <a:schemeClr val="accent1"/>
-          </a:fillRef>
-          <a:effectRef idx="2">
-            <a:schemeClr val="accent1"/>
-          </a:effectRef>
-          <a:fontRef idx="minor">
-            <a:schemeClr val="lt1"/>
-          </a:fontRef>
-        </p:style>
-        <p:txBody>
-          <a:bodyPr rtlCol="0" anchor="ctr"/>
-          <a:lstStyle/>
-          <a:p>
-            <a:pPr algn="ctr"/>
-          </a:p>
-        </p:txBody>
-      </p:sp>
-      <p:sp>
-        <p:nvSpPr>
-          <p:cNvPr id="7" name="TextBox 6"/>
-          <p:cNvSpPr txBox="1"/>
-          <p:nvPr/>
-        </p:nvSpPr>
-        <p:spPr>
-          <a:xfrm>
-            <a:off x="800000" y="1950000"/>
-            <a:ext cx="900000" cy="900000"/>
-          </a:xfrm>
-          <a:prstGeom prst="rect">
-            <a:avLst/>
-          </a:prstGeom>
-          <a:noFill/>
-        </p:spPr>
-        <p:txBody>
-          <a:bodyPr wrap="square" anchor="ctr">
-            <a:spAutoFit/>
-          </a:bodyPr>
-          <a:lstStyle/>
-          <a:p>
-            <a:pPr algn="ctr"/>
-            <a:r>
-              <a:rPr sz="3200" b="1">
-                <a:solidFill>
-                  <a:srgbClr val="FFFFFF"/>
-                </a:solidFill>
-                <a:latin typeface="Open Sans"/>
-                <a:ea typeface="Open Sans"/>
-                <a:cs typeface="Open Sans"/>
-              </a:rPr>
-              <a:t>1</a:t>
-            </a:r>
-          </a:p>
-        </p:txBody>
-      </p:sp>
-      <p:sp>
-        <p:nvSpPr>
-          <p:cNvPr id="8" name="Rectangle 7"/>
-          <p:cNvSpPr/>
-          <p:nvPr/>
-        </p:nvSpPr>
-        <p:spPr>
-          <a:xfrm>
-            <a:off x="1900000" y="1950000"/>
-            <a:ext cx="20500000" cy="900000"/>
-          </a:xfrm>
-          <a:prstGeom prst="rect">
-            <a:avLst/>
-          </a:prstGeom>
-          <a:solidFill>
-            <a:srgbClr val="FFFFFF"/>
-          </a:solidFill>
-          <a:ln w="12700">
-            <a:solidFill>
-              <a:srgbClr val="E1E1E1"/>
-            </a:solidFill>
-          </a:ln>
-        </p:spPr>
-        <p:style>
-          <a:lnRef idx="1">
-            <a:schemeClr val="accent1"/>
-          </a:lnRef>
-          <a:fillRef idx="3">
-            <a:schemeClr val="accent1"/>
-          </a:fillRef>
-          <a:effectRef idx="2">
-            <a:schemeClr val="accent1"/>
-          </a:effectRef>
-          <a:fontRef idx="minor">
-            <a:schemeClr val="lt1"/>
-          </a:fontRef>
-        </p:style>
-        <p:txBody>
-          <a:bodyPr rtlCol="0" anchor="ctr"/>
-          <a:lstStyle/>
-          <a:p>
-            <a:pPr algn="ctr"/>
-          </a:p>
-        </p:txBody>
-      </p:sp>
-      <p:sp>
-        <p:nvSpPr>
-          <p:cNvPr id="9" name="TextBox 8"/>
-          <p:cNvSpPr txBox="1"/>
-          <p:nvPr/>
-        </p:nvSpPr>
-        <p:spPr>
-          <a:xfrm>
-            <a:off x="2200000" y="1950000"/>
-            <a:ext cx="19500000" cy="900000"/>
-          </a:xfrm>
-          <a:prstGeom prst="rect">
-            <a:avLst/>
-          </a:prstGeom>
-          <a:noFill/>
-        </p:spPr>
-        <p:txBody>
-          <a:bodyPr wrap="square" anchor="ctr">
-            <a:spAutoFit/>
-          </a:bodyPr>
-          <a:lstStyle/>
-          <a:p>
-            <a:pPr algn="l"/>
-            <a:r>
-              <a:rPr sz="3200" b="0">
-                <a:solidFill>
-                  <a:srgbClr val="333333"/>
-                </a:solidFill>
-                <a:latin typeface="Open Sans"/>
-                <a:ea typeface="Open Sans"/>
-                <a:cs typeface="Open Sans"/>
-              </a:rPr>
-              <a:t>Определение кровотечения и признаки кровопотери</a:t>
-            </a:r>
-          </a:p>
-        </p:txBody>
-      </p:sp>
-      <p:sp>
-        <p:nvSpPr>
-          <p:cNvPr id="10" name="Rounded Rectangle 9"/>
-          <p:cNvSpPr/>
-          <p:nvPr/>
-        </p:nvSpPr>
-        <p:spPr>
-          <a:xfrm>
-            <a:off x="800000" y="3150000"/>
-            <a:ext cx="900000" cy="900000"/>
-          </a:xfrm>
-          <a:prstGeom prst="roundRect">
-            <a:avLst/>
-          </a:prstGeom>
-          <a:solidFill>
-            <a:srgbClr val="0055AA"/>
-          </a:solidFill>
-          <a:ln>
-            <a:noFill/>
-          </a:ln>
-        </p:spPr>
-        <p:style>
-          <a:lnRef idx="1">
-            <a:schemeClr val="accent1"/>
-          </a:lnRef>
-          <a:fillRef idx="3">
-            <a:schemeClr val="accent1"/>
-          </a:fillRef>
-          <a:effectRef idx="2">
-            <a:schemeClr val="accent1"/>
-          </a:effectRef>
-          <a:fontRef idx="minor">
-            <a:schemeClr val="lt1"/>
-          </a:fontRef>
-        </p:style>
-        <p:txBody>
-          <a:bodyPr rtlCol="0" anchor="ctr"/>
-          <a:lstStyle/>
-          <a:p>
-            <a:pPr algn="ctr"/>
-          </a:p>
-        </p:txBody>
-      </p:sp>
-      <p:sp>
-        <p:nvSpPr>
-          <p:cNvPr id="11" name="TextBox 10"/>
-          <p:cNvSpPr txBox="1"/>
-          <p:nvPr/>
-        </p:nvSpPr>
-        <p:spPr>
-          <a:xfrm>
-            <a:off x="800000" y="3150000"/>
-            <a:ext cx="900000" cy="900000"/>
-          </a:xfrm>
-          <a:prstGeom prst="rect">
-            <a:avLst/>
-          </a:prstGeom>
-          <a:noFill/>
-        </p:spPr>
-        <p:txBody>
-          <a:bodyPr wrap="square" anchor="ctr">
-            <a:spAutoFit/>
-          </a:bodyPr>
-          <a:lstStyle/>
-          <a:p>
-            <a:pPr algn="ctr"/>
-            <a:r>
-              <a:rPr sz="3200" b="1">
-                <a:solidFill>
-                  <a:srgbClr val="FFFFFF"/>
-                </a:solidFill>
-                <a:latin typeface="Open Sans"/>
-                <a:ea typeface="Open Sans"/>
-                <a:cs typeface="Open Sans"/>
-              </a:rPr>
-              <a:t>2</a:t>
-            </a:r>
-          </a:p>
-        </p:txBody>
-      </p:sp>
-      <p:sp>
-        <p:nvSpPr>
-          <p:cNvPr id="12" name="Rectangle 11"/>
-          <p:cNvSpPr/>
-          <p:nvPr/>
-        </p:nvSpPr>
-        <p:spPr>
-          <a:xfrm>
-            <a:off x="1900000" y="3150000"/>
-            <a:ext cx="20500000" cy="900000"/>
-          </a:xfrm>
-          <a:prstGeom prst="rect">
-            <a:avLst/>
-          </a:prstGeom>
-          <a:solidFill>
-            <a:srgbClr val="FFFFFF"/>
-          </a:solidFill>
-          <a:ln w="12700">
-            <a:solidFill>
-              <a:srgbClr val="E1E1E1"/>
-            </a:solidFill>
-          </a:ln>
-        </p:spPr>
-        <p:style>
-          <a:lnRef idx="1">
-            <a:schemeClr val="accent1"/>
-          </a:lnRef>
-          <a:fillRef idx="3">
-            <a:schemeClr val="accent1"/>
-          </a:fillRef>
-          <a:effectRef idx="2">
-            <a:schemeClr val="accent1"/>
-          </a:effectRef>
-          <a:fontRef idx="minor">
-            <a:schemeClr val="lt1"/>
-          </a:fontRef>
-        </p:style>
-        <p:txBody>
-          <a:bodyPr rtlCol="0" anchor="ctr"/>
-          <a:lstStyle/>
-          <a:p>
-            <a:pPr algn="ctr"/>
-          </a:p>
-        </p:txBody>
-      </p:sp>
-      <p:sp>
-        <p:nvSpPr>
-          <p:cNvPr id="13" name="TextBox 12"/>
-          <p:cNvSpPr txBox="1"/>
-          <p:nvPr/>
-        </p:nvSpPr>
-        <p:spPr>
-          <a:xfrm>
-            <a:off x="2200000" y="3150000"/>
-            <a:ext cx="19500000" cy="900000"/>
-          </a:xfrm>
-          <a:prstGeom prst="rect">
-            <a:avLst/>
-          </a:prstGeom>
-          <a:noFill/>
-        </p:spPr>
-        <p:txBody>
-          <a:bodyPr wrap="square" anchor="ctr">
-            <a:spAutoFit/>
-          </a:bodyPr>
-          <a:lstStyle/>
-          <a:p>
-            <a:pPr algn="l"/>
-            <a:r>
-              <a:rPr sz="3200" b="0">
-                <a:solidFill>
-                  <a:srgbClr val="333333"/>
-                </a:solidFill>
-                <a:latin typeface="Open Sans"/>
-                <a:ea typeface="Open Sans"/>
-                <a:cs typeface="Open Sans"/>
-              </a:rPr>
-              <a:t>Цель и порядок обзорного осмотра</a:t>
-            </a:r>
-          </a:p>
-        </p:txBody>
-      </p:sp>
-      <p:sp>
-        <p:nvSpPr>
-          <p:cNvPr id="14" name="Rounded Rectangle 13"/>
-          <p:cNvSpPr/>
-          <p:nvPr/>
-        </p:nvSpPr>
-        <p:spPr>
-          <a:xfrm>
-            <a:off x="800000" y="4350000"/>
-            <a:ext cx="900000" cy="900000"/>
-          </a:xfrm>
-          <a:prstGeom prst="roundRect">
-            <a:avLst/>
-          </a:prstGeom>
-          <a:solidFill>
-            <a:srgbClr val="0055AA"/>
-          </a:solidFill>
-          <a:ln>
-            <a:noFill/>
-          </a:ln>
-        </p:spPr>
-        <p:style>
-          <a:lnRef idx="1">
-            <a:schemeClr val="accent1"/>
-          </a:lnRef>
-          <a:fillRef idx="3">
-            <a:schemeClr val="accent1"/>
-          </a:fillRef>
-          <a:effectRef idx="2">
-            <a:schemeClr val="accent1"/>
-          </a:effectRef>
-          <a:fontRef idx="minor">
-            <a:schemeClr val="lt1"/>
-          </a:fontRef>
-        </p:style>
-        <p:txBody>
-          <a:bodyPr rtlCol="0" anchor="ctr"/>
-          <a:lstStyle/>
-          <a:p>
-            <a:pPr algn="ctr"/>
-          </a:p>
-        </p:txBody>
-      </p:sp>
-      <p:sp>
-        <p:nvSpPr>
-          <p:cNvPr id="15" name="TextBox 14"/>
-          <p:cNvSpPr txBox="1"/>
-          <p:nvPr/>
-        </p:nvSpPr>
-        <p:spPr>
-          <a:xfrm>
-            <a:off x="800000" y="4350000"/>
-            <a:ext cx="900000" cy="900000"/>
-          </a:xfrm>
-          <a:prstGeom prst="rect">
-            <a:avLst/>
-          </a:prstGeom>
-          <a:noFill/>
-        </p:spPr>
-        <p:txBody>
-          <a:bodyPr wrap="square" anchor="ctr">
-            <a:spAutoFit/>
-          </a:bodyPr>
-          <a:lstStyle/>
-          <a:p>
-            <a:pPr algn="ctr"/>
-            <a:r>
-              <a:rPr sz="3200" b="1">
-                <a:solidFill>
-                  <a:srgbClr val="FFFFFF"/>
-                </a:solidFill>
-                <a:latin typeface="Open Sans"/>
-                <a:ea typeface="Open Sans"/>
-                <a:cs typeface="Open Sans"/>
-              </a:rPr>
-              <a:t>3</a:t>
-            </a:r>
-          </a:p>
-        </p:txBody>
-      </p:sp>
-      <p:sp>
-        <p:nvSpPr>
-          <p:cNvPr id="16" name="Rectangle 15"/>
-          <p:cNvSpPr/>
-          <p:nvPr/>
-        </p:nvSpPr>
-        <p:spPr>
-          <a:xfrm>
-            <a:off x="1900000" y="4350000"/>
-            <a:ext cx="20500000" cy="900000"/>
-          </a:xfrm>
-          <a:prstGeom prst="rect">
-            <a:avLst/>
-          </a:prstGeom>
-          <a:solidFill>
-            <a:srgbClr val="FFFFFF"/>
-          </a:solidFill>
-          <a:ln w="12700">
-            <a:solidFill>
-              <a:srgbClr val="E1E1E1"/>
-            </a:solidFill>
-          </a:ln>
-        </p:spPr>
-        <p:style>
-          <a:lnRef idx="1">
-            <a:schemeClr val="accent1"/>
-          </a:lnRef>
-          <a:fillRef idx="3">
-            <a:schemeClr val="accent1"/>
-          </a:fillRef>
-          <a:effectRef idx="2">
-            <a:schemeClr val="accent1"/>
-          </a:effectRef>
-          <a:fontRef idx="minor">
-            <a:schemeClr val="lt1"/>
-          </a:fontRef>
-        </p:style>
-        <p:txBody>
-          <a:bodyPr rtlCol="0" anchor="ctr"/>
-          <a:lstStyle/>
-          <a:p>
-            <a:pPr algn="ctr"/>
-          </a:p>
-        </p:txBody>
-      </p:sp>
-      <p:sp>
-        <p:nvSpPr>
-          <p:cNvPr id="17" name="TextBox 16"/>
-          <p:cNvSpPr txBox="1"/>
-          <p:nvPr/>
-        </p:nvSpPr>
-        <p:spPr>
-          <a:xfrm>
-            <a:off x="2200000" y="4350000"/>
-            <a:ext cx="19500000" cy="900000"/>
-          </a:xfrm>
-          <a:prstGeom prst="rect">
-            <a:avLst/>
-          </a:prstGeom>
-          <a:noFill/>
-        </p:spPr>
-        <p:txBody>
-          <a:bodyPr wrap="square" anchor="ctr">
-            <a:spAutoFit/>
-          </a:bodyPr>
-          <a:lstStyle/>
-          <a:p>
-            <a:pPr algn="l"/>
-            <a:r>
-              <a:rPr sz="3200" b="0">
-                <a:solidFill>
-                  <a:srgbClr val="333333"/>
-                </a:solidFill>
-                <a:latin typeface="Open Sans"/>
-                <a:ea typeface="Open Sans"/>
-                <a:cs typeface="Open Sans"/>
-              </a:rPr>
-              <a:t>Обзорный и подробный осмотр: различия</a:t>
-            </a:r>
-          </a:p>
-        </p:txBody>
-      </p:sp>
-      <p:sp>
-        <p:nvSpPr>
-          <p:cNvPr id="18" name="Rounded Rectangle 17"/>
-          <p:cNvSpPr/>
-          <p:nvPr/>
-        </p:nvSpPr>
-        <p:spPr>
-          <a:xfrm>
-            <a:off x="800000" y="5550000"/>
-            <a:ext cx="900000" cy="900000"/>
-          </a:xfrm>
-          <a:prstGeom prst="roundRect">
-            <a:avLst/>
-          </a:prstGeom>
-          <a:solidFill>
-            <a:srgbClr val="0055AA"/>
-          </a:solidFill>
-          <a:ln>
-            <a:noFill/>
-          </a:ln>
-        </p:spPr>
-        <p:style>
-          <a:lnRef idx="1">
-            <a:schemeClr val="accent1"/>
-          </a:lnRef>
-          <a:fillRef idx="3">
-            <a:schemeClr val="accent1"/>
-          </a:fillRef>
-          <a:effectRef idx="2">
-            <a:schemeClr val="accent1"/>
-          </a:effectRef>
-          <a:fontRef idx="minor">
-            <a:schemeClr val="lt1"/>
-          </a:fontRef>
-        </p:style>
-        <p:txBody>
-          <a:bodyPr rtlCol="0" anchor="ctr"/>
-          <a:lstStyle/>
-          <a:p>
-            <a:pPr algn="ctr"/>
-          </a:p>
-        </p:txBody>
-      </p:sp>
-      <p:sp>
-        <p:nvSpPr>
-          <p:cNvPr id="19" name="TextBox 18"/>
-          <p:cNvSpPr txBox="1"/>
-          <p:nvPr/>
-        </p:nvSpPr>
-        <p:spPr>
-          <a:xfrm>
-            <a:off x="800000" y="5550000"/>
-            <a:ext cx="900000" cy="900000"/>
-          </a:xfrm>
-          <a:prstGeom prst="rect">
-            <a:avLst/>
-          </a:prstGeom>
-          <a:noFill/>
-        </p:spPr>
-        <p:txBody>
-          <a:bodyPr wrap="square" anchor="ctr">
-            <a:spAutoFit/>
-          </a:bodyPr>
-          <a:lstStyle/>
-          <a:p>
-            <a:pPr algn="ctr"/>
-            <a:r>
-              <a:rPr sz="3200" b="1">
-                <a:solidFill>
-                  <a:srgbClr val="FFFFFF"/>
-                </a:solidFill>
-                <a:latin typeface="Open Sans"/>
-                <a:ea typeface="Open Sans"/>
-                <a:cs typeface="Open Sans"/>
-              </a:rPr>
-              <a:t>4</a:t>
-            </a:r>
-          </a:p>
-        </p:txBody>
-      </p:sp>
-      <p:sp>
-        <p:nvSpPr>
-          <p:cNvPr id="20" name="Rectangle 19"/>
-          <p:cNvSpPr/>
-          <p:nvPr/>
-        </p:nvSpPr>
-        <p:spPr>
-          <a:xfrm>
-            <a:off x="1900000" y="5550000"/>
-            <a:ext cx="20500000" cy="900000"/>
-          </a:xfrm>
-          <a:prstGeom prst="rect">
-            <a:avLst/>
-          </a:prstGeom>
-          <a:solidFill>
-            <a:srgbClr val="FFFFFF"/>
-          </a:solidFill>
-          <a:ln w="12700">
-            <a:solidFill>
-              <a:srgbClr val="E1E1E1"/>
-            </a:solidFill>
-          </a:ln>
-        </p:spPr>
-        <p:style>
-          <a:lnRef idx="1">
-            <a:schemeClr val="accent1"/>
-          </a:lnRef>
-          <a:fillRef idx="3">
-            <a:schemeClr val="accent1"/>
-          </a:fillRef>
-          <a:effectRef idx="2">
-            <a:schemeClr val="accent1"/>
-          </a:effectRef>
-          <a:fontRef idx="minor">
-            <a:schemeClr val="lt1"/>
-          </a:fontRef>
-        </p:style>
-        <p:txBody>
-          <a:bodyPr rtlCol="0" anchor="ctr"/>
-          <a:lstStyle/>
-          <a:p>
-            <a:pPr algn="ctr"/>
-          </a:p>
-        </p:txBody>
-      </p:sp>
-      <p:sp>
-        <p:nvSpPr>
-          <p:cNvPr id="21" name="TextBox 20"/>
-          <p:cNvSpPr txBox="1"/>
-          <p:nvPr/>
-        </p:nvSpPr>
-        <p:spPr>
-          <a:xfrm>
-            <a:off x="2200000" y="5550000"/>
-            <a:ext cx="19500000" cy="900000"/>
-          </a:xfrm>
-          <a:prstGeom prst="rect">
-            <a:avLst/>
-          </a:prstGeom>
-          <a:noFill/>
-        </p:spPr>
-        <p:txBody>
-          <a:bodyPr wrap="square" anchor="ctr">
-            <a:spAutoFit/>
-          </a:bodyPr>
-          <a:lstStyle/>
-          <a:p>
-            <a:pPr algn="l"/>
-            <a:r>
-              <a:rPr sz="3200" b="0">
-                <a:solidFill>
-                  <a:srgbClr val="333333"/>
-                </a:solidFill>
-                <a:latin typeface="Open Sans"/>
-                <a:ea typeface="Open Sans"/>
-                <a:cs typeface="Open Sans"/>
-              </a:rPr>
-              <a:t>Когда обзорный осмотр критически важен</a:t>
-            </a:r>
           </a:p>
         </p:txBody>
       </p:sp>
@@ -4496,57 +4187,14 @@
       </p:sp>
       <p:sp>
         <p:nvSpPr>
-          <p:cNvPr id="3" name="Rectangle 2"/>
-          <p:cNvSpPr/>
-          <p:nvPr/>
-        </p:nvSpPr>
-        <p:spPr>
-          <a:xfrm>
-            <a:off x="0" y="0"/>
-            <a:ext cx="24384000" cy="120000"/>
-          </a:xfrm>
-          <a:prstGeom prst="rect">
-            <a:avLst/>
-          </a:prstGeom>
-          <a:solidFill>
-            <a:srgbClr val="DDDDDD"/>
-          </a:solidFill>
-          <a:ln>
-            <a:noFill/>
-          </a:ln>
-        </p:spPr>
-        <p:style>
-          <a:lnRef idx="1">
-            <a:schemeClr val="accent1"/>
-          </a:lnRef>
-          <a:fillRef idx="3">
-            <a:schemeClr val="accent1"/>
-          </a:fillRef>
-          <a:effectRef idx="2">
-            <a:schemeClr val="accent1"/>
-          </a:effectRef>
-          <a:fontRef idx="minor">
-            <a:schemeClr val="lt1"/>
-          </a:fontRef>
-        </p:style>
-        <p:txBody>
-          <a:bodyPr rtlCol="0" anchor="ctr"/>
-          <a:lstStyle/>
-          <a:p>
-            <a:pPr algn="ctr"/>
-          </a:p>
-        </p:txBody>
-      </p:sp>
-      <p:sp>
-        <p:nvSpPr>
-          <p:cNvPr id="4" name="TextBox 3"/>
+          <p:cNvPr id="3" name="TextBox 2"/>
           <p:cNvSpPr txBox="1"/>
           <p:nvPr/>
         </p:nvSpPr>
         <p:spPr>
           <a:xfrm>
-            <a:off x="800000" y="350000"/>
-            <a:ext cx="22800000" cy="1000000"/>
+            <a:off x="360000" y="350000"/>
+            <a:ext cx="23664000" cy="1100000"/>
           </a:xfrm>
           <a:prstGeom prst="rect">
             <a:avLst/>
@@ -4576,14 +4224,14 @@
       </p:sp>
       <p:sp>
         <p:nvSpPr>
-          <p:cNvPr id="5" name="Rectangle 4"/>
+          <p:cNvPr id="4" name="Rectangle 3"/>
           <p:cNvSpPr/>
           <p:nvPr/>
         </p:nvSpPr>
         <p:spPr>
           <a:xfrm>
-            <a:off x="800000" y="1450000"/>
-            <a:ext cx="22800000" cy="20000"/>
+            <a:off x="360000" y="1450000"/>
+            <a:ext cx="23664000" cy="20000"/>
           </a:xfrm>
           <a:prstGeom prst="rect">
             <a:avLst/>
@@ -4619,14 +4267,57 @@
       </p:sp>
       <p:sp>
         <p:nvSpPr>
+          <p:cNvPr id="5" name="Rounded Rectangle 4"/>
+          <p:cNvSpPr/>
+          <p:nvPr/>
+        </p:nvSpPr>
+        <p:spPr>
+          <a:xfrm>
+            <a:off x="360000" y="1900000"/>
+            <a:ext cx="900000" cy="900000"/>
+          </a:xfrm>
+          <a:prstGeom prst="roundRect">
+            <a:avLst/>
+          </a:prstGeom>
+          <a:solidFill>
+            <a:srgbClr val="0055AA"/>
+          </a:solidFill>
+          <a:ln>
+            <a:noFill/>
+          </a:ln>
+        </p:spPr>
+        <p:style>
+          <a:lnRef idx="1">
+            <a:schemeClr val="accent1"/>
+          </a:lnRef>
+          <a:fillRef idx="3">
+            <a:schemeClr val="accent1"/>
+          </a:fillRef>
+          <a:effectRef idx="2">
+            <a:schemeClr val="accent1"/>
+          </a:effectRef>
+          <a:fontRef idx="minor">
+            <a:schemeClr val="lt1"/>
+          </a:fontRef>
+        </p:style>
+        <p:txBody>
+          <a:bodyPr rtlCol="0" anchor="ctr"/>
+          <a:lstStyle/>
+          <a:p>
+            <a:pPr algn="ctr"/>
+          </a:p>
+        </p:txBody>
+      </p:sp>
+      <p:sp>
+        <p:nvSpPr>
           <p:cNvPr id="6" name="TextBox 5"/>
           <p:cNvSpPr txBox="1"/>
           <p:nvPr/>
         </p:nvSpPr>
         <p:spPr>
           <a:xfrm>
-            <a:off x="800000" y="1950000"/>
-            <a:ext cx="22800000" cy="8500000"/>
+            <a:off x="360000" y="1900000"/>
+            <a:ext cx="900000" cy="900000"/>
           </a:xfrm>
           <a:prstGeom prst="rect">
             <a:avLst/>
@@ -4634,34 +4325,49 @@
           <a:noFill/>
         </p:spPr>
         <p:txBody>
-          <a:bodyPr wrap="square">
+          <a:bodyPr wrap="square" anchor="ctr">
             <a:spAutoFit/>
           </a:bodyPr>
           <a:lstStyle/>
           <a:p>
-            <a:pPr algn="l">
-              <a:spcAft>
-                <a:spcPts val="1000"/>
-              </a:spcAft>
-            </a:pPr>
-            <a:r>
-              <a:rPr sz="3200" b="0">
-                <a:solidFill>
-                  <a:srgbClr val="333333"/>
+            <a:pPr algn="ctr"/>
+            <a:r>
+              <a:rPr sz="2200" b="1">
+                <a:solidFill>
+                  <a:srgbClr val="FFFFFF"/>
                 </a:solidFill>
                 <a:latin typeface="Open Sans"/>
                 <a:ea typeface="Open Sans"/>
                 <a:cs typeface="Open Sans"/>
               </a:rPr>
-              <a:t>•  Кровотечение — выход крови из сосудистого русла.</a:t>
-            </a:r>
-          </a:p>
-          <a:p>
-            <a:pPr algn="l">
-              <a:spcAft>
-                <a:spcPts val="1000"/>
-              </a:spcAft>
-            </a:pPr>
+              <a:t>1</a:t>
+            </a:r>
+          </a:p>
+        </p:txBody>
+      </p:sp>
+      <p:sp>
+        <p:nvSpPr>
+          <p:cNvPr id="7" name="TextBox 6"/>
+          <p:cNvSpPr txBox="1"/>
+          <p:nvPr/>
+        </p:nvSpPr>
+        <p:spPr>
+          <a:xfrm>
+            <a:off x="1560000" y="1900000"/>
+            <a:ext cx="22464000" cy="900000"/>
+          </a:xfrm>
+          <a:prstGeom prst="rect">
+            <a:avLst/>
+          </a:prstGeom>
+          <a:noFill/>
+        </p:spPr>
+        <p:txBody>
+          <a:bodyPr wrap="square" anchor="ctr">
+            <a:spAutoFit/>
+          </a:bodyPr>
+          <a:lstStyle/>
+          <a:p>
+            <a:pPr algn="l"/>
             <a:r>
               <a:rPr sz="3200" b="0">
                 <a:solidFill>
@@ -4671,33 +4377,114 @@
                 <a:ea typeface="Open Sans"/>
                 <a:cs typeface="Open Sans"/>
               </a:rPr>
-              <a:t>•  Приводит к острой кровопотере и угрозе жизни.</a:t>
-            </a:r>
-          </a:p>
-          <a:p>
-            <a:pPr algn="l">
-              <a:spcAft>
-                <a:spcPts val="1000"/>
-              </a:spcAft>
-            </a:pPr>
-            <a:r>
-              <a:rPr sz="3200" b="0">
-                <a:solidFill>
-                  <a:srgbClr val="333333"/>
+              <a:t>Выход крови из сосудистого русла</a:t>
+            </a:r>
+          </a:p>
+        </p:txBody>
+      </p:sp>
+      <p:sp>
+        <p:nvSpPr>
+          <p:cNvPr id="8" name="Rounded Rectangle 7"/>
+          <p:cNvSpPr/>
+          <p:nvPr/>
+        </p:nvSpPr>
+        <p:spPr>
+          <a:xfrm>
+            <a:off x="360000" y="3500000"/>
+            <a:ext cx="900000" cy="900000"/>
+          </a:xfrm>
+          <a:prstGeom prst="roundRect">
+            <a:avLst/>
+          </a:prstGeom>
+          <a:solidFill>
+            <a:srgbClr val="0055AA"/>
+          </a:solidFill>
+          <a:ln>
+            <a:noFill/>
+          </a:ln>
+        </p:spPr>
+        <p:style>
+          <a:lnRef idx="1">
+            <a:schemeClr val="accent1"/>
+          </a:lnRef>
+          <a:fillRef idx="3">
+            <a:schemeClr val="accent1"/>
+          </a:fillRef>
+          <a:effectRef idx="2">
+            <a:schemeClr val="accent1"/>
+          </a:effectRef>
+          <a:fontRef idx="minor">
+            <a:schemeClr val="lt1"/>
+          </a:fontRef>
+        </p:style>
+        <p:txBody>
+          <a:bodyPr rtlCol="0" anchor="ctr"/>
+          <a:lstStyle/>
+          <a:p>
+            <a:pPr algn="ctr"/>
+          </a:p>
+        </p:txBody>
+      </p:sp>
+      <p:sp>
+        <p:nvSpPr>
+          <p:cNvPr id="9" name="TextBox 8"/>
+          <p:cNvSpPr txBox="1"/>
+          <p:nvPr/>
+        </p:nvSpPr>
+        <p:spPr>
+          <a:xfrm>
+            <a:off x="360000" y="3500000"/>
+            <a:ext cx="900000" cy="900000"/>
+          </a:xfrm>
+          <a:prstGeom prst="rect">
+            <a:avLst/>
+          </a:prstGeom>
+          <a:noFill/>
+        </p:spPr>
+        <p:txBody>
+          <a:bodyPr wrap="square" anchor="ctr">
+            <a:spAutoFit/>
+          </a:bodyPr>
+          <a:lstStyle/>
+          <a:p>
+            <a:pPr algn="ctr"/>
+            <a:r>
+              <a:rPr sz="2200" b="1">
+                <a:solidFill>
+                  <a:srgbClr val="FFFFFF"/>
                 </a:solidFill>
                 <a:latin typeface="Open Sans"/>
                 <a:ea typeface="Open Sans"/>
                 <a:cs typeface="Open Sans"/>
               </a:rPr>
-              <a:t>•  Наружное кровотечение видно снаружи (рана, истечение крови).</a:t>
-            </a:r>
-          </a:p>
-          <a:p>
-            <a:pPr algn="l">
-              <a:spcAft>
-                <a:spcPts val="1000"/>
-              </a:spcAft>
-            </a:pPr>
+              <a:t>2</a:t>
+            </a:r>
+          </a:p>
+        </p:txBody>
+      </p:sp>
+      <p:sp>
+        <p:nvSpPr>
+          <p:cNvPr id="10" name="TextBox 9"/>
+          <p:cNvSpPr txBox="1"/>
+          <p:nvPr/>
+        </p:nvSpPr>
+        <p:spPr>
+          <a:xfrm>
+            <a:off x="1560000" y="3500000"/>
+            <a:ext cx="22464000" cy="900000"/>
+          </a:xfrm>
+          <a:prstGeom prst="rect">
+            <a:avLst/>
+          </a:prstGeom>
+          <a:noFill/>
+        </p:spPr>
+        <p:txBody>
+          <a:bodyPr wrap="square" anchor="ctr">
+            <a:spAutoFit/>
+          </a:bodyPr>
+          <a:lstStyle/>
+          <a:p>
+            <a:pPr algn="l"/>
             <a:r>
               <a:rPr sz="3200" b="0">
                 <a:solidFill>
@@ -4707,7 +4494,241 @@
                 <a:ea typeface="Open Sans"/>
                 <a:cs typeface="Open Sans"/>
               </a:rPr>
-              <a:t>•  Требует немедленной временной остановки.</a:t>
+              <a:t>Приводит к острой кровопотере</a:t>
+            </a:r>
+          </a:p>
+        </p:txBody>
+      </p:sp>
+      <p:sp>
+        <p:nvSpPr>
+          <p:cNvPr id="11" name="Rounded Rectangle 10"/>
+          <p:cNvSpPr/>
+          <p:nvPr/>
+        </p:nvSpPr>
+        <p:spPr>
+          <a:xfrm>
+            <a:off x="360000" y="5100000"/>
+            <a:ext cx="900000" cy="900000"/>
+          </a:xfrm>
+          <a:prstGeom prst="roundRect">
+            <a:avLst/>
+          </a:prstGeom>
+          <a:solidFill>
+            <a:srgbClr val="0055AA"/>
+          </a:solidFill>
+          <a:ln>
+            <a:noFill/>
+          </a:ln>
+        </p:spPr>
+        <p:style>
+          <a:lnRef idx="1">
+            <a:schemeClr val="accent1"/>
+          </a:lnRef>
+          <a:fillRef idx="3">
+            <a:schemeClr val="accent1"/>
+          </a:fillRef>
+          <a:effectRef idx="2">
+            <a:schemeClr val="accent1"/>
+          </a:effectRef>
+          <a:fontRef idx="minor">
+            <a:schemeClr val="lt1"/>
+          </a:fontRef>
+        </p:style>
+        <p:txBody>
+          <a:bodyPr rtlCol="0" anchor="ctr"/>
+          <a:lstStyle/>
+          <a:p>
+            <a:pPr algn="ctr"/>
+          </a:p>
+        </p:txBody>
+      </p:sp>
+      <p:sp>
+        <p:nvSpPr>
+          <p:cNvPr id="12" name="TextBox 11"/>
+          <p:cNvSpPr txBox="1"/>
+          <p:nvPr/>
+        </p:nvSpPr>
+        <p:spPr>
+          <a:xfrm>
+            <a:off x="360000" y="5100000"/>
+            <a:ext cx="900000" cy="900000"/>
+          </a:xfrm>
+          <a:prstGeom prst="rect">
+            <a:avLst/>
+          </a:prstGeom>
+          <a:noFill/>
+        </p:spPr>
+        <p:txBody>
+          <a:bodyPr wrap="square" anchor="ctr">
+            <a:spAutoFit/>
+          </a:bodyPr>
+          <a:lstStyle/>
+          <a:p>
+            <a:pPr algn="ctr"/>
+            <a:r>
+              <a:rPr sz="2200" b="1">
+                <a:solidFill>
+                  <a:srgbClr val="FFFFFF"/>
+                </a:solidFill>
+                <a:latin typeface="Open Sans"/>
+                <a:ea typeface="Open Sans"/>
+                <a:cs typeface="Open Sans"/>
+              </a:rPr>
+              <a:t>3</a:t>
+            </a:r>
+          </a:p>
+        </p:txBody>
+      </p:sp>
+      <p:sp>
+        <p:nvSpPr>
+          <p:cNvPr id="13" name="TextBox 12"/>
+          <p:cNvSpPr txBox="1"/>
+          <p:nvPr/>
+        </p:nvSpPr>
+        <p:spPr>
+          <a:xfrm>
+            <a:off x="1560000" y="5100000"/>
+            <a:ext cx="22464000" cy="900000"/>
+          </a:xfrm>
+          <a:prstGeom prst="rect">
+            <a:avLst/>
+          </a:prstGeom>
+          <a:noFill/>
+        </p:spPr>
+        <p:txBody>
+          <a:bodyPr wrap="square" anchor="ctr">
+            <a:spAutoFit/>
+          </a:bodyPr>
+          <a:lstStyle/>
+          <a:p>
+            <a:pPr algn="l"/>
+            <a:r>
+              <a:rPr sz="3200" b="0">
+                <a:solidFill>
+                  <a:srgbClr val="333333"/>
+                </a:solidFill>
+                <a:latin typeface="Open Sans"/>
+                <a:ea typeface="Open Sans"/>
+                <a:cs typeface="Open Sans"/>
+              </a:rPr>
+              <a:t>Наружное — видно снаружи (рана)</a:t>
+            </a:r>
+          </a:p>
+        </p:txBody>
+      </p:sp>
+      <p:sp>
+        <p:nvSpPr>
+          <p:cNvPr id="14" name="Rounded Rectangle 13"/>
+          <p:cNvSpPr/>
+          <p:nvPr/>
+        </p:nvSpPr>
+        <p:spPr>
+          <a:xfrm>
+            <a:off x="360000" y="6700000"/>
+            <a:ext cx="900000" cy="900000"/>
+          </a:xfrm>
+          <a:prstGeom prst="roundRect">
+            <a:avLst/>
+          </a:prstGeom>
+          <a:solidFill>
+            <a:srgbClr val="0055AA"/>
+          </a:solidFill>
+          <a:ln>
+            <a:noFill/>
+          </a:ln>
+        </p:spPr>
+        <p:style>
+          <a:lnRef idx="1">
+            <a:schemeClr val="accent1"/>
+          </a:lnRef>
+          <a:fillRef idx="3">
+            <a:schemeClr val="accent1"/>
+          </a:fillRef>
+          <a:effectRef idx="2">
+            <a:schemeClr val="accent1"/>
+          </a:effectRef>
+          <a:fontRef idx="minor">
+            <a:schemeClr val="lt1"/>
+          </a:fontRef>
+        </p:style>
+        <p:txBody>
+          <a:bodyPr rtlCol="0" anchor="ctr"/>
+          <a:lstStyle/>
+          <a:p>
+            <a:pPr algn="ctr"/>
+          </a:p>
+        </p:txBody>
+      </p:sp>
+      <p:sp>
+        <p:nvSpPr>
+          <p:cNvPr id="15" name="TextBox 14"/>
+          <p:cNvSpPr txBox="1"/>
+          <p:nvPr/>
+        </p:nvSpPr>
+        <p:spPr>
+          <a:xfrm>
+            <a:off x="360000" y="6700000"/>
+            <a:ext cx="900000" cy="900000"/>
+          </a:xfrm>
+          <a:prstGeom prst="rect">
+            <a:avLst/>
+          </a:prstGeom>
+          <a:noFill/>
+        </p:spPr>
+        <p:txBody>
+          <a:bodyPr wrap="square" anchor="ctr">
+            <a:spAutoFit/>
+          </a:bodyPr>
+          <a:lstStyle/>
+          <a:p>
+            <a:pPr algn="ctr"/>
+            <a:r>
+              <a:rPr sz="2200" b="1">
+                <a:solidFill>
+                  <a:srgbClr val="FFFFFF"/>
+                </a:solidFill>
+                <a:latin typeface="Open Sans"/>
+                <a:ea typeface="Open Sans"/>
+                <a:cs typeface="Open Sans"/>
+              </a:rPr>
+              <a:t>4</a:t>
+            </a:r>
+          </a:p>
+        </p:txBody>
+      </p:sp>
+      <p:sp>
+        <p:nvSpPr>
+          <p:cNvPr id="16" name="TextBox 15"/>
+          <p:cNvSpPr txBox="1"/>
+          <p:nvPr/>
+        </p:nvSpPr>
+        <p:spPr>
+          <a:xfrm>
+            <a:off x="1560000" y="6700000"/>
+            <a:ext cx="22464000" cy="900000"/>
+          </a:xfrm>
+          <a:prstGeom prst="rect">
+            <a:avLst/>
+          </a:prstGeom>
+          <a:noFill/>
+        </p:spPr>
+        <p:txBody>
+          <a:bodyPr wrap="square" anchor="ctr">
+            <a:spAutoFit/>
+          </a:bodyPr>
+          <a:lstStyle/>
+          <a:p>
+            <a:pPr algn="l"/>
+            <a:r>
+              <a:rPr sz="3200" b="0">
+                <a:solidFill>
+                  <a:srgbClr val="333333"/>
+                </a:solidFill>
+                <a:latin typeface="Open Sans"/>
+                <a:ea typeface="Open Sans"/>
+                <a:cs typeface="Open Sans"/>
+              </a:rPr>
+              <a:t>Требует немедленной остановки</a:t>
             </a:r>
           </a:p>
         </p:txBody>
@@ -4775,57 +4796,14 @@
       </p:sp>
       <p:sp>
         <p:nvSpPr>
-          <p:cNvPr id="3" name="Rectangle 2"/>
-          <p:cNvSpPr/>
-          <p:nvPr/>
-        </p:nvSpPr>
-        <p:spPr>
-          <a:xfrm>
-            <a:off x="0" y="0"/>
-            <a:ext cx="24384000" cy="120000"/>
-          </a:xfrm>
-          <a:prstGeom prst="rect">
-            <a:avLst/>
-          </a:prstGeom>
-          <a:solidFill>
-            <a:srgbClr val="DDDDDD"/>
-          </a:solidFill>
-          <a:ln>
-            <a:noFill/>
-          </a:ln>
-        </p:spPr>
-        <p:style>
-          <a:lnRef idx="1">
-            <a:schemeClr val="accent1"/>
-          </a:lnRef>
-          <a:fillRef idx="3">
-            <a:schemeClr val="accent1"/>
-          </a:fillRef>
-          <a:effectRef idx="2">
-            <a:schemeClr val="accent1"/>
-          </a:effectRef>
-          <a:fontRef idx="minor">
-            <a:schemeClr val="lt1"/>
-          </a:fontRef>
-        </p:style>
-        <p:txBody>
-          <a:bodyPr rtlCol="0" anchor="ctr"/>
-          <a:lstStyle/>
-          <a:p>
-            <a:pPr algn="ctr"/>
-          </a:p>
-        </p:txBody>
-      </p:sp>
-      <p:sp>
-        <p:nvSpPr>
-          <p:cNvPr id="4" name="TextBox 3"/>
+          <p:cNvPr id="3" name="TextBox 2"/>
           <p:cNvSpPr txBox="1"/>
           <p:nvPr/>
         </p:nvSpPr>
         <p:spPr>
           <a:xfrm>
-            <a:off x="800000" y="350000"/>
-            <a:ext cx="22800000" cy="1000000"/>
+            <a:off x="360000" y="350000"/>
+            <a:ext cx="23664000" cy="1100000"/>
           </a:xfrm>
           <a:prstGeom prst="rect">
             <a:avLst/>
@@ -4848,21 +4826,21 @@
                 <a:ea typeface="Open Sans"/>
                 <a:cs typeface="Open Sans"/>
               </a:rPr>
-              <a:t>Основные признаки острой кровопотери</a:t>
-            </a:r>
-          </a:p>
-        </p:txBody>
-      </p:sp>
-      <p:sp>
-        <p:nvSpPr>
-          <p:cNvPr id="5" name="Rectangle 4"/>
+              <a:t>Признаки острой кровопотери</a:t>
+            </a:r>
+          </a:p>
+        </p:txBody>
+      </p:sp>
+      <p:sp>
+        <p:nvSpPr>
+          <p:cNvPr id="4" name="Rectangle 3"/>
           <p:cNvSpPr/>
           <p:nvPr/>
         </p:nvSpPr>
         <p:spPr>
           <a:xfrm>
-            <a:off x="800000" y="1450000"/>
-            <a:ext cx="22800000" cy="20000"/>
+            <a:off x="360000" y="1450000"/>
+            <a:ext cx="23664000" cy="20000"/>
           </a:xfrm>
           <a:prstGeom prst="rect">
             <a:avLst/>
@@ -4898,61 +4876,16 @@
       </p:sp>
       <p:sp>
         <p:nvSpPr>
-          <p:cNvPr id="6" name="Rectangle 5"/>
+          <p:cNvPr id="5" name="Rounded Rectangle 4"/>
           <p:cNvSpPr/>
           <p:nvPr/>
         </p:nvSpPr>
         <p:spPr>
           <a:xfrm>
-            <a:off x="800000" y="2050000"/>
-            <a:ext cx="7000000" cy="3200000"/>
-          </a:xfrm>
-          <a:prstGeom prst="rect">
-            <a:avLst/>
-          </a:prstGeom>
-          <a:solidFill>
-            <a:srgbClr val="FFFFFF"/>
-          </a:solidFill>
-          <a:ln w="12700">
-            <a:solidFill>
-              <a:srgbClr val="E1E1E1"/>
-            </a:solidFill>
-          </a:ln>
-        </p:spPr>
-        <p:style>
-          <a:lnRef idx="1">
-            <a:schemeClr val="accent1"/>
-          </a:lnRef>
-          <a:fillRef idx="3">
-            <a:schemeClr val="accent1"/>
-          </a:fillRef>
-          <a:effectRef idx="2">
-            <a:schemeClr val="accent1"/>
-          </a:effectRef>
-          <a:fontRef idx="minor">
-            <a:schemeClr val="lt1"/>
-          </a:fontRef>
-        </p:style>
-        <p:txBody>
-          <a:bodyPr rtlCol="0" anchor="ctr"/>
-          <a:lstStyle/>
-          <a:p>
-            <a:pPr algn="ctr"/>
-          </a:p>
-        </p:txBody>
-      </p:sp>
-      <p:sp>
-        <p:nvSpPr>
-          <p:cNvPr id="7" name="Oval 6"/>
-          <p:cNvSpPr/>
-          <p:nvPr/>
-        </p:nvSpPr>
-        <p:spPr>
-          <a:xfrm>
-            <a:off x="1050000" y="2450000"/>
+            <a:off x="360000" y="1900000"/>
             <a:ext cx="900000" cy="900000"/>
           </a:xfrm>
-          <a:prstGeom prst="ellipse">
+          <a:prstGeom prst="roundRect">
             <a:avLst/>
           </a:prstGeom>
           <a:solidFill>
@@ -4986,13 +4919,13 @@
       </p:sp>
       <p:sp>
         <p:nvSpPr>
-          <p:cNvPr id="8" name="TextBox 7"/>
+          <p:cNvPr id="6" name="TextBox 5"/>
           <p:cNvSpPr txBox="1"/>
           <p:nvPr/>
         </p:nvSpPr>
         <p:spPr>
           <a:xfrm>
-            <a:off x="1050000" y="2450000"/>
+            <a:off x="360000" y="1900000"/>
             <a:ext cx="900000" cy="900000"/>
           </a:xfrm>
           <a:prstGeom prst="rect">
@@ -5008,7 +4941,7 @@
           <a:p>
             <a:pPr algn="ctr"/>
             <a:r>
-              <a:rPr sz="2000" b="1">
+              <a:rPr sz="2200" b="1">
                 <a:solidFill>
                   <a:srgbClr val="FFFFFF"/>
                 </a:solidFill>
@@ -5016,21 +4949,21 @@
                 <a:ea typeface="Open Sans"/>
                 <a:cs typeface="Open Sans"/>
               </a:rPr>
-              <a:t>1</a:t>
-            </a:r>
-          </a:p>
-        </p:txBody>
-      </p:sp>
-      <p:sp>
-        <p:nvSpPr>
-          <p:cNvPr id="9" name="TextBox 8"/>
+              <a:t>!</a:t>
+            </a:r>
+          </a:p>
+        </p:txBody>
+      </p:sp>
+      <p:sp>
+        <p:nvSpPr>
+          <p:cNvPr id="7" name="TextBox 6"/>
           <p:cNvSpPr txBox="1"/>
           <p:nvPr/>
         </p:nvSpPr>
         <p:spPr>
           <a:xfrm>
-            <a:off x="1050000" y="3650000"/>
-            <a:ext cx="6500000" cy="1300000"/>
+            <a:off x="1560000" y="1900000"/>
+            <a:ext cx="22464000" cy="900000"/>
           </a:xfrm>
           <a:prstGeom prst="rect">
             <a:avLst/>
@@ -5038,14 +4971,14 @@
           <a:noFill/>
         </p:spPr>
         <p:txBody>
-          <a:bodyPr wrap="square" anchor="t">
+          <a:bodyPr wrap="square" anchor="ctr">
             <a:spAutoFit/>
           </a:bodyPr>
           <a:lstStyle/>
           <a:p>
             <a:pPr algn="l"/>
             <a:r>
-              <a:rPr sz="2400" b="0">
+              <a:rPr sz="3200" b="0">
                 <a:solidFill>
                   <a:srgbClr val="333333"/>
                 </a:solidFill>
@@ -5060,61 +4993,16 @@
       </p:sp>
       <p:sp>
         <p:nvSpPr>
-          <p:cNvPr id="10" name="Rectangle 9"/>
+          <p:cNvPr id="8" name="Rounded Rectangle 7"/>
           <p:cNvSpPr/>
           <p:nvPr/>
         </p:nvSpPr>
         <p:spPr>
           <a:xfrm>
-            <a:off x="8500000" y="2050000"/>
-            <a:ext cx="7000000" cy="3200000"/>
-          </a:xfrm>
-          <a:prstGeom prst="rect">
-            <a:avLst/>
-          </a:prstGeom>
-          <a:solidFill>
-            <a:srgbClr val="FFFFFF"/>
-          </a:solidFill>
-          <a:ln w="12700">
-            <a:solidFill>
-              <a:srgbClr val="E1E1E1"/>
-            </a:solidFill>
-          </a:ln>
-        </p:spPr>
-        <p:style>
-          <a:lnRef idx="1">
-            <a:schemeClr val="accent1"/>
-          </a:lnRef>
-          <a:fillRef idx="3">
-            <a:schemeClr val="accent1"/>
-          </a:fillRef>
-          <a:effectRef idx="2">
-            <a:schemeClr val="accent1"/>
-          </a:effectRef>
-          <a:fontRef idx="minor">
-            <a:schemeClr val="lt1"/>
-          </a:fontRef>
-        </p:style>
-        <p:txBody>
-          <a:bodyPr rtlCol="0" anchor="ctr"/>
-          <a:lstStyle/>
-          <a:p>
-            <a:pPr algn="ctr"/>
-          </a:p>
-        </p:txBody>
-      </p:sp>
-      <p:sp>
-        <p:nvSpPr>
-          <p:cNvPr id="11" name="Oval 10"/>
-          <p:cNvSpPr/>
-          <p:nvPr/>
-        </p:nvSpPr>
-        <p:spPr>
-          <a:xfrm>
-            <a:off x="8750000" y="2450000"/>
+            <a:off x="360000" y="3500000"/>
             <a:ext cx="900000" cy="900000"/>
           </a:xfrm>
-          <a:prstGeom prst="ellipse">
+          <a:prstGeom prst="roundRect">
             <a:avLst/>
           </a:prstGeom>
           <a:solidFill>
@@ -5148,13 +5036,13 @@
       </p:sp>
       <p:sp>
         <p:nvSpPr>
-          <p:cNvPr id="12" name="TextBox 11"/>
+          <p:cNvPr id="9" name="TextBox 8"/>
           <p:cNvSpPr txBox="1"/>
           <p:nvPr/>
         </p:nvSpPr>
         <p:spPr>
           <a:xfrm>
-            <a:off x="8750000" y="2450000"/>
+            <a:off x="360000" y="3500000"/>
             <a:ext cx="900000" cy="900000"/>
           </a:xfrm>
           <a:prstGeom prst="rect">
@@ -5170,7 +5058,7 @@
           <a:p>
             <a:pPr algn="ctr"/>
             <a:r>
-              <a:rPr sz="2000" b="1">
+              <a:rPr sz="2200" b="1">
                 <a:solidFill>
                   <a:srgbClr val="FFFFFF"/>
                 </a:solidFill>
@@ -5178,21 +5066,21 @@
                 <a:ea typeface="Open Sans"/>
                 <a:cs typeface="Open Sans"/>
               </a:rPr>
-              <a:t>2</a:t>
-            </a:r>
-          </a:p>
-        </p:txBody>
-      </p:sp>
-      <p:sp>
-        <p:nvSpPr>
-          <p:cNvPr id="13" name="TextBox 12"/>
+              <a:t>•</a:t>
+            </a:r>
+          </a:p>
+        </p:txBody>
+      </p:sp>
+      <p:sp>
+        <p:nvSpPr>
+          <p:cNvPr id="10" name="TextBox 9"/>
           <p:cNvSpPr txBox="1"/>
           <p:nvPr/>
         </p:nvSpPr>
         <p:spPr>
           <a:xfrm>
-            <a:off x="8750000" y="3650000"/>
-            <a:ext cx="6500000" cy="1300000"/>
+            <a:off x="1560000" y="3500000"/>
+            <a:ext cx="22464000" cy="900000"/>
           </a:xfrm>
           <a:prstGeom prst="rect">
             <a:avLst/>
@@ -5200,14 +5088,14 @@
           <a:noFill/>
         </p:spPr>
         <p:txBody>
-          <a:bodyPr wrap="square" anchor="t">
+          <a:bodyPr wrap="square" anchor="ctr">
             <a:spAutoFit/>
           </a:bodyPr>
           <a:lstStyle/>
           <a:p>
             <a:pPr algn="l"/>
             <a:r>
-              <a:rPr sz="2400" b="0">
+              <a:rPr sz="3200" b="0">
                 <a:solidFill>
                   <a:srgbClr val="333333"/>
                 </a:solidFill>
@@ -5222,61 +5110,16 @@
       </p:sp>
       <p:sp>
         <p:nvSpPr>
-          <p:cNvPr id="14" name="Rectangle 13"/>
+          <p:cNvPr id="11" name="Rounded Rectangle 10"/>
           <p:cNvSpPr/>
           <p:nvPr/>
         </p:nvSpPr>
         <p:spPr>
           <a:xfrm>
-            <a:off x="16200000" y="2050000"/>
-            <a:ext cx="7000000" cy="3200000"/>
-          </a:xfrm>
-          <a:prstGeom prst="rect">
-            <a:avLst/>
-          </a:prstGeom>
-          <a:solidFill>
-            <a:srgbClr val="FFFFFF"/>
-          </a:solidFill>
-          <a:ln w="12700">
-            <a:solidFill>
-              <a:srgbClr val="E1E1E1"/>
-            </a:solidFill>
-          </a:ln>
-        </p:spPr>
-        <p:style>
-          <a:lnRef idx="1">
-            <a:schemeClr val="accent1"/>
-          </a:lnRef>
-          <a:fillRef idx="3">
-            <a:schemeClr val="accent1"/>
-          </a:fillRef>
-          <a:effectRef idx="2">
-            <a:schemeClr val="accent1"/>
-          </a:effectRef>
-          <a:fontRef idx="minor">
-            <a:schemeClr val="lt1"/>
-          </a:fontRef>
-        </p:style>
-        <p:txBody>
-          <a:bodyPr rtlCol="0" anchor="ctr"/>
-          <a:lstStyle/>
-          <a:p>
-            <a:pPr algn="ctr"/>
-          </a:p>
-        </p:txBody>
-      </p:sp>
-      <p:sp>
-        <p:nvSpPr>
-          <p:cNvPr id="15" name="Oval 14"/>
-          <p:cNvSpPr/>
-          <p:nvPr/>
-        </p:nvSpPr>
-        <p:spPr>
-          <a:xfrm>
-            <a:off x="16450000" y="2450000"/>
+            <a:off x="360000" y="5100000"/>
             <a:ext cx="900000" cy="900000"/>
           </a:xfrm>
-          <a:prstGeom prst="ellipse">
+          <a:prstGeom prst="roundRect">
             <a:avLst/>
           </a:prstGeom>
           <a:solidFill>
@@ -5310,13 +5153,13 @@
       </p:sp>
       <p:sp>
         <p:nvSpPr>
-          <p:cNvPr id="16" name="TextBox 15"/>
+          <p:cNvPr id="12" name="TextBox 11"/>
           <p:cNvSpPr txBox="1"/>
           <p:nvPr/>
         </p:nvSpPr>
         <p:spPr>
           <a:xfrm>
-            <a:off x="16450000" y="2450000"/>
+            <a:off x="360000" y="5100000"/>
             <a:ext cx="900000" cy="900000"/>
           </a:xfrm>
           <a:prstGeom prst="rect">
@@ -5332,7 +5175,7 @@
           <a:p>
             <a:pPr algn="ctr"/>
             <a:r>
-              <a:rPr sz="2000" b="1">
+              <a:rPr sz="2200" b="1">
                 <a:solidFill>
                   <a:srgbClr val="FFFFFF"/>
                 </a:solidFill>
@@ -5340,21 +5183,21 @@
                 <a:ea typeface="Open Sans"/>
                 <a:cs typeface="Open Sans"/>
               </a:rPr>
-              <a:t>3</a:t>
-            </a:r>
-          </a:p>
-        </p:txBody>
-      </p:sp>
-      <p:sp>
-        <p:nvSpPr>
-          <p:cNvPr id="17" name="TextBox 16"/>
+              <a:t>•</a:t>
+            </a:r>
+          </a:p>
+        </p:txBody>
+      </p:sp>
+      <p:sp>
+        <p:nvSpPr>
+          <p:cNvPr id="13" name="TextBox 12"/>
           <p:cNvSpPr txBox="1"/>
           <p:nvPr/>
         </p:nvSpPr>
         <p:spPr>
           <a:xfrm>
-            <a:off x="16450000" y="3650000"/>
-            <a:ext cx="6500000" cy="1300000"/>
+            <a:off x="1560000" y="5100000"/>
+            <a:ext cx="22464000" cy="900000"/>
           </a:xfrm>
           <a:prstGeom prst="rect">
             <a:avLst/>
@@ -5362,14 +5205,14 @@
           <a:noFill/>
         </p:spPr>
         <p:txBody>
-          <a:bodyPr wrap="square" anchor="t">
+          <a:bodyPr wrap="square" anchor="ctr">
             <a:spAutoFit/>
           </a:bodyPr>
           <a:lstStyle/>
           <a:p>
             <a:pPr algn="l"/>
             <a:r>
-              <a:rPr sz="2400" b="0">
+              <a:rPr sz="3200" b="0">
                 <a:solidFill>
                   <a:srgbClr val="333333"/>
                 </a:solidFill>
@@ -5384,61 +5227,16 @@
       </p:sp>
       <p:sp>
         <p:nvSpPr>
-          <p:cNvPr id="18" name="Rectangle 17"/>
+          <p:cNvPr id="14" name="Rounded Rectangle 13"/>
           <p:cNvSpPr/>
           <p:nvPr/>
         </p:nvSpPr>
         <p:spPr>
           <a:xfrm>
-            <a:off x="800000" y="5950000"/>
-            <a:ext cx="7000000" cy="3200000"/>
-          </a:xfrm>
-          <a:prstGeom prst="rect">
-            <a:avLst/>
-          </a:prstGeom>
-          <a:solidFill>
-            <a:srgbClr val="FFFFFF"/>
-          </a:solidFill>
-          <a:ln w="12700">
-            <a:solidFill>
-              <a:srgbClr val="E1E1E1"/>
-            </a:solidFill>
-          </a:ln>
-        </p:spPr>
-        <p:style>
-          <a:lnRef idx="1">
-            <a:schemeClr val="accent1"/>
-          </a:lnRef>
-          <a:fillRef idx="3">
-            <a:schemeClr val="accent1"/>
-          </a:fillRef>
-          <a:effectRef idx="2">
-            <a:schemeClr val="accent1"/>
-          </a:effectRef>
-          <a:fontRef idx="minor">
-            <a:schemeClr val="lt1"/>
-          </a:fontRef>
-        </p:style>
-        <p:txBody>
-          <a:bodyPr rtlCol="0" anchor="ctr"/>
-          <a:lstStyle/>
-          <a:p>
-            <a:pPr algn="ctr"/>
-          </a:p>
-        </p:txBody>
-      </p:sp>
-      <p:sp>
-        <p:nvSpPr>
-          <p:cNvPr id="19" name="Oval 18"/>
-          <p:cNvSpPr/>
-          <p:nvPr/>
-        </p:nvSpPr>
-        <p:spPr>
-          <a:xfrm>
-            <a:off x="1050000" y="6350000"/>
+            <a:off x="360000" y="6700000"/>
             <a:ext cx="900000" cy="900000"/>
           </a:xfrm>
-          <a:prstGeom prst="ellipse">
+          <a:prstGeom prst="roundRect">
             <a:avLst/>
           </a:prstGeom>
           <a:solidFill>
@@ -5472,13 +5270,13 @@
       </p:sp>
       <p:sp>
         <p:nvSpPr>
-          <p:cNvPr id="20" name="TextBox 19"/>
+          <p:cNvPr id="15" name="TextBox 14"/>
           <p:cNvSpPr txBox="1"/>
           <p:nvPr/>
         </p:nvSpPr>
         <p:spPr>
           <a:xfrm>
-            <a:off x="1050000" y="6350000"/>
+            <a:off x="360000" y="6700000"/>
             <a:ext cx="900000" cy="900000"/>
           </a:xfrm>
           <a:prstGeom prst="rect">
@@ -5494,7 +5292,7 @@
           <a:p>
             <a:pPr algn="ctr"/>
             <a:r>
-              <a:rPr sz="2000" b="1">
+              <a:rPr sz="2200" b="1">
                 <a:solidFill>
                   <a:srgbClr val="FFFFFF"/>
                 </a:solidFill>
@@ -5502,21 +5300,21 @@
                 <a:ea typeface="Open Sans"/>
                 <a:cs typeface="Open Sans"/>
               </a:rPr>
-              <a:t>4</a:t>
-            </a:r>
-          </a:p>
-        </p:txBody>
-      </p:sp>
-      <p:sp>
-        <p:nvSpPr>
-          <p:cNvPr id="21" name="TextBox 20"/>
+              <a:t>•</a:t>
+            </a:r>
+          </a:p>
+        </p:txBody>
+      </p:sp>
+      <p:sp>
+        <p:nvSpPr>
+          <p:cNvPr id="16" name="TextBox 15"/>
           <p:cNvSpPr txBox="1"/>
           <p:nvPr/>
         </p:nvSpPr>
         <p:spPr>
           <a:xfrm>
-            <a:off x="1050000" y="7550000"/>
-            <a:ext cx="6500000" cy="1300000"/>
+            <a:off x="1560000" y="6700000"/>
+            <a:ext cx="22464000" cy="900000"/>
           </a:xfrm>
           <a:prstGeom prst="rect">
             <a:avLst/>
@@ -5524,14 +5322,14 @@
           <a:noFill/>
         </p:spPr>
         <p:txBody>
-          <a:bodyPr wrap="square" anchor="t">
+          <a:bodyPr wrap="square" anchor="ctr">
             <a:spAutoFit/>
           </a:bodyPr>
           <a:lstStyle/>
           <a:p>
             <a:pPr algn="l"/>
             <a:r>
-              <a:rPr sz="2400" b="0">
+              <a:rPr sz="3200" b="0">
                 <a:solidFill>
                   <a:srgbClr val="333333"/>
                 </a:solidFill>
@@ -5539,331 +5337,7 @@
                 <a:ea typeface="Open Sans"/>
                 <a:cs typeface="Open Sans"/>
               </a:rPr>
-              <a:t>Учащённое сердцебиение</a:t>
-            </a:r>
-          </a:p>
-        </p:txBody>
-      </p:sp>
-      <p:sp>
-        <p:nvSpPr>
-          <p:cNvPr id="22" name="Rectangle 21"/>
-          <p:cNvSpPr/>
-          <p:nvPr/>
-        </p:nvSpPr>
-        <p:spPr>
-          <a:xfrm>
-            <a:off x="8500000" y="5950000"/>
-            <a:ext cx="7000000" cy="3200000"/>
-          </a:xfrm>
-          <a:prstGeom prst="rect">
-            <a:avLst/>
-          </a:prstGeom>
-          <a:solidFill>
-            <a:srgbClr val="FFFFFF"/>
-          </a:solidFill>
-          <a:ln w="12700">
-            <a:solidFill>
-              <a:srgbClr val="E1E1E1"/>
-            </a:solidFill>
-          </a:ln>
-        </p:spPr>
-        <p:style>
-          <a:lnRef idx="1">
-            <a:schemeClr val="accent1"/>
-          </a:lnRef>
-          <a:fillRef idx="3">
-            <a:schemeClr val="accent1"/>
-          </a:fillRef>
-          <a:effectRef idx="2">
-            <a:schemeClr val="accent1"/>
-          </a:effectRef>
-          <a:fontRef idx="minor">
-            <a:schemeClr val="lt1"/>
-          </a:fontRef>
-        </p:style>
-        <p:txBody>
-          <a:bodyPr rtlCol="0" anchor="ctr"/>
-          <a:lstStyle/>
-          <a:p>
-            <a:pPr algn="ctr"/>
-          </a:p>
-        </p:txBody>
-      </p:sp>
-      <p:sp>
-        <p:nvSpPr>
-          <p:cNvPr id="23" name="Oval 22"/>
-          <p:cNvSpPr/>
-          <p:nvPr/>
-        </p:nvSpPr>
-        <p:spPr>
-          <a:xfrm>
-            <a:off x="8750000" y="6350000"/>
-            <a:ext cx="900000" cy="900000"/>
-          </a:xfrm>
-          <a:prstGeom prst="ellipse">
-            <a:avLst/>
-          </a:prstGeom>
-          <a:solidFill>
-            <a:srgbClr val="0055AA"/>
-          </a:solidFill>
-          <a:ln>
-            <a:noFill/>
-          </a:ln>
-        </p:spPr>
-        <p:style>
-          <a:lnRef idx="1">
-            <a:schemeClr val="accent1"/>
-          </a:lnRef>
-          <a:fillRef idx="3">
-            <a:schemeClr val="accent1"/>
-          </a:fillRef>
-          <a:effectRef idx="2">
-            <a:schemeClr val="accent1"/>
-          </a:effectRef>
-          <a:fontRef idx="minor">
-            <a:schemeClr val="lt1"/>
-          </a:fontRef>
-        </p:style>
-        <p:txBody>
-          <a:bodyPr rtlCol="0" anchor="ctr"/>
-          <a:lstStyle/>
-          <a:p>
-            <a:pPr algn="ctr"/>
-          </a:p>
-        </p:txBody>
-      </p:sp>
-      <p:sp>
-        <p:nvSpPr>
-          <p:cNvPr id="24" name="TextBox 23"/>
-          <p:cNvSpPr txBox="1"/>
-          <p:nvPr/>
-        </p:nvSpPr>
-        <p:spPr>
-          <a:xfrm>
-            <a:off x="8750000" y="6350000"/>
-            <a:ext cx="900000" cy="900000"/>
-          </a:xfrm>
-          <a:prstGeom prst="rect">
-            <a:avLst/>
-          </a:prstGeom>
-          <a:noFill/>
-        </p:spPr>
-        <p:txBody>
-          <a:bodyPr wrap="square" anchor="ctr">
-            <a:spAutoFit/>
-          </a:bodyPr>
-          <a:lstStyle/>
-          <a:p>
-            <a:pPr algn="ctr"/>
-            <a:r>
-              <a:rPr sz="2000" b="1">
-                <a:solidFill>
-                  <a:srgbClr val="FFFFFF"/>
-                </a:solidFill>
-                <a:latin typeface="Open Sans"/>
-                <a:ea typeface="Open Sans"/>
-                <a:cs typeface="Open Sans"/>
-              </a:rPr>
-              <a:t>5</a:t>
-            </a:r>
-          </a:p>
-        </p:txBody>
-      </p:sp>
-      <p:sp>
-        <p:nvSpPr>
-          <p:cNvPr id="25" name="TextBox 24"/>
-          <p:cNvSpPr txBox="1"/>
-          <p:nvPr/>
-        </p:nvSpPr>
-        <p:spPr>
-          <a:xfrm>
-            <a:off x="8750000" y="7550000"/>
-            <a:ext cx="6500000" cy="1300000"/>
-          </a:xfrm>
-          <a:prstGeom prst="rect">
-            <a:avLst/>
-          </a:prstGeom>
-          <a:noFill/>
-        </p:spPr>
-        <p:txBody>
-          <a:bodyPr wrap="square" anchor="t">
-            <a:spAutoFit/>
-          </a:bodyPr>
-          <a:lstStyle/>
-          <a:p>
-            <a:pPr algn="l"/>
-            <a:r>
-              <a:rPr sz="2400" b="0">
-                <a:solidFill>
-                  <a:srgbClr val="333333"/>
-                </a:solidFill>
-                <a:latin typeface="Open Sans"/>
-                <a:ea typeface="Open Sans"/>
-                <a:cs typeface="Open Sans"/>
-              </a:rPr>
-              <a:t>Частое дыхание</a:t>
-            </a:r>
-          </a:p>
-        </p:txBody>
-      </p:sp>
-      <p:sp>
-        <p:nvSpPr>
-          <p:cNvPr id="26" name="Rectangle 25"/>
-          <p:cNvSpPr/>
-          <p:nvPr/>
-        </p:nvSpPr>
-        <p:spPr>
-          <a:xfrm>
-            <a:off x="16200000" y="5950000"/>
-            <a:ext cx="7000000" cy="3200000"/>
-          </a:xfrm>
-          <a:prstGeom prst="rect">
-            <a:avLst/>
-          </a:prstGeom>
-          <a:solidFill>
-            <a:srgbClr val="FFFFFF"/>
-          </a:solidFill>
-          <a:ln w="12700">
-            <a:solidFill>
-              <a:srgbClr val="E1E1E1"/>
-            </a:solidFill>
-          </a:ln>
-        </p:spPr>
-        <p:style>
-          <a:lnRef idx="1">
-            <a:schemeClr val="accent1"/>
-          </a:lnRef>
-          <a:fillRef idx="3">
-            <a:schemeClr val="accent1"/>
-          </a:fillRef>
-          <a:effectRef idx="2">
-            <a:schemeClr val="accent1"/>
-          </a:effectRef>
-          <a:fontRef idx="minor">
-            <a:schemeClr val="lt1"/>
-          </a:fontRef>
-        </p:style>
-        <p:txBody>
-          <a:bodyPr rtlCol="0" anchor="ctr"/>
-          <a:lstStyle/>
-          <a:p>
-            <a:pPr algn="ctr"/>
-          </a:p>
-        </p:txBody>
-      </p:sp>
-      <p:sp>
-        <p:nvSpPr>
-          <p:cNvPr id="27" name="Oval 26"/>
-          <p:cNvSpPr/>
-          <p:nvPr/>
-        </p:nvSpPr>
-        <p:spPr>
-          <a:xfrm>
-            <a:off x="16450000" y="6350000"/>
-            <a:ext cx="900000" cy="900000"/>
-          </a:xfrm>
-          <a:prstGeom prst="ellipse">
-            <a:avLst/>
-          </a:prstGeom>
-          <a:solidFill>
-            <a:srgbClr val="0055AA"/>
-          </a:solidFill>
-          <a:ln>
-            <a:noFill/>
-          </a:ln>
-        </p:spPr>
-        <p:style>
-          <a:lnRef idx="1">
-            <a:schemeClr val="accent1"/>
-          </a:lnRef>
-          <a:fillRef idx="3">
-            <a:schemeClr val="accent1"/>
-          </a:fillRef>
-          <a:effectRef idx="2">
-            <a:schemeClr val="accent1"/>
-          </a:effectRef>
-          <a:fontRef idx="minor">
-            <a:schemeClr val="lt1"/>
-          </a:fontRef>
-        </p:style>
-        <p:txBody>
-          <a:bodyPr rtlCol="0" anchor="ctr"/>
-          <a:lstStyle/>
-          <a:p>
-            <a:pPr algn="ctr"/>
-          </a:p>
-        </p:txBody>
-      </p:sp>
-      <p:sp>
-        <p:nvSpPr>
-          <p:cNvPr id="28" name="TextBox 27"/>
-          <p:cNvSpPr txBox="1"/>
-          <p:nvPr/>
-        </p:nvSpPr>
-        <p:spPr>
-          <a:xfrm>
-            <a:off x="16450000" y="6350000"/>
-            <a:ext cx="900000" cy="900000"/>
-          </a:xfrm>
-          <a:prstGeom prst="rect">
-            <a:avLst/>
-          </a:prstGeom>
-          <a:noFill/>
-        </p:spPr>
-        <p:txBody>
-          <a:bodyPr wrap="square" anchor="ctr">
-            <a:spAutoFit/>
-          </a:bodyPr>
-          <a:lstStyle/>
-          <a:p>
-            <a:pPr algn="ctr"/>
-            <a:r>
-              <a:rPr sz="2000" b="1">
-                <a:solidFill>
-                  <a:srgbClr val="FFFFFF"/>
-                </a:solidFill>
-                <a:latin typeface="Open Sans"/>
-                <a:ea typeface="Open Sans"/>
-                <a:cs typeface="Open Sans"/>
-              </a:rPr>
-              <a:t>6</a:t>
-            </a:r>
-          </a:p>
-        </p:txBody>
-      </p:sp>
-      <p:sp>
-        <p:nvSpPr>
-          <p:cNvPr id="29" name="TextBox 28"/>
-          <p:cNvSpPr txBox="1"/>
-          <p:nvPr/>
-        </p:nvSpPr>
-        <p:spPr>
-          <a:xfrm>
-            <a:off x="16450000" y="7550000"/>
-            <a:ext cx="6500000" cy="1300000"/>
-          </a:xfrm>
-          <a:prstGeom prst="rect">
-            <a:avLst/>
-          </a:prstGeom>
-          <a:noFill/>
-        </p:spPr>
-        <p:txBody>
-          <a:bodyPr wrap="square" anchor="t">
-            <a:spAutoFit/>
-          </a:bodyPr>
-          <a:lstStyle/>
-          <a:p>
-            <a:pPr algn="l"/>
-            <a:r>
-              <a:rPr sz="2400" b="0">
-                <a:solidFill>
-                  <a:srgbClr val="333333"/>
-                </a:solidFill>
-                <a:latin typeface="Open Sans"/>
-                <a:ea typeface="Open Sans"/>
-                <a:cs typeface="Open Sans"/>
-              </a:rPr>
-              <a:t>Возбуждение → апатия</a:t>
+              <a:t>Учащённое сердцебиение и дыхание</a:t>
             </a:r>
           </a:p>
         </p:txBody>
@@ -5931,57 +5405,14 @@
       </p:sp>
       <p:sp>
         <p:nvSpPr>
-          <p:cNvPr id="3" name="Rectangle 2"/>
-          <p:cNvSpPr/>
-          <p:nvPr/>
-        </p:nvSpPr>
-        <p:spPr>
-          <a:xfrm>
-            <a:off x="0" y="0"/>
-            <a:ext cx="24384000" cy="120000"/>
-          </a:xfrm>
-          <a:prstGeom prst="rect">
-            <a:avLst/>
-          </a:prstGeom>
-          <a:solidFill>
-            <a:srgbClr val="DDDDDD"/>
-          </a:solidFill>
-          <a:ln>
-            <a:noFill/>
-          </a:ln>
-        </p:spPr>
-        <p:style>
-          <a:lnRef idx="1">
-            <a:schemeClr val="accent1"/>
-          </a:lnRef>
-          <a:fillRef idx="3">
-            <a:schemeClr val="accent1"/>
-          </a:fillRef>
-          <a:effectRef idx="2">
-            <a:schemeClr val="accent1"/>
-          </a:effectRef>
-          <a:fontRef idx="minor">
-            <a:schemeClr val="lt1"/>
-          </a:fontRef>
-        </p:style>
-        <p:txBody>
-          <a:bodyPr rtlCol="0" anchor="ctr"/>
-          <a:lstStyle/>
-          <a:p>
-            <a:pPr algn="ctr"/>
-          </a:p>
-        </p:txBody>
-      </p:sp>
-      <p:sp>
-        <p:nvSpPr>
-          <p:cNvPr id="4" name="TextBox 3"/>
+          <p:cNvPr id="3" name="TextBox 2"/>
           <p:cNvSpPr txBox="1"/>
           <p:nvPr/>
         </p:nvSpPr>
         <p:spPr>
           <a:xfrm>
-            <a:off x="800000" y="350000"/>
-            <a:ext cx="22800000" cy="1000000"/>
+            <a:off x="360000" y="350000"/>
+            <a:ext cx="23664000" cy="1100000"/>
           </a:xfrm>
           <a:prstGeom prst="rect">
             <a:avLst/>
@@ -6004,21 +5435,21 @@
                 <a:ea typeface="Open Sans"/>
                 <a:cs typeface="Open Sans"/>
               </a:rPr>
-              <a:t>Что такое обзорный осмотр</a:t>
-            </a:r>
-          </a:p>
-        </p:txBody>
-      </p:sp>
-      <p:sp>
-        <p:nvSpPr>
-          <p:cNvPr id="5" name="Rectangle 4"/>
+              <a:t>Обзорный осмотр</a:t>
+            </a:r>
+          </a:p>
+        </p:txBody>
+      </p:sp>
+      <p:sp>
+        <p:nvSpPr>
+          <p:cNvPr id="4" name="Rectangle 3"/>
           <p:cNvSpPr/>
           <p:nvPr/>
         </p:nvSpPr>
         <p:spPr>
           <a:xfrm>
-            <a:off x="800000" y="1450000"/>
-            <a:ext cx="22800000" cy="20000"/>
+            <a:off x="360000" y="1450000"/>
+            <a:ext cx="23664000" cy="20000"/>
           </a:xfrm>
           <a:prstGeom prst="rect">
             <a:avLst/>
@@ -6054,14 +5485,14 @@
       </p:sp>
       <p:sp>
         <p:nvSpPr>
-          <p:cNvPr id="6" name="TextBox 5"/>
+          <p:cNvPr id="5" name="TextBox 4"/>
           <p:cNvSpPr txBox="1"/>
           <p:nvPr/>
         </p:nvSpPr>
         <p:spPr>
           <a:xfrm>
-            <a:off x="800000" y="1950000"/>
-            <a:ext cx="12000000" cy="6000000"/>
+            <a:off x="360000" y="1900000"/>
+            <a:ext cx="13015200" cy="6800000"/>
           </a:xfrm>
           <a:prstGeom prst="rect">
             <a:avLst/>
@@ -6076,7 +5507,7 @@
           <a:p>
             <a:pPr algn="l">
               <a:spcAft>
-                <a:spcPts val="1000"/>
+                <a:spcPts val="1400"/>
               </a:spcAft>
             </a:pPr>
             <a:r>
@@ -6088,13 +5519,13 @@
                 <a:ea typeface="Open Sans"/>
                 <a:cs typeface="Open Sans"/>
               </a:rPr>
-              <a:t>•  Быстрая визуальная оценка с головы до ног.</a:t>
+              <a:t>•  Быстрая оценка с головы до ног</a:t>
             </a:r>
           </a:p>
           <a:p>
             <a:pPr algn="l">
               <a:spcAft>
-                <a:spcPts val="1000"/>
+                <a:spcPts val="1400"/>
               </a:spcAft>
             </a:pPr>
             <a:r>
@@ -6106,13 +5537,13 @@
                 <a:ea typeface="Open Sans"/>
                 <a:cs typeface="Open Sans"/>
               </a:rPr>
-              <a:t>•  Цель — выявить наружное кровотечение.</a:t>
+              <a:t>•  Цель — найти наружное кровотечение</a:t>
             </a:r>
           </a:p>
           <a:p>
             <a:pPr algn="l">
               <a:spcAft>
-                <a:spcPts val="1000"/>
+                <a:spcPts val="1400"/>
               </a:spcAft>
             </a:pPr>
             <a:r>
@@ -6124,13 +5555,13 @@
                 <a:ea typeface="Open Sans"/>
                 <a:cs typeface="Open Sans"/>
               </a:rPr>
-              <a:t>•  Сразу после оценки обстановки и безопасности.</a:t>
+              <a:t>•  Длительность: около 1–2 секунд</a:t>
             </a:r>
           </a:p>
           <a:p>
             <a:pPr algn="l">
               <a:spcAft>
-                <a:spcPts val="1000"/>
+                <a:spcPts val="1400"/>
               </a:spcAft>
             </a:pPr>
             <a:r>
@@ -6142,13 +5573,13 @@
                 <a:ea typeface="Open Sans"/>
                 <a:cs typeface="Open Sans"/>
               </a:rPr>
-              <a:t>•  Длительность: около 1–2 секунд.</a:t>
+              <a:t>•  Сразу после оценки безопасности</a:t>
             </a:r>
           </a:p>
           <a:p>
             <a:pPr algn="l">
               <a:spcAft>
-                <a:spcPts val="1000"/>
+                <a:spcPts val="1400"/>
               </a:spcAft>
             </a:pPr>
             <a:r>
@@ -6160,39 +5591,21 @@
                 <a:ea typeface="Open Sans"/>
                 <a:cs typeface="Open Sans"/>
               </a:rPr>
-              <a:t>•  При кровотечении — немедленно начать остановку.</a:t>
-            </a:r>
-          </a:p>
-          <a:p>
-            <a:pPr algn="l">
-              <a:spcAft>
-                <a:spcPts val="1000"/>
-              </a:spcAft>
-            </a:pPr>
-            <a:r>
-              <a:rPr sz="2800" b="0">
-                <a:solidFill>
-                  <a:srgbClr val="333333"/>
-                </a:solidFill>
-                <a:latin typeface="Open Sans"/>
-                <a:ea typeface="Open Sans"/>
-                <a:cs typeface="Open Sans"/>
-              </a:rPr>
-              <a:t>•  По Приказу № 220н — до подробного осмотра.</a:t>
-            </a:r>
-          </a:p>
-        </p:txBody>
-      </p:sp>
-      <p:sp>
-        <p:nvSpPr>
-          <p:cNvPr id="7" name="Rectangle 6"/>
+              <a:t>•  При крови — сразу начать остановку</a:t>
+            </a:r>
+          </a:p>
+        </p:txBody>
+      </p:sp>
+      <p:sp>
+        <p:nvSpPr>
+          <p:cNvPr id="6" name="Rectangle 5"/>
           <p:cNvSpPr/>
           <p:nvPr/>
         </p:nvSpPr>
         <p:spPr>
           <a:xfrm>
-            <a:off x="13500000" y="1950000"/>
-            <a:ext cx="10000000" cy="8500000"/>
+            <a:off x="13775200" y="1900000"/>
+            <a:ext cx="9465600" cy="6800000"/>
           </a:xfrm>
           <a:prstGeom prst="rect">
             <a:avLst/>
@@ -6200,7 +5613,7 @@
           <a:solidFill>
             <a:srgbClr val="FFFFFF"/>
           </a:solidFill>
-          <a:ln w="12700">
+          <a:ln w="15875">
             <a:solidFill>
               <a:srgbClr val="E1E1E1"/>
             </a:solidFill>
@@ -6230,7 +5643,7 @@
       </p:sp>
       <p:pic>
         <p:nvPicPr>
-          <p:cNvPr id="8" name="Picture 7" descr="overview_exam.png"/>
+          <p:cNvPr id="7" name="Picture 6" descr="overview_exam.png"/>
           <p:cNvPicPr>
             <a:picLocks noChangeAspect="1"/>
           </p:cNvPicPr>
@@ -6244,8 +5657,8 @@
         </p:blipFill>
         <p:spPr>
           <a:xfrm>
-            <a:off x="13650000" y="2371053"/>
-            <a:ext cx="9700000" cy="7657894"/>
+            <a:off x="14328000" y="2000000"/>
+            <a:ext cx="8360000" cy="6600000"/>
           </a:xfrm>
           <a:prstGeom prst="rect">
             <a:avLst/>
@@ -6254,20 +5667,20 @@
       </p:pic>
       <p:sp>
         <p:nvSpPr>
-          <p:cNvPr id="9" name="Rounded Rectangle 8"/>
+          <p:cNvPr id="8" name="Rounded Rectangle 7"/>
           <p:cNvSpPr/>
           <p:nvPr/>
         </p:nvSpPr>
         <p:spPr>
           <a:xfrm>
-            <a:off x="800000" y="11200000"/>
-            <a:ext cx="22800000" cy="1600000"/>
+            <a:off x="360000" y="11200000"/>
+            <a:ext cx="23664000" cy="1500000"/>
           </a:xfrm>
           <a:prstGeom prst="roundRect">
             <a:avLst/>
           </a:prstGeom>
           <a:solidFill>
-            <a:srgbClr val="FAFAFA"/>
+            <a:srgbClr val="F7F7F7"/>
           </a:solidFill>
           <a:ln>
             <a:noFill/>
@@ -6297,14 +5710,14 @@
       </p:sp>
       <p:sp>
         <p:nvSpPr>
-          <p:cNvPr id="10" name="Rectangle 9"/>
+          <p:cNvPr id="9" name="Rectangle 8"/>
           <p:cNvSpPr/>
           <p:nvPr/>
         </p:nvSpPr>
         <p:spPr>
           <a:xfrm>
-            <a:off x="800000" y="11200000"/>
-            <a:ext cx="120000" cy="1600000"/>
+            <a:off x="360000" y="11200000"/>
+            <a:ext cx="120000" cy="1500000"/>
           </a:xfrm>
           <a:prstGeom prst="rect">
             <a:avLst/>
@@ -6340,14 +5753,14 @@
       </p:sp>
       <p:sp>
         <p:nvSpPr>
-          <p:cNvPr id="11" name="TextBox 10"/>
+          <p:cNvPr id="10" name="TextBox 9"/>
           <p:cNvSpPr txBox="1"/>
           <p:nvPr/>
         </p:nvSpPr>
         <p:spPr>
           <a:xfrm>
-            <a:off x="1200000" y="11400000"/>
-            <a:ext cx="21800000" cy="1200000"/>
+            <a:off x="760000" y="11400000"/>
+            <a:ext cx="23064000" cy="1100000"/>
           </a:xfrm>
           <a:prstGeom prst="rect">
             <a:avLst/>
@@ -6370,7 +5783,7 @@
                 <a:ea typeface="Open Sans"/>
                 <a:cs typeface="Open Sans"/>
               </a:rPr>
-              <a:t>Приоритет: сначала угрожающее жизни кровотечение.</a:t>
+              <a:t>Приоритет: сначала угрожающее жизни кровотечение</a:t>
             </a:r>
           </a:p>
         </p:txBody>
@@ -6438,57 +5851,14 @@
       </p:sp>
       <p:sp>
         <p:nvSpPr>
-          <p:cNvPr id="3" name="Rectangle 2"/>
-          <p:cNvSpPr/>
-          <p:nvPr/>
-        </p:nvSpPr>
-        <p:spPr>
-          <a:xfrm>
-            <a:off x="0" y="0"/>
-            <a:ext cx="24384000" cy="120000"/>
-          </a:xfrm>
-          <a:prstGeom prst="rect">
-            <a:avLst/>
-          </a:prstGeom>
-          <a:solidFill>
-            <a:srgbClr val="DDDDDD"/>
-          </a:solidFill>
-          <a:ln>
-            <a:noFill/>
-          </a:ln>
-        </p:spPr>
-        <p:style>
-          <a:lnRef idx="1">
-            <a:schemeClr val="accent1"/>
-          </a:lnRef>
-          <a:fillRef idx="3">
-            <a:schemeClr val="accent1"/>
-          </a:fillRef>
-          <a:effectRef idx="2">
-            <a:schemeClr val="accent1"/>
-          </a:effectRef>
-          <a:fontRef idx="minor">
-            <a:schemeClr val="lt1"/>
-          </a:fontRef>
-        </p:style>
-        <p:txBody>
-          <a:bodyPr rtlCol="0" anchor="ctr"/>
-          <a:lstStyle/>
-          <a:p>
-            <a:pPr algn="ctr"/>
-          </a:p>
-        </p:txBody>
-      </p:sp>
-      <p:sp>
-        <p:nvSpPr>
-          <p:cNvPr id="4" name="TextBox 3"/>
+          <p:cNvPr id="3" name="TextBox 2"/>
           <p:cNvSpPr txBox="1"/>
           <p:nvPr/>
         </p:nvSpPr>
         <p:spPr>
           <a:xfrm>
-            <a:off x="800000" y="350000"/>
-            <a:ext cx="22800000" cy="1000000"/>
+            <a:off x="360000" y="350000"/>
+            <a:ext cx="23664000" cy="1100000"/>
           </a:xfrm>
           <a:prstGeom prst="rect">
             <a:avLst/>
@@ -6518,14 +5888,14 @@
       </p:sp>
       <p:sp>
         <p:nvSpPr>
-          <p:cNvPr id="5" name="Rectangle 4"/>
+          <p:cNvPr id="4" name="Rectangle 3"/>
           <p:cNvSpPr/>
           <p:nvPr/>
         </p:nvSpPr>
         <p:spPr>
           <a:xfrm>
-            <a:off x="800000" y="1450000"/>
-            <a:ext cx="22800000" cy="20000"/>
+            <a:off x="360000" y="1450000"/>
+            <a:ext cx="23664000" cy="20000"/>
           </a:xfrm>
           <a:prstGeom prst="rect">
             <a:avLst/>
@@ -6561,14 +5931,102 @@
       </p:sp>
       <p:sp>
         <p:nvSpPr>
-          <p:cNvPr id="6" name="TextBox 5"/>
+          <p:cNvPr id="5" name="Rounded Rectangle 4"/>
+          <p:cNvSpPr/>
+          <p:nvPr/>
+        </p:nvSpPr>
+        <p:spPr>
+          <a:xfrm>
+            <a:off x="1860000" y="1800000"/>
+            <a:ext cx="19000000" cy="1400000"/>
+          </a:xfrm>
+          <a:prstGeom prst="roundRect">
+            <a:avLst/>
+          </a:prstGeom>
+          <a:solidFill>
+            <a:srgbClr val="F7F7F7"/>
+          </a:solidFill>
+          <a:ln w="15875">
+            <a:solidFill>
+              <a:srgbClr val="E1E1E1"/>
+            </a:solidFill>
+          </a:ln>
+        </p:spPr>
+        <p:style>
+          <a:lnRef idx="1">
+            <a:schemeClr val="accent1"/>
+          </a:lnRef>
+          <a:fillRef idx="3">
+            <a:schemeClr val="accent1"/>
+          </a:fillRef>
+          <a:effectRef idx="2">
+            <a:schemeClr val="accent1"/>
+          </a:effectRef>
+          <a:fontRef idx="minor">
+            <a:schemeClr val="lt1"/>
+          </a:fontRef>
+        </p:style>
+        <p:txBody>
+          <a:bodyPr rtlCol="0" anchor="ctr"/>
+          <a:lstStyle/>
+          <a:p>
+            <a:pPr algn="ctr"/>
+          </a:p>
+        </p:txBody>
+      </p:sp>
+      <p:sp>
+        <p:nvSpPr>
+          <p:cNvPr id="6" name="Oval 5"/>
+          <p:cNvSpPr/>
+          <p:nvPr/>
+        </p:nvSpPr>
+        <p:spPr>
+          <a:xfrm>
+            <a:off x="2160000" y="2100000"/>
+            <a:ext cx="800000" cy="800000"/>
+          </a:xfrm>
+          <a:prstGeom prst="ellipse">
+            <a:avLst/>
+          </a:prstGeom>
+          <a:solidFill>
+            <a:srgbClr val="0055AA"/>
+          </a:solidFill>
+          <a:ln>
+            <a:noFill/>
+          </a:ln>
+        </p:spPr>
+        <p:style>
+          <a:lnRef idx="1">
+            <a:schemeClr val="accent1"/>
+          </a:lnRef>
+          <a:fillRef idx="3">
+            <a:schemeClr val="accent1"/>
+          </a:fillRef>
+          <a:effectRef idx="2">
+            <a:schemeClr val="accent1"/>
+          </a:effectRef>
+          <a:fontRef idx="minor">
+            <a:schemeClr val="lt1"/>
+          </a:fontRef>
+        </p:style>
+        <p:txBody>
+          <a:bodyPr rtlCol="0" anchor="ctr"/>
+          <a:lstStyle/>
+          <a:p>
+            <a:pPr algn="ctr"/>
+          </a:p>
+        </p:txBody>
+      </p:sp>
+      <p:sp>
+        <p:nvSpPr>
+          <p:cNvPr id="7" name="TextBox 6"/>
           <p:cNvSpPr txBox="1"/>
           <p:nvPr/>
         </p:nvSpPr>
         <p:spPr>
           <a:xfrm>
-            <a:off x="800000" y="1950000"/>
-            <a:ext cx="22800000" cy="8500000"/>
+            <a:off x="2160000" y="2100000"/>
+            <a:ext cx="800000" cy="800000"/>
           </a:xfrm>
           <a:prstGeom prst="rect">
             <a:avLst/>
@@ -6576,36 +6034,51 @@
           <a:noFill/>
         </p:spPr>
         <p:txBody>
-          <a:bodyPr wrap="square">
+          <a:bodyPr wrap="square" anchor="ctr">
             <a:spAutoFit/>
           </a:bodyPr>
           <a:lstStyle/>
           <a:p>
-            <a:pPr algn="l">
-              <a:spcAft>
-                <a:spcPts val="1000"/>
-              </a:spcAft>
-            </a:pPr>
-            <a:r>
-              <a:rPr sz="3200" b="0">
-                <a:solidFill>
-                  <a:srgbClr val="333333"/>
+            <a:pPr algn="ctr"/>
+            <a:r>
+              <a:rPr sz="2600" b="1">
+                <a:solidFill>
+                  <a:srgbClr val="FFFFFF"/>
                 </a:solidFill>
                 <a:latin typeface="Open Sans"/>
                 <a:ea typeface="Open Sans"/>
                 <a:cs typeface="Open Sans"/>
               </a:rPr>
-              <a:t>•  Убедиться в собственной безопасности (перчатки / СИЗ).</a:t>
-            </a:r>
-          </a:p>
-          <a:p>
-            <a:pPr algn="l">
-              <a:spcAft>
-                <a:spcPts val="1000"/>
-              </a:spcAft>
-            </a:pPr>
-            <a:r>
-              <a:rPr sz="3200" b="0">
+              <a:t>1</a:t>
+            </a:r>
+          </a:p>
+        </p:txBody>
+      </p:sp>
+      <p:sp>
+        <p:nvSpPr>
+          <p:cNvPr id="8" name="TextBox 7"/>
+          <p:cNvSpPr txBox="1"/>
+          <p:nvPr/>
+        </p:nvSpPr>
+        <p:spPr>
+          <a:xfrm>
+            <a:off x="3260000" y="2000000"/>
+            <a:ext cx="17000000" cy="1000000"/>
+          </a:xfrm>
+          <a:prstGeom prst="rect">
+            <a:avLst/>
+          </a:prstGeom>
+          <a:noFill/>
+        </p:spPr>
+        <p:txBody>
+          <a:bodyPr wrap="square" anchor="ctr">
+            <a:spAutoFit/>
+          </a:bodyPr>
+          <a:lstStyle/>
+          <a:p>
+            <a:pPr algn="l"/>
+            <a:r>
+              <a:rPr sz="2800" b="0">
                 <a:solidFill>
                   <a:srgbClr val="333333"/>
                 </a:solidFill>
@@ -6613,35 +6086,204 @@
                 <a:ea typeface="Open Sans"/>
                 <a:cs typeface="Open Sans"/>
               </a:rPr>
-              <a:t>•  Быстро осмотреть пострадавшего с головы до ног.</a:t>
-            </a:r>
-          </a:p>
-          <a:p>
-            <a:pPr algn="l">
-              <a:spcAft>
-                <a:spcPts val="1000"/>
-              </a:spcAft>
-            </a:pPr>
-            <a:r>
-              <a:rPr sz="3200" b="0">
-                <a:solidFill>
-                  <a:srgbClr val="333333"/>
+              <a:t>Безопасность себе и пострадавшему</a:t>
+            </a:r>
+          </a:p>
+        </p:txBody>
+      </p:sp>
+      <p:sp>
+        <p:nvSpPr>
+          <p:cNvPr id="9" name="Down Arrow 8"/>
+          <p:cNvSpPr/>
+          <p:nvPr/>
+        </p:nvSpPr>
+        <p:spPr>
+          <a:xfrm>
+            <a:off x="11360000" y="3220000"/>
+            <a:ext cx="350000" cy="180000"/>
+          </a:xfrm>
+          <a:prstGeom prst="downArrow">
+            <a:avLst/>
+          </a:prstGeom>
+          <a:solidFill>
+            <a:srgbClr val="0055AA"/>
+          </a:solidFill>
+          <a:ln>
+            <a:noFill/>
+          </a:ln>
+        </p:spPr>
+        <p:style>
+          <a:lnRef idx="1">
+            <a:schemeClr val="accent1"/>
+          </a:lnRef>
+          <a:fillRef idx="3">
+            <a:schemeClr val="accent1"/>
+          </a:fillRef>
+          <a:effectRef idx="2">
+            <a:schemeClr val="accent1"/>
+          </a:effectRef>
+          <a:fontRef idx="minor">
+            <a:schemeClr val="lt1"/>
+          </a:fontRef>
+        </p:style>
+        <p:txBody>
+          <a:bodyPr rtlCol="0" anchor="ctr"/>
+          <a:lstStyle/>
+          <a:p>
+            <a:pPr algn="ctr"/>
+          </a:p>
+        </p:txBody>
+      </p:sp>
+      <p:sp>
+        <p:nvSpPr>
+          <p:cNvPr id="10" name="Rounded Rectangle 9"/>
+          <p:cNvSpPr/>
+          <p:nvPr/>
+        </p:nvSpPr>
+        <p:spPr>
+          <a:xfrm>
+            <a:off x="1860000" y="3450000"/>
+            <a:ext cx="19000000" cy="1400000"/>
+          </a:xfrm>
+          <a:prstGeom prst="roundRect">
+            <a:avLst/>
+          </a:prstGeom>
+          <a:solidFill>
+            <a:srgbClr val="F7F7F7"/>
+          </a:solidFill>
+          <a:ln w="15875">
+            <a:solidFill>
+              <a:srgbClr val="E1E1E1"/>
+            </a:solidFill>
+          </a:ln>
+        </p:spPr>
+        <p:style>
+          <a:lnRef idx="1">
+            <a:schemeClr val="accent1"/>
+          </a:lnRef>
+          <a:fillRef idx="3">
+            <a:schemeClr val="accent1"/>
+          </a:fillRef>
+          <a:effectRef idx="2">
+            <a:schemeClr val="accent1"/>
+          </a:effectRef>
+          <a:fontRef idx="minor">
+            <a:schemeClr val="lt1"/>
+          </a:fontRef>
+        </p:style>
+        <p:txBody>
+          <a:bodyPr rtlCol="0" anchor="ctr"/>
+          <a:lstStyle/>
+          <a:p>
+            <a:pPr algn="ctr"/>
+          </a:p>
+        </p:txBody>
+      </p:sp>
+      <p:sp>
+        <p:nvSpPr>
+          <p:cNvPr id="11" name="Oval 10"/>
+          <p:cNvSpPr/>
+          <p:nvPr/>
+        </p:nvSpPr>
+        <p:spPr>
+          <a:xfrm>
+            <a:off x="2160000" y="3750000"/>
+            <a:ext cx="800000" cy="800000"/>
+          </a:xfrm>
+          <a:prstGeom prst="ellipse">
+            <a:avLst/>
+          </a:prstGeom>
+          <a:solidFill>
+            <a:srgbClr val="0055AA"/>
+          </a:solidFill>
+          <a:ln>
+            <a:noFill/>
+          </a:ln>
+        </p:spPr>
+        <p:style>
+          <a:lnRef idx="1">
+            <a:schemeClr val="accent1"/>
+          </a:lnRef>
+          <a:fillRef idx="3">
+            <a:schemeClr val="accent1"/>
+          </a:fillRef>
+          <a:effectRef idx="2">
+            <a:schemeClr val="accent1"/>
+          </a:effectRef>
+          <a:fontRef idx="minor">
+            <a:schemeClr val="lt1"/>
+          </a:fontRef>
+        </p:style>
+        <p:txBody>
+          <a:bodyPr rtlCol="0" anchor="ctr"/>
+          <a:lstStyle/>
+          <a:p>
+            <a:pPr algn="ctr"/>
+          </a:p>
+        </p:txBody>
+      </p:sp>
+      <p:sp>
+        <p:nvSpPr>
+          <p:cNvPr id="12" name="TextBox 11"/>
+          <p:cNvSpPr txBox="1"/>
+          <p:nvPr/>
+        </p:nvSpPr>
+        <p:spPr>
+          <a:xfrm>
+            <a:off x="2160000" y="3750000"/>
+            <a:ext cx="800000" cy="800000"/>
+          </a:xfrm>
+          <a:prstGeom prst="rect">
+            <a:avLst/>
+          </a:prstGeom>
+          <a:noFill/>
+        </p:spPr>
+        <p:txBody>
+          <a:bodyPr wrap="square" anchor="ctr">
+            <a:spAutoFit/>
+          </a:bodyPr>
+          <a:lstStyle/>
+          <a:p>
+            <a:pPr algn="ctr"/>
+            <a:r>
+              <a:rPr sz="2600" b="1">
+                <a:solidFill>
+                  <a:srgbClr val="FFFFFF"/>
                 </a:solidFill>
                 <a:latin typeface="Open Sans"/>
                 <a:ea typeface="Open Sans"/>
                 <a:cs typeface="Open Sans"/>
               </a:rPr>
-              <a:t>•  Искать кровь на одежде, лужи крови, пульсирующую струю.</a:t>
-            </a:r>
-          </a:p>
-          <a:p>
-            <a:pPr algn="l">
-              <a:spcAft>
-                <a:spcPts val="1000"/>
-              </a:spcAft>
-            </a:pPr>
-            <a:r>
-              <a:rPr sz="3200" b="0">
+              <a:t>2</a:t>
+            </a:r>
+          </a:p>
+        </p:txBody>
+      </p:sp>
+      <p:sp>
+        <p:nvSpPr>
+          <p:cNvPr id="13" name="TextBox 12"/>
+          <p:cNvSpPr txBox="1"/>
+          <p:nvPr/>
+        </p:nvSpPr>
+        <p:spPr>
+          <a:xfrm>
+            <a:off x="3260000" y="3650000"/>
+            <a:ext cx="17000000" cy="1000000"/>
+          </a:xfrm>
+          <a:prstGeom prst="rect">
+            <a:avLst/>
+          </a:prstGeom>
+          <a:noFill/>
+        </p:spPr>
+        <p:txBody>
+          <a:bodyPr wrap="square" anchor="ctr">
+            <a:spAutoFit/>
+          </a:bodyPr>
+          <a:lstStyle/>
+          <a:p>
+            <a:pPr algn="l"/>
+            <a:r>
+              <a:rPr sz="2800" b="0">
                 <a:solidFill>
                   <a:srgbClr val="333333"/>
                 </a:solidFill>
@@ -6649,35 +6291,204 @@
                 <a:ea typeface="Open Sans"/>
                 <a:cs typeface="Open Sans"/>
               </a:rPr>
-              <a:t>•  При нескольких пострадавших — осмотреть всех.</a:t>
-            </a:r>
-          </a:p>
-          <a:p>
-            <a:pPr algn="l">
-              <a:spcAft>
-                <a:spcPts val="1000"/>
-              </a:spcAft>
-            </a:pPr>
-            <a:r>
-              <a:rPr sz="3200" b="0">
-                <a:solidFill>
-                  <a:srgbClr val="333333"/>
+              <a:t>Осмотр с головы до ног (1–2 с)</a:t>
+            </a:r>
+          </a:p>
+        </p:txBody>
+      </p:sp>
+      <p:sp>
+        <p:nvSpPr>
+          <p:cNvPr id="14" name="Down Arrow 13"/>
+          <p:cNvSpPr/>
+          <p:nvPr/>
+        </p:nvSpPr>
+        <p:spPr>
+          <a:xfrm>
+            <a:off x="11360000" y="4870000"/>
+            <a:ext cx="350000" cy="180000"/>
+          </a:xfrm>
+          <a:prstGeom prst="downArrow">
+            <a:avLst/>
+          </a:prstGeom>
+          <a:solidFill>
+            <a:srgbClr val="0055AA"/>
+          </a:solidFill>
+          <a:ln>
+            <a:noFill/>
+          </a:ln>
+        </p:spPr>
+        <p:style>
+          <a:lnRef idx="1">
+            <a:schemeClr val="accent1"/>
+          </a:lnRef>
+          <a:fillRef idx="3">
+            <a:schemeClr val="accent1"/>
+          </a:fillRef>
+          <a:effectRef idx="2">
+            <a:schemeClr val="accent1"/>
+          </a:effectRef>
+          <a:fontRef idx="minor">
+            <a:schemeClr val="lt1"/>
+          </a:fontRef>
+        </p:style>
+        <p:txBody>
+          <a:bodyPr rtlCol="0" anchor="ctr"/>
+          <a:lstStyle/>
+          <a:p>
+            <a:pPr algn="ctr"/>
+          </a:p>
+        </p:txBody>
+      </p:sp>
+      <p:sp>
+        <p:nvSpPr>
+          <p:cNvPr id="15" name="Rounded Rectangle 14"/>
+          <p:cNvSpPr/>
+          <p:nvPr/>
+        </p:nvSpPr>
+        <p:spPr>
+          <a:xfrm>
+            <a:off x="1860000" y="5100000"/>
+            <a:ext cx="19000000" cy="1400000"/>
+          </a:xfrm>
+          <a:prstGeom prst="roundRect">
+            <a:avLst/>
+          </a:prstGeom>
+          <a:solidFill>
+            <a:srgbClr val="F7F7F7"/>
+          </a:solidFill>
+          <a:ln w="15875">
+            <a:solidFill>
+              <a:srgbClr val="E1E1E1"/>
+            </a:solidFill>
+          </a:ln>
+        </p:spPr>
+        <p:style>
+          <a:lnRef idx="1">
+            <a:schemeClr val="accent1"/>
+          </a:lnRef>
+          <a:fillRef idx="3">
+            <a:schemeClr val="accent1"/>
+          </a:fillRef>
+          <a:effectRef idx="2">
+            <a:schemeClr val="accent1"/>
+          </a:effectRef>
+          <a:fontRef idx="minor">
+            <a:schemeClr val="lt1"/>
+          </a:fontRef>
+        </p:style>
+        <p:txBody>
+          <a:bodyPr rtlCol="0" anchor="ctr"/>
+          <a:lstStyle/>
+          <a:p>
+            <a:pPr algn="ctr"/>
+          </a:p>
+        </p:txBody>
+      </p:sp>
+      <p:sp>
+        <p:nvSpPr>
+          <p:cNvPr id="16" name="Oval 15"/>
+          <p:cNvSpPr/>
+          <p:nvPr/>
+        </p:nvSpPr>
+        <p:spPr>
+          <a:xfrm>
+            <a:off x="2160000" y="5400000"/>
+            <a:ext cx="800000" cy="800000"/>
+          </a:xfrm>
+          <a:prstGeom prst="ellipse">
+            <a:avLst/>
+          </a:prstGeom>
+          <a:solidFill>
+            <a:srgbClr val="0055AA"/>
+          </a:solidFill>
+          <a:ln>
+            <a:noFill/>
+          </a:ln>
+        </p:spPr>
+        <p:style>
+          <a:lnRef idx="1">
+            <a:schemeClr val="accent1"/>
+          </a:lnRef>
+          <a:fillRef idx="3">
+            <a:schemeClr val="accent1"/>
+          </a:fillRef>
+          <a:effectRef idx="2">
+            <a:schemeClr val="accent1"/>
+          </a:effectRef>
+          <a:fontRef idx="minor">
+            <a:schemeClr val="lt1"/>
+          </a:fontRef>
+        </p:style>
+        <p:txBody>
+          <a:bodyPr rtlCol="0" anchor="ctr"/>
+          <a:lstStyle/>
+          <a:p>
+            <a:pPr algn="ctr"/>
+          </a:p>
+        </p:txBody>
+      </p:sp>
+      <p:sp>
+        <p:nvSpPr>
+          <p:cNvPr id="17" name="TextBox 16"/>
+          <p:cNvSpPr txBox="1"/>
+          <p:nvPr/>
+        </p:nvSpPr>
+        <p:spPr>
+          <a:xfrm>
+            <a:off x="2160000" y="5400000"/>
+            <a:ext cx="800000" cy="800000"/>
+          </a:xfrm>
+          <a:prstGeom prst="rect">
+            <a:avLst/>
+          </a:prstGeom>
+          <a:noFill/>
+        </p:spPr>
+        <p:txBody>
+          <a:bodyPr wrap="square" anchor="ctr">
+            <a:spAutoFit/>
+          </a:bodyPr>
+          <a:lstStyle/>
+          <a:p>
+            <a:pPr algn="ctr"/>
+            <a:r>
+              <a:rPr sz="2600" b="1">
+                <a:solidFill>
+                  <a:srgbClr val="FFFFFF"/>
                 </a:solidFill>
                 <a:latin typeface="Open Sans"/>
                 <a:ea typeface="Open Sans"/>
                 <a:cs typeface="Open Sans"/>
               </a:rPr>
-              <a:t>•  Приоритет — детям и пострадавшим с массивным кровотечением.</a:t>
-            </a:r>
-          </a:p>
-          <a:p>
-            <a:pPr algn="l">
-              <a:spcAft>
-                <a:spcPts val="1000"/>
-              </a:spcAft>
-            </a:pPr>
-            <a:r>
-              <a:rPr sz="3200" b="0">
+              <a:t>3</a:t>
+            </a:r>
+          </a:p>
+        </p:txBody>
+      </p:sp>
+      <p:sp>
+        <p:nvSpPr>
+          <p:cNvPr id="18" name="TextBox 17"/>
+          <p:cNvSpPr txBox="1"/>
+          <p:nvPr/>
+        </p:nvSpPr>
+        <p:spPr>
+          <a:xfrm>
+            <a:off x="3260000" y="5300000"/>
+            <a:ext cx="17000000" cy="1000000"/>
+          </a:xfrm>
+          <a:prstGeom prst="rect">
+            <a:avLst/>
+          </a:prstGeom>
+          <a:noFill/>
+        </p:spPr>
+        <p:txBody>
+          <a:bodyPr wrap="square" anchor="ctr">
+            <a:spAutoFit/>
+          </a:bodyPr>
+          <a:lstStyle/>
+          <a:p>
+            <a:pPr algn="l"/>
+            <a:r>
+              <a:rPr sz="2800" b="0">
                 <a:solidFill>
                   <a:srgbClr val="333333"/>
                 </a:solidFill>
@@ -6685,7 +6496,415 @@
                 <a:ea typeface="Open Sans"/>
                 <a:cs typeface="Open Sans"/>
               </a:rPr>
-              <a:t>•  После остановки крови — оценка сознания / дыхания и подробный осмотр.</a:t>
+              <a:t>Искать кровь, лужи, пульсирующую струю</a:t>
+            </a:r>
+          </a:p>
+        </p:txBody>
+      </p:sp>
+      <p:sp>
+        <p:nvSpPr>
+          <p:cNvPr id="19" name="Down Arrow 18"/>
+          <p:cNvSpPr/>
+          <p:nvPr/>
+        </p:nvSpPr>
+        <p:spPr>
+          <a:xfrm>
+            <a:off x="11360000" y="6520000"/>
+            <a:ext cx="350000" cy="180000"/>
+          </a:xfrm>
+          <a:prstGeom prst="downArrow">
+            <a:avLst/>
+          </a:prstGeom>
+          <a:solidFill>
+            <a:srgbClr val="0055AA"/>
+          </a:solidFill>
+          <a:ln>
+            <a:noFill/>
+          </a:ln>
+        </p:spPr>
+        <p:style>
+          <a:lnRef idx="1">
+            <a:schemeClr val="accent1"/>
+          </a:lnRef>
+          <a:fillRef idx="3">
+            <a:schemeClr val="accent1"/>
+          </a:fillRef>
+          <a:effectRef idx="2">
+            <a:schemeClr val="accent1"/>
+          </a:effectRef>
+          <a:fontRef idx="minor">
+            <a:schemeClr val="lt1"/>
+          </a:fontRef>
+        </p:style>
+        <p:txBody>
+          <a:bodyPr rtlCol="0" anchor="ctr"/>
+          <a:lstStyle/>
+          <a:p>
+            <a:pPr algn="ctr"/>
+          </a:p>
+        </p:txBody>
+      </p:sp>
+      <p:sp>
+        <p:nvSpPr>
+          <p:cNvPr id="20" name="Rounded Rectangle 19"/>
+          <p:cNvSpPr/>
+          <p:nvPr/>
+        </p:nvSpPr>
+        <p:spPr>
+          <a:xfrm>
+            <a:off x="1860000" y="6750000"/>
+            <a:ext cx="19000000" cy="1400000"/>
+          </a:xfrm>
+          <a:prstGeom prst="roundRect">
+            <a:avLst/>
+          </a:prstGeom>
+          <a:solidFill>
+            <a:srgbClr val="0055AA"/>
+          </a:solidFill>
+          <a:ln>
+            <a:noFill/>
+          </a:ln>
+        </p:spPr>
+        <p:style>
+          <a:lnRef idx="1">
+            <a:schemeClr val="accent1"/>
+          </a:lnRef>
+          <a:fillRef idx="3">
+            <a:schemeClr val="accent1"/>
+          </a:fillRef>
+          <a:effectRef idx="2">
+            <a:schemeClr val="accent1"/>
+          </a:effectRef>
+          <a:fontRef idx="minor">
+            <a:schemeClr val="lt1"/>
+          </a:fontRef>
+        </p:style>
+        <p:txBody>
+          <a:bodyPr rtlCol="0" anchor="ctr"/>
+          <a:lstStyle/>
+          <a:p>
+            <a:pPr algn="ctr"/>
+          </a:p>
+        </p:txBody>
+      </p:sp>
+      <p:sp>
+        <p:nvSpPr>
+          <p:cNvPr id="21" name="Oval 20"/>
+          <p:cNvSpPr/>
+          <p:nvPr/>
+        </p:nvSpPr>
+        <p:spPr>
+          <a:xfrm>
+            <a:off x="2160000" y="7050000"/>
+            <a:ext cx="800000" cy="800000"/>
+          </a:xfrm>
+          <a:prstGeom prst="ellipse">
+            <a:avLst/>
+          </a:prstGeom>
+          <a:solidFill>
+            <a:srgbClr val="FFFFFF"/>
+          </a:solidFill>
+          <a:ln>
+            <a:noFill/>
+          </a:ln>
+        </p:spPr>
+        <p:style>
+          <a:lnRef idx="1">
+            <a:schemeClr val="accent1"/>
+          </a:lnRef>
+          <a:fillRef idx="3">
+            <a:schemeClr val="accent1"/>
+          </a:fillRef>
+          <a:effectRef idx="2">
+            <a:schemeClr val="accent1"/>
+          </a:effectRef>
+          <a:fontRef idx="minor">
+            <a:schemeClr val="lt1"/>
+          </a:fontRef>
+        </p:style>
+        <p:txBody>
+          <a:bodyPr rtlCol="0" anchor="ctr"/>
+          <a:lstStyle/>
+          <a:p>
+            <a:pPr algn="ctr"/>
+          </a:p>
+        </p:txBody>
+      </p:sp>
+      <p:sp>
+        <p:nvSpPr>
+          <p:cNvPr id="22" name="TextBox 21"/>
+          <p:cNvSpPr txBox="1"/>
+          <p:nvPr/>
+        </p:nvSpPr>
+        <p:spPr>
+          <a:xfrm>
+            <a:off x="2160000" y="7050000"/>
+            <a:ext cx="800000" cy="800000"/>
+          </a:xfrm>
+          <a:prstGeom prst="rect">
+            <a:avLst/>
+          </a:prstGeom>
+          <a:noFill/>
+        </p:spPr>
+        <p:txBody>
+          <a:bodyPr wrap="square" anchor="ctr">
+            <a:spAutoFit/>
+          </a:bodyPr>
+          <a:lstStyle/>
+          <a:p>
+            <a:pPr algn="ctr"/>
+            <a:r>
+              <a:rPr sz="2600" b="1">
+                <a:solidFill>
+                  <a:srgbClr val="0055AA"/>
+                </a:solidFill>
+                <a:latin typeface="Open Sans"/>
+                <a:ea typeface="Open Sans"/>
+                <a:cs typeface="Open Sans"/>
+              </a:rPr>
+              <a:t>4</a:t>
+            </a:r>
+          </a:p>
+        </p:txBody>
+      </p:sp>
+      <p:sp>
+        <p:nvSpPr>
+          <p:cNvPr id="23" name="TextBox 22"/>
+          <p:cNvSpPr txBox="1"/>
+          <p:nvPr/>
+        </p:nvSpPr>
+        <p:spPr>
+          <a:xfrm>
+            <a:off x="3260000" y="6950000"/>
+            <a:ext cx="17000000" cy="1000000"/>
+          </a:xfrm>
+          <a:prstGeom prst="rect">
+            <a:avLst/>
+          </a:prstGeom>
+          <a:noFill/>
+        </p:spPr>
+        <p:txBody>
+          <a:bodyPr wrap="square" anchor="ctr">
+            <a:spAutoFit/>
+          </a:bodyPr>
+          <a:lstStyle/>
+          <a:p>
+            <a:pPr algn="l"/>
+            <a:r>
+              <a:rPr sz="2800" b="0">
+                <a:solidFill>
+                  <a:srgbClr val="FFFFFF"/>
+                </a:solidFill>
+                <a:latin typeface="Open Sans"/>
+                <a:ea typeface="Open Sans"/>
+                <a:cs typeface="Open Sans"/>
+              </a:rPr>
+              <a:t>Остановить кровотечение</a:t>
+            </a:r>
+          </a:p>
+        </p:txBody>
+      </p:sp>
+      <p:sp>
+        <p:nvSpPr>
+          <p:cNvPr id="24" name="Down Arrow 23"/>
+          <p:cNvSpPr/>
+          <p:nvPr/>
+        </p:nvSpPr>
+        <p:spPr>
+          <a:xfrm>
+            <a:off x="11360000" y="8170000"/>
+            <a:ext cx="350000" cy="180000"/>
+          </a:xfrm>
+          <a:prstGeom prst="downArrow">
+            <a:avLst/>
+          </a:prstGeom>
+          <a:solidFill>
+            <a:srgbClr val="0055AA"/>
+          </a:solidFill>
+          <a:ln>
+            <a:noFill/>
+          </a:ln>
+        </p:spPr>
+        <p:style>
+          <a:lnRef idx="1">
+            <a:schemeClr val="accent1"/>
+          </a:lnRef>
+          <a:fillRef idx="3">
+            <a:schemeClr val="accent1"/>
+          </a:fillRef>
+          <a:effectRef idx="2">
+            <a:schemeClr val="accent1"/>
+          </a:effectRef>
+          <a:fontRef idx="minor">
+            <a:schemeClr val="lt1"/>
+          </a:fontRef>
+        </p:style>
+        <p:txBody>
+          <a:bodyPr rtlCol="0" anchor="ctr"/>
+          <a:lstStyle/>
+          <a:p>
+            <a:pPr algn="ctr"/>
+          </a:p>
+        </p:txBody>
+      </p:sp>
+      <p:sp>
+        <p:nvSpPr>
+          <p:cNvPr id="25" name="Rounded Rectangle 24"/>
+          <p:cNvSpPr/>
+          <p:nvPr/>
+        </p:nvSpPr>
+        <p:spPr>
+          <a:xfrm>
+            <a:off x="1860000" y="8400000"/>
+            <a:ext cx="19000000" cy="1400000"/>
+          </a:xfrm>
+          <a:prstGeom prst="roundRect">
+            <a:avLst/>
+          </a:prstGeom>
+          <a:solidFill>
+            <a:srgbClr val="F7F7F7"/>
+          </a:solidFill>
+          <a:ln w="15875">
+            <a:solidFill>
+              <a:srgbClr val="E1E1E1"/>
+            </a:solidFill>
+          </a:ln>
+        </p:spPr>
+        <p:style>
+          <a:lnRef idx="1">
+            <a:schemeClr val="accent1"/>
+          </a:lnRef>
+          <a:fillRef idx="3">
+            <a:schemeClr val="accent1"/>
+          </a:fillRef>
+          <a:effectRef idx="2">
+            <a:schemeClr val="accent1"/>
+          </a:effectRef>
+          <a:fontRef idx="minor">
+            <a:schemeClr val="lt1"/>
+          </a:fontRef>
+        </p:style>
+        <p:txBody>
+          <a:bodyPr rtlCol="0" anchor="ctr"/>
+          <a:lstStyle/>
+          <a:p>
+            <a:pPr algn="ctr"/>
+          </a:p>
+        </p:txBody>
+      </p:sp>
+      <p:sp>
+        <p:nvSpPr>
+          <p:cNvPr id="26" name="Oval 25"/>
+          <p:cNvSpPr/>
+          <p:nvPr/>
+        </p:nvSpPr>
+        <p:spPr>
+          <a:xfrm>
+            <a:off x="2160000" y="8700000"/>
+            <a:ext cx="800000" cy="800000"/>
+          </a:xfrm>
+          <a:prstGeom prst="ellipse">
+            <a:avLst/>
+          </a:prstGeom>
+          <a:solidFill>
+            <a:srgbClr val="0055AA"/>
+          </a:solidFill>
+          <a:ln>
+            <a:noFill/>
+          </a:ln>
+        </p:spPr>
+        <p:style>
+          <a:lnRef idx="1">
+            <a:schemeClr val="accent1"/>
+          </a:lnRef>
+          <a:fillRef idx="3">
+            <a:schemeClr val="accent1"/>
+          </a:fillRef>
+          <a:effectRef idx="2">
+            <a:schemeClr val="accent1"/>
+          </a:effectRef>
+          <a:fontRef idx="minor">
+            <a:schemeClr val="lt1"/>
+          </a:fontRef>
+        </p:style>
+        <p:txBody>
+          <a:bodyPr rtlCol="0" anchor="ctr"/>
+          <a:lstStyle/>
+          <a:p>
+            <a:pPr algn="ctr"/>
+          </a:p>
+        </p:txBody>
+      </p:sp>
+      <p:sp>
+        <p:nvSpPr>
+          <p:cNvPr id="27" name="TextBox 26"/>
+          <p:cNvSpPr txBox="1"/>
+          <p:nvPr/>
+        </p:nvSpPr>
+        <p:spPr>
+          <a:xfrm>
+            <a:off x="2160000" y="8700000"/>
+            <a:ext cx="800000" cy="800000"/>
+          </a:xfrm>
+          <a:prstGeom prst="rect">
+            <a:avLst/>
+          </a:prstGeom>
+          <a:noFill/>
+        </p:spPr>
+        <p:txBody>
+          <a:bodyPr wrap="square" anchor="ctr">
+            <a:spAutoFit/>
+          </a:bodyPr>
+          <a:lstStyle/>
+          <a:p>
+            <a:pPr algn="ctr"/>
+            <a:r>
+              <a:rPr sz="2600" b="1">
+                <a:solidFill>
+                  <a:srgbClr val="FFFFFF"/>
+                </a:solidFill>
+                <a:latin typeface="Open Sans"/>
+                <a:ea typeface="Open Sans"/>
+                <a:cs typeface="Open Sans"/>
+              </a:rPr>
+              <a:t>5</a:t>
+            </a:r>
+          </a:p>
+        </p:txBody>
+      </p:sp>
+      <p:sp>
+        <p:nvSpPr>
+          <p:cNvPr id="28" name="TextBox 27"/>
+          <p:cNvSpPr txBox="1"/>
+          <p:nvPr/>
+        </p:nvSpPr>
+        <p:spPr>
+          <a:xfrm>
+            <a:off x="3260000" y="8600000"/>
+            <a:ext cx="17000000" cy="1000000"/>
+          </a:xfrm>
+          <a:prstGeom prst="rect">
+            <a:avLst/>
+          </a:prstGeom>
+          <a:noFill/>
+        </p:spPr>
+        <p:txBody>
+          <a:bodyPr wrap="square" anchor="ctr">
+            <a:spAutoFit/>
+          </a:bodyPr>
+          <a:lstStyle/>
+          <a:p>
+            <a:pPr algn="l"/>
+            <a:r>
+              <a:rPr sz="2800" b="0">
+                <a:solidFill>
+                  <a:srgbClr val="333333"/>
+                </a:solidFill>
+                <a:latin typeface="Open Sans"/>
+                <a:ea typeface="Open Sans"/>
+                <a:cs typeface="Open Sans"/>
+              </a:rPr>
+              <a:t>Затем — сознание, дыхание, подробный осмотр</a:t>
             </a:r>
           </a:p>
         </p:txBody>
@@ -6753,14 +6972,227 @@
       </p:sp>
       <p:sp>
         <p:nvSpPr>
-          <p:cNvPr id="3" name="Rectangle 2"/>
+          <p:cNvPr id="3" name="TextBox 2"/>
+          <p:cNvSpPr txBox="1"/>
+          <p:nvPr/>
+        </p:nvSpPr>
+        <p:spPr>
+          <a:xfrm>
+            <a:off x="360000" y="350000"/>
+            <a:ext cx="23664000" cy="1100000"/>
+          </a:xfrm>
+          <a:prstGeom prst="rect">
+            <a:avLst/>
+          </a:prstGeom>
+          <a:noFill/>
+        </p:spPr>
+        <p:txBody>
+          <a:bodyPr wrap="square" anchor="t">
+            <a:spAutoFit/>
+          </a:bodyPr>
+          <a:lstStyle/>
+          <a:p>
+            <a:pPr algn="l"/>
+            <a:r>
+              <a:rPr sz="4600" b="1">
+                <a:solidFill>
+                  <a:srgbClr val="333333"/>
+                </a:solidFill>
+                <a:latin typeface="Open Sans"/>
+                <a:ea typeface="Open Sans"/>
+                <a:cs typeface="Open Sans"/>
+              </a:rPr>
+              <a:t>Обзорный и подробный осмотр</a:t>
+            </a:r>
+          </a:p>
+        </p:txBody>
+      </p:sp>
+      <p:sp>
+        <p:nvSpPr>
+          <p:cNvPr id="4" name="Rectangle 3"/>
           <p:cNvSpPr/>
           <p:nvPr/>
         </p:nvSpPr>
         <p:spPr>
           <a:xfrm>
-            <a:off x="0" y="0"/>
-            <a:ext cx="24384000" cy="120000"/>
+            <a:off x="360000" y="1450000"/>
+            <a:ext cx="23664000" cy="20000"/>
+          </a:xfrm>
+          <a:prstGeom prst="rect">
+            <a:avLst/>
+          </a:prstGeom>
+          <a:solidFill>
+            <a:srgbClr val="E1E1E1"/>
+          </a:solidFill>
+          <a:ln>
+            <a:noFill/>
+          </a:ln>
+        </p:spPr>
+        <p:style>
+          <a:lnRef idx="1">
+            <a:schemeClr val="accent1"/>
+          </a:lnRef>
+          <a:fillRef idx="3">
+            <a:schemeClr val="accent1"/>
+          </a:fillRef>
+          <a:effectRef idx="2">
+            <a:schemeClr val="accent1"/>
+          </a:effectRef>
+          <a:fontRef idx="minor">
+            <a:schemeClr val="lt1"/>
+          </a:fontRef>
+        </p:style>
+        <p:txBody>
+          <a:bodyPr rtlCol="0" anchor="ctr"/>
+          <a:lstStyle/>
+          <a:p>
+            <a:pPr algn="ctr"/>
+          </a:p>
+        </p:txBody>
+      </p:sp>
+      <p:sp>
+        <p:nvSpPr>
+          <p:cNvPr id="5" name="Rounded Rectangle 4"/>
+          <p:cNvSpPr/>
+          <p:nvPr/>
+        </p:nvSpPr>
+        <p:spPr>
+          <a:xfrm>
+            <a:off x="360000" y="1900000"/>
+            <a:ext cx="10800000" cy="9000000"/>
+          </a:xfrm>
+          <a:prstGeom prst="roundRect">
+            <a:avLst/>
+          </a:prstGeom>
+          <a:solidFill>
+            <a:srgbClr val="FFFFFF"/>
+          </a:solidFill>
+          <a:ln w="15875">
+            <a:solidFill>
+              <a:srgbClr val="E1E1E1"/>
+            </a:solidFill>
+          </a:ln>
+        </p:spPr>
+        <p:style>
+          <a:lnRef idx="1">
+            <a:schemeClr val="accent1"/>
+          </a:lnRef>
+          <a:fillRef idx="3">
+            <a:schemeClr val="accent1"/>
+          </a:fillRef>
+          <a:effectRef idx="2">
+            <a:schemeClr val="accent1"/>
+          </a:effectRef>
+          <a:fontRef idx="minor">
+            <a:schemeClr val="lt1"/>
+          </a:fontRef>
+        </p:style>
+        <p:txBody>
+          <a:bodyPr rtlCol="0" anchor="ctr"/>
+          <a:lstStyle/>
+          <a:p>
+            <a:pPr algn="ctr"/>
+          </a:p>
+        </p:txBody>
+      </p:sp>
+      <p:sp>
+        <p:nvSpPr>
+          <p:cNvPr id="6" name="Rounded Rectangle 5"/>
+          <p:cNvSpPr/>
+          <p:nvPr/>
+        </p:nvSpPr>
+        <p:spPr>
+          <a:xfrm>
+            <a:off x="12160000" y="1900000"/>
+            <a:ext cx="10800000" cy="9000000"/>
+          </a:xfrm>
+          <a:prstGeom prst="roundRect">
+            <a:avLst/>
+          </a:prstGeom>
+          <a:solidFill>
+            <a:srgbClr val="FFFFFF"/>
+          </a:solidFill>
+          <a:ln w="15875">
+            <a:solidFill>
+              <a:srgbClr val="E1E1E1"/>
+            </a:solidFill>
+          </a:ln>
+        </p:spPr>
+        <p:style>
+          <a:lnRef idx="1">
+            <a:schemeClr val="accent1"/>
+          </a:lnRef>
+          <a:fillRef idx="3">
+            <a:schemeClr val="accent1"/>
+          </a:fillRef>
+          <a:effectRef idx="2">
+            <a:schemeClr val="accent1"/>
+          </a:effectRef>
+          <a:fontRef idx="minor">
+            <a:schemeClr val="lt1"/>
+          </a:fontRef>
+        </p:style>
+        <p:txBody>
+          <a:bodyPr rtlCol="0" anchor="ctr"/>
+          <a:lstStyle/>
+          <a:p>
+            <a:pPr algn="ctr"/>
+          </a:p>
+        </p:txBody>
+      </p:sp>
+      <p:sp>
+        <p:nvSpPr>
+          <p:cNvPr id="7" name="Rectangle 6"/>
+          <p:cNvSpPr/>
+          <p:nvPr/>
+        </p:nvSpPr>
+        <p:spPr>
+          <a:xfrm>
+            <a:off x="360000" y="1900000"/>
+            <a:ext cx="10800000" cy="1000000"/>
+          </a:xfrm>
+          <a:prstGeom prst="rect">
+            <a:avLst/>
+          </a:prstGeom>
+          <a:solidFill>
+            <a:srgbClr val="0055AA"/>
+          </a:solidFill>
+          <a:ln>
+            <a:noFill/>
+          </a:ln>
+        </p:spPr>
+        <p:style>
+          <a:lnRef idx="1">
+            <a:schemeClr val="accent1"/>
+          </a:lnRef>
+          <a:fillRef idx="3">
+            <a:schemeClr val="accent1"/>
+          </a:fillRef>
+          <a:effectRef idx="2">
+            <a:schemeClr val="accent1"/>
+          </a:effectRef>
+          <a:fontRef idx="minor">
+            <a:schemeClr val="lt1"/>
+          </a:fontRef>
+        </p:style>
+        <p:txBody>
+          <a:bodyPr rtlCol="0" anchor="ctr"/>
+          <a:lstStyle/>
+          <a:p>
+            <a:pPr algn="ctr"/>
+          </a:p>
+        </p:txBody>
+      </p:sp>
+      <p:sp>
+        <p:nvSpPr>
+          <p:cNvPr id="8" name="Rectangle 7"/>
+          <p:cNvSpPr/>
+          <p:nvPr/>
+        </p:nvSpPr>
+        <p:spPr>
+          <a:xfrm>
+            <a:off x="12160000" y="1900000"/>
+            <a:ext cx="10800000" cy="1000000"/>
           </a:xfrm>
           <a:prstGeom prst="rect">
             <a:avLst/>
@@ -6796,14 +7228,14 @@
       </p:sp>
       <p:sp>
         <p:nvSpPr>
-          <p:cNvPr id="4" name="TextBox 3"/>
+          <p:cNvPr id="9" name="TextBox 8"/>
           <p:cNvSpPr txBox="1"/>
           <p:nvPr/>
         </p:nvSpPr>
         <p:spPr>
           <a:xfrm>
-            <a:off x="800000" y="350000"/>
-            <a:ext cx="22800000" cy="1000000"/>
+            <a:off x="560000" y="2050000"/>
+            <a:ext cx="10400000" cy="700000"/>
           </a:xfrm>
           <a:prstGeom prst="rect">
             <a:avLst/>
@@ -6816,237 +7248,18 @@
           </a:bodyPr>
           <a:lstStyle/>
           <a:p>
-            <a:pPr algn="l"/>
-            <a:r>
-              <a:rPr sz="4600" b="1">
-                <a:solidFill>
-                  <a:srgbClr val="333333"/>
+            <a:pPr algn="ctr"/>
+            <a:r>
+              <a:rPr sz="2600" b="1">
+                <a:solidFill>
+                  <a:srgbClr val="FFFFFF"/>
                 </a:solidFill>
                 <a:latin typeface="Open Sans"/>
                 <a:ea typeface="Open Sans"/>
                 <a:cs typeface="Open Sans"/>
               </a:rPr>
-              <a:t>Обзорный и подробный осмотр</a:t>
-            </a:r>
-          </a:p>
-        </p:txBody>
-      </p:sp>
-      <p:sp>
-        <p:nvSpPr>
-          <p:cNvPr id="5" name="Rectangle 4"/>
-          <p:cNvSpPr/>
-          <p:nvPr/>
-        </p:nvSpPr>
-        <p:spPr>
-          <a:xfrm>
-            <a:off x="800000" y="1450000"/>
-            <a:ext cx="22800000" cy="20000"/>
-          </a:xfrm>
-          <a:prstGeom prst="rect">
-            <a:avLst/>
-          </a:prstGeom>
-          <a:solidFill>
-            <a:srgbClr val="E1E1E1"/>
-          </a:solidFill>
-          <a:ln>
-            <a:noFill/>
-          </a:ln>
-        </p:spPr>
-        <p:style>
-          <a:lnRef idx="1">
-            <a:schemeClr val="accent1"/>
-          </a:lnRef>
-          <a:fillRef idx="3">
-            <a:schemeClr val="accent1"/>
-          </a:fillRef>
-          <a:effectRef idx="2">
-            <a:schemeClr val="accent1"/>
-          </a:effectRef>
-          <a:fontRef idx="minor">
-            <a:schemeClr val="lt1"/>
-          </a:fontRef>
-        </p:style>
-        <p:txBody>
-          <a:bodyPr rtlCol="0" anchor="ctr"/>
-          <a:lstStyle/>
-          <a:p>
-            <a:pPr algn="ctr"/>
-          </a:p>
-        </p:txBody>
-      </p:sp>
-      <p:sp>
-        <p:nvSpPr>
-          <p:cNvPr id="6" name="Rectangle 5"/>
-          <p:cNvSpPr/>
-          <p:nvPr/>
-        </p:nvSpPr>
-        <p:spPr>
-          <a:xfrm>
-            <a:off x="800000" y="1950000"/>
-            <a:ext cx="10800000" cy="9500000"/>
-          </a:xfrm>
-          <a:prstGeom prst="rect">
-            <a:avLst/>
-          </a:prstGeom>
-          <a:solidFill>
-            <a:srgbClr val="FFFFFF"/>
-          </a:solidFill>
-          <a:ln w="12700">
-            <a:solidFill>
-              <a:srgbClr val="E1E1E1"/>
-            </a:solidFill>
-          </a:ln>
-        </p:spPr>
-        <p:style>
-          <a:lnRef idx="1">
-            <a:schemeClr val="accent1"/>
-          </a:lnRef>
-          <a:fillRef idx="3">
-            <a:schemeClr val="accent1"/>
-          </a:fillRef>
-          <a:effectRef idx="2">
-            <a:schemeClr val="accent1"/>
-          </a:effectRef>
-          <a:fontRef idx="minor">
-            <a:schemeClr val="lt1"/>
-          </a:fontRef>
-        </p:style>
-        <p:txBody>
-          <a:bodyPr rtlCol="0" anchor="ctr"/>
-          <a:lstStyle/>
-          <a:p>
-            <a:pPr algn="ctr"/>
-          </a:p>
-        </p:txBody>
-      </p:sp>
-      <p:sp>
-        <p:nvSpPr>
-          <p:cNvPr id="7" name="Rectangle 6"/>
-          <p:cNvSpPr/>
-          <p:nvPr/>
-        </p:nvSpPr>
-        <p:spPr>
-          <a:xfrm>
-            <a:off x="12800000" y="1950000"/>
-            <a:ext cx="10800000" cy="9500000"/>
-          </a:xfrm>
-          <a:prstGeom prst="rect">
-            <a:avLst/>
-          </a:prstGeom>
-          <a:solidFill>
-            <a:srgbClr val="FFFFFF"/>
-          </a:solidFill>
-          <a:ln w="12700">
-            <a:solidFill>
-              <a:srgbClr val="E1E1E1"/>
-            </a:solidFill>
-          </a:ln>
-        </p:spPr>
-        <p:style>
-          <a:lnRef idx="1">
-            <a:schemeClr val="accent1"/>
-          </a:lnRef>
-          <a:fillRef idx="3">
-            <a:schemeClr val="accent1"/>
-          </a:fillRef>
-          <a:effectRef idx="2">
-            <a:schemeClr val="accent1"/>
-          </a:effectRef>
-          <a:fontRef idx="minor">
-            <a:schemeClr val="lt1"/>
-          </a:fontRef>
-        </p:style>
-        <p:txBody>
-          <a:bodyPr rtlCol="0" anchor="ctr"/>
-          <a:lstStyle/>
-          <a:p>
-            <a:pPr algn="ctr"/>
-          </a:p>
-        </p:txBody>
-      </p:sp>
-      <p:sp>
-        <p:nvSpPr>
-          <p:cNvPr id="8" name="Rectangle 7"/>
-          <p:cNvSpPr/>
-          <p:nvPr/>
-        </p:nvSpPr>
-        <p:spPr>
-          <a:xfrm>
-            <a:off x="800000" y="1950000"/>
-            <a:ext cx="10800000" cy="900000"/>
-          </a:xfrm>
-          <a:prstGeom prst="rect">
-            <a:avLst/>
-          </a:prstGeom>
-          <a:solidFill>
-            <a:srgbClr val="0055AA"/>
-          </a:solidFill>
-          <a:ln>
-            <a:noFill/>
-          </a:ln>
-        </p:spPr>
-        <p:style>
-          <a:lnRef idx="1">
-            <a:schemeClr val="accent1"/>
-          </a:lnRef>
-          <a:fillRef idx="3">
-            <a:schemeClr val="accent1"/>
-          </a:fillRef>
-          <a:effectRef idx="2">
-            <a:schemeClr val="accent1"/>
-          </a:effectRef>
-          <a:fontRef idx="minor">
-            <a:schemeClr val="lt1"/>
-          </a:fontRef>
-        </p:style>
-        <p:txBody>
-          <a:bodyPr rtlCol="0" anchor="ctr"/>
-          <a:lstStyle/>
-          <a:p>
-            <a:pPr algn="ctr"/>
-          </a:p>
-        </p:txBody>
-      </p:sp>
-      <p:sp>
-        <p:nvSpPr>
-          <p:cNvPr id="9" name="Rectangle 8"/>
-          <p:cNvSpPr/>
-          <p:nvPr/>
-        </p:nvSpPr>
-        <p:spPr>
-          <a:xfrm>
-            <a:off x="12800000" y="1950000"/>
-            <a:ext cx="10800000" cy="900000"/>
-          </a:xfrm>
-          <a:prstGeom prst="rect">
-            <a:avLst/>
-          </a:prstGeom>
-          <a:solidFill>
-            <a:srgbClr val="DDDDDD"/>
-          </a:solidFill>
-          <a:ln>
-            <a:noFill/>
-          </a:ln>
-        </p:spPr>
-        <p:style>
-          <a:lnRef idx="1">
-            <a:schemeClr val="accent1"/>
-          </a:lnRef>
-          <a:fillRef idx="3">
-            <a:schemeClr val="accent1"/>
-          </a:fillRef>
-          <a:effectRef idx="2">
-            <a:schemeClr val="accent1"/>
-          </a:effectRef>
-          <a:fontRef idx="minor">
-            <a:schemeClr val="lt1"/>
-          </a:fontRef>
-        </p:style>
-        <p:txBody>
-          <a:bodyPr rtlCol="0" anchor="ctr"/>
-          <a:lstStyle/>
-          <a:p>
-            <a:pPr algn="ctr"/>
+              <a:t>Обзорный</a:t>
+            </a:r>
           </a:p>
         </p:txBody>
       </p:sp>
@@ -7058,8 +7271,8 @@
         </p:nvSpPr>
         <p:spPr>
           <a:xfrm>
-            <a:off x="1000000" y="2100000"/>
-            <a:ext cx="10000000" cy="600000"/>
+            <a:off x="12360000" y="2050000"/>
+            <a:ext cx="10400000" cy="700000"/>
           </a:xfrm>
           <a:prstGeom prst="rect">
             <a:avLst/>
@@ -7072,17 +7285,17 @@
           </a:bodyPr>
           <a:lstStyle/>
           <a:p>
-            <a:pPr algn="l"/>
+            <a:pPr algn="ctr"/>
             <a:r>
               <a:rPr sz="2600" b="1">
                 <a:solidFill>
-                  <a:srgbClr val="FFFFFF"/>
+                  <a:srgbClr val="333333"/>
                 </a:solidFill>
                 <a:latin typeface="Open Sans"/>
                 <a:ea typeface="Open Sans"/>
                 <a:cs typeface="Open Sans"/>
               </a:rPr>
-              <a:t>Обзорный осмотр</a:t>
+              <a:t>Подробный</a:t>
             </a:r>
           </a:p>
         </p:txBody>
@@ -7095,8 +7308,8 @@
         </p:nvSpPr>
         <p:spPr>
           <a:xfrm>
-            <a:off x="13000000" y="2100000"/>
-            <a:ext cx="10000000" cy="600000"/>
+            <a:off x="760000" y="3200000"/>
+            <a:ext cx="10000000" cy="7000000"/>
           </a:xfrm>
           <a:prstGeom prst="rect">
             <a:avLst/>
@@ -7104,14 +7317,18 @@
           <a:noFill/>
         </p:spPr>
         <p:txBody>
-          <a:bodyPr wrap="square" anchor="t">
+          <a:bodyPr wrap="square">
             <a:spAutoFit/>
           </a:bodyPr>
           <a:lstStyle/>
           <a:p>
-            <a:pPr algn="l"/>
-            <a:r>
-              <a:rPr sz="2600" b="1">
+            <a:pPr algn="l">
+              <a:spcAft>
+                <a:spcPts val="1400"/>
+              </a:spcAft>
+            </a:pPr>
+            <a:r>
+              <a:rPr sz="2600" b="0">
                 <a:solidFill>
                   <a:srgbClr val="333333"/>
                 </a:solidFill>
@@ -7119,40 +7336,17 @@
                 <a:ea typeface="Open Sans"/>
                 <a:cs typeface="Open Sans"/>
               </a:rPr>
-              <a:t>Подробный осмотр</a:t>
-            </a:r>
-          </a:p>
-        </p:txBody>
-      </p:sp>
-      <p:sp>
-        <p:nvSpPr>
-          <p:cNvPr id="12" name="TextBox 11"/>
-          <p:cNvSpPr txBox="1"/>
-          <p:nvPr/>
-        </p:nvSpPr>
-        <p:spPr>
-          <a:xfrm>
-            <a:off x="1000000" y="3150000"/>
-            <a:ext cx="10000000" cy="8000000"/>
-          </a:xfrm>
-          <a:prstGeom prst="rect">
-            <a:avLst/>
-          </a:prstGeom>
-          <a:noFill/>
-        </p:spPr>
-        <p:txBody>
-          <a:bodyPr wrap="square">
-            <a:spAutoFit/>
-          </a:bodyPr>
-          <a:lstStyle/>
+              <a:t>•  Найти наружное кровотечение</a:t>
+            </a:r>
+          </a:p>
           <a:p>
             <a:pPr algn="l">
               <a:spcAft>
-                <a:spcPts val="1000"/>
+                <a:spcPts val="1400"/>
               </a:spcAft>
             </a:pPr>
             <a:r>
-              <a:rPr sz="2400" b="0">
+              <a:rPr sz="2600" b="0">
                 <a:solidFill>
                   <a:srgbClr val="333333"/>
                 </a:solidFill>
@@ -7160,17 +7354,17 @@
                 <a:ea typeface="Open Sans"/>
                 <a:cs typeface="Open Sans"/>
               </a:rPr>
-              <a:t>•  Цель: найти наружное кровотечение</a:t>
+              <a:t>•  1–2 секунды</a:t>
             </a:r>
           </a:p>
           <a:p>
             <a:pPr algn="l">
               <a:spcAft>
-                <a:spcPts val="1000"/>
+                <a:spcPts val="1400"/>
               </a:spcAft>
             </a:pPr>
             <a:r>
-              <a:rPr sz="2400" b="0">
+              <a:rPr sz="2600" b="0">
                 <a:solidFill>
                   <a:srgbClr val="333333"/>
                 </a:solidFill>
@@ -7178,17 +7372,17 @@
                 <a:ea typeface="Open Sans"/>
                 <a:cs typeface="Open Sans"/>
               </a:rPr>
-              <a:t>•  Время: 1–2 секунды</a:t>
+              <a:t>•  С головы до ног</a:t>
             </a:r>
           </a:p>
           <a:p>
             <a:pPr algn="l">
               <a:spcAft>
-                <a:spcPts val="1000"/>
+                <a:spcPts val="1400"/>
               </a:spcAft>
             </a:pPr>
             <a:r>
-              <a:rPr sz="2400" b="0">
+              <a:rPr sz="2600" b="0">
                 <a:solidFill>
                   <a:srgbClr val="333333"/>
                 </a:solidFill>
@@ -7196,17 +7390,40 @@
                 <a:ea typeface="Open Sans"/>
                 <a:cs typeface="Open Sans"/>
               </a:rPr>
-              <a:t>•  Объём: быстрый взгляд с головы до ног</a:t>
-            </a:r>
-          </a:p>
+              <a:t>•  Сразу после оценки обстановки</a:t>
+            </a:r>
+          </a:p>
+        </p:txBody>
+      </p:sp>
+      <p:sp>
+        <p:nvSpPr>
+          <p:cNvPr id="12" name="TextBox 11"/>
+          <p:cNvSpPr txBox="1"/>
+          <p:nvPr/>
+        </p:nvSpPr>
+        <p:spPr>
+          <a:xfrm>
+            <a:off x="12560000" y="3200000"/>
+            <a:ext cx="10000000" cy="7000000"/>
+          </a:xfrm>
+          <a:prstGeom prst="rect">
+            <a:avLst/>
+          </a:prstGeom>
+          <a:noFill/>
+        </p:spPr>
+        <p:txBody>
+          <a:bodyPr wrap="square">
+            <a:spAutoFit/>
+          </a:bodyPr>
+          <a:lstStyle/>
           <a:p>
             <a:pPr algn="l">
               <a:spcAft>
-                <a:spcPts val="1000"/>
+                <a:spcPts val="1400"/>
               </a:spcAft>
             </a:pPr>
             <a:r>
-              <a:rPr sz="2400" b="0">
+              <a:rPr sz="2600" b="0">
                 <a:solidFill>
                   <a:srgbClr val="333333"/>
                 </a:solidFill>
@@ -7214,17 +7431,17 @@
                 <a:ea typeface="Open Sans"/>
                 <a:cs typeface="Open Sans"/>
               </a:rPr>
-              <a:t>•  Когда: сразу после оценки обстановки</a:t>
+              <a:t>•  Выявить травмы и угрозы</a:t>
             </a:r>
           </a:p>
           <a:p>
             <a:pPr algn="l">
               <a:spcAft>
-                <a:spcPts val="1000"/>
+                <a:spcPts val="1400"/>
               </a:spcAft>
             </a:pPr>
             <a:r>
-              <a:rPr sz="2400" b="0">
+              <a:rPr sz="2600" b="0">
                 <a:solidFill>
                   <a:srgbClr val="333333"/>
                 </a:solidFill>
@@ -7232,40 +7449,17 @@
                 <a:ea typeface="Open Sans"/>
                 <a:cs typeface="Open Sans"/>
               </a:rPr>
-              <a:t>•  Результат: останавливать кровь или нет</a:t>
-            </a:r>
-          </a:p>
-        </p:txBody>
-      </p:sp>
-      <p:sp>
-        <p:nvSpPr>
-          <p:cNvPr id="13" name="TextBox 12"/>
-          <p:cNvSpPr txBox="1"/>
-          <p:nvPr/>
-        </p:nvSpPr>
-        <p:spPr>
-          <a:xfrm>
-            <a:off x="13000000" y="3150000"/>
-            <a:ext cx="10000000" cy="8000000"/>
-          </a:xfrm>
-          <a:prstGeom prst="rect">
-            <a:avLst/>
-          </a:prstGeom>
-          <a:noFill/>
-        </p:spPr>
-        <p:txBody>
-          <a:bodyPr wrap="square">
-            <a:spAutoFit/>
-          </a:bodyPr>
-          <a:lstStyle/>
+              <a:t>•  Несколько минут</a:t>
+            </a:r>
+          </a:p>
           <a:p>
             <a:pPr algn="l">
               <a:spcAft>
-                <a:spcPts val="1000"/>
+                <a:spcPts val="1400"/>
               </a:spcAft>
             </a:pPr>
             <a:r>
-              <a:rPr sz="2400" b="0">
+              <a:rPr sz="2600" b="0">
                 <a:solidFill>
                   <a:srgbClr val="333333"/>
                 </a:solidFill>
@@ -7273,17 +7467,17 @@
                 <a:ea typeface="Open Sans"/>
                 <a:cs typeface="Open Sans"/>
               </a:rPr>
-              <a:t>•  Цель: выявить травмы и другие угрозы</a:t>
+              <a:t>•  Голова → шея → грудь → …</a:t>
             </a:r>
           </a:p>
           <a:p>
             <a:pPr algn="l">
               <a:spcAft>
-                <a:spcPts val="1000"/>
+                <a:spcPts val="1400"/>
               </a:spcAft>
             </a:pPr>
             <a:r>
-              <a:rPr sz="2400" b="0">
+              <a:rPr sz="2600" b="0">
                 <a:solidFill>
                   <a:srgbClr val="333333"/>
                 </a:solidFill>
@@ -7291,61 +7485,7 @@
                 <a:ea typeface="Open Sans"/>
                 <a:cs typeface="Open Sans"/>
               </a:rPr>
-              <a:t>•  Время: несколько минут</a:t>
-            </a:r>
-          </a:p>
-          <a:p>
-            <a:pPr algn="l">
-              <a:spcAft>
-                <a:spcPts val="1000"/>
-              </a:spcAft>
-            </a:pPr>
-            <a:r>
-              <a:rPr sz="2400" b="0">
-                <a:solidFill>
-                  <a:srgbClr val="333333"/>
-                </a:solidFill>
-                <a:latin typeface="Open Sans"/>
-                <a:ea typeface="Open Sans"/>
-                <a:cs typeface="Open Sans"/>
-              </a:rPr>
-              <a:t>•  Объём: голова → шея → грудь → … → руки</a:t>
-            </a:r>
-          </a:p>
-          <a:p>
-            <a:pPr algn="l">
-              <a:spcAft>
-                <a:spcPts val="1000"/>
-              </a:spcAft>
-            </a:pPr>
-            <a:r>
-              <a:rPr sz="2400" b="0">
-                <a:solidFill>
-                  <a:srgbClr val="333333"/>
-                </a:solidFill>
-                <a:latin typeface="Open Sans"/>
-                <a:ea typeface="Open Sans"/>
-                <a:cs typeface="Open Sans"/>
-              </a:rPr>
-              <a:t>•  Когда: после остановки кровотечения</a:t>
-            </a:r>
-          </a:p>
-          <a:p>
-            <a:pPr algn="l">
-              <a:spcAft>
-                <a:spcPts val="1000"/>
-              </a:spcAft>
-            </a:pPr>
-            <a:r>
-              <a:rPr sz="2400" b="0">
-                <a:solidFill>
-                  <a:srgbClr val="333333"/>
-                </a:solidFill>
-                <a:latin typeface="Open Sans"/>
-                <a:ea typeface="Open Sans"/>
-                <a:cs typeface="Open Sans"/>
-              </a:rPr>
-              <a:t>•  Результат: повязки, иммобилизация</a:t>
+              <a:t>•  После остановки кровотечения</a:t>
             </a:r>
           </a:p>
         </p:txBody>
@@ -7413,57 +7553,14 @@
       </p:sp>
       <p:sp>
         <p:nvSpPr>
-          <p:cNvPr id="3" name="Rectangle 2"/>
-          <p:cNvSpPr/>
-          <p:nvPr/>
-        </p:nvSpPr>
-        <p:spPr>
-          <a:xfrm>
-            <a:off x="0" y="0"/>
-            <a:ext cx="24384000" cy="120000"/>
-          </a:xfrm>
-          <a:prstGeom prst="rect">
-            <a:avLst/>
-          </a:prstGeom>
-          <a:solidFill>
-            <a:srgbClr val="DDDDDD"/>
-          </a:solidFill>
-          <a:ln>
-            <a:noFill/>
-          </a:ln>
-        </p:spPr>
-        <p:style>
-          <a:lnRef idx="1">
-            <a:schemeClr val="accent1"/>
-          </a:lnRef>
-          <a:fillRef idx="3">
-            <a:schemeClr val="accent1"/>
-          </a:fillRef>
-          <a:effectRef idx="2">
-            <a:schemeClr val="accent1"/>
-          </a:effectRef>
-          <a:fontRef idx="minor">
-            <a:schemeClr val="lt1"/>
-          </a:fontRef>
-        </p:style>
-        <p:txBody>
-          <a:bodyPr rtlCol="0" anchor="ctr"/>
-          <a:lstStyle/>
-          <a:p>
-            <a:pPr algn="ctr"/>
-          </a:p>
-        </p:txBody>
-      </p:sp>
-      <p:sp>
-        <p:nvSpPr>
-          <p:cNvPr id="4" name="TextBox 3"/>
+          <p:cNvPr id="3" name="TextBox 2"/>
           <p:cNvSpPr txBox="1"/>
           <p:nvPr/>
         </p:nvSpPr>
         <p:spPr>
           <a:xfrm>
-            <a:off x="800000" y="350000"/>
-            <a:ext cx="22800000" cy="1000000"/>
+            <a:off x="360000" y="350000"/>
+            <a:ext cx="23664000" cy="1100000"/>
           </a:xfrm>
           <a:prstGeom prst="rect">
             <a:avLst/>
@@ -7486,21 +7583,21 @@
                 <a:ea typeface="Open Sans"/>
                 <a:cs typeface="Open Sans"/>
               </a:rPr>
-              <a:t>Когда обзорный осмотр критически важен</a:t>
-            </a:r>
-          </a:p>
-        </p:txBody>
-      </p:sp>
-      <p:sp>
-        <p:nvSpPr>
-          <p:cNvPr id="5" name="Rectangle 4"/>
+              <a:t>Когда осмотр критически важен</a:t>
+            </a:r>
+          </a:p>
+        </p:txBody>
+      </p:sp>
+      <p:sp>
+        <p:nvSpPr>
+          <p:cNvPr id="4" name="Rectangle 3"/>
           <p:cNvSpPr/>
           <p:nvPr/>
         </p:nvSpPr>
         <p:spPr>
           <a:xfrm>
-            <a:off x="800000" y="1450000"/>
-            <a:ext cx="22800000" cy="20000"/>
+            <a:off x="360000" y="1450000"/>
+            <a:ext cx="23664000" cy="20000"/>
           </a:xfrm>
           <a:prstGeom prst="rect">
             <a:avLst/>
@@ -7536,14 +7633,57 @@
       </p:sp>
       <p:sp>
         <p:nvSpPr>
+          <p:cNvPr id="5" name="Rounded Rectangle 4"/>
+          <p:cNvSpPr/>
+          <p:nvPr/>
+        </p:nvSpPr>
+        <p:spPr>
+          <a:xfrm>
+            <a:off x="360000" y="1900000"/>
+            <a:ext cx="900000" cy="900000"/>
+          </a:xfrm>
+          <a:prstGeom prst="roundRect">
+            <a:avLst/>
+          </a:prstGeom>
+          <a:solidFill>
+            <a:srgbClr val="0055AA"/>
+          </a:solidFill>
+          <a:ln>
+            <a:noFill/>
+          </a:ln>
+        </p:spPr>
+        <p:style>
+          <a:lnRef idx="1">
+            <a:schemeClr val="accent1"/>
+          </a:lnRef>
+          <a:fillRef idx="3">
+            <a:schemeClr val="accent1"/>
+          </a:fillRef>
+          <a:effectRef idx="2">
+            <a:schemeClr val="accent1"/>
+          </a:effectRef>
+          <a:fontRef idx="minor">
+            <a:schemeClr val="lt1"/>
+          </a:fontRef>
+        </p:style>
+        <p:txBody>
+          <a:bodyPr rtlCol="0" anchor="ctr"/>
+          <a:lstStyle/>
+          <a:p>
+            <a:pPr algn="ctr"/>
+          </a:p>
+        </p:txBody>
+      </p:sp>
+      <p:sp>
+        <p:nvSpPr>
           <p:cNvPr id="6" name="TextBox 5"/>
           <p:cNvSpPr txBox="1"/>
           <p:nvPr/>
         </p:nvSpPr>
         <p:spPr>
           <a:xfrm>
-            <a:off x="800000" y="1950000"/>
-            <a:ext cx="22800000" cy="8500000"/>
+            <a:off x="360000" y="1900000"/>
+            <a:ext cx="900000" cy="900000"/>
           </a:xfrm>
           <a:prstGeom prst="rect">
             <a:avLst/>
@@ -7551,34 +7691,49 @@
           <a:noFill/>
         </p:spPr>
         <p:txBody>
-          <a:bodyPr wrap="square">
+          <a:bodyPr wrap="square" anchor="ctr">
             <a:spAutoFit/>
           </a:bodyPr>
           <a:lstStyle/>
           <a:p>
-            <a:pPr algn="l">
-              <a:spcAft>
-                <a:spcPts val="1000"/>
-              </a:spcAft>
-            </a:pPr>
-            <a:r>
-              <a:rPr sz="3200" b="0">
-                <a:solidFill>
-                  <a:srgbClr val="333333"/>
+            <a:pPr algn="ctr"/>
+            <a:r>
+              <a:rPr sz="2200" b="1">
+                <a:solidFill>
+                  <a:srgbClr val="FFFFFF"/>
                 </a:solidFill>
                 <a:latin typeface="Open Sans"/>
                 <a:ea typeface="Open Sans"/>
                 <a:cs typeface="Open Sans"/>
               </a:rPr>
-              <a:t>•  ДТП — раны под одеждой, кровотечение из конечностей.</a:t>
-            </a:r>
-          </a:p>
-          <a:p>
-            <a:pPr algn="l">
-              <a:spcAft>
-                <a:spcPts val="1000"/>
-              </a:spcAft>
-            </a:pPr>
+              <a:t>1</a:t>
+            </a:r>
+          </a:p>
+        </p:txBody>
+      </p:sp>
+      <p:sp>
+        <p:nvSpPr>
+          <p:cNvPr id="7" name="TextBox 6"/>
+          <p:cNvSpPr txBox="1"/>
+          <p:nvPr/>
+        </p:nvSpPr>
+        <p:spPr>
+          <a:xfrm>
+            <a:off x="1560000" y="1900000"/>
+            <a:ext cx="22464000" cy="900000"/>
+          </a:xfrm>
+          <a:prstGeom prst="rect">
+            <a:avLst/>
+          </a:prstGeom>
+          <a:noFill/>
+        </p:spPr>
+        <p:txBody>
+          <a:bodyPr wrap="square" anchor="ctr">
+            <a:spAutoFit/>
+          </a:bodyPr>
+          <a:lstStyle/>
+          <a:p>
+            <a:pPr algn="l"/>
             <a:r>
               <a:rPr sz="3200" b="0">
                 <a:solidFill>
@@ -7588,33 +7743,114 @@
                 <a:ea typeface="Open Sans"/>
                 <a:cs typeface="Open Sans"/>
               </a:rPr>
-              <a:t>•  Падение с высоты — множественные повреждения.</a:t>
-            </a:r>
-          </a:p>
-          <a:p>
-            <a:pPr algn="l">
-              <a:spcAft>
-                <a:spcPts val="1000"/>
-              </a:spcAft>
-            </a:pPr>
-            <a:r>
-              <a:rPr sz="3200" b="0">
-                <a:solidFill>
-                  <a:srgbClr val="333333"/>
+              <a:t>ДТП — раны под одеждой</a:t>
+            </a:r>
+          </a:p>
+        </p:txBody>
+      </p:sp>
+      <p:sp>
+        <p:nvSpPr>
+          <p:cNvPr id="8" name="Rounded Rectangle 7"/>
+          <p:cNvSpPr/>
+          <p:nvPr/>
+        </p:nvSpPr>
+        <p:spPr>
+          <a:xfrm>
+            <a:off x="360000" y="3500000"/>
+            <a:ext cx="900000" cy="900000"/>
+          </a:xfrm>
+          <a:prstGeom prst="roundRect">
+            <a:avLst/>
+          </a:prstGeom>
+          <a:solidFill>
+            <a:srgbClr val="0055AA"/>
+          </a:solidFill>
+          <a:ln>
+            <a:noFill/>
+          </a:ln>
+        </p:spPr>
+        <p:style>
+          <a:lnRef idx="1">
+            <a:schemeClr val="accent1"/>
+          </a:lnRef>
+          <a:fillRef idx="3">
+            <a:schemeClr val="accent1"/>
+          </a:fillRef>
+          <a:effectRef idx="2">
+            <a:schemeClr val="accent1"/>
+          </a:effectRef>
+          <a:fontRef idx="minor">
+            <a:schemeClr val="lt1"/>
+          </a:fontRef>
+        </p:style>
+        <p:txBody>
+          <a:bodyPr rtlCol="0" anchor="ctr"/>
+          <a:lstStyle/>
+          <a:p>
+            <a:pPr algn="ctr"/>
+          </a:p>
+        </p:txBody>
+      </p:sp>
+      <p:sp>
+        <p:nvSpPr>
+          <p:cNvPr id="9" name="TextBox 8"/>
+          <p:cNvSpPr txBox="1"/>
+          <p:nvPr/>
+        </p:nvSpPr>
+        <p:spPr>
+          <a:xfrm>
+            <a:off x="360000" y="3500000"/>
+            <a:ext cx="900000" cy="900000"/>
+          </a:xfrm>
+          <a:prstGeom prst="rect">
+            <a:avLst/>
+          </a:prstGeom>
+          <a:noFill/>
+        </p:spPr>
+        <p:txBody>
+          <a:bodyPr wrap="square" anchor="ctr">
+            <a:spAutoFit/>
+          </a:bodyPr>
+          <a:lstStyle/>
+          <a:p>
+            <a:pPr algn="ctr"/>
+            <a:r>
+              <a:rPr sz="2200" b="1">
+                <a:solidFill>
+                  <a:srgbClr val="FFFFFF"/>
                 </a:solidFill>
                 <a:latin typeface="Open Sans"/>
                 <a:ea typeface="Open Sans"/>
                 <a:cs typeface="Open Sans"/>
               </a:rPr>
-              <a:t>•  Производственные травмы — риск артериального кровотечения.</a:t>
-            </a:r>
-          </a:p>
-          <a:p>
-            <a:pPr algn="l">
-              <a:spcAft>
-                <a:spcPts val="1000"/>
-              </a:spcAft>
-            </a:pPr>
+              <a:t>2</a:t>
+            </a:r>
+          </a:p>
+        </p:txBody>
+      </p:sp>
+      <p:sp>
+        <p:nvSpPr>
+          <p:cNvPr id="10" name="TextBox 9"/>
+          <p:cNvSpPr txBox="1"/>
+          <p:nvPr/>
+        </p:nvSpPr>
+        <p:spPr>
+          <a:xfrm>
+            <a:off x="1560000" y="3500000"/>
+            <a:ext cx="22464000" cy="900000"/>
+          </a:xfrm>
+          <a:prstGeom prst="rect">
+            <a:avLst/>
+          </a:prstGeom>
+          <a:noFill/>
+        </p:spPr>
+        <p:txBody>
+          <a:bodyPr wrap="square" anchor="ctr">
+            <a:spAutoFit/>
+          </a:bodyPr>
+          <a:lstStyle/>
+          <a:p>
+            <a:pPr algn="l"/>
             <a:r>
               <a:rPr sz="3200" b="0">
                 <a:solidFill>
@@ -7624,33 +7860,114 @@
                 <a:ea typeface="Open Sans"/>
                 <a:cs typeface="Open Sans"/>
               </a:rPr>
-              <a:t>•  ЧС с несколькими пострадавшими — быстрая сортировка.</a:t>
-            </a:r>
-          </a:p>
-          <a:p>
-            <a:pPr algn="l">
-              <a:spcAft>
-                <a:spcPts val="1000"/>
-              </a:spcAft>
-            </a:pPr>
-            <a:r>
-              <a:rPr sz="3200" b="0">
-                <a:solidFill>
-                  <a:srgbClr val="333333"/>
+              <a:t>Падение с высоты</a:t>
+            </a:r>
+          </a:p>
+        </p:txBody>
+      </p:sp>
+      <p:sp>
+        <p:nvSpPr>
+          <p:cNvPr id="11" name="Rounded Rectangle 10"/>
+          <p:cNvSpPr/>
+          <p:nvPr/>
+        </p:nvSpPr>
+        <p:spPr>
+          <a:xfrm>
+            <a:off x="360000" y="5100000"/>
+            <a:ext cx="900000" cy="900000"/>
+          </a:xfrm>
+          <a:prstGeom prst="roundRect">
+            <a:avLst/>
+          </a:prstGeom>
+          <a:solidFill>
+            <a:srgbClr val="0055AA"/>
+          </a:solidFill>
+          <a:ln>
+            <a:noFill/>
+          </a:ln>
+        </p:spPr>
+        <p:style>
+          <a:lnRef idx="1">
+            <a:schemeClr val="accent1"/>
+          </a:lnRef>
+          <a:fillRef idx="3">
+            <a:schemeClr val="accent1"/>
+          </a:fillRef>
+          <a:effectRef idx="2">
+            <a:schemeClr val="accent1"/>
+          </a:effectRef>
+          <a:fontRef idx="minor">
+            <a:schemeClr val="lt1"/>
+          </a:fontRef>
+        </p:style>
+        <p:txBody>
+          <a:bodyPr rtlCol="0" anchor="ctr"/>
+          <a:lstStyle/>
+          <a:p>
+            <a:pPr algn="ctr"/>
+          </a:p>
+        </p:txBody>
+      </p:sp>
+      <p:sp>
+        <p:nvSpPr>
+          <p:cNvPr id="12" name="TextBox 11"/>
+          <p:cNvSpPr txBox="1"/>
+          <p:nvPr/>
+        </p:nvSpPr>
+        <p:spPr>
+          <a:xfrm>
+            <a:off x="360000" y="5100000"/>
+            <a:ext cx="900000" cy="900000"/>
+          </a:xfrm>
+          <a:prstGeom prst="rect">
+            <a:avLst/>
+          </a:prstGeom>
+          <a:noFill/>
+        </p:spPr>
+        <p:txBody>
+          <a:bodyPr wrap="square" anchor="ctr">
+            <a:spAutoFit/>
+          </a:bodyPr>
+          <a:lstStyle/>
+          <a:p>
+            <a:pPr algn="ctr"/>
+            <a:r>
+              <a:rPr sz="2200" b="1">
+                <a:solidFill>
+                  <a:srgbClr val="FFFFFF"/>
                 </a:solidFill>
                 <a:latin typeface="Open Sans"/>
                 <a:ea typeface="Open Sans"/>
                 <a:cs typeface="Open Sans"/>
               </a:rPr>
-              <a:t>•  Огнестрельные и колото-резаные ранения.</a:t>
-            </a:r>
-          </a:p>
-          <a:p>
-            <a:pPr algn="l">
-              <a:spcAft>
-                <a:spcPts val="1000"/>
-              </a:spcAft>
-            </a:pPr>
+              <a:t>3</a:t>
+            </a:r>
+          </a:p>
+        </p:txBody>
+      </p:sp>
+      <p:sp>
+        <p:nvSpPr>
+          <p:cNvPr id="13" name="TextBox 12"/>
+          <p:cNvSpPr txBox="1"/>
+          <p:nvPr/>
+        </p:nvSpPr>
+        <p:spPr>
+          <a:xfrm>
+            <a:off x="1560000" y="5100000"/>
+            <a:ext cx="22464000" cy="900000"/>
+          </a:xfrm>
+          <a:prstGeom prst="rect">
+            <a:avLst/>
+          </a:prstGeom>
+          <a:noFill/>
+        </p:spPr>
+        <p:txBody>
+          <a:bodyPr wrap="square" anchor="ctr">
+            <a:spAutoFit/>
+          </a:bodyPr>
+          <a:lstStyle/>
+          <a:p>
+            <a:pPr algn="l"/>
             <a:r>
               <a:rPr sz="3200" b="0">
                 <a:solidFill>
@@ -7660,7 +7977,124 @@
                 <a:ea typeface="Open Sans"/>
                 <a:cs typeface="Open Sans"/>
               </a:rPr>
-              <a:t>•  Правило: видна кровь или одежда пропитана — действуйте сразу.</a:t>
+              <a:t>Производственные травмы</a:t>
+            </a:r>
+          </a:p>
+        </p:txBody>
+      </p:sp>
+      <p:sp>
+        <p:nvSpPr>
+          <p:cNvPr id="14" name="Rounded Rectangle 13"/>
+          <p:cNvSpPr/>
+          <p:nvPr/>
+        </p:nvSpPr>
+        <p:spPr>
+          <a:xfrm>
+            <a:off x="360000" y="6700000"/>
+            <a:ext cx="900000" cy="900000"/>
+          </a:xfrm>
+          <a:prstGeom prst="roundRect">
+            <a:avLst/>
+          </a:prstGeom>
+          <a:solidFill>
+            <a:srgbClr val="0055AA"/>
+          </a:solidFill>
+          <a:ln>
+            <a:noFill/>
+          </a:ln>
+        </p:spPr>
+        <p:style>
+          <a:lnRef idx="1">
+            <a:schemeClr val="accent1"/>
+          </a:lnRef>
+          <a:fillRef idx="3">
+            <a:schemeClr val="accent1"/>
+          </a:fillRef>
+          <a:effectRef idx="2">
+            <a:schemeClr val="accent1"/>
+          </a:effectRef>
+          <a:fontRef idx="minor">
+            <a:schemeClr val="lt1"/>
+          </a:fontRef>
+        </p:style>
+        <p:txBody>
+          <a:bodyPr rtlCol="0" anchor="ctr"/>
+          <a:lstStyle/>
+          <a:p>
+            <a:pPr algn="ctr"/>
+          </a:p>
+        </p:txBody>
+      </p:sp>
+      <p:sp>
+        <p:nvSpPr>
+          <p:cNvPr id="15" name="TextBox 14"/>
+          <p:cNvSpPr txBox="1"/>
+          <p:nvPr/>
+        </p:nvSpPr>
+        <p:spPr>
+          <a:xfrm>
+            <a:off x="360000" y="6700000"/>
+            <a:ext cx="900000" cy="900000"/>
+          </a:xfrm>
+          <a:prstGeom prst="rect">
+            <a:avLst/>
+          </a:prstGeom>
+          <a:noFill/>
+        </p:spPr>
+        <p:txBody>
+          <a:bodyPr wrap="square" anchor="ctr">
+            <a:spAutoFit/>
+          </a:bodyPr>
+          <a:lstStyle/>
+          <a:p>
+            <a:pPr algn="ctr"/>
+            <a:r>
+              <a:rPr sz="2200" b="1">
+                <a:solidFill>
+                  <a:srgbClr val="FFFFFF"/>
+                </a:solidFill>
+                <a:latin typeface="Open Sans"/>
+                <a:ea typeface="Open Sans"/>
+                <a:cs typeface="Open Sans"/>
+              </a:rPr>
+              <a:t>4</a:t>
+            </a:r>
+          </a:p>
+        </p:txBody>
+      </p:sp>
+      <p:sp>
+        <p:nvSpPr>
+          <p:cNvPr id="16" name="TextBox 15"/>
+          <p:cNvSpPr txBox="1"/>
+          <p:nvPr/>
+        </p:nvSpPr>
+        <p:spPr>
+          <a:xfrm>
+            <a:off x="1560000" y="6700000"/>
+            <a:ext cx="22464000" cy="900000"/>
+          </a:xfrm>
+          <a:prstGeom prst="rect">
+            <a:avLst/>
+          </a:prstGeom>
+          <a:noFill/>
+        </p:spPr>
+        <p:txBody>
+          <a:bodyPr wrap="square" anchor="ctr">
+            <a:spAutoFit/>
+          </a:bodyPr>
+          <a:lstStyle/>
+          <a:p>
+            <a:pPr algn="l"/>
+            <a:r>
+              <a:rPr sz="3200" b="0">
+                <a:solidFill>
+                  <a:srgbClr val="333333"/>
+                </a:solidFill>
+                <a:latin typeface="Open Sans"/>
+                <a:ea typeface="Open Sans"/>
+                <a:cs typeface="Open Sans"/>
+              </a:rPr>
+              <a:t>Несколько пострадавших</a:t>
             </a:r>
           </a:p>
         </p:txBody>
@@ -7728,57 +8162,14 @@
       </p:sp>
       <p:sp>
         <p:nvSpPr>
-          <p:cNvPr id="3" name="Rectangle 2"/>
-          <p:cNvSpPr/>
-          <p:nvPr/>
-        </p:nvSpPr>
-        <p:spPr>
-          <a:xfrm>
-            <a:off x="0" y="0"/>
-            <a:ext cx="24384000" cy="120000"/>
-          </a:xfrm>
-          <a:prstGeom prst="rect">
-            <a:avLst/>
-          </a:prstGeom>
-          <a:solidFill>
-            <a:srgbClr val="DDDDDD"/>
-          </a:solidFill>
-          <a:ln>
-            <a:noFill/>
-          </a:ln>
-        </p:spPr>
-        <p:style>
-          <a:lnRef idx="1">
-            <a:schemeClr val="accent1"/>
-          </a:lnRef>
-          <a:fillRef idx="3">
-            <a:schemeClr val="accent1"/>
-          </a:fillRef>
-          <a:effectRef idx="2">
-            <a:schemeClr val="accent1"/>
-          </a:effectRef>
-          <a:fontRef idx="minor">
-            <a:schemeClr val="lt1"/>
-          </a:fontRef>
-        </p:style>
-        <p:txBody>
-          <a:bodyPr rtlCol="0" anchor="ctr"/>
-          <a:lstStyle/>
-          <a:p>
-            <a:pPr algn="ctr"/>
-          </a:p>
-        </p:txBody>
-      </p:sp>
-      <p:sp>
-        <p:nvSpPr>
-          <p:cNvPr id="4" name="TextBox 3"/>
+          <p:cNvPr id="3" name="TextBox 2"/>
           <p:cNvSpPr txBox="1"/>
           <p:nvPr/>
         </p:nvSpPr>
         <p:spPr>
           <a:xfrm>
-            <a:off x="800000" y="350000"/>
-            <a:ext cx="22800000" cy="1000000"/>
+            <a:off x="360000" y="350000"/>
+            <a:ext cx="23664000" cy="1100000"/>
           </a:xfrm>
           <a:prstGeom prst="rect">
             <a:avLst/>
@@ -7791,7 +8182,7 @@
           </a:bodyPr>
           <a:lstStyle/>
           <a:p>
-            <a:pPr algn="l"/>
+            <a:pPr algn="ctr"/>
             <a:r>
               <a:rPr sz="4600" b="1">
                 <a:solidFill>
@@ -7801,21 +8192,21 @@
                 <a:ea typeface="Open Sans"/>
                 <a:cs typeface="Open Sans"/>
               </a:rPr>
-              <a:t>Краткое резюме</a:t>
-            </a:r>
-          </a:p>
-        </p:txBody>
-      </p:sp>
-      <p:sp>
-        <p:nvSpPr>
-          <p:cNvPr id="5" name="Rectangle 4"/>
+              <a:t>Главное запомнить</a:t>
+            </a:r>
+          </a:p>
+        </p:txBody>
+      </p:sp>
+      <p:sp>
+        <p:nvSpPr>
+          <p:cNvPr id="4" name="Rectangle 3"/>
           <p:cNvSpPr/>
           <p:nvPr/>
         </p:nvSpPr>
         <p:spPr>
           <a:xfrm>
-            <a:off x="800000" y="1450000"/>
-            <a:ext cx="22800000" cy="20000"/>
+            <a:off x="360000" y="1450000"/>
+            <a:ext cx="23664000" cy="20000"/>
           </a:xfrm>
           <a:prstGeom prst="rect">
             <a:avLst/>
@@ -7851,61 +8242,16 @@
       </p:sp>
       <p:sp>
         <p:nvSpPr>
-          <p:cNvPr id="6" name="Rectangle 5"/>
+          <p:cNvPr id="5" name="Oval 4"/>
           <p:cNvSpPr/>
           <p:nvPr/>
         </p:nvSpPr>
         <p:spPr>
           <a:xfrm>
-            <a:off x="800000" y="1950000"/>
-            <a:ext cx="22800000" cy="1600000"/>
-          </a:xfrm>
-          <a:prstGeom prst="rect">
-            <a:avLst/>
-          </a:prstGeom>
-          <a:solidFill>
-            <a:srgbClr val="FFFFFF"/>
-          </a:solidFill>
-          <a:ln w="12700">
-            <a:solidFill>
-              <a:srgbClr val="E1E1E1"/>
-            </a:solidFill>
-          </a:ln>
-        </p:spPr>
-        <p:style>
-          <a:lnRef idx="1">
-            <a:schemeClr val="accent1"/>
-          </a:lnRef>
-          <a:fillRef idx="3">
-            <a:schemeClr val="accent1"/>
-          </a:fillRef>
-          <a:effectRef idx="2">
-            <a:schemeClr val="accent1"/>
-          </a:effectRef>
-          <a:fontRef idx="minor">
-            <a:schemeClr val="lt1"/>
-          </a:fontRef>
-        </p:style>
-        <p:txBody>
-          <a:bodyPr rtlCol="0" anchor="ctr"/>
-          <a:lstStyle/>
-          <a:p>
-            <a:pPr algn="ctr"/>
-          </a:p>
-        </p:txBody>
-      </p:sp>
-      <p:sp>
-        <p:nvSpPr>
-          <p:cNvPr id="7" name="Rectangle 6"/>
-          <p:cNvSpPr/>
-          <p:nvPr/>
-        </p:nvSpPr>
-        <p:spPr>
-          <a:xfrm>
-            <a:off x="800000" y="1950000"/>
-            <a:ext cx="120000" cy="1600000"/>
-          </a:xfrm>
-          <a:prstGeom prst="rect">
+            <a:off x="1860000" y="2150000"/>
+            <a:ext cx="600000" cy="600000"/>
+          </a:xfrm>
+          <a:prstGeom prst="ellipse">
             <a:avLst/>
           </a:prstGeom>
           <a:solidFill>
@@ -7939,14 +8285,14 @@
       </p:sp>
       <p:sp>
         <p:nvSpPr>
-          <p:cNvPr id="8" name="TextBox 7"/>
+          <p:cNvPr id="6" name="TextBox 5"/>
           <p:cNvSpPr txBox="1"/>
           <p:nvPr/>
         </p:nvSpPr>
         <p:spPr>
           <a:xfrm>
-            <a:off x="1200000" y="2250000"/>
-            <a:ext cx="21800000" cy="1100000"/>
+            <a:off x="1860000" y="2150000"/>
+            <a:ext cx="600000" cy="600000"/>
           </a:xfrm>
           <a:prstGeom prst="rect">
             <a:avLst/>
@@ -7959,78 +8305,70 @@
           </a:bodyPr>
           <a:lstStyle/>
           <a:p>
-            <a:pPr algn="l"/>
-            <a:r>
-              <a:rPr sz="2600" b="0">
-                <a:solidFill>
-                  <a:srgbClr val="333333"/>
+            <a:pPr algn="ctr"/>
+            <a:r>
+              <a:rPr sz="2400" b="1">
+                <a:solidFill>
+                  <a:srgbClr val="FFFFFF"/>
                 </a:solidFill>
                 <a:latin typeface="Open Sans"/>
                 <a:ea typeface="Open Sans"/>
                 <a:cs typeface="Open Sans"/>
               </a:rPr>
-              <a:t>Кровотечение — выход крови из сосудов с риском острой кровопотери.</a:t>
-            </a:r>
-          </a:p>
-        </p:txBody>
-      </p:sp>
-      <p:sp>
-        <p:nvSpPr>
-          <p:cNvPr id="9" name="Rectangle 8"/>
+              <a:t>OK</a:t>
+            </a:r>
+          </a:p>
+        </p:txBody>
+      </p:sp>
+      <p:sp>
+        <p:nvSpPr>
+          <p:cNvPr id="7" name="TextBox 6"/>
+          <p:cNvSpPr txBox="1"/>
+          <p:nvPr/>
+        </p:nvSpPr>
+        <p:spPr>
+          <a:xfrm>
+            <a:off x="2860000" y="2000000"/>
+            <a:ext cx="18000000" cy="900000"/>
+          </a:xfrm>
+          <a:prstGeom prst="rect">
+            <a:avLst/>
+          </a:prstGeom>
+          <a:noFill/>
+        </p:spPr>
+        <p:txBody>
+          <a:bodyPr wrap="square" anchor="ctr">
+            <a:spAutoFit/>
+          </a:bodyPr>
+          <a:lstStyle/>
+          <a:p>
+            <a:pPr algn="l"/>
+            <a:r>
+              <a:rPr sz="2800" b="0">
+                <a:solidFill>
+                  <a:srgbClr val="333333"/>
+                </a:solidFill>
+                <a:latin typeface="Open Sans"/>
+                <a:ea typeface="Open Sans"/>
+                <a:cs typeface="Open Sans"/>
+              </a:rPr>
+              <a:t>Кровотечение — выход крови с риском острой кровопотери</a:t>
+            </a:r>
+          </a:p>
+        </p:txBody>
+      </p:sp>
+      <p:sp>
+        <p:nvSpPr>
+          <p:cNvPr id="8" name="Oval 7"/>
           <p:cNvSpPr/>
           <p:nvPr/>
         </p:nvSpPr>
         <p:spPr>
           <a:xfrm>
-            <a:off x="800000" y="3850000"/>
-            <a:ext cx="22800000" cy="1600000"/>
-          </a:xfrm>
-          <a:prstGeom prst="rect">
-            <a:avLst/>
-          </a:prstGeom>
-          <a:solidFill>
-            <a:srgbClr val="FFFFFF"/>
-          </a:solidFill>
-          <a:ln w="12700">
-            <a:solidFill>
-              <a:srgbClr val="E1E1E1"/>
-            </a:solidFill>
-          </a:ln>
-        </p:spPr>
-        <p:style>
-          <a:lnRef idx="1">
-            <a:schemeClr val="accent1"/>
-          </a:lnRef>
-          <a:fillRef idx="3">
-            <a:schemeClr val="accent1"/>
-          </a:fillRef>
-          <a:effectRef idx="2">
-            <a:schemeClr val="accent1"/>
-          </a:effectRef>
-          <a:fontRef idx="minor">
-            <a:schemeClr val="lt1"/>
-          </a:fontRef>
-        </p:style>
-        <p:txBody>
-          <a:bodyPr rtlCol="0" anchor="ctr"/>
-          <a:lstStyle/>
-          <a:p>
-            <a:pPr algn="ctr"/>
-          </a:p>
-        </p:txBody>
-      </p:sp>
-      <p:sp>
-        <p:nvSpPr>
-          <p:cNvPr id="10" name="Rectangle 9"/>
-          <p:cNvSpPr/>
-          <p:nvPr/>
-        </p:nvSpPr>
-        <p:spPr>
-          <a:xfrm>
-            <a:off x="800000" y="3850000"/>
-            <a:ext cx="120000" cy="1600000"/>
-          </a:xfrm>
-          <a:prstGeom prst="rect">
+            <a:off x="1860000" y="3750000"/>
+            <a:ext cx="600000" cy="600000"/>
+          </a:xfrm>
+          <a:prstGeom prst="ellipse">
             <a:avLst/>
           </a:prstGeom>
           <a:solidFill>
@@ -8064,14 +8402,14 @@
       </p:sp>
       <p:sp>
         <p:nvSpPr>
-          <p:cNvPr id="11" name="TextBox 10"/>
+          <p:cNvPr id="9" name="TextBox 8"/>
           <p:cNvSpPr txBox="1"/>
           <p:nvPr/>
         </p:nvSpPr>
         <p:spPr>
           <a:xfrm>
-            <a:off x="1200000" y="4150000"/>
-            <a:ext cx="21800000" cy="1100000"/>
+            <a:off x="1860000" y="3750000"/>
+            <a:ext cx="600000" cy="600000"/>
           </a:xfrm>
           <a:prstGeom prst="rect">
             <a:avLst/>
@@ -8084,78 +8422,70 @@
           </a:bodyPr>
           <a:lstStyle/>
           <a:p>
-            <a:pPr algn="l"/>
-            <a:r>
-              <a:rPr sz="2600" b="0">
-                <a:solidFill>
-                  <a:srgbClr val="333333"/>
+            <a:pPr algn="ctr"/>
+            <a:r>
+              <a:rPr sz="2400" b="1">
+                <a:solidFill>
+                  <a:srgbClr val="FFFFFF"/>
                 </a:solidFill>
                 <a:latin typeface="Open Sans"/>
                 <a:ea typeface="Open Sans"/>
                 <a:cs typeface="Open Sans"/>
               </a:rPr>
-              <a:t>Обзорный осмотр — быстрый поиск кровотечения с головы до ног (1–2 с).</a:t>
-            </a:r>
-          </a:p>
-        </p:txBody>
-      </p:sp>
-      <p:sp>
-        <p:nvSpPr>
-          <p:cNvPr id="12" name="Rectangle 11"/>
+              <a:t>OK</a:t>
+            </a:r>
+          </a:p>
+        </p:txBody>
+      </p:sp>
+      <p:sp>
+        <p:nvSpPr>
+          <p:cNvPr id="10" name="TextBox 9"/>
+          <p:cNvSpPr txBox="1"/>
+          <p:nvPr/>
+        </p:nvSpPr>
+        <p:spPr>
+          <a:xfrm>
+            <a:off x="2860000" y="3600000"/>
+            <a:ext cx="18000000" cy="900000"/>
+          </a:xfrm>
+          <a:prstGeom prst="rect">
+            <a:avLst/>
+          </a:prstGeom>
+          <a:noFill/>
+        </p:spPr>
+        <p:txBody>
+          <a:bodyPr wrap="square" anchor="ctr">
+            <a:spAutoFit/>
+          </a:bodyPr>
+          <a:lstStyle/>
+          <a:p>
+            <a:pPr algn="l"/>
+            <a:r>
+              <a:rPr sz="2800" b="0">
+                <a:solidFill>
+                  <a:srgbClr val="333333"/>
+                </a:solidFill>
+                <a:latin typeface="Open Sans"/>
+                <a:ea typeface="Open Sans"/>
+                <a:cs typeface="Open Sans"/>
+              </a:rPr>
+              <a:t>Обзорный осмотр — быстрый поиск кровотечения (1–2 с)</a:t>
+            </a:r>
+          </a:p>
+        </p:txBody>
+      </p:sp>
+      <p:sp>
+        <p:nvSpPr>
+          <p:cNvPr id="11" name="Oval 10"/>
           <p:cNvSpPr/>
           <p:nvPr/>
         </p:nvSpPr>
         <p:spPr>
           <a:xfrm>
-            <a:off x="800000" y="5750000"/>
-            <a:ext cx="22800000" cy="1600000"/>
-          </a:xfrm>
-          <a:prstGeom prst="rect">
-            <a:avLst/>
-          </a:prstGeom>
-          <a:solidFill>
-            <a:srgbClr val="FFFFFF"/>
-          </a:solidFill>
-          <a:ln w="12700">
-            <a:solidFill>
-              <a:srgbClr val="E1E1E1"/>
-            </a:solidFill>
-          </a:ln>
-        </p:spPr>
-        <p:style>
-          <a:lnRef idx="1">
-            <a:schemeClr val="accent1"/>
-          </a:lnRef>
-          <a:fillRef idx="3">
-            <a:schemeClr val="accent1"/>
-          </a:fillRef>
-          <a:effectRef idx="2">
-            <a:schemeClr val="accent1"/>
-          </a:effectRef>
-          <a:fontRef idx="minor">
-            <a:schemeClr val="lt1"/>
-          </a:fontRef>
-        </p:style>
-        <p:txBody>
-          <a:bodyPr rtlCol="0" anchor="ctr"/>
-          <a:lstStyle/>
-          <a:p>
-            <a:pPr algn="ctr"/>
-          </a:p>
-        </p:txBody>
-      </p:sp>
-      <p:sp>
-        <p:nvSpPr>
-          <p:cNvPr id="13" name="Rectangle 12"/>
-          <p:cNvSpPr/>
-          <p:nvPr/>
-        </p:nvSpPr>
-        <p:spPr>
-          <a:xfrm>
-            <a:off x="800000" y="5750000"/>
-            <a:ext cx="120000" cy="1600000"/>
-          </a:xfrm>
-          <a:prstGeom prst="rect">
+            <a:off x="1860000" y="5350000"/>
+            <a:ext cx="600000" cy="600000"/>
+          </a:xfrm>
+          <a:prstGeom prst="ellipse">
             <a:avLst/>
           </a:prstGeom>
           <a:solidFill>
@@ -8189,14 +8519,14 @@
       </p:sp>
       <p:sp>
         <p:nvSpPr>
-          <p:cNvPr id="14" name="TextBox 13"/>
+          <p:cNvPr id="12" name="TextBox 11"/>
           <p:cNvSpPr txBox="1"/>
           <p:nvPr/>
         </p:nvSpPr>
         <p:spPr>
           <a:xfrm>
-            <a:off x="1200000" y="6050000"/>
-            <a:ext cx="21800000" cy="1100000"/>
+            <a:off x="1860000" y="5350000"/>
+            <a:ext cx="600000" cy="600000"/>
           </a:xfrm>
           <a:prstGeom prst="rect">
             <a:avLst/>
@@ -8209,78 +8539,70 @@
           </a:bodyPr>
           <a:lstStyle/>
           <a:p>
-            <a:pPr algn="l"/>
-            <a:r>
-              <a:rPr sz="2600" b="0">
-                <a:solidFill>
-                  <a:srgbClr val="333333"/>
+            <a:pPr algn="ctr"/>
+            <a:r>
+              <a:rPr sz="2400" b="1">
+                <a:solidFill>
+                  <a:srgbClr val="FFFFFF"/>
                 </a:solidFill>
                 <a:latin typeface="Open Sans"/>
                 <a:ea typeface="Open Sans"/>
                 <a:cs typeface="Open Sans"/>
               </a:rPr>
-              <a:t>Сначала останавливаем кровь, затем проводим подробный осмотр.</a:t>
-            </a:r>
-          </a:p>
-        </p:txBody>
-      </p:sp>
-      <p:sp>
-        <p:nvSpPr>
-          <p:cNvPr id="15" name="Rectangle 14"/>
+              <a:t>OK</a:t>
+            </a:r>
+          </a:p>
+        </p:txBody>
+      </p:sp>
+      <p:sp>
+        <p:nvSpPr>
+          <p:cNvPr id="13" name="TextBox 12"/>
+          <p:cNvSpPr txBox="1"/>
+          <p:nvPr/>
+        </p:nvSpPr>
+        <p:spPr>
+          <a:xfrm>
+            <a:off x="2860000" y="5200000"/>
+            <a:ext cx="18000000" cy="900000"/>
+          </a:xfrm>
+          <a:prstGeom prst="rect">
+            <a:avLst/>
+          </a:prstGeom>
+          <a:noFill/>
+        </p:spPr>
+        <p:txBody>
+          <a:bodyPr wrap="square" anchor="ctr">
+            <a:spAutoFit/>
+          </a:bodyPr>
+          <a:lstStyle/>
+          <a:p>
+            <a:pPr algn="l"/>
+            <a:r>
+              <a:rPr sz="2800" b="0">
+                <a:solidFill>
+                  <a:srgbClr val="333333"/>
+                </a:solidFill>
+                <a:latin typeface="Open Sans"/>
+                <a:ea typeface="Open Sans"/>
+                <a:cs typeface="Open Sans"/>
+              </a:rPr>
+              <a:t>Сначала останавливаем кровь, затем подробный осмотр</a:t>
+            </a:r>
+          </a:p>
+        </p:txBody>
+      </p:sp>
+      <p:sp>
+        <p:nvSpPr>
+          <p:cNvPr id="14" name="Oval 13"/>
           <p:cNvSpPr/>
           <p:nvPr/>
         </p:nvSpPr>
         <p:spPr>
           <a:xfrm>
-            <a:off x="800000" y="7650000"/>
-            <a:ext cx="22800000" cy="1600000"/>
-          </a:xfrm>
-          <a:prstGeom prst="rect">
-            <a:avLst/>
-          </a:prstGeom>
-          <a:solidFill>
-            <a:srgbClr val="FFFFFF"/>
-          </a:solidFill>
-          <a:ln w="12700">
-            <a:solidFill>
-              <a:srgbClr val="E1E1E1"/>
-            </a:solidFill>
-          </a:ln>
-        </p:spPr>
-        <p:style>
-          <a:lnRef idx="1">
-            <a:schemeClr val="accent1"/>
-          </a:lnRef>
-          <a:fillRef idx="3">
-            <a:schemeClr val="accent1"/>
-          </a:fillRef>
-          <a:effectRef idx="2">
-            <a:schemeClr val="accent1"/>
-          </a:effectRef>
-          <a:fontRef idx="minor">
-            <a:schemeClr val="lt1"/>
-          </a:fontRef>
-        </p:style>
-        <p:txBody>
-          <a:bodyPr rtlCol="0" anchor="ctr"/>
-          <a:lstStyle/>
-          <a:p>
-            <a:pPr algn="ctr"/>
-          </a:p>
-        </p:txBody>
-      </p:sp>
-      <p:sp>
-        <p:nvSpPr>
-          <p:cNvPr id="16" name="Rectangle 15"/>
-          <p:cNvSpPr/>
-          <p:nvPr/>
-        </p:nvSpPr>
-        <p:spPr>
-          <a:xfrm>
-            <a:off x="800000" y="7650000"/>
-            <a:ext cx="120000" cy="1600000"/>
-          </a:xfrm>
-          <a:prstGeom prst="rect">
+            <a:off x="1860000" y="6950000"/>
+            <a:ext cx="600000" cy="600000"/>
+          </a:xfrm>
+          <a:prstGeom prst="ellipse">
             <a:avLst/>
           </a:prstGeom>
           <a:solidFill>
@@ -8314,14 +8636,14 @@
       </p:sp>
       <p:sp>
         <p:nvSpPr>
-          <p:cNvPr id="17" name="TextBox 16"/>
+          <p:cNvPr id="15" name="TextBox 14"/>
           <p:cNvSpPr txBox="1"/>
           <p:nvPr/>
         </p:nvSpPr>
         <p:spPr>
           <a:xfrm>
-            <a:off x="1200000" y="7950000"/>
-            <a:ext cx="21800000" cy="1100000"/>
+            <a:off x="1860000" y="6950000"/>
+            <a:ext cx="600000" cy="600000"/>
           </a:xfrm>
           <a:prstGeom prst="rect">
             <a:avLst/>
@@ -8334,17 +8656,91 @@
           </a:bodyPr>
           <a:lstStyle/>
           <a:p>
-            <a:pPr algn="l"/>
-            <a:r>
-              <a:rPr sz="2600" b="0">
-                <a:solidFill>
-                  <a:srgbClr val="333333"/>
+            <a:pPr algn="ctr"/>
+            <a:r>
+              <a:rPr sz="2400" b="1">
+                <a:solidFill>
+                  <a:srgbClr val="FFFFFF"/>
                 </a:solidFill>
                 <a:latin typeface="Open Sans"/>
                 <a:ea typeface="Open Sans"/>
                 <a:cs typeface="Open Sans"/>
               </a:rPr>
-              <a:t>Особенно важен при ДТП, падении с высоты и множественных пострадавших.</a:t>
+              <a:t>OK</a:t>
+            </a:r>
+          </a:p>
+        </p:txBody>
+      </p:sp>
+      <p:sp>
+        <p:nvSpPr>
+          <p:cNvPr id="16" name="TextBox 15"/>
+          <p:cNvSpPr txBox="1"/>
+          <p:nvPr/>
+        </p:nvSpPr>
+        <p:spPr>
+          <a:xfrm>
+            <a:off x="2860000" y="6800000"/>
+            <a:ext cx="18000000" cy="900000"/>
+          </a:xfrm>
+          <a:prstGeom prst="rect">
+            <a:avLst/>
+          </a:prstGeom>
+          <a:noFill/>
+        </p:spPr>
+        <p:txBody>
+          <a:bodyPr wrap="square" anchor="ctr">
+            <a:spAutoFit/>
+          </a:bodyPr>
+          <a:lstStyle/>
+          <a:p>
+            <a:pPr algn="l"/>
+            <a:r>
+              <a:rPr sz="2800" b="0">
+                <a:solidFill>
+                  <a:srgbClr val="333333"/>
+                </a:solidFill>
+                <a:latin typeface="Open Sans"/>
+                <a:ea typeface="Open Sans"/>
+                <a:cs typeface="Open Sans"/>
+              </a:rPr>
+              <a:t>Особенно важен при ДТП и падении с высоты</a:t>
+            </a:r>
+          </a:p>
+        </p:txBody>
+      </p:sp>
+      <p:sp>
+        <p:nvSpPr>
+          <p:cNvPr id="17" name="TextBox 16"/>
+          <p:cNvSpPr txBox="1"/>
+          <p:nvPr/>
+        </p:nvSpPr>
+        <p:spPr>
+          <a:xfrm>
+            <a:off x="360000" y="11200000"/>
+            <a:ext cx="23664000" cy="1200000"/>
+          </a:xfrm>
+          <a:prstGeom prst="rect">
+            <a:avLst/>
+          </a:prstGeom>
+          <a:noFill/>
+        </p:spPr>
+        <p:txBody>
+          <a:bodyPr wrap="square" anchor="t">
+            <a:spAutoFit/>
+          </a:bodyPr>
+          <a:lstStyle/>
+          <a:p>
+            <a:pPr algn="ctr"/>
+            <a:r>
+              <a:rPr sz="2600" b="1">
+                <a:solidFill>
+                  <a:srgbClr val="CC0000"/>
+                </a:solidFill>
+                <a:latin typeface="Open Sans"/>
+                <a:ea typeface="Open Sans"/>
+                <a:cs typeface="Open Sans"/>
+              </a:rPr>
+              <a:t>Время — критический фактор!</a:t>
             </a:r>
           </a:p>
         </p:txBody>

--- a/tema2_bleeding/Кровотечение_и_обзорный_осмотр.pptx
+++ b/tema2_bleeding/Кровотечение_и_обзорный_осмотр.pptx
@@ -14,7 +14,6 @@
     <p:sldId id="262" r:id="rId13"/>
     <p:sldId id="263" r:id="rId14"/>
     <p:sldId id="264" r:id="rId15"/>
-    <p:sldId id="265" r:id="rId16"/>
   </p:sldIdLst>
   <p:sldSz cx="24384000" cy="13716000" type="screen4x3"/>
   <p:notesSz cx="6858000" cy="9144000"/>
@@ -3097,12 +3096,20 @@
         <p:nvPr/>
       </p:nvGrpSpPr>
       <p:grpSpPr/>
-      <p:sp>
-        <p:nvSpPr>
-          <p:cNvPr id="2" name="Rectangle 1"/>
-          <p:cNvSpPr/>
+      <p:pic>
+        <p:nvPicPr>
+          <p:cNvPr id="2" name="Picture 1" descr="page_01.png"/>
+          <p:cNvPicPr>
+            <a:picLocks noChangeAspect="1"/>
+          </p:cNvPicPr>
           <p:nvPr/>
-        </p:nvSpPr>
+        </p:nvPicPr>
+        <p:blipFill>
+          <a:blip r:embed="rId2"/>
+          <a:stretch>
+            <a:fillRect/>
+          </a:stretch>
+        </p:blipFill>
         <p:spPr>
           <a:xfrm>
             <a:off x="0" y="0"/>
@@ -3111,367 +3118,8 @@
           <a:prstGeom prst="rect">
             <a:avLst/>
           </a:prstGeom>
-          <a:solidFill>
-            <a:srgbClr val="FFFFFF"/>
-          </a:solidFill>
-          <a:ln>
-            <a:noFill/>
-          </a:ln>
-        </p:spPr>
-        <p:style>
-          <a:lnRef idx="1">
-            <a:schemeClr val="accent1"/>
-          </a:lnRef>
-          <a:fillRef idx="3">
-            <a:schemeClr val="accent1"/>
-          </a:fillRef>
-          <a:effectRef idx="2">
-            <a:schemeClr val="accent1"/>
-          </a:effectRef>
-          <a:fontRef idx="minor">
-            <a:schemeClr val="lt1"/>
-          </a:fontRef>
-        </p:style>
-        <p:txBody>
-          <a:bodyPr rtlCol="0" anchor="ctr"/>
-          <a:lstStyle/>
-          <a:p>
-            <a:pPr algn="ctr"/>
-          </a:p>
-        </p:txBody>
-      </p:sp>
-      <p:sp>
-        <p:nvSpPr>
-          <p:cNvPr id="3" name="TextBox 2"/>
-          <p:cNvSpPr txBox="1"/>
-          <p:nvPr/>
-        </p:nvSpPr>
-        <p:spPr>
-          <a:xfrm>
-            <a:off x="360000" y="4800000"/>
-            <a:ext cx="23664000" cy="1600000"/>
-          </a:xfrm>
-          <a:prstGeom prst="rect">
-            <a:avLst/>
-          </a:prstGeom>
-          <a:noFill/>
-        </p:spPr>
-        <p:txBody>
-          <a:bodyPr wrap="square" anchor="t">
-            <a:spAutoFit/>
-          </a:bodyPr>
-          <a:lstStyle/>
-          <a:p>
-            <a:pPr algn="ctr"/>
-            <a:r>
-              <a:rPr sz="4600" b="1">
-                <a:solidFill>
-                  <a:srgbClr val="333333"/>
-                </a:solidFill>
-                <a:latin typeface="Open Sans"/>
-                <a:ea typeface="Open Sans"/>
-                <a:cs typeface="Open Sans"/>
-              </a:rPr>
-              <a:t>КРОВОТЕЧЕНИЕ И ОБЗОРНЫЙ ОСМОТР ПОСТРАДАВШЕГО</a:t>
-            </a:r>
-          </a:p>
-        </p:txBody>
-      </p:sp>
-      <p:sp>
-        <p:nvSpPr>
-          <p:cNvPr id="4" name="Rectangle 3"/>
-          <p:cNvSpPr/>
-          <p:nvPr/>
-        </p:nvSpPr>
-        <p:spPr>
-          <a:xfrm>
-            <a:off x="7000000" y="6600000"/>
-            <a:ext cx="10000000" cy="25000"/>
-          </a:xfrm>
-          <a:prstGeom prst="rect">
-            <a:avLst/>
-          </a:prstGeom>
-          <a:solidFill>
-            <a:srgbClr val="0055AA"/>
-          </a:solidFill>
-          <a:ln>
-            <a:noFill/>
-          </a:ln>
-        </p:spPr>
-        <p:style>
-          <a:lnRef idx="1">
-            <a:schemeClr val="accent1"/>
-          </a:lnRef>
-          <a:fillRef idx="3">
-            <a:schemeClr val="accent1"/>
-          </a:fillRef>
-          <a:effectRef idx="2">
-            <a:schemeClr val="accent1"/>
-          </a:effectRef>
-          <a:fontRef idx="minor">
-            <a:schemeClr val="lt1"/>
-          </a:fontRef>
-        </p:style>
-        <p:txBody>
-          <a:bodyPr rtlCol="0" anchor="ctr"/>
-          <a:lstStyle/>
-          <a:p>
-            <a:pPr algn="ctr"/>
-          </a:p>
-        </p:txBody>
-      </p:sp>
-      <p:sp>
-        <p:nvSpPr>
-          <p:cNvPr id="5" name="TextBox 4"/>
-          <p:cNvSpPr txBox="1"/>
-          <p:nvPr/>
-        </p:nvSpPr>
-        <p:spPr>
-          <a:xfrm>
-            <a:off x="360000" y="6900000"/>
-            <a:ext cx="23664000" cy="800000"/>
-          </a:xfrm>
-          <a:prstGeom prst="rect">
-            <a:avLst/>
-          </a:prstGeom>
-          <a:noFill/>
-        </p:spPr>
-        <p:txBody>
-          <a:bodyPr wrap="square" anchor="t">
-            <a:spAutoFit/>
-          </a:bodyPr>
-          <a:lstStyle/>
-          <a:p>
-            <a:pPr algn="ctr"/>
-            <a:r>
-              <a:rPr sz="2600" b="0">
-                <a:solidFill>
-                  <a:srgbClr val="333333"/>
-                </a:solidFill>
-                <a:latin typeface="Open Sans"/>
-                <a:ea typeface="Open Sans"/>
-                <a:cs typeface="Open Sans"/>
-              </a:rPr>
-              <a:t>Теоретический модуль · п. 2.1</a:t>
-            </a:r>
-          </a:p>
-        </p:txBody>
-      </p:sp>
-      <p:sp>
-        <p:nvSpPr>
-          <p:cNvPr id="6" name="TextBox 5"/>
-          <p:cNvSpPr txBox="1"/>
-          <p:nvPr/>
-        </p:nvSpPr>
-        <p:spPr>
-          <a:xfrm>
-            <a:off x="360000" y="7800000"/>
-            <a:ext cx="23664000" cy="500000"/>
-          </a:xfrm>
-          <a:prstGeom prst="rect">
-            <a:avLst/>
-          </a:prstGeom>
-          <a:noFill/>
-        </p:spPr>
-        <p:txBody>
-          <a:bodyPr wrap="square" anchor="t">
-            <a:spAutoFit/>
-          </a:bodyPr>
-          <a:lstStyle/>
-          <a:p>
-            <a:pPr algn="ctr"/>
-            <a:r>
-              <a:rPr sz="2000" b="0">
-                <a:solidFill>
-                  <a:srgbClr val="0055AA"/>
-                </a:solidFill>
-                <a:latin typeface="Open Sans"/>
-                <a:ea typeface="Open Sans"/>
-                <a:cs typeface="Open Sans"/>
-              </a:rPr>
-              <a:t>Тема 2 · Оказание первой помощи при наружных кровотечениях</a:t>
-            </a:r>
-          </a:p>
-        </p:txBody>
-      </p:sp>
-    </p:spTree>
-  </p:cSld>
-  <p:clrMapOvr>
-    <a:masterClrMapping/>
-  </p:clrMapOvr>
-</p:sld>
-</file>
-
-<file path=ppt/slides/slide10.xml><?xml version="1.0" encoding="utf-8"?>
-<p:sld xmlns:a="http://schemas.openxmlformats.org/drawingml/2006/main" xmlns:p="http://schemas.openxmlformats.org/presentationml/2006/main" xmlns:r="http://schemas.openxmlformats.org/officeDocument/2006/relationships">
-  <p:cSld>
-    <p:spTree>
-      <p:nvGrpSpPr>
-        <p:cNvPr id="1" name=""/>
-        <p:cNvGrpSpPr/>
-        <p:nvPr/>
-      </p:nvGrpSpPr>
-      <p:grpSpPr/>
-      <p:sp>
-        <p:nvSpPr>
-          <p:cNvPr id="2" name="Rectangle 1"/>
-          <p:cNvSpPr/>
-          <p:nvPr/>
-        </p:nvSpPr>
-        <p:spPr>
-          <a:xfrm>
-            <a:off x="0" y="0"/>
-            <a:ext cx="24384000" cy="13716000"/>
-          </a:xfrm>
-          <a:prstGeom prst="rect">
-            <a:avLst/>
-          </a:prstGeom>
-          <a:solidFill>
-            <a:srgbClr val="FFFFFF"/>
-          </a:solidFill>
-          <a:ln>
-            <a:noFill/>
-          </a:ln>
-        </p:spPr>
-        <p:style>
-          <a:lnRef idx="1">
-            <a:schemeClr val="accent1"/>
-          </a:lnRef>
-          <a:fillRef idx="3">
-            <a:schemeClr val="accent1"/>
-          </a:fillRef>
-          <a:effectRef idx="2">
-            <a:schemeClr val="accent1"/>
-          </a:effectRef>
-          <a:fontRef idx="minor">
-            <a:schemeClr val="lt1"/>
-          </a:fontRef>
-        </p:style>
-        <p:txBody>
-          <a:bodyPr rtlCol="0" anchor="ctr"/>
-          <a:lstStyle/>
-          <a:p>
-            <a:pPr algn="ctr"/>
-          </a:p>
-        </p:txBody>
-      </p:sp>
-      <p:sp>
-        <p:nvSpPr>
-          <p:cNvPr id="3" name="TextBox 2"/>
-          <p:cNvSpPr txBox="1"/>
-          <p:nvPr/>
-        </p:nvSpPr>
-        <p:spPr>
-          <a:xfrm>
-            <a:off x="360000" y="5500000"/>
-            <a:ext cx="23664000" cy="1200000"/>
-          </a:xfrm>
-          <a:prstGeom prst="rect">
-            <a:avLst/>
-          </a:prstGeom>
-          <a:noFill/>
-        </p:spPr>
-        <p:txBody>
-          <a:bodyPr wrap="square" anchor="t">
-            <a:spAutoFit/>
-          </a:bodyPr>
-          <a:lstStyle/>
-          <a:p>
-            <a:pPr algn="ctr"/>
-            <a:r>
-              <a:rPr sz="4600" b="1">
-                <a:solidFill>
-                  <a:srgbClr val="333333"/>
-                </a:solidFill>
-                <a:latin typeface="Open Sans"/>
-                <a:ea typeface="Open Sans"/>
-                <a:cs typeface="Open Sans"/>
-              </a:rPr>
-              <a:t>Благодарим за внимание</a:t>
-            </a:r>
-          </a:p>
-        </p:txBody>
-      </p:sp>
-      <p:sp>
-        <p:nvSpPr>
-          <p:cNvPr id="4" name="Rectangle 3"/>
-          <p:cNvSpPr/>
-          <p:nvPr/>
-        </p:nvSpPr>
-        <p:spPr>
-          <a:xfrm>
-            <a:off x="7000000" y="7000000"/>
-            <a:ext cx="10000000" cy="25000"/>
-          </a:xfrm>
-          <a:prstGeom prst="rect">
-            <a:avLst/>
-          </a:prstGeom>
-          <a:solidFill>
-            <a:srgbClr val="0055AA"/>
-          </a:solidFill>
-          <a:ln>
-            <a:noFill/>
-          </a:ln>
-        </p:spPr>
-        <p:style>
-          <a:lnRef idx="1">
-            <a:schemeClr val="accent1"/>
-          </a:lnRef>
-          <a:fillRef idx="3">
-            <a:schemeClr val="accent1"/>
-          </a:fillRef>
-          <a:effectRef idx="2">
-            <a:schemeClr val="accent1"/>
-          </a:effectRef>
-          <a:fontRef idx="minor">
-            <a:schemeClr val="lt1"/>
-          </a:fontRef>
-        </p:style>
-        <p:txBody>
-          <a:bodyPr rtlCol="0" anchor="ctr"/>
-          <a:lstStyle/>
-          <a:p>
-            <a:pPr algn="ctr"/>
-          </a:p>
-        </p:txBody>
-      </p:sp>
-      <p:sp>
-        <p:nvSpPr>
-          <p:cNvPr id="5" name="TextBox 4"/>
-          <p:cNvSpPr txBox="1"/>
-          <p:nvPr/>
-        </p:nvSpPr>
-        <p:spPr>
-          <a:xfrm>
-            <a:off x="360000" y="7400000"/>
-            <a:ext cx="23664000" cy="500000"/>
-          </a:xfrm>
-          <a:prstGeom prst="rect">
-            <a:avLst/>
-          </a:prstGeom>
-          <a:noFill/>
-        </p:spPr>
-        <p:txBody>
-          <a:bodyPr wrap="square" anchor="t">
-            <a:spAutoFit/>
-          </a:bodyPr>
-          <a:lstStyle/>
-          <a:p>
-            <a:pPr algn="ctr"/>
-            <a:r>
-              <a:rPr sz="2000" b="0">
-                <a:solidFill>
-                  <a:srgbClr val="333333"/>
-                </a:solidFill>
-                <a:latin typeface="Open Sans"/>
-                <a:ea typeface="Open Sans"/>
-                <a:cs typeface="Open Sans"/>
-              </a:rPr>
-              <a:t>Тема 2 · Оказание первой помощи при наружных кровотечениях</a:t>
-            </a:r>
-          </a:p>
-        </p:txBody>
-      </p:sp>
+        </p:spPr>
+      </p:pic>
     </p:spTree>
   </p:cSld>
   <p:clrMapOvr>
@@ -3541,8 +3189,8 @@
         </p:nvSpPr>
         <p:spPr>
           <a:xfrm>
-            <a:off x="360000" y="350000"/>
-            <a:ext cx="23664000" cy="1100000"/>
+            <a:off x="800000" y="400000"/>
+            <a:ext cx="22800000" cy="1000000"/>
           </a:xfrm>
           <a:prstGeom prst="rect">
             <a:avLst/>
@@ -3555,7 +3203,7 @@
           </a:bodyPr>
           <a:lstStyle/>
           <a:p>
-            <a:pPr algn="ctr"/>
+            <a:pPr algn="l"/>
             <a:r>
               <a:rPr sz="4600" b="1">
                 <a:solidFill>
@@ -3578,8 +3226,8 @@
         </p:nvSpPr>
         <p:spPr>
           <a:xfrm>
-            <a:off x="360000" y="1450000"/>
-            <a:ext cx="23664000" cy="20000"/>
+            <a:off x="800000" y="1500000"/>
+            <a:ext cx="22800000" cy="20000"/>
           </a:xfrm>
           <a:prstGeom prst="rect">
             <a:avLst/>
@@ -3621,8 +3269,8 @@
         </p:nvSpPr>
         <p:spPr>
           <a:xfrm>
-            <a:off x="2360000" y="2000000"/>
-            <a:ext cx="700000" cy="700000"/>
+            <a:off x="800000" y="2000000"/>
+            <a:ext cx="800000" cy="800000"/>
           </a:xfrm>
           <a:prstGeom prst="ellipse">
             <a:avLst/>
@@ -3664,8 +3312,8 @@
         </p:nvSpPr>
         <p:spPr>
           <a:xfrm>
-            <a:off x="2360000" y="2000000"/>
-            <a:ext cx="700000" cy="700000"/>
+            <a:off x="800000" y="2000000"/>
+            <a:ext cx="800000" cy="800000"/>
           </a:xfrm>
           <a:prstGeom prst="rect">
             <a:avLst/>
@@ -3695,14 +3343,59 @@
       </p:sp>
       <p:sp>
         <p:nvSpPr>
-          <p:cNvPr id="7" name="TextBox 6"/>
+          <p:cNvPr id="7" name="Rectangle 6"/>
+          <p:cNvSpPr/>
+          <p:nvPr/>
+        </p:nvSpPr>
+        <p:spPr>
+          <a:xfrm>
+            <a:off x="1900000" y="2000000"/>
+            <a:ext cx="20500000" cy="800000"/>
+          </a:xfrm>
+          <a:prstGeom prst="rect">
+            <a:avLst/>
+          </a:prstGeom>
+          <a:solidFill>
+            <a:srgbClr val="FFFFFF"/>
+          </a:solidFill>
+          <a:ln w="12700">
+            <a:solidFill>
+              <a:srgbClr val="E1E1E1"/>
+            </a:solidFill>
+          </a:ln>
+        </p:spPr>
+        <p:style>
+          <a:lnRef idx="1">
+            <a:schemeClr val="accent1"/>
+          </a:lnRef>
+          <a:fillRef idx="3">
+            <a:schemeClr val="accent1"/>
+          </a:fillRef>
+          <a:effectRef idx="2">
+            <a:schemeClr val="accent1"/>
+          </a:effectRef>
+          <a:fontRef idx="minor">
+            <a:schemeClr val="lt1"/>
+          </a:fontRef>
+        </p:style>
+        <p:txBody>
+          <a:bodyPr rtlCol="0" anchor="ctr"/>
+          <a:lstStyle/>
+          <a:p>
+            <a:pPr algn="ctr"/>
+          </a:p>
+        </p:txBody>
+      </p:sp>
+      <p:sp>
+        <p:nvSpPr>
+          <p:cNvPr id="8" name="TextBox 7"/>
           <p:cNvSpPr txBox="1"/>
           <p:nvPr/>
         </p:nvSpPr>
         <p:spPr>
           <a:xfrm>
-            <a:off x="3360000" y="2000000"/>
-            <a:ext cx="14000000" cy="700000"/>
+            <a:off x="2200000" y="2000000"/>
+            <a:ext cx="19500000" cy="800000"/>
           </a:xfrm>
           <a:prstGeom prst="rect">
             <a:avLst/>
@@ -3732,14 +3425,14 @@
       </p:sp>
       <p:sp>
         <p:nvSpPr>
-          <p:cNvPr id="8" name="Oval 7"/>
+          <p:cNvPr id="9" name="Oval 8"/>
           <p:cNvSpPr/>
           <p:nvPr/>
         </p:nvSpPr>
         <p:spPr>
           <a:xfrm>
-            <a:off x="2360000" y="3400000"/>
-            <a:ext cx="700000" cy="700000"/>
+            <a:off x="800000" y="3400000"/>
+            <a:ext cx="800000" cy="800000"/>
           </a:xfrm>
           <a:prstGeom prst="ellipse">
             <a:avLst/>
@@ -3775,14 +3468,14 @@
       </p:sp>
       <p:sp>
         <p:nvSpPr>
-          <p:cNvPr id="9" name="TextBox 8"/>
+          <p:cNvPr id="10" name="TextBox 9"/>
           <p:cNvSpPr txBox="1"/>
           <p:nvPr/>
         </p:nvSpPr>
         <p:spPr>
           <a:xfrm>
-            <a:off x="2360000" y="3400000"/>
-            <a:ext cx="700000" cy="700000"/>
+            <a:off x="800000" y="3400000"/>
+            <a:ext cx="800000" cy="800000"/>
           </a:xfrm>
           <a:prstGeom prst="rect">
             <a:avLst/>
@@ -3812,14 +3505,59 @@
       </p:sp>
       <p:sp>
         <p:nvSpPr>
-          <p:cNvPr id="10" name="TextBox 9"/>
+          <p:cNvPr id="11" name="Rectangle 10"/>
+          <p:cNvSpPr/>
+          <p:nvPr/>
+        </p:nvSpPr>
+        <p:spPr>
+          <a:xfrm>
+            <a:off x="1900000" y="3400000"/>
+            <a:ext cx="20500000" cy="800000"/>
+          </a:xfrm>
+          <a:prstGeom prst="rect">
+            <a:avLst/>
+          </a:prstGeom>
+          <a:solidFill>
+            <a:srgbClr val="FFFFFF"/>
+          </a:solidFill>
+          <a:ln w="12700">
+            <a:solidFill>
+              <a:srgbClr val="E1E1E1"/>
+            </a:solidFill>
+          </a:ln>
+        </p:spPr>
+        <p:style>
+          <a:lnRef idx="1">
+            <a:schemeClr val="accent1"/>
+          </a:lnRef>
+          <a:fillRef idx="3">
+            <a:schemeClr val="accent1"/>
+          </a:fillRef>
+          <a:effectRef idx="2">
+            <a:schemeClr val="accent1"/>
+          </a:effectRef>
+          <a:fontRef idx="minor">
+            <a:schemeClr val="lt1"/>
+          </a:fontRef>
+        </p:style>
+        <p:txBody>
+          <a:bodyPr rtlCol="0" anchor="ctr"/>
+          <a:lstStyle/>
+          <a:p>
+            <a:pPr algn="ctr"/>
+          </a:p>
+        </p:txBody>
+      </p:sp>
+      <p:sp>
+        <p:nvSpPr>
+          <p:cNvPr id="12" name="TextBox 11"/>
           <p:cNvSpPr txBox="1"/>
           <p:nvPr/>
         </p:nvSpPr>
         <p:spPr>
           <a:xfrm>
-            <a:off x="3360000" y="3400000"/>
-            <a:ext cx="14000000" cy="700000"/>
+            <a:off x="2200000" y="3400000"/>
+            <a:ext cx="19500000" cy="800000"/>
           </a:xfrm>
           <a:prstGeom prst="rect">
             <a:avLst/>
@@ -3849,14 +3587,14 @@
       </p:sp>
       <p:sp>
         <p:nvSpPr>
-          <p:cNvPr id="11" name="Oval 10"/>
+          <p:cNvPr id="13" name="Oval 12"/>
           <p:cNvSpPr/>
           <p:nvPr/>
         </p:nvSpPr>
         <p:spPr>
           <a:xfrm>
-            <a:off x="2360000" y="4800000"/>
-            <a:ext cx="700000" cy="700000"/>
+            <a:off x="800000" y="4800000"/>
+            <a:ext cx="800000" cy="800000"/>
           </a:xfrm>
           <a:prstGeom prst="ellipse">
             <a:avLst/>
@@ -3892,14 +3630,14 @@
       </p:sp>
       <p:sp>
         <p:nvSpPr>
-          <p:cNvPr id="12" name="TextBox 11"/>
+          <p:cNvPr id="14" name="TextBox 13"/>
           <p:cNvSpPr txBox="1"/>
           <p:nvPr/>
         </p:nvSpPr>
         <p:spPr>
           <a:xfrm>
-            <a:off x="2360000" y="4800000"/>
-            <a:ext cx="700000" cy="700000"/>
+            <a:off x="800000" y="4800000"/>
+            <a:ext cx="800000" cy="800000"/>
           </a:xfrm>
           <a:prstGeom prst="rect">
             <a:avLst/>
@@ -3929,14 +3667,59 @@
       </p:sp>
       <p:sp>
         <p:nvSpPr>
-          <p:cNvPr id="13" name="TextBox 12"/>
+          <p:cNvPr id="15" name="Rectangle 14"/>
+          <p:cNvSpPr/>
+          <p:nvPr/>
+        </p:nvSpPr>
+        <p:spPr>
+          <a:xfrm>
+            <a:off x="1900000" y="4800000"/>
+            <a:ext cx="20500000" cy="800000"/>
+          </a:xfrm>
+          <a:prstGeom prst="rect">
+            <a:avLst/>
+          </a:prstGeom>
+          <a:solidFill>
+            <a:srgbClr val="FFFFFF"/>
+          </a:solidFill>
+          <a:ln w="12700">
+            <a:solidFill>
+              <a:srgbClr val="E1E1E1"/>
+            </a:solidFill>
+          </a:ln>
+        </p:spPr>
+        <p:style>
+          <a:lnRef idx="1">
+            <a:schemeClr val="accent1"/>
+          </a:lnRef>
+          <a:fillRef idx="3">
+            <a:schemeClr val="accent1"/>
+          </a:fillRef>
+          <a:effectRef idx="2">
+            <a:schemeClr val="accent1"/>
+          </a:effectRef>
+          <a:fontRef idx="minor">
+            <a:schemeClr val="lt1"/>
+          </a:fontRef>
+        </p:style>
+        <p:txBody>
+          <a:bodyPr rtlCol="0" anchor="ctr"/>
+          <a:lstStyle/>
+          <a:p>
+            <a:pPr algn="ctr"/>
+          </a:p>
+        </p:txBody>
+      </p:sp>
+      <p:sp>
+        <p:nvSpPr>
+          <p:cNvPr id="16" name="TextBox 15"/>
           <p:cNvSpPr txBox="1"/>
           <p:nvPr/>
         </p:nvSpPr>
         <p:spPr>
           <a:xfrm>
-            <a:off x="3360000" y="4800000"/>
-            <a:ext cx="14000000" cy="700000"/>
+            <a:off x="2200000" y="4800000"/>
+            <a:ext cx="19500000" cy="800000"/>
           </a:xfrm>
           <a:prstGeom prst="rect">
             <a:avLst/>
@@ -3966,14 +3749,14 @@
       </p:sp>
       <p:sp>
         <p:nvSpPr>
-          <p:cNvPr id="14" name="Oval 13"/>
+          <p:cNvPr id="17" name="Oval 16"/>
           <p:cNvSpPr/>
           <p:nvPr/>
         </p:nvSpPr>
         <p:spPr>
           <a:xfrm>
-            <a:off x="2360000" y="6200000"/>
-            <a:ext cx="700000" cy="700000"/>
+            <a:off x="800000" y="6200000"/>
+            <a:ext cx="800000" cy="800000"/>
           </a:xfrm>
           <a:prstGeom prst="ellipse">
             <a:avLst/>
@@ -4009,14 +3792,14 @@
       </p:sp>
       <p:sp>
         <p:nvSpPr>
-          <p:cNvPr id="15" name="TextBox 14"/>
+          <p:cNvPr id="18" name="TextBox 17"/>
           <p:cNvSpPr txBox="1"/>
           <p:nvPr/>
         </p:nvSpPr>
         <p:spPr>
           <a:xfrm>
-            <a:off x="2360000" y="6200000"/>
-            <a:ext cx="700000" cy="700000"/>
+            <a:off x="800000" y="6200000"/>
+            <a:ext cx="800000" cy="800000"/>
           </a:xfrm>
           <a:prstGeom prst="rect">
             <a:avLst/>
@@ -4046,14 +3829,59 @@
       </p:sp>
       <p:sp>
         <p:nvSpPr>
-          <p:cNvPr id="16" name="TextBox 15"/>
+          <p:cNvPr id="19" name="Rectangle 18"/>
+          <p:cNvSpPr/>
+          <p:nvPr/>
+        </p:nvSpPr>
+        <p:spPr>
+          <a:xfrm>
+            <a:off x="1900000" y="6200000"/>
+            <a:ext cx="20500000" cy="800000"/>
+          </a:xfrm>
+          <a:prstGeom prst="rect">
+            <a:avLst/>
+          </a:prstGeom>
+          <a:solidFill>
+            <a:srgbClr val="FFFFFF"/>
+          </a:solidFill>
+          <a:ln w="12700">
+            <a:solidFill>
+              <a:srgbClr val="E1E1E1"/>
+            </a:solidFill>
+          </a:ln>
+        </p:spPr>
+        <p:style>
+          <a:lnRef idx="1">
+            <a:schemeClr val="accent1"/>
+          </a:lnRef>
+          <a:fillRef idx="3">
+            <a:schemeClr val="accent1"/>
+          </a:fillRef>
+          <a:effectRef idx="2">
+            <a:schemeClr val="accent1"/>
+          </a:effectRef>
+          <a:fontRef idx="minor">
+            <a:schemeClr val="lt1"/>
+          </a:fontRef>
+        </p:style>
+        <p:txBody>
+          <a:bodyPr rtlCol="0" anchor="ctr"/>
+          <a:lstStyle/>
+          <a:p>
+            <a:pPr algn="ctr"/>
+          </a:p>
+        </p:txBody>
+      </p:sp>
+      <p:sp>
+        <p:nvSpPr>
+          <p:cNvPr id="20" name="TextBox 19"/>
           <p:cNvSpPr txBox="1"/>
           <p:nvPr/>
         </p:nvSpPr>
         <p:spPr>
           <a:xfrm>
-            <a:off x="3360000" y="6200000"/>
-            <a:ext cx="14000000" cy="700000"/>
+            <a:off x="2200000" y="6200000"/>
+            <a:ext cx="19500000" cy="800000"/>
           </a:xfrm>
           <a:prstGeom prst="rect">
             <a:avLst/>
@@ -4078,49 +3906,6 @@
               </a:rPr>
               <a:t>Когда обзорный осмотр критически важен</a:t>
             </a:r>
-          </a:p>
-        </p:txBody>
-      </p:sp>
-      <p:sp>
-        <p:nvSpPr>
-          <p:cNvPr id="17" name="Rectangle 16"/>
-          <p:cNvSpPr/>
-          <p:nvPr/>
-        </p:nvSpPr>
-        <p:spPr>
-          <a:xfrm>
-            <a:off x="22000000" y="1600000"/>
-            <a:ext cx="80000" cy="9000000"/>
-          </a:xfrm>
-          <a:prstGeom prst="rect">
-            <a:avLst/>
-          </a:prstGeom>
-          <a:solidFill>
-            <a:srgbClr val="DDDDDD"/>
-          </a:solidFill>
-          <a:ln>
-            <a:noFill/>
-          </a:ln>
-        </p:spPr>
-        <p:style>
-          <a:lnRef idx="1">
-            <a:schemeClr val="accent1"/>
-          </a:lnRef>
-          <a:fillRef idx="3">
-            <a:schemeClr val="accent1"/>
-          </a:fillRef>
-          <a:effectRef idx="2">
-            <a:schemeClr val="accent1"/>
-          </a:effectRef>
-          <a:fontRef idx="minor">
-            <a:schemeClr val="lt1"/>
-          </a:fontRef>
-        </p:style>
-        <p:txBody>
-          <a:bodyPr rtlCol="0" anchor="ctr"/>
-          <a:lstStyle/>
-          <a:p>
-            <a:pPr algn="ctr"/>
           </a:p>
         </p:txBody>
       </p:sp>
@@ -4142,12 +3927,20 @@
         <p:nvPr/>
       </p:nvGrpSpPr>
       <p:grpSpPr/>
-      <p:sp>
-        <p:nvSpPr>
-          <p:cNvPr id="2" name="Rectangle 1"/>
-          <p:cNvSpPr/>
+      <p:pic>
+        <p:nvPicPr>
+          <p:cNvPr id="2" name="Picture 1" descr="page_02.png"/>
+          <p:cNvPicPr>
+            <a:picLocks noChangeAspect="1"/>
+          </p:cNvPicPr>
           <p:nvPr/>
-        </p:nvSpPr>
+        </p:nvPicPr>
+        <p:blipFill>
+          <a:blip r:embed="rId2"/>
+          <a:stretch>
+            <a:fillRect/>
+          </a:stretch>
+        </p:blipFill>
         <p:spPr>
           <a:xfrm>
             <a:off x="0" y="0"/>
@@ -4156,583 +3949,8 @@
           <a:prstGeom prst="rect">
             <a:avLst/>
           </a:prstGeom>
-          <a:solidFill>
-            <a:srgbClr val="FFFFFF"/>
-          </a:solidFill>
-          <a:ln>
-            <a:noFill/>
-          </a:ln>
-        </p:spPr>
-        <p:style>
-          <a:lnRef idx="1">
-            <a:schemeClr val="accent1"/>
-          </a:lnRef>
-          <a:fillRef idx="3">
-            <a:schemeClr val="accent1"/>
-          </a:fillRef>
-          <a:effectRef idx="2">
-            <a:schemeClr val="accent1"/>
-          </a:effectRef>
-          <a:fontRef idx="minor">
-            <a:schemeClr val="lt1"/>
-          </a:fontRef>
-        </p:style>
-        <p:txBody>
-          <a:bodyPr rtlCol="0" anchor="ctr"/>
-          <a:lstStyle/>
-          <a:p>
-            <a:pPr algn="ctr"/>
-          </a:p>
-        </p:txBody>
-      </p:sp>
-      <p:sp>
-        <p:nvSpPr>
-          <p:cNvPr id="3" name="TextBox 2"/>
-          <p:cNvSpPr txBox="1"/>
-          <p:nvPr/>
-        </p:nvSpPr>
-        <p:spPr>
-          <a:xfrm>
-            <a:off x="360000" y="350000"/>
-            <a:ext cx="23664000" cy="1100000"/>
-          </a:xfrm>
-          <a:prstGeom prst="rect">
-            <a:avLst/>
-          </a:prstGeom>
-          <a:noFill/>
-        </p:spPr>
-        <p:txBody>
-          <a:bodyPr wrap="square" anchor="t">
-            <a:spAutoFit/>
-          </a:bodyPr>
-          <a:lstStyle/>
-          <a:p>
-            <a:pPr algn="l"/>
-            <a:r>
-              <a:rPr sz="4600" b="1">
-                <a:solidFill>
-                  <a:srgbClr val="333333"/>
-                </a:solidFill>
-                <a:latin typeface="Open Sans"/>
-                <a:ea typeface="Open Sans"/>
-                <a:cs typeface="Open Sans"/>
-              </a:rPr>
-              <a:t>Понятие «кровотечение»</a:t>
-            </a:r>
-          </a:p>
-        </p:txBody>
-      </p:sp>
-      <p:sp>
-        <p:nvSpPr>
-          <p:cNvPr id="4" name="Rectangle 3"/>
-          <p:cNvSpPr/>
-          <p:nvPr/>
-        </p:nvSpPr>
-        <p:spPr>
-          <a:xfrm>
-            <a:off x="360000" y="1450000"/>
-            <a:ext cx="23664000" cy="20000"/>
-          </a:xfrm>
-          <a:prstGeom prst="rect">
-            <a:avLst/>
-          </a:prstGeom>
-          <a:solidFill>
-            <a:srgbClr val="E1E1E1"/>
-          </a:solidFill>
-          <a:ln>
-            <a:noFill/>
-          </a:ln>
-        </p:spPr>
-        <p:style>
-          <a:lnRef idx="1">
-            <a:schemeClr val="accent1"/>
-          </a:lnRef>
-          <a:fillRef idx="3">
-            <a:schemeClr val="accent1"/>
-          </a:fillRef>
-          <a:effectRef idx="2">
-            <a:schemeClr val="accent1"/>
-          </a:effectRef>
-          <a:fontRef idx="minor">
-            <a:schemeClr val="lt1"/>
-          </a:fontRef>
-        </p:style>
-        <p:txBody>
-          <a:bodyPr rtlCol="0" anchor="ctr"/>
-          <a:lstStyle/>
-          <a:p>
-            <a:pPr algn="ctr"/>
-          </a:p>
-        </p:txBody>
-      </p:sp>
-      <p:sp>
-        <p:nvSpPr>
-          <p:cNvPr id="5" name="Rounded Rectangle 4"/>
-          <p:cNvSpPr/>
-          <p:nvPr/>
-        </p:nvSpPr>
-        <p:spPr>
-          <a:xfrm>
-            <a:off x="360000" y="1900000"/>
-            <a:ext cx="900000" cy="900000"/>
-          </a:xfrm>
-          <a:prstGeom prst="roundRect">
-            <a:avLst/>
-          </a:prstGeom>
-          <a:solidFill>
-            <a:srgbClr val="0055AA"/>
-          </a:solidFill>
-          <a:ln>
-            <a:noFill/>
-          </a:ln>
-        </p:spPr>
-        <p:style>
-          <a:lnRef idx="1">
-            <a:schemeClr val="accent1"/>
-          </a:lnRef>
-          <a:fillRef idx="3">
-            <a:schemeClr val="accent1"/>
-          </a:fillRef>
-          <a:effectRef idx="2">
-            <a:schemeClr val="accent1"/>
-          </a:effectRef>
-          <a:fontRef idx="minor">
-            <a:schemeClr val="lt1"/>
-          </a:fontRef>
-        </p:style>
-        <p:txBody>
-          <a:bodyPr rtlCol="0" anchor="ctr"/>
-          <a:lstStyle/>
-          <a:p>
-            <a:pPr algn="ctr"/>
-          </a:p>
-        </p:txBody>
-      </p:sp>
-      <p:sp>
-        <p:nvSpPr>
-          <p:cNvPr id="6" name="TextBox 5"/>
-          <p:cNvSpPr txBox="1"/>
-          <p:nvPr/>
-        </p:nvSpPr>
-        <p:spPr>
-          <a:xfrm>
-            <a:off x="360000" y="1900000"/>
-            <a:ext cx="900000" cy="900000"/>
-          </a:xfrm>
-          <a:prstGeom prst="rect">
-            <a:avLst/>
-          </a:prstGeom>
-          <a:noFill/>
-        </p:spPr>
-        <p:txBody>
-          <a:bodyPr wrap="square" anchor="ctr">
-            <a:spAutoFit/>
-          </a:bodyPr>
-          <a:lstStyle/>
-          <a:p>
-            <a:pPr algn="ctr"/>
-            <a:r>
-              <a:rPr sz="2200" b="1">
-                <a:solidFill>
-                  <a:srgbClr val="FFFFFF"/>
-                </a:solidFill>
-                <a:latin typeface="Open Sans"/>
-                <a:ea typeface="Open Sans"/>
-                <a:cs typeface="Open Sans"/>
-              </a:rPr>
-              <a:t>1</a:t>
-            </a:r>
-          </a:p>
-        </p:txBody>
-      </p:sp>
-      <p:sp>
-        <p:nvSpPr>
-          <p:cNvPr id="7" name="TextBox 6"/>
-          <p:cNvSpPr txBox="1"/>
-          <p:nvPr/>
-        </p:nvSpPr>
-        <p:spPr>
-          <a:xfrm>
-            <a:off x="1560000" y="1900000"/>
-            <a:ext cx="22464000" cy="900000"/>
-          </a:xfrm>
-          <a:prstGeom prst="rect">
-            <a:avLst/>
-          </a:prstGeom>
-          <a:noFill/>
-        </p:spPr>
-        <p:txBody>
-          <a:bodyPr wrap="square" anchor="ctr">
-            <a:spAutoFit/>
-          </a:bodyPr>
-          <a:lstStyle/>
-          <a:p>
-            <a:pPr algn="l"/>
-            <a:r>
-              <a:rPr sz="3200" b="0">
-                <a:solidFill>
-                  <a:srgbClr val="333333"/>
-                </a:solidFill>
-                <a:latin typeface="Open Sans"/>
-                <a:ea typeface="Open Sans"/>
-                <a:cs typeface="Open Sans"/>
-              </a:rPr>
-              <a:t>Выход крови из сосудистого русла</a:t>
-            </a:r>
-          </a:p>
-        </p:txBody>
-      </p:sp>
-      <p:sp>
-        <p:nvSpPr>
-          <p:cNvPr id="8" name="Rounded Rectangle 7"/>
-          <p:cNvSpPr/>
-          <p:nvPr/>
-        </p:nvSpPr>
-        <p:spPr>
-          <a:xfrm>
-            <a:off x="360000" y="3500000"/>
-            <a:ext cx="900000" cy="900000"/>
-          </a:xfrm>
-          <a:prstGeom prst="roundRect">
-            <a:avLst/>
-          </a:prstGeom>
-          <a:solidFill>
-            <a:srgbClr val="0055AA"/>
-          </a:solidFill>
-          <a:ln>
-            <a:noFill/>
-          </a:ln>
-        </p:spPr>
-        <p:style>
-          <a:lnRef idx="1">
-            <a:schemeClr val="accent1"/>
-          </a:lnRef>
-          <a:fillRef idx="3">
-            <a:schemeClr val="accent1"/>
-          </a:fillRef>
-          <a:effectRef idx="2">
-            <a:schemeClr val="accent1"/>
-          </a:effectRef>
-          <a:fontRef idx="minor">
-            <a:schemeClr val="lt1"/>
-          </a:fontRef>
-        </p:style>
-        <p:txBody>
-          <a:bodyPr rtlCol="0" anchor="ctr"/>
-          <a:lstStyle/>
-          <a:p>
-            <a:pPr algn="ctr"/>
-          </a:p>
-        </p:txBody>
-      </p:sp>
-      <p:sp>
-        <p:nvSpPr>
-          <p:cNvPr id="9" name="TextBox 8"/>
-          <p:cNvSpPr txBox="1"/>
-          <p:nvPr/>
-        </p:nvSpPr>
-        <p:spPr>
-          <a:xfrm>
-            <a:off x="360000" y="3500000"/>
-            <a:ext cx="900000" cy="900000"/>
-          </a:xfrm>
-          <a:prstGeom prst="rect">
-            <a:avLst/>
-          </a:prstGeom>
-          <a:noFill/>
-        </p:spPr>
-        <p:txBody>
-          <a:bodyPr wrap="square" anchor="ctr">
-            <a:spAutoFit/>
-          </a:bodyPr>
-          <a:lstStyle/>
-          <a:p>
-            <a:pPr algn="ctr"/>
-            <a:r>
-              <a:rPr sz="2200" b="1">
-                <a:solidFill>
-                  <a:srgbClr val="FFFFFF"/>
-                </a:solidFill>
-                <a:latin typeface="Open Sans"/>
-                <a:ea typeface="Open Sans"/>
-                <a:cs typeface="Open Sans"/>
-              </a:rPr>
-              <a:t>2</a:t>
-            </a:r>
-          </a:p>
-        </p:txBody>
-      </p:sp>
-      <p:sp>
-        <p:nvSpPr>
-          <p:cNvPr id="10" name="TextBox 9"/>
-          <p:cNvSpPr txBox="1"/>
-          <p:nvPr/>
-        </p:nvSpPr>
-        <p:spPr>
-          <a:xfrm>
-            <a:off x="1560000" y="3500000"/>
-            <a:ext cx="22464000" cy="900000"/>
-          </a:xfrm>
-          <a:prstGeom prst="rect">
-            <a:avLst/>
-          </a:prstGeom>
-          <a:noFill/>
-        </p:spPr>
-        <p:txBody>
-          <a:bodyPr wrap="square" anchor="ctr">
-            <a:spAutoFit/>
-          </a:bodyPr>
-          <a:lstStyle/>
-          <a:p>
-            <a:pPr algn="l"/>
-            <a:r>
-              <a:rPr sz="3200" b="0">
-                <a:solidFill>
-                  <a:srgbClr val="333333"/>
-                </a:solidFill>
-                <a:latin typeface="Open Sans"/>
-                <a:ea typeface="Open Sans"/>
-                <a:cs typeface="Open Sans"/>
-              </a:rPr>
-              <a:t>Приводит к острой кровопотере</a:t>
-            </a:r>
-          </a:p>
-        </p:txBody>
-      </p:sp>
-      <p:sp>
-        <p:nvSpPr>
-          <p:cNvPr id="11" name="Rounded Rectangle 10"/>
-          <p:cNvSpPr/>
-          <p:nvPr/>
-        </p:nvSpPr>
-        <p:spPr>
-          <a:xfrm>
-            <a:off x="360000" y="5100000"/>
-            <a:ext cx="900000" cy="900000"/>
-          </a:xfrm>
-          <a:prstGeom prst="roundRect">
-            <a:avLst/>
-          </a:prstGeom>
-          <a:solidFill>
-            <a:srgbClr val="0055AA"/>
-          </a:solidFill>
-          <a:ln>
-            <a:noFill/>
-          </a:ln>
-        </p:spPr>
-        <p:style>
-          <a:lnRef idx="1">
-            <a:schemeClr val="accent1"/>
-          </a:lnRef>
-          <a:fillRef idx="3">
-            <a:schemeClr val="accent1"/>
-          </a:fillRef>
-          <a:effectRef idx="2">
-            <a:schemeClr val="accent1"/>
-          </a:effectRef>
-          <a:fontRef idx="minor">
-            <a:schemeClr val="lt1"/>
-          </a:fontRef>
-        </p:style>
-        <p:txBody>
-          <a:bodyPr rtlCol="0" anchor="ctr"/>
-          <a:lstStyle/>
-          <a:p>
-            <a:pPr algn="ctr"/>
-          </a:p>
-        </p:txBody>
-      </p:sp>
-      <p:sp>
-        <p:nvSpPr>
-          <p:cNvPr id="12" name="TextBox 11"/>
-          <p:cNvSpPr txBox="1"/>
-          <p:nvPr/>
-        </p:nvSpPr>
-        <p:spPr>
-          <a:xfrm>
-            <a:off x="360000" y="5100000"/>
-            <a:ext cx="900000" cy="900000"/>
-          </a:xfrm>
-          <a:prstGeom prst="rect">
-            <a:avLst/>
-          </a:prstGeom>
-          <a:noFill/>
-        </p:spPr>
-        <p:txBody>
-          <a:bodyPr wrap="square" anchor="ctr">
-            <a:spAutoFit/>
-          </a:bodyPr>
-          <a:lstStyle/>
-          <a:p>
-            <a:pPr algn="ctr"/>
-            <a:r>
-              <a:rPr sz="2200" b="1">
-                <a:solidFill>
-                  <a:srgbClr val="FFFFFF"/>
-                </a:solidFill>
-                <a:latin typeface="Open Sans"/>
-                <a:ea typeface="Open Sans"/>
-                <a:cs typeface="Open Sans"/>
-              </a:rPr>
-              <a:t>3</a:t>
-            </a:r>
-          </a:p>
-        </p:txBody>
-      </p:sp>
-      <p:sp>
-        <p:nvSpPr>
-          <p:cNvPr id="13" name="TextBox 12"/>
-          <p:cNvSpPr txBox="1"/>
-          <p:nvPr/>
-        </p:nvSpPr>
-        <p:spPr>
-          <a:xfrm>
-            <a:off x="1560000" y="5100000"/>
-            <a:ext cx="22464000" cy="900000"/>
-          </a:xfrm>
-          <a:prstGeom prst="rect">
-            <a:avLst/>
-          </a:prstGeom>
-          <a:noFill/>
-        </p:spPr>
-        <p:txBody>
-          <a:bodyPr wrap="square" anchor="ctr">
-            <a:spAutoFit/>
-          </a:bodyPr>
-          <a:lstStyle/>
-          <a:p>
-            <a:pPr algn="l"/>
-            <a:r>
-              <a:rPr sz="3200" b="0">
-                <a:solidFill>
-                  <a:srgbClr val="333333"/>
-                </a:solidFill>
-                <a:latin typeface="Open Sans"/>
-                <a:ea typeface="Open Sans"/>
-                <a:cs typeface="Open Sans"/>
-              </a:rPr>
-              <a:t>Наружное — видно снаружи (рана)</a:t>
-            </a:r>
-          </a:p>
-        </p:txBody>
-      </p:sp>
-      <p:sp>
-        <p:nvSpPr>
-          <p:cNvPr id="14" name="Rounded Rectangle 13"/>
-          <p:cNvSpPr/>
-          <p:nvPr/>
-        </p:nvSpPr>
-        <p:spPr>
-          <a:xfrm>
-            <a:off x="360000" y="6700000"/>
-            <a:ext cx="900000" cy="900000"/>
-          </a:xfrm>
-          <a:prstGeom prst="roundRect">
-            <a:avLst/>
-          </a:prstGeom>
-          <a:solidFill>
-            <a:srgbClr val="0055AA"/>
-          </a:solidFill>
-          <a:ln>
-            <a:noFill/>
-          </a:ln>
-        </p:spPr>
-        <p:style>
-          <a:lnRef idx="1">
-            <a:schemeClr val="accent1"/>
-          </a:lnRef>
-          <a:fillRef idx="3">
-            <a:schemeClr val="accent1"/>
-          </a:fillRef>
-          <a:effectRef idx="2">
-            <a:schemeClr val="accent1"/>
-          </a:effectRef>
-          <a:fontRef idx="minor">
-            <a:schemeClr val="lt1"/>
-          </a:fontRef>
-        </p:style>
-        <p:txBody>
-          <a:bodyPr rtlCol="0" anchor="ctr"/>
-          <a:lstStyle/>
-          <a:p>
-            <a:pPr algn="ctr"/>
-          </a:p>
-        </p:txBody>
-      </p:sp>
-      <p:sp>
-        <p:nvSpPr>
-          <p:cNvPr id="15" name="TextBox 14"/>
-          <p:cNvSpPr txBox="1"/>
-          <p:nvPr/>
-        </p:nvSpPr>
-        <p:spPr>
-          <a:xfrm>
-            <a:off x="360000" y="6700000"/>
-            <a:ext cx="900000" cy="900000"/>
-          </a:xfrm>
-          <a:prstGeom prst="rect">
-            <a:avLst/>
-          </a:prstGeom>
-          <a:noFill/>
-        </p:spPr>
-        <p:txBody>
-          <a:bodyPr wrap="square" anchor="ctr">
-            <a:spAutoFit/>
-          </a:bodyPr>
-          <a:lstStyle/>
-          <a:p>
-            <a:pPr algn="ctr"/>
-            <a:r>
-              <a:rPr sz="2200" b="1">
-                <a:solidFill>
-                  <a:srgbClr val="FFFFFF"/>
-                </a:solidFill>
-                <a:latin typeface="Open Sans"/>
-                <a:ea typeface="Open Sans"/>
-                <a:cs typeface="Open Sans"/>
-              </a:rPr>
-              <a:t>4</a:t>
-            </a:r>
-          </a:p>
-        </p:txBody>
-      </p:sp>
-      <p:sp>
-        <p:nvSpPr>
-          <p:cNvPr id="16" name="TextBox 15"/>
-          <p:cNvSpPr txBox="1"/>
-          <p:nvPr/>
-        </p:nvSpPr>
-        <p:spPr>
-          <a:xfrm>
-            <a:off x="1560000" y="6700000"/>
-            <a:ext cx="22464000" cy="900000"/>
-          </a:xfrm>
-          <a:prstGeom prst="rect">
-            <a:avLst/>
-          </a:prstGeom>
-          <a:noFill/>
-        </p:spPr>
-        <p:txBody>
-          <a:bodyPr wrap="square" anchor="ctr">
-            <a:spAutoFit/>
-          </a:bodyPr>
-          <a:lstStyle/>
-          <a:p>
-            <a:pPr algn="l"/>
-            <a:r>
-              <a:rPr sz="3200" b="0">
-                <a:solidFill>
-                  <a:srgbClr val="333333"/>
-                </a:solidFill>
-                <a:latin typeface="Open Sans"/>
-                <a:ea typeface="Open Sans"/>
-                <a:cs typeface="Open Sans"/>
-              </a:rPr>
-              <a:t>Требует немедленной остановки</a:t>
-            </a:r>
-          </a:p>
-        </p:txBody>
-      </p:sp>
+        </p:spPr>
+      </p:pic>
     </p:spTree>
   </p:cSld>
   <p:clrMapOvr>
@@ -4751,12 +3969,20 @@
         <p:nvPr/>
       </p:nvGrpSpPr>
       <p:grpSpPr/>
-      <p:sp>
-        <p:nvSpPr>
-          <p:cNvPr id="2" name="Rectangle 1"/>
-          <p:cNvSpPr/>
+      <p:pic>
+        <p:nvPicPr>
+          <p:cNvPr id="2" name="Picture 1" descr="page_04.png"/>
+          <p:cNvPicPr>
+            <a:picLocks noChangeAspect="1"/>
+          </p:cNvPicPr>
           <p:nvPr/>
-        </p:nvSpPr>
+        </p:nvPicPr>
+        <p:blipFill>
+          <a:blip r:embed="rId2"/>
+          <a:stretch>
+            <a:fillRect/>
+          </a:stretch>
+        </p:blipFill>
         <p:spPr>
           <a:xfrm>
             <a:off x="0" y="0"/>
@@ -4765,583 +3991,8 @@
           <a:prstGeom prst="rect">
             <a:avLst/>
           </a:prstGeom>
-          <a:solidFill>
-            <a:srgbClr val="FFFFFF"/>
-          </a:solidFill>
-          <a:ln>
-            <a:noFill/>
-          </a:ln>
-        </p:spPr>
-        <p:style>
-          <a:lnRef idx="1">
-            <a:schemeClr val="accent1"/>
-          </a:lnRef>
-          <a:fillRef idx="3">
-            <a:schemeClr val="accent1"/>
-          </a:fillRef>
-          <a:effectRef idx="2">
-            <a:schemeClr val="accent1"/>
-          </a:effectRef>
-          <a:fontRef idx="minor">
-            <a:schemeClr val="lt1"/>
-          </a:fontRef>
-        </p:style>
-        <p:txBody>
-          <a:bodyPr rtlCol="0" anchor="ctr"/>
-          <a:lstStyle/>
-          <a:p>
-            <a:pPr algn="ctr"/>
-          </a:p>
-        </p:txBody>
-      </p:sp>
-      <p:sp>
-        <p:nvSpPr>
-          <p:cNvPr id="3" name="TextBox 2"/>
-          <p:cNvSpPr txBox="1"/>
-          <p:nvPr/>
-        </p:nvSpPr>
-        <p:spPr>
-          <a:xfrm>
-            <a:off x="360000" y="350000"/>
-            <a:ext cx="23664000" cy="1100000"/>
-          </a:xfrm>
-          <a:prstGeom prst="rect">
-            <a:avLst/>
-          </a:prstGeom>
-          <a:noFill/>
-        </p:spPr>
-        <p:txBody>
-          <a:bodyPr wrap="square" anchor="t">
-            <a:spAutoFit/>
-          </a:bodyPr>
-          <a:lstStyle/>
-          <a:p>
-            <a:pPr algn="l"/>
-            <a:r>
-              <a:rPr sz="4600" b="1">
-                <a:solidFill>
-                  <a:srgbClr val="333333"/>
-                </a:solidFill>
-                <a:latin typeface="Open Sans"/>
-                <a:ea typeface="Open Sans"/>
-                <a:cs typeface="Open Sans"/>
-              </a:rPr>
-              <a:t>Признаки острой кровопотери</a:t>
-            </a:r>
-          </a:p>
-        </p:txBody>
-      </p:sp>
-      <p:sp>
-        <p:nvSpPr>
-          <p:cNvPr id="4" name="Rectangle 3"/>
-          <p:cNvSpPr/>
-          <p:nvPr/>
-        </p:nvSpPr>
-        <p:spPr>
-          <a:xfrm>
-            <a:off x="360000" y="1450000"/>
-            <a:ext cx="23664000" cy="20000"/>
-          </a:xfrm>
-          <a:prstGeom prst="rect">
-            <a:avLst/>
-          </a:prstGeom>
-          <a:solidFill>
-            <a:srgbClr val="E1E1E1"/>
-          </a:solidFill>
-          <a:ln>
-            <a:noFill/>
-          </a:ln>
-        </p:spPr>
-        <p:style>
-          <a:lnRef idx="1">
-            <a:schemeClr val="accent1"/>
-          </a:lnRef>
-          <a:fillRef idx="3">
-            <a:schemeClr val="accent1"/>
-          </a:fillRef>
-          <a:effectRef idx="2">
-            <a:schemeClr val="accent1"/>
-          </a:effectRef>
-          <a:fontRef idx="minor">
-            <a:schemeClr val="lt1"/>
-          </a:fontRef>
-        </p:style>
-        <p:txBody>
-          <a:bodyPr rtlCol="0" anchor="ctr"/>
-          <a:lstStyle/>
-          <a:p>
-            <a:pPr algn="ctr"/>
-          </a:p>
-        </p:txBody>
-      </p:sp>
-      <p:sp>
-        <p:nvSpPr>
-          <p:cNvPr id="5" name="Rounded Rectangle 4"/>
-          <p:cNvSpPr/>
-          <p:nvPr/>
-        </p:nvSpPr>
-        <p:spPr>
-          <a:xfrm>
-            <a:off x="360000" y="1900000"/>
-            <a:ext cx="900000" cy="900000"/>
-          </a:xfrm>
-          <a:prstGeom prst="roundRect">
-            <a:avLst/>
-          </a:prstGeom>
-          <a:solidFill>
-            <a:srgbClr val="0055AA"/>
-          </a:solidFill>
-          <a:ln>
-            <a:noFill/>
-          </a:ln>
-        </p:spPr>
-        <p:style>
-          <a:lnRef idx="1">
-            <a:schemeClr val="accent1"/>
-          </a:lnRef>
-          <a:fillRef idx="3">
-            <a:schemeClr val="accent1"/>
-          </a:fillRef>
-          <a:effectRef idx="2">
-            <a:schemeClr val="accent1"/>
-          </a:effectRef>
-          <a:fontRef idx="minor">
-            <a:schemeClr val="lt1"/>
-          </a:fontRef>
-        </p:style>
-        <p:txBody>
-          <a:bodyPr rtlCol="0" anchor="ctr"/>
-          <a:lstStyle/>
-          <a:p>
-            <a:pPr algn="ctr"/>
-          </a:p>
-        </p:txBody>
-      </p:sp>
-      <p:sp>
-        <p:nvSpPr>
-          <p:cNvPr id="6" name="TextBox 5"/>
-          <p:cNvSpPr txBox="1"/>
-          <p:nvPr/>
-        </p:nvSpPr>
-        <p:spPr>
-          <a:xfrm>
-            <a:off x="360000" y="1900000"/>
-            <a:ext cx="900000" cy="900000"/>
-          </a:xfrm>
-          <a:prstGeom prst="rect">
-            <a:avLst/>
-          </a:prstGeom>
-          <a:noFill/>
-        </p:spPr>
-        <p:txBody>
-          <a:bodyPr wrap="square" anchor="ctr">
-            <a:spAutoFit/>
-          </a:bodyPr>
-          <a:lstStyle/>
-          <a:p>
-            <a:pPr algn="ctr"/>
-            <a:r>
-              <a:rPr sz="2200" b="1">
-                <a:solidFill>
-                  <a:srgbClr val="FFFFFF"/>
-                </a:solidFill>
-                <a:latin typeface="Open Sans"/>
-                <a:ea typeface="Open Sans"/>
-                <a:cs typeface="Open Sans"/>
-              </a:rPr>
-              <a:t>!</a:t>
-            </a:r>
-          </a:p>
-        </p:txBody>
-      </p:sp>
-      <p:sp>
-        <p:nvSpPr>
-          <p:cNvPr id="7" name="TextBox 6"/>
-          <p:cNvSpPr txBox="1"/>
-          <p:nvPr/>
-        </p:nvSpPr>
-        <p:spPr>
-          <a:xfrm>
-            <a:off x="1560000" y="1900000"/>
-            <a:ext cx="22464000" cy="900000"/>
-          </a:xfrm>
-          <a:prstGeom prst="rect">
-            <a:avLst/>
-          </a:prstGeom>
-          <a:noFill/>
-        </p:spPr>
-        <p:txBody>
-          <a:bodyPr wrap="square" anchor="ctr">
-            <a:spAutoFit/>
-          </a:bodyPr>
-          <a:lstStyle/>
-          <a:p>
-            <a:pPr algn="l"/>
-            <a:r>
-              <a:rPr sz="3200" b="0">
-                <a:solidFill>
-                  <a:srgbClr val="333333"/>
-                </a:solidFill>
-                <a:latin typeface="Open Sans"/>
-                <a:ea typeface="Open Sans"/>
-                <a:cs typeface="Open Sans"/>
-              </a:rPr>
-              <a:t>Слабость, жажда, головокружение</a:t>
-            </a:r>
-          </a:p>
-        </p:txBody>
-      </p:sp>
-      <p:sp>
-        <p:nvSpPr>
-          <p:cNvPr id="8" name="Rounded Rectangle 7"/>
-          <p:cNvSpPr/>
-          <p:nvPr/>
-        </p:nvSpPr>
-        <p:spPr>
-          <a:xfrm>
-            <a:off x="360000" y="3500000"/>
-            <a:ext cx="900000" cy="900000"/>
-          </a:xfrm>
-          <a:prstGeom prst="roundRect">
-            <a:avLst/>
-          </a:prstGeom>
-          <a:solidFill>
-            <a:srgbClr val="0055AA"/>
-          </a:solidFill>
-          <a:ln>
-            <a:noFill/>
-          </a:ln>
-        </p:spPr>
-        <p:style>
-          <a:lnRef idx="1">
-            <a:schemeClr val="accent1"/>
-          </a:lnRef>
-          <a:fillRef idx="3">
-            <a:schemeClr val="accent1"/>
-          </a:fillRef>
-          <a:effectRef idx="2">
-            <a:schemeClr val="accent1"/>
-          </a:effectRef>
-          <a:fontRef idx="minor">
-            <a:schemeClr val="lt1"/>
-          </a:fontRef>
-        </p:style>
-        <p:txBody>
-          <a:bodyPr rtlCol="0" anchor="ctr"/>
-          <a:lstStyle/>
-          <a:p>
-            <a:pPr algn="ctr"/>
-          </a:p>
-        </p:txBody>
-      </p:sp>
-      <p:sp>
-        <p:nvSpPr>
-          <p:cNvPr id="9" name="TextBox 8"/>
-          <p:cNvSpPr txBox="1"/>
-          <p:nvPr/>
-        </p:nvSpPr>
-        <p:spPr>
-          <a:xfrm>
-            <a:off x="360000" y="3500000"/>
-            <a:ext cx="900000" cy="900000"/>
-          </a:xfrm>
-          <a:prstGeom prst="rect">
-            <a:avLst/>
-          </a:prstGeom>
-          <a:noFill/>
-        </p:spPr>
-        <p:txBody>
-          <a:bodyPr wrap="square" anchor="ctr">
-            <a:spAutoFit/>
-          </a:bodyPr>
-          <a:lstStyle/>
-          <a:p>
-            <a:pPr algn="ctr"/>
-            <a:r>
-              <a:rPr sz="2200" b="1">
-                <a:solidFill>
-                  <a:srgbClr val="FFFFFF"/>
-                </a:solidFill>
-                <a:latin typeface="Open Sans"/>
-                <a:ea typeface="Open Sans"/>
-                <a:cs typeface="Open Sans"/>
-              </a:rPr>
-              <a:t>•</a:t>
-            </a:r>
-          </a:p>
-        </p:txBody>
-      </p:sp>
-      <p:sp>
-        <p:nvSpPr>
-          <p:cNvPr id="10" name="TextBox 9"/>
-          <p:cNvSpPr txBox="1"/>
-          <p:nvPr/>
-        </p:nvSpPr>
-        <p:spPr>
-          <a:xfrm>
-            <a:off x="1560000" y="3500000"/>
-            <a:ext cx="22464000" cy="900000"/>
-          </a:xfrm>
-          <a:prstGeom prst="rect">
-            <a:avLst/>
-          </a:prstGeom>
-          <a:noFill/>
-        </p:spPr>
-        <p:txBody>
-          <a:bodyPr wrap="square" anchor="ctr">
-            <a:spAutoFit/>
-          </a:bodyPr>
-          <a:lstStyle/>
-          <a:p>
-            <a:pPr algn="l"/>
-            <a:r>
-              <a:rPr sz="3200" b="0">
-                <a:solidFill>
-                  <a:srgbClr val="333333"/>
-                </a:solidFill>
-                <a:latin typeface="Open Sans"/>
-                <a:ea typeface="Open Sans"/>
-                <a:cs typeface="Open Sans"/>
-              </a:rPr>
-              <a:t>«Мушки» перед глазами, обморок</a:t>
-            </a:r>
-          </a:p>
-        </p:txBody>
-      </p:sp>
-      <p:sp>
-        <p:nvSpPr>
-          <p:cNvPr id="11" name="Rounded Rectangle 10"/>
-          <p:cNvSpPr/>
-          <p:nvPr/>
-        </p:nvSpPr>
-        <p:spPr>
-          <a:xfrm>
-            <a:off x="360000" y="5100000"/>
-            <a:ext cx="900000" cy="900000"/>
-          </a:xfrm>
-          <a:prstGeom prst="roundRect">
-            <a:avLst/>
-          </a:prstGeom>
-          <a:solidFill>
-            <a:srgbClr val="0055AA"/>
-          </a:solidFill>
-          <a:ln>
-            <a:noFill/>
-          </a:ln>
-        </p:spPr>
-        <p:style>
-          <a:lnRef idx="1">
-            <a:schemeClr val="accent1"/>
-          </a:lnRef>
-          <a:fillRef idx="3">
-            <a:schemeClr val="accent1"/>
-          </a:fillRef>
-          <a:effectRef idx="2">
-            <a:schemeClr val="accent1"/>
-          </a:effectRef>
-          <a:fontRef idx="minor">
-            <a:schemeClr val="lt1"/>
-          </a:fontRef>
-        </p:style>
-        <p:txBody>
-          <a:bodyPr rtlCol="0" anchor="ctr"/>
-          <a:lstStyle/>
-          <a:p>
-            <a:pPr algn="ctr"/>
-          </a:p>
-        </p:txBody>
-      </p:sp>
-      <p:sp>
-        <p:nvSpPr>
-          <p:cNvPr id="12" name="TextBox 11"/>
-          <p:cNvSpPr txBox="1"/>
-          <p:nvPr/>
-        </p:nvSpPr>
-        <p:spPr>
-          <a:xfrm>
-            <a:off x="360000" y="5100000"/>
-            <a:ext cx="900000" cy="900000"/>
-          </a:xfrm>
-          <a:prstGeom prst="rect">
-            <a:avLst/>
-          </a:prstGeom>
-          <a:noFill/>
-        </p:spPr>
-        <p:txBody>
-          <a:bodyPr wrap="square" anchor="ctr">
-            <a:spAutoFit/>
-          </a:bodyPr>
-          <a:lstStyle/>
-          <a:p>
-            <a:pPr algn="ctr"/>
-            <a:r>
-              <a:rPr sz="2200" b="1">
-                <a:solidFill>
-                  <a:srgbClr val="FFFFFF"/>
-                </a:solidFill>
-                <a:latin typeface="Open Sans"/>
-                <a:ea typeface="Open Sans"/>
-                <a:cs typeface="Open Sans"/>
-              </a:rPr>
-              <a:t>•</a:t>
-            </a:r>
-          </a:p>
-        </p:txBody>
-      </p:sp>
-      <p:sp>
-        <p:nvSpPr>
-          <p:cNvPr id="13" name="TextBox 12"/>
-          <p:cNvSpPr txBox="1"/>
-          <p:nvPr/>
-        </p:nvSpPr>
-        <p:spPr>
-          <a:xfrm>
-            <a:off x="1560000" y="5100000"/>
-            <a:ext cx="22464000" cy="900000"/>
-          </a:xfrm>
-          <a:prstGeom prst="rect">
-            <a:avLst/>
-          </a:prstGeom>
-          <a:noFill/>
-        </p:spPr>
-        <p:txBody>
-          <a:bodyPr wrap="square" anchor="ctr">
-            <a:spAutoFit/>
-          </a:bodyPr>
-          <a:lstStyle/>
-          <a:p>
-            <a:pPr algn="l"/>
-            <a:r>
-              <a:rPr sz="3200" b="0">
-                <a:solidFill>
-                  <a:srgbClr val="333333"/>
-                </a:solidFill>
-                <a:latin typeface="Open Sans"/>
-                <a:ea typeface="Open Sans"/>
-                <a:cs typeface="Open Sans"/>
-              </a:rPr>
-              <a:t>Бледная, влажная, холодная кожа</a:t>
-            </a:r>
-          </a:p>
-        </p:txBody>
-      </p:sp>
-      <p:sp>
-        <p:nvSpPr>
-          <p:cNvPr id="14" name="Rounded Rectangle 13"/>
-          <p:cNvSpPr/>
-          <p:nvPr/>
-        </p:nvSpPr>
-        <p:spPr>
-          <a:xfrm>
-            <a:off x="360000" y="6700000"/>
-            <a:ext cx="900000" cy="900000"/>
-          </a:xfrm>
-          <a:prstGeom prst="roundRect">
-            <a:avLst/>
-          </a:prstGeom>
-          <a:solidFill>
-            <a:srgbClr val="0055AA"/>
-          </a:solidFill>
-          <a:ln>
-            <a:noFill/>
-          </a:ln>
-        </p:spPr>
-        <p:style>
-          <a:lnRef idx="1">
-            <a:schemeClr val="accent1"/>
-          </a:lnRef>
-          <a:fillRef idx="3">
-            <a:schemeClr val="accent1"/>
-          </a:fillRef>
-          <a:effectRef idx="2">
-            <a:schemeClr val="accent1"/>
-          </a:effectRef>
-          <a:fontRef idx="minor">
-            <a:schemeClr val="lt1"/>
-          </a:fontRef>
-        </p:style>
-        <p:txBody>
-          <a:bodyPr rtlCol="0" anchor="ctr"/>
-          <a:lstStyle/>
-          <a:p>
-            <a:pPr algn="ctr"/>
-          </a:p>
-        </p:txBody>
-      </p:sp>
-      <p:sp>
-        <p:nvSpPr>
-          <p:cNvPr id="15" name="TextBox 14"/>
-          <p:cNvSpPr txBox="1"/>
-          <p:nvPr/>
-        </p:nvSpPr>
-        <p:spPr>
-          <a:xfrm>
-            <a:off x="360000" y="6700000"/>
-            <a:ext cx="900000" cy="900000"/>
-          </a:xfrm>
-          <a:prstGeom prst="rect">
-            <a:avLst/>
-          </a:prstGeom>
-          <a:noFill/>
-        </p:spPr>
-        <p:txBody>
-          <a:bodyPr wrap="square" anchor="ctr">
-            <a:spAutoFit/>
-          </a:bodyPr>
-          <a:lstStyle/>
-          <a:p>
-            <a:pPr algn="ctr"/>
-            <a:r>
-              <a:rPr sz="2200" b="1">
-                <a:solidFill>
-                  <a:srgbClr val="FFFFFF"/>
-                </a:solidFill>
-                <a:latin typeface="Open Sans"/>
-                <a:ea typeface="Open Sans"/>
-                <a:cs typeface="Open Sans"/>
-              </a:rPr>
-              <a:t>•</a:t>
-            </a:r>
-          </a:p>
-        </p:txBody>
-      </p:sp>
-      <p:sp>
-        <p:nvSpPr>
-          <p:cNvPr id="16" name="TextBox 15"/>
-          <p:cNvSpPr txBox="1"/>
-          <p:nvPr/>
-        </p:nvSpPr>
-        <p:spPr>
-          <a:xfrm>
-            <a:off x="1560000" y="6700000"/>
-            <a:ext cx="22464000" cy="900000"/>
-          </a:xfrm>
-          <a:prstGeom prst="rect">
-            <a:avLst/>
-          </a:prstGeom>
-          <a:noFill/>
-        </p:spPr>
-        <p:txBody>
-          <a:bodyPr wrap="square" anchor="ctr">
-            <a:spAutoFit/>
-          </a:bodyPr>
-          <a:lstStyle/>
-          <a:p>
-            <a:pPr algn="l"/>
-            <a:r>
-              <a:rPr sz="3200" b="0">
-                <a:solidFill>
-                  <a:srgbClr val="333333"/>
-                </a:solidFill>
-                <a:latin typeface="Open Sans"/>
-                <a:ea typeface="Open Sans"/>
-                <a:cs typeface="Open Sans"/>
-              </a:rPr>
-              <a:t>Учащённое сердцебиение и дыхание</a:t>
-            </a:r>
-          </a:p>
-        </p:txBody>
-      </p:sp>
+        </p:spPr>
+      </p:pic>
     </p:spTree>
   </p:cSld>
   <p:clrMapOvr>
@@ -5411,8 +4062,8 @@
         </p:nvSpPr>
         <p:spPr>
           <a:xfrm>
-            <a:off x="360000" y="350000"/>
-            <a:ext cx="23664000" cy="1100000"/>
+            <a:off x="800000" y="400000"/>
+            <a:ext cx="22800000" cy="1000000"/>
           </a:xfrm>
           <a:prstGeom prst="rect">
             <a:avLst/>
@@ -5435,7 +4086,7 @@
                 <a:ea typeface="Open Sans"/>
                 <a:cs typeface="Open Sans"/>
               </a:rPr>
-              <a:t>Обзорный осмотр</a:t>
+              <a:t>Что такое обзорный осмотр и зачем он нужен</a:t>
             </a:r>
           </a:p>
         </p:txBody>
@@ -5448,8 +4099,8 @@
         </p:nvSpPr>
         <p:spPr>
           <a:xfrm>
-            <a:off x="360000" y="1450000"/>
-            <a:ext cx="23664000" cy="20000"/>
+            <a:off x="800000" y="1500000"/>
+            <a:ext cx="22800000" cy="20000"/>
           </a:xfrm>
           <a:prstGeom prst="rect">
             <a:avLst/>
@@ -5491,8 +4142,8 @@
         </p:nvSpPr>
         <p:spPr>
           <a:xfrm>
-            <a:off x="360000" y="1900000"/>
-            <a:ext cx="13015200" cy="6800000"/>
+            <a:off x="800000" y="1900000"/>
+            <a:ext cx="22800000" cy="6500000"/>
           </a:xfrm>
           <a:prstGeom prst="rect">
             <a:avLst/>
@@ -5507,11 +4158,11 @@
           <a:p>
             <a:pPr algn="l">
               <a:spcAft>
-                <a:spcPts val="1400"/>
+                <a:spcPts val="1200"/>
               </a:spcAft>
             </a:pPr>
             <a:r>
-              <a:rPr sz="2800" b="0">
+              <a:rPr sz="3200" b="0">
                 <a:solidFill>
                   <a:srgbClr val="333333"/>
                 </a:solidFill>
@@ -5519,17 +4170,17 @@
                 <a:ea typeface="Open Sans"/>
                 <a:cs typeface="Open Sans"/>
               </a:rPr>
-              <a:t>•  Быстрая оценка с головы до ног</a:t>
+              <a:t>•  Быстрая визуальная оценка пострадавшего с головы до ног</a:t>
             </a:r>
           </a:p>
           <a:p>
             <a:pPr algn="l">
               <a:spcAft>
-                <a:spcPts val="1400"/>
+                <a:spcPts val="1200"/>
               </a:spcAft>
             </a:pPr>
             <a:r>
-              <a:rPr sz="2800" b="0">
+              <a:rPr sz="3200" b="0">
                 <a:solidFill>
                   <a:srgbClr val="333333"/>
                 </a:solidFill>
@@ -5537,17 +4188,17 @@
                 <a:ea typeface="Open Sans"/>
                 <a:cs typeface="Open Sans"/>
               </a:rPr>
-              <a:t>•  Цель — найти наружное кровотечение</a:t>
+              <a:t>•  Цель — выявить продолжающееся наружное кровотечение</a:t>
             </a:r>
           </a:p>
           <a:p>
             <a:pPr algn="l">
               <a:spcAft>
-                <a:spcPts val="1400"/>
+                <a:spcPts val="1200"/>
               </a:spcAft>
             </a:pPr>
             <a:r>
-              <a:rPr sz="2800" b="0">
+              <a:rPr sz="3200" b="0">
                 <a:solidFill>
                   <a:srgbClr val="333333"/>
                 </a:solidFill>
@@ -5555,17 +4206,17 @@
                 <a:ea typeface="Open Sans"/>
                 <a:cs typeface="Open Sans"/>
               </a:rPr>
-              <a:t>•  Длительность: около 1–2 секунд</a:t>
+              <a:t>•  Выполняется сразу после оценки обстановки и безопасности</a:t>
             </a:r>
           </a:p>
           <a:p>
             <a:pPr algn="l">
               <a:spcAft>
-                <a:spcPts val="1400"/>
+                <a:spcPts val="1200"/>
               </a:spcAft>
             </a:pPr>
             <a:r>
-              <a:rPr sz="2800" b="0">
+              <a:rPr sz="3200" b="0">
                 <a:solidFill>
                   <a:srgbClr val="333333"/>
                 </a:solidFill>
@@ -5573,17 +4224,17 @@
                 <a:ea typeface="Open Sans"/>
                 <a:cs typeface="Open Sans"/>
               </a:rPr>
-              <a:t>•  Сразу после оценки безопасности</a:t>
+              <a:t>•  При кровотечении — немедленно начать временную остановку</a:t>
             </a:r>
           </a:p>
           <a:p>
             <a:pPr algn="l">
               <a:spcAft>
-                <a:spcPts val="1400"/>
+                <a:spcPts val="1200"/>
               </a:spcAft>
             </a:pPr>
             <a:r>
-              <a:rPr sz="2800" b="0">
+              <a:rPr sz="3200" b="0">
                 <a:solidFill>
                   <a:srgbClr val="333333"/>
                 </a:solidFill>
@@ -5591,90 +4242,21 @@
                 <a:ea typeface="Open Sans"/>
                 <a:cs typeface="Open Sans"/>
               </a:rPr>
-              <a:t>•  При крови — сразу начать остановку</a:t>
-            </a:r>
-          </a:p>
-        </p:txBody>
-      </p:sp>
-      <p:sp>
-        <p:nvSpPr>
-          <p:cNvPr id="6" name="Rectangle 5"/>
+              <a:t>•  По Приказу Минздрава № 220н — до подробного осмотра</a:t>
+            </a:r>
+          </a:p>
+        </p:txBody>
+      </p:sp>
+      <p:sp>
+        <p:nvSpPr>
+          <p:cNvPr id="6" name="Rounded Rectangle 5"/>
           <p:cNvSpPr/>
           <p:nvPr/>
         </p:nvSpPr>
         <p:spPr>
           <a:xfrm>
-            <a:off x="13775200" y="1900000"/>
-            <a:ext cx="9465600" cy="6800000"/>
-          </a:xfrm>
-          <a:prstGeom prst="rect">
-            <a:avLst/>
-          </a:prstGeom>
-          <a:solidFill>
-            <a:srgbClr val="FFFFFF"/>
-          </a:solidFill>
-          <a:ln w="15875">
-            <a:solidFill>
-              <a:srgbClr val="E1E1E1"/>
-            </a:solidFill>
-          </a:ln>
-        </p:spPr>
-        <p:style>
-          <a:lnRef idx="1">
-            <a:schemeClr val="accent1"/>
-          </a:lnRef>
-          <a:fillRef idx="3">
-            <a:schemeClr val="accent1"/>
-          </a:fillRef>
-          <a:effectRef idx="2">
-            <a:schemeClr val="accent1"/>
-          </a:effectRef>
-          <a:fontRef idx="minor">
-            <a:schemeClr val="lt1"/>
-          </a:fontRef>
-        </p:style>
-        <p:txBody>
-          <a:bodyPr rtlCol="0" anchor="ctr"/>
-          <a:lstStyle/>
-          <a:p>
-            <a:pPr algn="ctr"/>
-          </a:p>
-        </p:txBody>
-      </p:sp>
-      <p:pic>
-        <p:nvPicPr>
-          <p:cNvPr id="7" name="Picture 6" descr="overview_exam.png"/>
-          <p:cNvPicPr>
-            <a:picLocks noChangeAspect="1"/>
-          </p:cNvPicPr>
-          <p:nvPr/>
-        </p:nvPicPr>
-        <p:blipFill>
-          <a:blip r:embed="rId2"/>
-          <a:stretch>
-            <a:fillRect/>
-          </a:stretch>
-        </p:blipFill>
-        <p:spPr>
-          <a:xfrm>
-            <a:off x="14328000" y="2000000"/>
-            <a:ext cx="8360000" cy="6600000"/>
-          </a:xfrm>
-          <a:prstGeom prst="rect">
-            <a:avLst/>
-          </a:prstGeom>
-        </p:spPr>
-      </p:pic>
-      <p:sp>
-        <p:nvSpPr>
-          <p:cNvPr id="8" name="Rounded Rectangle 7"/>
-          <p:cNvSpPr/>
-          <p:nvPr/>
-        </p:nvSpPr>
-        <p:spPr>
-          <a:xfrm>
-            <a:off x="360000" y="11200000"/>
-            <a:ext cx="23664000" cy="1500000"/>
+            <a:off x="800000" y="11000000"/>
+            <a:ext cx="22800000" cy="1600000"/>
           </a:xfrm>
           <a:prstGeom prst="roundRect">
             <a:avLst/>
@@ -5710,14 +4292,14 @@
       </p:sp>
       <p:sp>
         <p:nvSpPr>
-          <p:cNvPr id="9" name="Rectangle 8"/>
+          <p:cNvPr id="7" name="Rectangle 6"/>
           <p:cNvSpPr/>
           <p:nvPr/>
         </p:nvSpPr>
         <p:spPr>
           <a:xfrm>
-            <a:off x="360000" y="11200000"/>
-            <a:ext cx="120000" cy="1500000"/>
+            <a:off x="800000" y="11000000"/>
+            <a:ext cx="120000" cy="1600000"/>
           </a:xfrm>
           <a:prstGeom prst="rect">
             <a:avLst/>
@@ -5753,14 +4335,14 @@
       </p:sp>
       <p:sp>
         <p:nvSpPr>
-          <p:cNvPr id="10" name="TextBox 9"/>
+          <p:cNvPr id="8" name="TextBox 7"/>
           <p:cNvSpPr txBox="1"/>
           <p:nvPr/>
         </p:nvSpPr>
         <p:spPr>
           <a:xfrm>
-            <a:off x="760000" y="11400000"/>
-            <a:ext cx="23064000" cy="1100000"/>
+            <a:off x="1200000" y="11200000"/>
+            <a:ext cx="21800000" cy="1200000"/>
           </a:xfrm>
           <a:prstGeom prst="rect">
             <a:avLst/>
@@ -5775,7 +4357,7 @@
           <a:p>
             <a:pPr algn="l"/>
             <a:r>
-              <a:rPr sz="2400" b="1">
+              <a:rPr sz="2600" b="1">
                 <a:solidFill>
                   <a:srgbClr val="CC0000"/>
                 </a:solidFill>
@@ -5857,8 +4439,8 @@
         </p:nvSpPr>
         <p:spPr>
           <a:xfrm>
-            <a:off x="360000" y="350000"/>
-            <a:ext cx="23664000" cy="1100000"/>
+            <a:off x="800000" y="400000"/>
+            <a:ext cx="22800000" cy="1000000"/>
           </a:xfrm>
           <a:prstGeom prst="rect">
             <a:avLst/>
@@ -5881,7 +4463,7 @@
                 <a:ea typeface="Open Sans"/>
                 <a:cs typeface="Open Sans"/>
               </a:rPr>
-              <a:t>Порядок обзорного осмотра</a:t>
+              <a:t>Обзорный и подробный осмотр — различия</a:t>
             </a:r>
           </a:p>
         </p:txBody>
@@ -5894,8 +4476,8 @@
         </p:nvSpPr>
         <p:spPr>
           <a:xfrm>
-            <a:off x="360000" y="1450000"/>
-            <a:ext cx="23664000" cy="20000"/>
+            <a:off x="800000" y="1500000"/>
+            <a:ext cx="22800000" cy="20000"/>
           </a:xfrm>
           <a:prstGeom prst="rect">
             <a:avLst/>
@@ -5931,22 +4513,22 @@
       </p:sp>
       <p:sp>
         <p:nvSpPr>
-          <p:cNvPr id="5" name="Rounded Rectangle 4"/>
+          <p:cNvPr id="5" name="Rectangle 4"/>
           <p:cNvSpPr/>
           <p:nvPr/>
         </p:nvSpPr>
         <p:spPr>
           <a:xfrm>
-            <a:off x="1860000" y="1800000"/>
-            <a:ext cx="19000000" cy="1400000"/>
-          </a:xfrm>
-          <a:prstGeom prst="roundRect">
+            <a:off x="800000" y="1900000"/>
+            <a:ext cx="10800000" cy="9500000"/>
+          </a:xfrm>
+          <a:prstGeom prst="rect">
             <a:avLst/>
           </a:prstGeom>
           <a:solidFill>
-            <a:srgbClr val="F7F7F7"/>
+            <a:srgbClr val="FFFFFF"/>
           </a:solidFill>
-          <a:ln w="15875">
+          <a:ln w="12700">
             <a:solidFill>
               <a:srgbClr val="E1E1E1"/>
             </a:solidFill>
@@ -5976,16 +4558,61 @@
       </p:sp>
       <p:sp>
         <p:nvSpPr>
-          <p:cNvPr id="6" name="Oval 5"/>
+          <p:cNvPr id="6" name="Rectangle 5"/>
           <p:cNvSpPr/>
           <p:nvPr/>
         </p:nvSpPr>
         <p:spPr>
           <a:xfrm>
-            <a:off x="2160000" y="2100000"/>
-            <a:ext cx="800000" cy="800000"/>
-          </a:xfrm>
-          <a:prstGeom prst="ellipse">
+            <a:off x="12800000" y="1900000"/>
+            <a:ext cx="10800000" cy="9500000"/>
+          </a:xfrm>
+          <a:prstGeom prst="rect">
+            <a:avLst/>
+          </a:prstGeom>
+          <a:solidFill>
+            <a:srgbClr val="FFFFFF"/>
+          </a:solidFill>
+          <a:ln w="12700">
+            <a:solidFill>
+              <a:srgbClr val="E1E1E1"/>
+            </a:solidFill>
+          </a:ln>
+        </p:spPr>
+        <p:style>
+          <a:lnRef idx="1">
+            <a:schemeClr val="accent1"/>
+          </a:lnRef>
+          <a:fillRef idx="3">
+            <a:schemeClr val="accent1"/>
+          </a:fillRef>
+          <a:effectRef idx="2">
+            <a:schemeClr val="accent1"/>
+          </a:effectRef>
+          <a:fontRef idx="minor">
+            <a:schemeClr val="lt1"/>
+          </a:fontRef>
+        </p:style>
+        <p:txBody>
+          <a:bodyPr rtlCol="0" anchor="ctr"/>
+          <a:lstStyle/>
+          <a:p>
+            <a:pPr algn="ctr"/>
+          </a:p>
+        </p:txBody>
+      </p:sp>
+      <p:sp>
+        <p:nvSpPr>
+          <p:cNvPr id="7" name="Rectangle 6"/>
+          <p:cNvSpPr/>
+          <p:nvPr/>
+        </p:nvSpPr>
+        <p:spPr>
+          <a:xfrm>
+            <a:off x="800000" y="1900000"/>
+            <a:ext cx="10800000" cy="1000000"/>
+          </a:xfrm>
+          <a:prstGeom prst="rect">
             <a:avLst/>
           </a:prstGeom>
           <a:solidFill>
@@ -6019,14 +4646,57 @@
       </p:sp>
       <p:sp>
         <p:nvSpPr>
-          <p:cNvPr id="7" name="TextBox 6"/>
+          <p:cNvPr id="8" name="Rectangle 7"/>
+          <p:cNvSpPr/>
+          <p:nvPr/>
+        </p:nvSpPr>
+        <p:spPr>
+          <a:xfrm>
+            <a:off x="12800000" y="1900000"/>
+            <a:ext cx="10800000" cy="1000000"/>
+          </a:xfrm>
+          <a:prstGeom prst="rect">
+            <a:avLst/>
+          </a:prstGeom>
+          <a:solidFill>
+            <a:srgbClr val="DDDDDD"/>
+          </a:solidFill>
+          <a:ln>
+            <a:noFill/>
+          </a:ln>
+        </p:spPr>
+        <p:style>
+          <a:lnRef idx="1">
+            <a:schemeClr val="accent1"/>
+          </a:lnRef>
+          <a:fillRef idx="3">
+            <a:schemeClr val="accent1"/>
+          </a:fillRef>
+          <a:effectRef idx="2">
+            <a:schemeClr val="accent1"/>
+          </a:effectRef>
+          <a:fontRef idx="minor">
+            <a:schemeClr val="lt1"/>
+          </a:fontRef>
+        </p:style>
+        <p:txBody>
+          <a:bodyPr rtlCol="0" anchor="ctr"/>
+          <a:lstStyle/>
+          <a:p>
+            <a:pPr algn="ctr"/>
+          </a:p>
+        </p:txBody>
+      </p:sp>
+      <p:sp>
+        <p:nvSpPr>
+          <p:cNvPr id="9" name="TextBox 8"/>
           <p:cNvSpPr txBox="1"/>
           <p:nvPr/>
         </p:nvSpPr>
         <p:spPr>
           <a:xfrm>
-            <a:off x="2160000" y="2100000"/>
-            <a:ext cx="800000" cy="800000"/>
+            <a:off x="1000000" y="2050000"/>
+            <a:ext cx="10400000" cy="700000"/>
           </a:xfrm>
           <a:prstGeom prst="rect">
             <a:avLst/>
@@ -6034,7 +4704,7 @@
           <a:noFill/>
         </p:spPr>
         <p:txBody>
-          <a:bodyPr wrap="square" anchor="ctr">
+          <a:bodyPr wrap="square" anchor="t">
             <a:spAutoFit/>
           </a:bodyPr>
           <a:lstStyle/>
@@ -6049,21 +4719,21 @@
                 <a:ea typeface="Open Sans"/>
                 <a:cs typeface="Open Sans"/>
               </a:rPr>
-              <a:t>1</a:t>
-            </a:r>
-          </a:p>
-        </p:txBody>
-      </p:sp>
-      <p:sp>
-        <p:nvSpPr>
-          <p:cNvPr id="8" name="TextBox 7"/>
+              <a:t>Обзорный осмотр</a:t>
+            </a:r>
+          </a:p>
+        </p:txBody>
+      </p:sp>
+      <p:sp>
+        <p:nvSpPr>
+          <p:cNvPr id="10" name="TextBox 9"/>
           <p:cNvSpPr txBox="1"/>
           <p:nvPr/>
         </p:nvSpPr>
         <p:spPr>
           <a:xfrm>
-            <a:off x="3260000" y="2000000"/>
-            <a:ext cx="17000000" cy="1000000"/>
+            <a:off x="13000000" y="2050000"/>
+            <a:ext cx="10400000" cy="700000"/>
           </a:xfrm>
           <a:prstGeom prst="rect">
             <a:avLst/>
@@ -6071,14 +4741,14 @@
           <a:noFill/>
         </p:spPr>
         <p:txBody>
-          <a:bodyPr wrap="square" anchor="ctr">
+          <a:bodyPr wrap="square" anchor="t">
             <a:spAutoFit/>
           </a:bodyPr>
           <a:lstStyle/>
           <a:p>
-            <a:pPr algn="l"/>
-            <a:r>
-              <a:rPr sz="2800" b="0">
+            <a:pPr algn="ctr"/>
+            <a:r>
+              <a:rPr sz="2600" b="1">
                 <a:solidFill>
                   <a:srgbClr val="333333"/>
                 </a:solidFill>
@@ -6086,152 +4756,21 @@
                 <a:ea typeface="Open Sans"/>
                 <a:cs typeface="Open Sans"/>
               </a:rPr>
-              <a:t>Безопасность себе и пострадавшему</a:t>
-            </a:r>
-          </a:p>
-        </p:txBody>
-      </p:sp>
-      <p:sp>
-        <p:nvSpPr>
-          <p:cNvPr id="9" name="Down Arrow 8"/>
-          <p:cNvSpPr/>
-          <p:nvPr/>
-        </p:nvSpPr>
-        <p:spPr>
-          <a:xfrm>
-            <a:off x="11360000" y="3220000"/>
-            <a:ext cx="350000" cy="180000"/>
-          </a:xfrm>
-          <a:prstGeom prst="downArrow">
-            <a:avLst/>
-          </a:prstGeom>
-          <a:solidFill>
-            <a:srgbClr val="0055AA"/>
-          </a:solidFill>
-          <a:ln>
-            <a:noFill/>
-          </a:ln>
-        </p:spPr>
-        <p:style>
-          <a:lnRef idx="1">
-            <a:schemeClr val="accent1"/>
-          </a:lnRef>
-          <a:fillRef idx="3">
-            <a:schemeClr val="accent1"/>
-          </a:fillRef>
-          <a:effectRef idx="2">
-            <a:schemeClr val="accent1"/>
-          </a:effectRef>
-          <a:fontRef idx="minor">
-            <a:schemeClr val="lt1"/>
-          </a:fontRef>
-        </p:style>
-        <p:txBody>
-          <a:bodyPr rtlCol="0" anchor="ctr"/>
-          <a:lstStyle/>
-          <a:p>
-            <a:pPr algn="ctr"/>
-          </a:p>
-        </p:txBody>
-      </p:sp>
-      <p:sp>
-        <p:nvSpPr>
-          <p:cNvPr id="10" name="Rounded Rectangle 9"/>
-          <p:cNvSpPr/>
-          <p:nvPr/>
-        </p:nvSpPr>
-        <p:spPr>
-          <a:xfrm>
-            <a:off x="1860000" y="3450000"/>
-            <a:ext cx="19000000" cy="1400000"/>
-          </a:xfrm>
-          <a:prstGeom prst="roundRect">
-            <a:avLst/>
-          </a:prstGeom>
-          <a:solidFill>
-            <a:srgbClr val="F7F7F7"/>
-          </a:solidFill>
-          <a:ln w="15875">
-            <a:solidFill>
-              <a:srgbClr val="E1E1E1"/>
-            </a:solidFill>
-          </a:ln>
-        </p:spPr>
-        <p:style>
-          <a:lnRef idx="1">
-            <a:schemeClr val="accent1"/>
-          </a:lnRef>
-          <a:fillRef idx="3">
-            <a:schemeClr val="accent1"/>
-          </a:fillRef>
-          <a:effectRef idx="2">
-            <a:schemeClr val="accent1"/>
-          </a:effectRef>
-          <a:fontRef idx="minor">
-            <a:schemeClr val="lt1"/>
-          </a:fontRef>
-        </p:style>
-        <p:txBody>
-          <a:bodyPr rtlCol="0" anchor="ctr"/>
-          <a:lstStyle/>
-          <a:p>
-            <a:pPr algn="ctr"/>
-          </a:p>
-        </p:txBody>
-      </p:sp>
-      <p:sp>
-        <p:nvSpPr>
-          <p:cNvPr id="11" name="Oval 10"/>
-          <p:cNvSpPr/>
-          <p:nvPr/>
-        </p:nvSpPr>
-        <p:spPr>
-          <a:xfrm>
-            <a:off x="2160000" y="3750000"/>
-            <a:ext cx="800000" cy="800000"/>
-          </a:xfrm>
-          <a:prstGeom prst="ellipse">
-            <a:avLst/>
-          </a:prstGeom>
-          <a:solidFill>
-            <a:srgbClr val="0055AA"/>
-          </a:solidFill>
-          <a:ln>
-            <a:noFill/>
-          </a:ln>
-        </p:spPr>
-        <p:style>
-          <a:lnRef idx="1">
-            <a:schemeClr val="accent1"/>
-          </a:lnRef>
-          <a:fillRef idx="3">
-            <a:schemeClr val="accent1"/>
-          </a:fillRef>
-          <a:effectRef idx="2">
-            <a:schemeClr val="accent1"/>
-          </a:effectRef>
-          <a:fontRef idx="minor">
-            <a:schemeClr val="lt1"/>
-          </a:fontRef>
-        </p:style>
-        <p:txBody>
-          <a:bodyPr rtlCol="0" anchor="ctr"/>
-          <a:lstStyle/>
-          <a:p>
-            <a:pPr algn="ctr"/>
-          </a:p>
-        </p:txBody>
-      </p:sp>
-      <p:sp>
-        <p:nvSpPr>
-          <p:cNvPr id="12" name="TextBox 11"/>
+              <a:t>Подробный осмотр</a:t>
+            </a:r>
+          </a:p>
+        </p:txBody>
+      </p:sp>
+      <p:sp>
+        <p:nvSpPr>
+          <p:cNvPr id="11" name="TextBox 10"/>
           <p:cNvSpPr txBox="1"/>
           <p:nvPr/>
         </p:nvSpPr>
         <p:spPr>
           <a:xfrm>
-            <a:off x="2160000" y="3750000"/>
-            <a:ext cx="800000" cy="800000"/>
+            <a:off x="1100000" y="3200000"/>
+            <a:ext cx="10000000" cy="7800000"/>
           </a:xfrm>
           <a:prstGeom prst="rect">
             <a:avLst/>
@@ -6239,51 +4778,18 @@
           <a:noFill/>
         </p:spPr>
         <p:txBody>
-          <a:bodyPr wrap="square" anchor="ctr">
+          <a:bodyPr wrap="square">
             <a:spAutoFit/>
           </a:bodyPr>
           <a:lstStyle/>
           <a:p>
-            <a:pPr algn="ctr"/>
-            <a:r>
-              <a:rPr sz="2600" b="1">
-                <a:solidFill>
-                  <a:srgbClr val="FFFFFF"/>
-                </a:solidFill>
-                <a:latin typeface="Open Sans"/>
-                <a:ea typeface="Open Sans"/>
-                <a:cs typeface="Open Sans"/>
-              </a:rPr>
-              <a:t>2</a:t>
-            </a:r>
-          </a:p>
-        </p:txBody>
-      </p:sp>
-      <p:sp>
-        <p:nvSpPr>
-          <p:cNvPr id="13" name="TextBox 12"/>
-          <p:cNvSpPr txBox="1"/>
-          <p:nvPr/>
-        </p:nvSpPr>
-        <p:spPr>
-          <a:xfrm>
-            <a:off x="3260000" y="3650000"/>
-            <a:ext cx="17000000" cy="1000000"/>
-          </a:xfrm>
-          <a:prstGeom prst="rect">
-            <a:avLst/>
-          </a:prstGeom>
-          <a:noFill/>
-        </p:spPr>
-        <p:txBody>
-          <a:bodyPr wrap="square" anchor="ctr">
-            <a:spAutoFit/>
-          </a:bodyPr>
-          <a:lstStyle/>
-          <a:p>
-            <a:pPr algn="l"/>
-            <a:r>
-              <a:rPr sz="2800" b="0">
+            <a:pPr algn="l">
+              <a:spcAft>
+                <a:spcPts val="1200"/>
+              </a:spcAft>
+            </a:pPr>
+            <a:r>
+              <a:rPr sz="2600" b="0">
                 <a:solidFill>
                   <a:srgbClr val="333333"/>
                 </a:solidFill>
@@ -6291,204 +4797,17 @@
                 <a:ea typeface="Open Sans"/>
                 <a:cs typeface="Open Sans"/>
               </a:rPr>
-              <a:t>Осмотр с головы до ног (1–2 с)</a:t>
-            </a:r>
-          </a:p>
-        </p:txBody>
-      </p:sp>
-      <p:sp>
-        <p:nvSpPr>
-          <p:cNvPr id="14" name="Down Arrow 13"/>
-          <p:cNvSpPr/>
-          <p:nvPr/>
-        </p:nvSpPr>
-        <p:spPr>
-          <a:xfrm>
-            <a:off x="11360000" y="4870000"/>
-            <a:ext cx="350000" cy="180000"/>
-          </a:xfrm>
-          <a:prstGeom prst="downArrow">
-            <a:avLst/>
-          </a:prstGeom>
-          <a:solidFill>
-            <a:srgbClr val="0055AA"/>
-          </a:solidFill>
-          <a:ln>
-            <a:noFill/>
-          </a:ln>
-        </p:spPr>
-        <p:style>
-          <a:lnRef idx="1">
-            <a:schemeClr val="accent1"/>
-          </a:lnRef>
-          <a:fillRef idx="3">
-            <a:schemeClr val="accent1"/>
-          </a:fillRef>
-          <a:effectRef idx="2">
-            <a:schemeClr val="accent1"/>
-          </a:effectRef>
-          <a:fontRef idx="minor">
-            <a:schemeClr val="lt1"/>
-          </a:fontRef>
-        </p:style>
-        <p:txBody>
-          <a:bodyPr rtlCol="0" anchor="ctr"/>
-          <a:lstStyle/>
-          <a:p>
-            <a:pPr algn="ctr"/>
-          </a:p>
-        </p:txBody>
-      </p:sp>
-      <p:sp>
-        <p:nvSpPr>
-          <p:cNvPr id="15" name="Rounded Rectangle 14"/>
-          <p:cNvSpPr/>
-          <p:nvPr/>
-        </p:nvSpPr>
-        <p:spPr>
-          <a:xfrm>
-            <a:off x="1860000" y="5100000"/>
-            <a:ext cx="19000000" cy="1400000"/>
-          </a:xfrm>
-          <a:prstGeom prst="roundRect">
-            <a:avLst/>
-          </a:prstGeom>
-          <a:solidFill>
-            <a:srgbClr val="F7F7F7"/>
-          </a:solidFill>
-          <a:ln w="15875">
-            <a:solidFill>
-              <a:srgbClr val="E1E1E1"/>
-            </a:solidFill>
-          </a:ln>
-        </p:spPr>
-        <p:style>
-          <a:lnRef idx="1">
-            <a:schemeClr val="accent1"/>
-          </a:lnRef>
-          <a:fillRef idx="3">
-            <a:schemeClr val="accent1"/>
-          </a:fillRef>
-          <a:effectRef idx="2">
-            <a:schemeClr val="accent1"/>
-          </a:effectRef>
-          <a:fontRef idx="minor">
-            <a:schemeClr val="lt1"/>
-          </a:fontRef>
-        </p:style>
-        <p:txBody>
-          <a:bodyPr rtlCol="0" anchor="ctr"/>
-          <a:lstStyle/>
-          <a:p>
-            <a:pPr algn="ctr"/>
-          </a:p>
-        </p:txBody>
-      </p:sp>
-      <p:sp>
-        <p:nvSpPr>
-          <p:cNvPr id="16" name="Oval 15"/>
-          <p:cNvSpPr/>
-          <p:nvPr/>
-        </p:nvSpPr>
-        <p:spPr>
-          <a:xfrm>
-            <a:off x="2160000" y="5400000"/>
-            <a:ext cx="800000" cy="800000"/>
-          </a:xfrm>
-          <a:prstGeom prst="ellipse">
-            <a:avLst/>
-          </a:prstGeom>
-          <a:solidFill>
-            <a:srgbClr val="0055AA"/>
-          </a:solidFill>
-          <a:ln>
-            <a:noFill/>
-          </a:ln>
-        </p:spPr>
-        <p:style>
-          <a:lnRef idx="1">
-            <a:schemeClr val="accent1"/>
-          </a:lnRef>
-          <a:fillRef idx="3">
-            <a:schemeClr val="accent1"/>
-          </a:fillRef>
-          <a:effectRef idx="2">
-            <a:schemeClr val="accent1"/>
-          </a:effectRef>
-          <a:fontRef idx="minor">
-            <a:schemeClr val="lt1"/>
-          </a:fontRef>
-        </p:style>
-        <p:txBody>
-          <a:bodyPr rtlCol="0" anchor="ctr"/>
-          <a:lstStyle/>
-          <a:p>
-            <a:pPr algn="ctr"/>
-          </a:p>
-        </p:txBody>
-      </p:sp>
-      <p:sp>
-        <p:nvSpPr>
-          <p:cNvPr id="17" name="TextBox 16"/>
-          <p:cNvSpPr txBox="1"/>
-          <p:nvPr/>
-        </p:nvSpPr>
-        <p:spPr>
-          <a:xfrm>
-            <a:off x="2160000" y="5400000"/>
-            <a:ext cx="800000" cy="800000"/>
-          </a:xfrm>
-          <a:prstGeom prst="rect">
-            <a:avLst/>
-          </a:prstGeom>
-          <a:noFill/>
-        </p:spPr>
-        <p:txBody>
-          <a:bodyPr wrap="square" anchor="ctr">
-            <a:spAutoFit/>
-          </a:bodyPr>
-          <a:lstStyle/>
-          <a:p>
-            <a:pPr algn="ctr"/>
-            <a:r>
-              <a:rPr sz="2600" b="1">
-                <a:solidFill>
-                  <a:srgbClr val="FFFFFF"/>
-                </a:solidFill>
-                <a:latin typeface="Open Sans"/>
-                <a:ea typeface="Open Sans"/>
-                <a:cs typeface="Open Sans"/>
-              </a:rPr>
-              <a:t>3</a:t>
-            </a:r>
-          </a:p>
-        </p:txBody>
-      </p:sp>
-      <p:sp>
-        <p:nvSpPr>
-          <p:cNvPr id="18" name="TextBox 17"/>
-          <p:cNvSpPr txBox="1"/>
-          <p:nvPr/>
-        </p:nvSpPr>
-        <p:spPr>
-          <a:xfrm>
-            <a:off x="3260000" y="5300000"/>
-            <a:ext cx="17000000" cy="1000000"/>
-          </a:xfrm>
-          <a:prstGeom prst="rect">
-            <a:avLst/>
-          </a:prstGeom>
-          <a:noFill/>
-        </p:spPr>
-        <p:txBody>
-          <a:bodyPr wrap="square" anchor="ctr">
-            <a:spAutoFit/>
-          </a:bodyPr>
-          <a:lstStyle/>
-          <a:p>
-            <a:pPr algn="l"/>
-            <a:r>
-              <a:rPr sz="2800" b="0">
+              <a:t>•  Цель: найти наружное кровотечение</a:t>
+            </a:r>
+          </a:p>
+          <a:p>
+            <a:pPr algn="l">
+              <a:spcAft>
+                <a:spcPts val="1200"/>
+              </a:spcAft>
+            </a:pPr>
+            <a:r>
+              <a:rPr sz="2600" b="0">
                 <a:solidFill>
                   <a:srgbClr val="333333"/>
                 </a:solidFill>
@@ -6496,407 +4815,17 @@
                 <a:ea typeface="Open Sans"/>
                 <a:cs typeface="Open Sans"/>
               </a:rPr>
-              <a:t>Искать кровь, лужи, пульсирующую струю</a:t>
-            </a:r>
-          </a:p>
-        </p:txBody>
-      </p:sp>
-      <p:sp>
-        <p:nvSpPr>
-          <p:cNvPr id="19" name="Down Arrow 18"/>
-          <p:cNvSpPr/>
-          <p:nvPr/>
-        </p:nvSpPr>
-        <p:spPr>
-          <a:xfrm>
-            <a:off x="11360000" y="6520000"/>
-            <a:ext cx="350000" cy="180000"/>
-          </a:xfrm>
-          <a:prstGeom prst="downArrow">
-            <a:avLst/>
-          </a:prstGeom>
-          <a:solidFill>
-            <a:srgbClr val="0055AA"/>
-          </a:solidFill>
-          <a:ln>
-            <a:noFill/>
-          </a:ln>
-        </p:spPr>
-        <p:style>
-          <a:lnRef idx="1">
-            <a:schemeClr val="accent1"/>
-          </a:lnRef>
-          <a:fillRef idx="3">
-            <a:schemeClr val="accent1"/>
-          </a:fillRef>
-          <a:effectRef idx="2">
-            <a:schemeClr val="accent1"/>
-          </a:effectRef>
-          <a:fontRef idx="minor">
-            <a:schemeClr val="lt1"/>
-          </a:fontRef>
-        </p:style>
-        <p:txBody>
-          <a:bodyPr rtlCol="0" anchor="ctr"/>
-          <a:lstStyle/>
-          <a:p>
-            <a:pPr algn="ctr"/>
-          </a:p>
-        </p:txBody>
-      </p:sp>
-      <p:sp>
-        <p:nvSpPr>
-          <p:cNvPr id="20" name="Rounded Rectangle 19"/>
-          <p:cNvSpPr/>
-          <p:nvPr/>
-        </p:nvSpPr>
-        <p:spPr>
-          <a:xfrm>
-            <a:off x="1860000" y="6750000"/>
-            <a:ext cx="19000000" cy="1400000"/>
-          </a:xfrm>
-          <a:prstGeom prst="roundRect">
-            <a:avLst/>
-          </a:prstGeom>
-          <a:solidFill>
-            <a:srgbClr val="0055AA"/>
-          </a:solidFill>
-          <a:ln>
-            <a:noFill/>
-          </a:ln>
-        </p:spPr>
-        <p:style>
-          <a:lnRef idx="1">
-            <a:schemeClr val="accent1"/>
-          </a:lnRef>
-          <a:fillRef idx="3">
-            <a:schemeClr val="accent1"/>
-          </a:fillRef>
-          <a:effectRef idx="2">
-            <a:schemeClr val="accent1"/>
-          </a:effectRef>
-          <a:fontRef idx="minor">
-            <a:schemeClr val="lt1"/>
-          </a:fontRef>
-        </p:style>
-        <p:txBody>
-          <a:bodyPr rtlCol="0" anchor="ctr"/>
-          <a:lstStyle/>
-          <a:p>
-            <a:pPr algn="ctr"/>
-          </a:p>
-        </p:txBody>
-      </p:sp>
-      <p:sp>
-        <p:nvSpPr>
-          <p:cNvPr id="21" name="Oval 20"/>
-          <p:cNvSpPr/>
-          <p:nvPr/>
-        </p:nvSpPr>
-        <p:spPr>
-          <a:xfrm>
-            <a:off x="2160000" y="7050000"/>
-            <a:ext cx="800000" cy="800000"/>
-          </a:xfrm>
-          <a:prstGeom prst="ellipse">
-            <a:avLst/>
-          </a:prstGeom>
-          <a:solidFill>
-            <a:srgbClr val="FFFFFF"/>
-          </a:solidFill>
-          <a:ln>
-            <a:noFill/>
-          </a:ln>
-        </p:spPr>
-        <p:style>
-          <a:lnRef idx="1">
-            <a:schemeClr val="accent1"/>
-          </a:lnRef>
-          <a:fillRef idx="3">
-            <a:schemeClr val="accent1"/>
-          </a:fillRef>
-          <a:effectRef idx="2">
-            <a:schemeClr val="accent1"/>
-          </a:effectRef>
-          <a:fontRef idx="minor">
-            <a:schemeClr val="lt1"/>
-          </a:fontRef>
-        </p:style>
-        <p:txBody>
-          <a:bodyPr rtlCol="0" anchor="ctr"/>
-          <a:lstStyle/>
-          <a:p>
-            <a:pPr algn="ctr"/>
-          </a:p>
-        </p:txBody>
-      </p:sp>
-      <p:sp>
-        <p:nvSpPr>
-          <p:cNvPr id="22" name="TextBox 21"/>
-          <p:cNvSpPr txBox="1"/>
-          <p:nvPr/>
-        </p:nvSpPr>
-        <p:spPr>
-          <a:xfrm>
-            <a:off x="2160000" y="7050000"/>
-            <a:ext cx="800000" cy="800000"/>
-          </a:xfrm>
-          <a:prstGeom prst="rect">
-            <a:avLst/>
-          </a:prstGeom>
-          <a:noFill/>
-        </p:spPr>
-        <p:txBody>
-          <a:bodyPr wrap="square" anchor="ctr">
-            <a:spAutoFit/>
-          </a:bodyPr>
-          <a:lstStyle/>
-          <a:p>
-            <a:pPr algn="ctr"/>
-            <a:r>
-              <a:rPr sz="2600" b="1">
-                <a:solidFill>
-                  <a:srgbClr val="0055AA"/>
-                </a:solidFill>
-                <a:latin typeface="Open Sans"/>
-                <a:ea typeface="Open Sans"/>
-                <a:cs typeface="Open Sans"/>
-              </a:rPr>
-              <a:t>4</a:t>
-            </a:r>
-          </a:p>
-        </p:txBody>
-      </p:sp>
-      <p:sp>
-        <p:nvSpPr>
-          <p:cNvPr id="23" name="TextBox 22"/>
-          <p:cNvSpPr txBox="1"/>
-          <p:nvPr/>
-        </p:nvSpPr>
-        <p:spPr>
-          <a:xfrm>
-            <a:off x="3260000" y="6950000"/>
-            <a:ext cx="17000000" cy="1000000"/>
-          </a:xfrm>
-          <a:prstGeom prst="rect">
-            <a:avLst/>
-          </a:prstGeom>
-          <a:noFill/>
-        </p:spPr>
-        <p:txBody>
-          <a:bodyPr wrap="square" anchor="ctr">
-            <a:spAutoFit/>
-          </a:bodyPr>
-          <a:lstStyle/>
-          <a:p>
-            <a:pPr algn="l"/>
-            <a:r>
-              <a:rPr sz="2800" b="0">
-                <a:solidFill>
-                  <a:srgbClr val="FFFFFF"/>
-                </a:solidFill>
-                <a:latin typeface="Open Sans"/>
-                <a:ea typeface="Open Sans"/>
-                <a:cs typeface="Open Sans"/>
-              </a:rPr>
-              <a:t>Остановить кровотечение</a:t>
-            </a:r>
-          </a:p>
-        </p:txBody>
-      </p:sp>
-      <p:sp>
-        <p:nvSpPr>
-          <p:cNvPr id="24" name="Down Arrow 23"/>
-          <p:cNvSpPr/>
-          <p:nvPr/>
-        </p:nvSpPr>
-        <p:spPr>
-          <a:xfrm>
-            <a:off x="11360000" y="8170000"/>
-            <a:ext cx="350000" cy="180000"/>
-          </a:xfrm>
-          <a:prstGeom prst="downArrow">
-            <a:avLst/>
-          </a:prstGeom>
-          <a:solidFill>
-            <a:srgbClr val="0055AA"/>
-          </a:solidFill>
-          <a:ln>
-            <a:noFill/>
-          </a:ln>
-        </p:spPr>
-        <p:style>
-          <a:lnRef idx="1">
-            <a:schemeClr val="accent1"/>
-          </a:lnRef>
-          <a:fillRef idx="3">
-            <a:schemeClr val="accent1"/>
-          </a:fillRef>
-          <a:effectRef idx="2">
-            <a:schemeClr val="accent1"/>
-          </a:effectRef>
-          <a:fontRef idx="minor">
-            <a:schemeClr val="lt1"/>
-          </a:fontRef>
-        </p:style>
-        <p:txBody>
-          <a:bodyPr rtlCol="0" anchor="ctr"/>
-          <a:lstStyle/>
-          <a:p>
-            <a:pPr algn="ctr"/>
-          </a:p>
-        </p:txBody>
-      </p:sp>
-      <p:sp>
-        <p:nvSpPr>
-          <p:cNvPr id="25" name="Rounded Rectangle 24"/>
-          <p:cNvSpPr/>
-          <p:nvPr/>
-        </p:nvSpPr>
-        <p:spPr>
-          <a:xfrm>
-            <a:off x="1860000" y="8400000"/>
-            <a:ext cx="19000000" cy="1400000"/>
-          </a:xfrm>
-          <a:prstGeom prst="roundRect">
-            <a:avLst/>
-          </a:prstGeom>
-          <a:solidFill>
-            <a:srgbClr val="F7F7F7"/>
-          </a:solidFill>
-          <a:ln w="15875">
-            <a:solidFill>
-              <a:srgbClr val="E1E1E1"/>
-            </a:solidFill>
-          </a:ln>
-        </p:spPr>
-        <p:style>
-          <a:lnRef idx="1">
-            <a:schemeClr val="accent1"/>
-          </a:lnRef>
-          <a:fillRef idx="3">
-            <a:schemeClr val="accent1"/>
-          </a:fillRef>
-          <a:effectRef idx="2">
-            <a:schemeClr val="accent1"/>
-          </a:effectRef>
-          <a:fontRef idx="minor">
-            <a:schemeClr val="lt1"/>
-          </a:fontRef>
-        </p:style>
-        <p:txBody>
-          <a:bodyPr rtlCol="0" anchor="ctr"/>
-          <a:lstStyle/>
-          <a:p>
-            <a:pPr algn="ctr"/>
-          </a:p>
-        </p:txBody>
-      </p:sp>
-      <p:sp>
-        <p:nvSpPr>
-          <p:cNvPr id="26" name="Oval 25"/>
-          <p:cNvSpPr/>
-          <p:nvPr/>
-        </p:nvSpPr>
-        <p:spPr>
-          <a:xfrm>
-            <a:off x="2160000" y="8700000"/>
-            <a:ext cx="800000" cy="800000"/>
-          </a:xfrm>
-          <a:prstGeom prst="ellipse">
-            <a:avLst/>
-          </a:prstGeom>
-          <a:solidFill>
-            <a:srgbClr val="0055AA"/>
-          </a:solidFill>
-          <a:ln>
-            <a:noFill/>
-          </a:ln>
-        </p:spPr>
-        <p:style>
-          <a:lnRef idx="1">
-            <a:schemeClr val="accent1"/>
-          </a:lnRef>
-          <a:fillRef idx="3">
-            <a:schemeClr val="accent1"/>
-          </a:fillRef>
-          <a:effectRef idx="2">
-            <a:schemeClr val="accent1"/>
-          </a:effectRef>
-          <a:fontRef idx="minor">
-            <a:schemeClr val="lt1"/>
-          </a:fontRef>
-        </p:style>
-        <p:txBody>
-          <a:bodyPr rtlCol="0" anchor="ctr"/>
-          <a:lstStyle/>
-          <a:p>
-            <a:pPr algn="ctr"/>
-          </a:p>
-        </p:txBody>
-      </p:sp>
-      <p:sp>
-        <p:nvSpPr>
-          <p:cNvPr id="27" name="TextBox 26"/>
-          <p:cNvSpPr txBox="1"/>
-          <p:nvPr/>
-        </p:nvSpPr>
-        <p:spPr>
-          <a:xfrm>
-            <a:off x="2160000" y="8700000"/>
-            <a:ext cx="800000" cy="800000"/>
-          </a:xfrm>
-          <a:prstGeom prst="rect">
-            <a:avLst/>
-          </a:prstGeom>
-          <a:noFill/>
-        </p:spPr>
-        <p:txBody>
-          <a:bodyPr wrap="square" anchor="ctr">
-            <a:spAutoFit/>
-          </a:bodyPr>
-          <a:lstStyle/>
-          <a:p>
-            <a:pPr algn="ctr"/>
-            <a:r>
-              <a:rPr sz="2600" b="1">
-                <a:solidFill>
-                  <a:srgbClr val="FFFFFF"/>
-                </a:solidFill>
-                <a:latin typeface="Open Sans"/>
-                <a:ea typeface="Open Sans"/>
-                <a:cs typeface="Open Sans"/>
-              </a:rPr>
-              <a:t>5</a:t>
-            </a:r>
-          </a:p>
-        </p:txBody>
-      </p:sp>
-      <p:sp>
-        <p:nvSpPr>
-          <p:cNvPr id="28" name="TextBox 27"/>
-          <p:cNvSpPr txBox="1"/>
-          <p:nvPr/>
-        </p:nvSpPr>
-        <p:spPr>
-          <a:xfrm>
-            <a:off x="3260000" y="8600000"/>
-            <a:ext cx="17000000" cy="1000000"/>
-          </a:xfrm>
-          <a:prstGeom prst="rect">
-            <a:avLst/>
-          </a:prstGeom>
-          <a:noFill/>
-        </p:spPr>
-        <p:txBody>
-          <a:bodyPr wrap="square" anchor="ctr">
-            <a:spAutoFit/>
-          </a:bodyPr>
-          <a:lstStyle/>
-          <a:p>
-            <a:pPr algn="l"/>
-            <a:r>
-              <a:rPr sz="2800" b="0">
+              <a:t>•  Время: около 1–2 секунд</a:t>
+            </a:r>
+          </a:p>
+          <a:p>
+            <a:pPr algn="l">
+              <a:spcAft>
+                <a:spcPts val="1200"/>
+              </a:spcAft>
+            </a:pPr>
+            <a:r>
+              <a:rPr sz="2600" b="0">
                 <a:solidFill>
                   <a:srgbClr val="333333"/>
                 </a:solidFill>
@@ -6904,7 +4833,120 @@
                 <a:ea typeface="Open Sans"/>
                 <a:cs typeface="Open Sans"/>
               </a:rPr>
-              <a:t>Затем — сознание, дыхание, подробный осмотр</a:t>
+              <a:t>•  Объём: быстрый взгляд с головы до ног</a:t>
+            </a:r>
+          </a:p>
+          <a:p>
+            <a:pPr algn="l">
+              <a:spcAft>
+                <a:spcPts val="1200"/>
+              </a:spcAft>
+            </a:pPr>
+            <a:r>
+              <a:rPr sz="2600" b="0">
+                <a:solidFill>
+                  <a:srgbClr val="333333"/>
+                </a:solidFill>
+                <a:latin typeface="Open Sans"/>
+                <a:ea typeface="Open Sans"/>
+                <a:cs typeface="Open Sans"/>
+              </a:rPr>
+              <a:t>•  Когда: сразу после оценки обстановки</a:t>
+            </a:r>
+          </a:p>
+        </p:txBody>
+      </p:sp>
+      <p:sp>
+        <p:nvSpPr>
+          <p:cNvPr id="12" name="TextBox 11"/>
+          <p:cNvSpPr txBox="1"/>
+          <p:nvPr/>
+        </p:nvSpPr>
+        <p:spPr>
+          <a:xfrm>
+            <a:off x="13100000" y="3200000"/>
+            <a:ext cx="10000000" cy="7800000"/>
+          </a:xfrm>
+          <a:prstGeom prst="rect">
+            <a:avLst/>
+          </a:prstGeom>
+          <a:noFill/>
+        </p:spPr>
+        <p:txBody>
+          <a:bodyPr wrap="square">
+            <a:spAutoFit/>
+          </a:bodyPr>
+          <a:lstStyle/>
+          <a:p>
+            <a:pPr algn="l">
+              <a:spcAft>
+                <a:spcPts val="1200"/>
+              </a:spcAft>
+            </a:pPr>
+            <a:r>
+              <a:rPr sz="2600" b="0">
+                <a:solidFill>
+                  <a:srgbClr val="333333"/>
+                </a:solidFill>
+                <a:latin typeface="Open Sans"/>
+                <a:ea typeface="Open Sans"/>
+                <a:cs typeface="Open Sans"/>
+              </a:rPr>
+              <a:t>•  Цель: выявить травмы и другие угрозы</a:t>
+            </a:r>
+          </a:p>
+          <a:p>
+            <a:pPr algn="l">
+              <a:spcAft>
+                <a:spcPts val="1200"/>
+              </a:spcAft>
+            </a:pPr>
+            <a:r>
+              <a:rPr sz="2600" b="0">
+                <a:solidFill>
+                  <a:srgbClr val="333333"/>
+                </a:solidFill>
+                <a:latin typeface="Open Sans"/>
+                <a:ea typeface="Open Sans"/>
+                <a:cs typeface="Open Sans"/>
+              </a:rPr>
+              <a:t>•  Время: несколько минут</a:t>
+            </a:r>
+          </a:p>
+          <a:p>
+            <a:pPr algn="l">
+              <a:spcAft>
+                <a:spcPts val="1200"/>
+              </a:spcAft>
+            </a:pPr>
+            <a:r>
+              <a:rPr sz="2600" b="0">
+                <a:solidFill>
+                  <a:srgbClr val="333333"/>
+                </a:solidFill>
+                <a:latin typeface="Open Sans"/>
+                <a:ea typeface="Open Sans"/>
+                <a:cs typeface="Open Sans"/>
+              </a:rPr>
+              <a:t>•  Объём: голова → шея → грудь → … → руки</a:t>
+            </a:r>
+          </a:p>
+          <a:p>
+            <a:pPr algn="l">
+              <a:spcAft>
+                <a:spcPts val="1200"/>
+              </a:spcAft>
+            </a:pPr>
+            <a:r>
+              <a:rPr sz="2600" b="0">
+                <a:solidFill>
+                  <a:srgbClr val="333333"/>
+                </a:solidFill>
+                <a:latin typeface="Open Sans"/>
+                <a:ea typeface="Open Sans"/>
+                <a:cs typeface="Open Sans"/>
+              </a:rPr>
+              <a:t>•  Когда: после остановки кровотечения</a:t>
             </a:r>
           </a:p>
         </p:txBody>
@@ -6978,8 +5020,8 @@
         </p:nvSpPr>
         <p:spPr>
           <a:xfrm>
-            <a:off x="360000" y="350000"/>
-            <a:ext cx="23664000" cy="1100000"/>
+            <a:off x="800000" y="400000"/>
+            <a:ext cx="22800000" cy="1000000"/>
           </a:xfrm>
           <a:prstGeom prst="rect">
             <a:avLst/>
@@ -7002,7 +5044,7 @@
                 <a:ea typeface="Open Sans"/>
                 <a:cs typeface="Open Sans"/>
               </a:rPr>
-              <a:t>Обзорный и подробный осмотр</a:t>
+              <a:t>Когда обзорный осмотр критически важен</a:t>
             </a:r>
           </a:p>
         </p:txBody>
@@ -7015,8 +5057,8 @@
         </p:nvSpPr>
         <p:spPr>
           <a:xfrm>
-            <a:off x="360000" y="1450000"/>
-            <a:ext cx="23664000" cy="20000"/>
+            <a:off x="800000" y="1500000"/>
+            <a:ext cx="22800000" cy="20000"/>
           </a:xfrm>
           <a:prstGeom prst="rect">
             <a:avLst/>
@@ -7052,190 +5094,14 @@
       </p:sp>
       <p:sp>
         <p:nvSpPr>
-          <p:cNvPr id="5" name="Rounded Rectangle 4"/>
-          <p:cNvSpPr/>
-          <p:nvPr/>
-        </p:nvSpPr>
-        <p:spPr>
-          <a:xfrm>
-            <a:off x="360000" y="1900000"/>
-            <a:ext cx="10800000" cy="9000000"/>
-          </a:xfrm>
-          <a:prstGeom prst="roundRect">
-            <a:avLst/>
-          </a:prstGeom>
-          <a:solidFill>
-            <a:srgbClr val="FFFFFF"/>
-          </a:solidFill>
-          <a:ln w="15875">
-            <a:solidFill>
-              <a:srgbClr val="E1E1E1"/>
-            </a:solidFill>
-          </a:ln>
-        </p:spPr>
-        <p:style>
-          <a:lnRef idx="1">
-            <a:schemeClr val="accent1"/>
-          </a:lnRef>
-          <a:fillRef idx="3">
-            <a:schemeClr val="accent1"/>
-          </a:fillRef>
-          <a:effectRef idx="2">
-            <a:schemeClr val="accent1"/>
-          </a:effectRef>
-          <a:fontRef idx="minor">
-            <a:schemeClr val="lt1"/>
-          </a:fontRef>
-        </p:style>
-        <p:txBody>
-          <a:bodyPr rtlCol="0" anchor="ctr"/>
-          <a:lstStyle/>
-          <a:p>
-            <a:pPr algn="ctr"/>
-          </a:p>
-        </p:txBody>
-      </p:sp>
-      <p:sp>
-        <p:nvSpPr>
-          <p:cNvPr id="6" name="Rounded Rectangle 5"/>
-          <p:cNvSpPr/>
-          <p:nvPr/>
-        </p:nvSpPr>
-        <p:spPr>
-          <a:xfrm>
-            <a:off x="12160000" y="1900000"/>
-            <a:ext cx="10800000" cy="9000000"/>
-          </a:xfrm>
-          <a:prstGeom prst="roundRect">
-            <a:avLst/>
-          </a:prstGeom>
-          <a:solidFill>
-            <a:srgbClr val="FFFFFF"/>
-          </a:solidFill>
-          <a:ln w="15875">
-            <a:solidFill>
-              <a:srgbClr val="E1E1E1"/>
-            </a:solidFill>
-          </a:ln>
-        </p:spPr>
-        <p:style>
-          <a:lnRef idx="1">
-            <a:schemeClr val="accent1"/>
-          </a:lnRef>
-          <a:fillRef idx="3">
-            <a:schemeClr val="accent1"/>
-          </a:fillRef>
-          <a:effectRef idx="2">
-            <a:schemeClr val="accent1"/>
-          </a:effectRef>
-          <a:fontRef idx="minor">
-            <a:schemeClr val="lt1"/>
-          </a:fontRef>
-        </p:style>
-        <p:txBody>
-          <a:bodyPr rtlCol="0" anchor="ctr"/>
-          <a:lstStyle/>
-          <a:p>
-            <a:pPr algn="ctr"/>
-          </a:p>
-        </p:txBody>
-      </p:sp>
-      <p:sp>
-        <p:nvSpPr>
-          <p:cNvPr id="7" name="Rectangle 6"/>
-          <p:cNvSpPr/>
-          <p:nvPr/>
-        </p:nvSpPr>
-        <p:spPr>
-          <a:xfrm>
-            <a:off x="360000" y="1900000"/>
-            <a:ext cx="10800000" cy="1000000"/>
-          </a:xfrm>
-          <a:prstGeom prst="rect">
-            <a:avLst/>
-          </a:prstGeom>
-          <a:solidFill>
-            <a:srgbClr val="0055AA"/>
-          </a:solidFill>
-          <a:ln>
-            <a:noFill/>
-          </a:ln>
-        </p:spPr>
-        <p:style>
-          <a:lnRef idx="1">
-            <a:schemeClr val="accent1"/>
-          </a:lnRef>
-          <a:fillRef idx="3">
-            <a:schemeClr val="accent1"/>
-          </a:fillRef>
-          <a:effectRef idx="2">
-            <a:schemeClr val="accent1"/>
-          </a:effectRef>
-          <a:fontRef idx="minor">
-            <a:schemeClr val="lt1"/>
-          </a:fontRef>
-        </p:style>
-        <p:txBody>
-          <a:bodyPr rtlCol="0" anchor="ctr"/>
-          <a:lstStyle/>
-          <a:p>
-            <a:pPr algn="ctr"/>
-          </a:p>
-        </p:txBody>
-      </p:sp>
-      <p:sp>
-        <p:nvSpPr>
-          <p:cNvPr id="8" name="Rectangle 7"/>
-          <p:cNvSpPr/>
-          <p:nvPr/>
-        </p:nvSpPr>
-        <p:spPr>
-          <a:xfrm>
-            <a:off x="12160000" y="1900000"/>
-            <a:ext cx="10800000" cy="1000000"/>
-          </a:xfrm>
-          <a:prstGeom prst="rect">
-            <a:avLst/>
-          </a:prstGeom>
-          <a:solidFill>
-            <a:srgbClr val="DDDDDD"/>
-          </a:solidFill>
-          <a:ln>
-            <a:noFill/>
-          </a:ln>
-        </p:spPr>
-        <p:style>
-          <a:lnRef idx="1">
-            <a:schemeClr val="accent1"/>
-          </a:lnRef>
-          <a:fillRef idx="3">
-            <a:schemeClr val="accent1"/>
-          </a:fillRef>
-          <a:effectRef idx="2">
-            <a:schemeClr val="accent1"/>
-          </a:effectRef>
-          <a:fontRef idx="minor">
-            <a:schemeClr val="lt1"/>
-          </a:fontRef>
-        </p:style>
-        <p:txBody>
-          <a:bodyPr rtlCol="0" anchor="ctr"/>
-          <a:lstStyle/>
-          <a:p>
-            <a:pPr algn="ctr"/>
-          </a:p>
-        </p:txBody>
-      </p:sp>
-      <p:sp>
-        <p:nvSpPr>
-          <p:cNvPr id="9" name="TextBox 8"/>
+          <p:cNvPr id="5" name="TextBox 4"/>
           <p:cNvSpPr txBox="1"/>
           <p:nvPr/>
         </p:nvSpPr>
         <p:spPr>
           <a:xfrm>
-            <a:off x="560000" y="2050000"/>
-            <a:ext cx="10400000" cy="700000"/>
+            <a:off x="800000" y="1900000"/>
+            <a:ext cx="22800000" cy="8000000"/>
           </a:xfrm>
           <a:prstGeom prst="rect">
             <a:avLst/>
@@ -7243,51 +5109,18 @@
           <a:noFill/>
         </p:spPr>
         <p:txBody>
-          <a:bodyPr wrap="square" anchor="t">
+          <a:bodyPr wrap="square">
             <a:spAutoFit/>
           </a:bodyPr>
           <a:lstStyle/>
           <a:p>
-            <a:pPr algn="ctr"/>
-            <a:r>
-              <a:rPr sz="2600" b="1">
-                <a:solidFill>
-                  <a:srgbClr val="FFFFFF"/>
-                </a:solidFill>
-                <a:latin typeface="Open Sans"/>
-                <a:ea typeface="Open Sans"/>
-                <a:cs typeface="Open Sans"/>
-              </a:rPr>
-              <a:t>Обзорный</a:t>
-            </a:r>
-          </a:p>
-        </p:txBody>
-      </p:sp>
-      <p:sp>
-        <p:nvSpPr>
-          <p:cNvPr id="10" name="TextBox 9"/>
-          <p:cNvSpPr txBox="1"/>
-          <p:nvPr/>
-        </p:nvSpPr>
-        <p:spPr>
-          <a:xfrm>
-            <a:off x="12360000" y="2050000"/>
-            <a:ext cx="10400000" cy="700000"/>
-          </a:xfrm>
-          <a:prstGeom prst="rect">
-            <a:avLst/>
-          </a:prstGeom>
-          <a:noFill/>
-        </p:spPr>
-        <p:txBody>
-          <a:bodyPr wrap="square" anchor="t">
-            <a:spAutoFit/>
-          </a:bodyPr>
-          <a:lstStyle/>
-          <a:p>
-            <a:pPr algn="ctr"/>
-            <a:r>
-              <a:rPr sz="2600" b="1">
+            <a:pPr algn="l">
+              <a:spcAft>
+                <a:spcPts val="1200"/>
+              </a:spcAft>
+            </a:pPr>
+            <a:r>
+              <a:rPr sz="3200" b="0">
                 <a:solidFill>
                   <a:srgbClr val="333333"/>
                 </a:solidFill>
@@ -7295,40 +5128,17 @@
                 <a:ea typeface="Open Sans"/>
                 <a:cs typeface="Open Sans"/>
               </a:rPr>
-              <a:t>Подробный</a:t>
-            </a:r>
-          </a:p>
-        </p:txBody>
-      </p:sp>
-      <p:sp>
-        <p:nvSpPr>
-          <p:cNvPr id="11" name="TextBox 10"/>
-          <p:cNvSpPr txBox="1"/>
-          <p:nvPr/>
-        </p:nvSpPr>
-        <p:spPr>
-          <a:xfrm>
-            <a:off x="760000" y="3200000"/>
-            <a:ext cx="10000000" cy="7000000"/>
-          </a:xfrm>
-          <a:prstGeom prst="rect">
-            <a:avLst/>
-          </a:prstGeom>
-          <a:noFill/>
-        </p:spPr>
-        <p:txBody>
-          <a:bodyPr wrap="square">
-            <a:spAutoFit/>
-          </a:bodyPr>
-          <a:lstStyle/>
+              <a:t>•  ДТП — раны под одеждой, кровотечение из конечностей</a:t>
+            </a:r>
+          </a:p>
           <a:p>
             <a:pPr algn="l">
               <a:spcAft>
-                <a:spcPts val="1400"/>
+                <a:spcPts val="1200"/>
               </a:spcAft>
             </a:pPr>
             <a:r>
-              <a:rPr sz="2600" b="0">
+              <a:rPr sz="3200" b="0">
                 <a:solidFill>
                   <a:srgbClr val="333333"/>
                 </a:solidFill>
@@ -7336,17 +5146,17 @@
                 <a:ea typeface="Open Sans"/>
                 <a:cs typeface="Open Sans"/>
               </a:rPr>
-              <a:t>•  Найти наружное кровотечение</a:t>
+              <a:t>•  Падение с высоты — множественные повреждения</a:t>
             </a:r>
           </a:p>
           <a:p>
             <a:pPr algn="l">
               <a:spcAft>
-                <a:spcPts val="1400"/>
+                <a:spcPts val="1200"/>
               </a:spcAft>
             </a:pPr>
             <a:r>
-              <a:rPr sz="2600" b="0">
+              <a:rPr sz="3200" b="0">
                 <a:solidFill>
                   <a:srgbClr val="333333"/>
                 </a:solidFill>
@@ -7354,17 +5164,17 @@
                 <a:ea typeface="Open Sans"/>
                 <a:cs typeface="Open Sans"/>
               </a:rPr>
-              <a:t>•  1–2 секунды</a:t>
+              <a:t>•  Производственные травмы — риск артериального кровотечения</a:t>
             </a:r>
           </a:p>
           <a:p>
             <a:pPr algn="l">
               <a:spcAft>
-                <a:spcPts val="1400"/>
+                <a:spcPts val="1200"/>
               </a:spcAft>
             </a:pPr>
             <a:r>
-              <a:rPr sz="2600" b="0">
+              <a:rPr sz="3200" b="0">
                 <a:solidFill>
                   <a:srgbClr val="333333"/>
                 </a:solidFill>
@@ -7372,17 +5182,17 @@
                 <a:ea typeface="Open Sans"/>
                 <a:cs typeface="Open Sans"/>
               </a:rPr>
-              <a:t>•  С головы до ног</a:t>
+              <a:t>•  ЧС с несколькими пострадавшими — быстрая сортировка</a:t>
             </a:r>
           </a:p>
           <a:p>
             <a:pPr algn="l">
               <a:spcAft>
-                <a:spcPts val="1400"/>
+                <a:spcPts val="1200"/>
               </a:spcAft>
             </a:pPr>
             <a:r>
-              <a:rPr sz="2600" b="0">
+              <a:rPr sz="3200" b="0">
                 <a:solidFill>
                   <a:srgbClr val="333333"/>
                 </a:solidFill>
@@ -7390,102 +5200,7 @@
                 <a:ea typeface="Open Sans"/>
                 <a:cs typeface="Open Sans"/>
               </a:rPr>
-              <a:t>•  Сразу после оценки обстановки</a:t>
-            </a:r>
-          </a:p>
-        </p:txBody>
-      </p:sp>
-      <p:sp>
-        <p:nvSpPr>
-          <p:cNvPr id="12" name="TextBox 11"/>
-          <p:cNvSpPr txBox="1"/>
-          <p:nvPr/>
-        </p:nvSpPr>
-        <p:spPr>
-          <a:xfrm>
-            <a:off x="12560000" y="3200000"/>
-            <a:ext cx="10000000" cy="7000000"/>
-          </a:xfrm>
-          <a:prstGeom prst="rect">
-            <a:avLst/>
-          </a:prstGeom>
-          <a:noFill/>
-        </p:spPr>
-        <p:txBody>
-          <a:bodyPr wrap="square">
-            <a:spAutoFit/>
-          </a:bodyPr>
-          <a:lstStyle/>
-          <a:p>
-            <a:pPr algn="l">
-              <a:spcAft>
-                <a:spcPts val="1400"/>
-              </a:spcAft>
-            </a:pPr>
-            <a:r>
-              <a:rPr sz="2600" b="0">
-                <a:solidFill>
-                  <a:srgbClr val="333333"/>
-                </a:solidFill>
-                <a:latin typeface="Open Sans"/>
-                <a:ea typeface="Open Sans"/>
-                <a:cs typeface="Open Sans"/>
-              </a:rPr>
-              <a:t>•  Выявить травмы и угрозы</a:t>
-            </a:r>
-          </a:p>
-          <a:p>
-            <a:pPr algn="l">
-              <a:spcAft>
-                <a:spcPts val="1400"/>
-              </a:spcAft>
-            </a:pPr>
-            <a:r>
-              <a:rPr sz="2600" b="0">
-                <a:solidFill>
-                  <a:srgbClr val="333333"/>
-                </a:solidFill>
-                <a:latin typeface="Open Sans"/>
-                <a:ea typeface="Open Sans"/>
-                <a:cs typeface="Open Sans"/>
-              </a:rPr>
-              <a:t>•  Несколько минут</a:t>
-            </a:r>
-          </a:p>
-          <a:p>
-            <a:pPr algn="l">
-              <a:spcAft>
-                <a:spcPts val="1400"/>
-              </a:spcAft>
-            </a:pPr>
-            <a:r>
-              <a:rPr sz="2600" b="0">
-                <a:solidFill>
-                  <a:srgbClr val="333333"/>
-                </a:solidFill>
-                <a:latin typeface="Open Sans"/>
-                <a:ea typeface="Open Sans"/>
-                <a:cs typeface="Open Sans"/>
-              </a:rPr>
-              <a:t>•  Голова → шея → грудь → …</a:t>
-            </a:r>
-          </a:p>
-          <a:p>
-            <a:pPr algn="l">
-              <a:spcAft>
-                <a:spcPts val="1400"/>
-              </a:spcAft>
-            </a:pPr>
-            <a:r>
-              <a:rPr sz="2600" b="0">
-                <a:solidFill>
-                  <a:srgbClr val="333333"/>
-                </a:solidFill>
-                <a:latin typeface="Open Sans"/>
-                <a:ea typeface="Open Sans"/>
-                <a:cs typeface="Open Sans"/>
-              </a:rPr>
-              <a:t>•  После остановки кровотечения</a:t>
+              <a:t>•  Огнестрельные и колото-резаные ранения</a:t>
             </a:r>
           </a:p>
         </p:txBody>
@@ -7559,8 +5274,8 @@
         </p:nvSpPr>
         <p:spPr>
           <a:xfrm>
-            <a:off x="360000" y="350000"/>
-            <a:ext cx="23664000" cy="1100000"/>
+            <a:off x="800000" y="400000"/>
+            <a:ext cx="22800000" cy="1000000"/>
           </a:xfrm>
           <a:prstGeom prst="rect">
             <a:avLst/>
@@ -7583,7 +5298,7 @@
                 <a:ea typeface="Open Sans"/>
                 <a:cs typeface="Open Sans"/>
               </a:rPr>
-              <a:t>Когда осмотр критически важен</a:t>
+              <a:t>Главное запомнить</a:t>
             </a:r>
           </a:p>
         </p:txBody>
@@ -7596,8 +5311,8 @@
         </p:nvSpPr>
         <p:spPr>
           <a:xfrm>
-            <a:off x="360000" y="1450000"/>
-            <a:ext cx="23664000" cy="20000"/>
+            <a:off x="800000" y="1500000"/>
+            <a:ext cx="22800000" cy="20000"/>
           </a:xfrm>
           <a:prstGeom prst="rect">
             <a:avLst/>
@@ -7633,16 +5348,61 @@
       </p:sp>
       <p:sp>
         <p:nvSpPr>
-          <p:cNvPr id="5" name="Rounded Rectangle 4"/>
+          <p:cNvPr id="5" name="Rectangle 4"/>
           <p:cNvSpPr/>
           <p:nvPr/>
         </p:nvSpPr>
         <p:spPr>
           <a:xfrm>
-            <a:off x="360000" y="1900000"/>
-            <a:ext cx="900000" cy="900000"/>
-          </a:xfrm>
-          <a:prstGeom prst="roundRect">
+            <a:off x="800000" y="2000000"/>
+            <a:ext cx="22800000" cy="1600000"/>
+          </a:xfrm>
+          <a:prstGeom prst="rect">
+            <a:avLst/>
+          </a:prstGeom>
+          <a:solidFill>
+            <a:srgbClr val="FFFFFF"/>
+          </a:solidFill>
+          <a:ln w="12700">
+            <a:solidFill>
+              <a:srgbClr val="E1E1E1"/>
+            </a:solidFill>
+          </a:ln>
+        </p:spPr>
+        <p:style>
+          <a:lnRef idx="1">
+            <a:schemeClr val="accent1"/>
+          </a:lnRef>
+          <a:fillRef idx="3">
+            <a:schemeClr val="accent1"/>
+          </a:fillRef>
+          <a:effectRef idx="2">
+            <a:schemeClr val="accent1"/>
+          </a:effectRef>
+          <a:fontRef idx="minor">
+            <a:schemeClr val="lt1"/>
+          </a:fontRef>
+        </p:style>
+        <p:txBody>
+          <a:bodyPr rtlCol="0" anchor="ctr"/>
+          <a:lstStyle/>
+          <a:p>
+            <a:pPr algn="ctr"/>
+          </a:p>
+        </p:txBody>
+      </p:sp>
+      <p:sp>
+        <p:nvSpPr>
+          <p:cNvPr id="6" name="Rectangle 5"/>
+          <p:cNvSpPr/>
+          <p:nvPr/>
+        </p:nvSpPr>
+        <p:spPr>
+          <a:xfrm>
+            <a:off x="800000" y="2000000"/>
+            <a:ext cx="120000" cy="1600000"/>
+          </a:xfrm>
+          <a:prstGeom prst="rect">
             <a:avLst/>
           </a:prstGeom>
           <a:solidFill>
@@ -7676,14 +5436,14 @@
       </p:sp>
       <p:sp>
         <p:nvSpPr>
-          <p:cNvPr id="6" name="TextBox 5"/>
+          <p:cNvPr id="7" name="TextBox 6"/>
           <p:cNvSpPr txBox="1"/>
           <p:nvPr/>
         </p:nvSpPr>
         <p:spPr>
           <a:xfrm>
-            <a:off x="360000" y="1900000"/>
-            <a:ext cx="900000" cy="900000"/>
+            <a:off x="1300000" y="2350000"/>
+            <a:ext cx="21500000" cy="900000"/>
           </a:xfrm>
           <a:prstGeom prst="rect">
             <a:avLst/>
@@ -7696,46 +5456,9 @@
           </a:bodyPr>
           <a:lstStyle/>
           <a:p>
-            <a:pPr algn="ctr"/>
-            <a:r>
-              <a:rPr sz="2200" b="1">
-                <a:solidFill>
-                  <a:srgbClr val="FFFFFF"/>
-                </a:solidFill>
-                <a:latin typeface="Open Sans"/>
-                <a:ea typeface="Open Sans"/>
-                <a:cs typeface="Open Sans"/>
-              </a:rPr>
-              <a:t>1</a:t>
-            </a:r>
-          </a:p>
-        </p:txBody>
-      </p:sp>
-      <p:sp>
-        <p:nvSpPr>
-          <p:cNvPr id="7" name="TextBox 6"/>
-          <p:cNvSpPr txBox="1"/>
-          <p:nvPr/>
-        </p:nvSpPr>
-        <p:spPr>
-          <a:xfrm>
-            <a:off x="1560000" y="1900000"/>
-            <a:ext cx="22464000" cy="900000"/>
-          </a:xfrm>
-          <a:prstGeom prst="rect">
-            <a:avLst/>
-          </a:prstGeom>
-          <a:noFill/>
-        </p:spPr>
-        <p:txBody>
-          <a:bodyPr wrap="square" anchor="ctr">
-            <a:spAutoFit/>
-          </a:bodyPr>
-          <a:lstStyle/>
-          <a:p>
             <a:pPr algn="l"/>
             <a:r>
-              <a:rPr sz="3200" b="0">
+              <a:rPr sz="2800" b="0">
                 <a:solidFill>
                   <a:srgbClr val="333333"/>
                 </a:solidFill>
@@ -7743,23 +5466,68 @@
                 <a:ea typeface="Open Sans"/>
                 <a:cs typeface="Open Sans"/>
               </a:rPr>
-              <a:t>ДТП — раны под одеждой</a:t>
-            </a:r>
-          </a:p>
-        </p:txBody>
-      </p:sp>
-      <p:sp>
-        <p:nvSpPr>
-          <p:cNvPr id="8" name="Rounded Rectangle 7"/>
+              <a:t>Кровотечение — выход крови из сосудов с риском кровопотери</a:t>
+            </a:r>
+          </a:p>
+        </p:txBody>
+      </p:sp>
+      <p:sp>
+        <p:nvSpPr>
+          <p:cNvPr id="8" name="Rectangle 7"/>
           <p:cNvSpPr/>
           <p:nvPr/>
         </p:nvSpPr>
         <p:spPr>
           <a:xfrm>
-            <a:off x="360000" y="3500000"/>
-            <a:ext cx="900000" cy="900000"/>
-          </a:xfrm>
-          <a:prstGeom prst="roundRect">
+            <a:off x="800000" y="3900000"/>
+            <a:ext cx="22800000" cy="1600000"/>
+          </a:xfrm>
+          <a:prstGeom prst="rect">
+            <a:avLst/>
+          </a:prstGeom>
+          <a:solidFill>
+            <a:srgbClr val="FFFFFF"/>
+          </a:solidFill>
+          <a:ln w="12700">
+            <a:solidFill>
+              <a:srgbClr val="E1E1E1"/>
+            </a:solidFill>
+          </a:ln>
+        </p:spPr>
+        <p:style>
+          <a:lnRef idx="1">
+            <a:schemeClr val="accent1"/>
+          </a:lnRef>
+          <a:fillRef idx="3">
+            <a:schemeClr val="accent1"/>
+          </a:fillRef>
+          <a:effectRef idx="2">
+            <a:schemeClr val="accent1"/>
+          </a:effectRef>
+          <a:fontRef idx="minor">
+            <a:schemeClr val="lt1"/>
+          </a:fontRef>
+        </p:style>
+        <p:txBody>
+          <a:bodyPr rtlCol="0" anchor="ctr"/>
+          <a:lstStyle/>
+          <a:p>
+            <a:pPr algn="ctr"/>
+          </a:p>
+        </p:txBody>
+      </p:sp>
+      <p:sp>
+        <p:nvSpPr>
+          <p:cNvPr id="9" name="Rectangle 8"/>
+          <p:cNvSpPr/>
+          <p:nvPr/>
+        </p:nvSpPr>
+        <p:spPr>
+          <a:xfrm>
+            <a:off x="800000" y="3900000"/>
+            <a:ext cx="120000" cy="1600000"/>
+          </a:xfrm>
+          <a:prstGeom prst="rect">
             <a:avLst/>
           </a:prstGeom>
           <a:solidFill>
@@ -7793,14 +5561,14 @@
       </p:sp>
       <p:sp>
         <p:nvSpPr>
-          <p:cNvPr id="9" name="TextBox 8"/>
+          <p:cNvPr id="10" name="TextBox 9"/>
           <p:cNvSpPr txBox="1"/>
           <p:nvPr/>
         </p:nvSpPr>
         <p:spPr>
           <a:xfrm>
-            <a:off x="360000" y="3500000"/>
-            <a:ext cx="900000" cy="900000"/>
+            <a:off x="1300000" y="4250000"/>
+            <a:ext cx="21500000" cy="900000"/>
           </a:xfrm>
           <a:prstGeom prst="rect">
             <a:avLst/>
@@ -7813,46 +5581,9 @@
           </a:bodyPr>
           <a:lstStyle/>
           <a:p>
-            <a:pPr algn="ctr"/>
-            <a:r>
-              <a:rPr sz="2200" b="1">
-                <a:solidFill>
-                  <a:srgbClr val="FFFFFF"/>
-                </a:solidFill>
-                <a:latin typeface="Open Sans"/>
-                <a:ea typeface="Open Sans"/>
-                <a:cs typeface="Open Sans"/>
-              </a:rPr>
-              <a:t>2</a:t>
-            </a:r>
-          </a:p>
-        </p:txBody>
-      </p:sp>
-      <p:sp>
-        <p:nvSpPr>
-          <p:cNvPr id="10" name="TextBox 9"/>
-          <p:cNvSpPr txBox="1"/>
-          <p:nvPr/>
-        </p:nvSpPr>
-        <p:spPr>
-          <a:xfrm>
-            <a:off x="1560000" y="3500000"/>
-            <a:ext cx="22464000" cy="900000"/>
-          </a:xfrm>
-          <a:prstGeom prst="rect">
-            <a:avLst/>
-          </a:prstGeom>
-          <a:noFill/>
-        </p:spPr>
-        <p:txBody>
-          <a:bodyPr wrap="square" anchor="ctr">
-            <a:spAutoFit/>
-          </a:bodyPr>
-          <a:lstStyle/>
-          <a:p>
             <a:pPr algn="l"/>
             <a:r>
-              <a:rPr sz="3200" b="0">
+              <a:rPr sz="2800" b="0">
                 <a:solidFill>
                   <a:srgbClr val="333333"/>
                 </a:solidFill>
@@ -7860,23 +5591,68 @@
                 <a:ea typeface="Open Sans"/>
                 <a:cs typeface="Open Sans"/>
               </a:rPr>
-              <a:t>Падение с высоты</a:t>
-            </a:r>
-          </a:p>
-        </p:txBody>
-      </p:sp>
-      <p:sp>
-        <p:nvSpPr>
-          <p:cNvPr id="11" name="Rounded Rectangle 10"/>
+              <a:t>Обзорный осмотр — быстрый поиск кровотечения (1–2 с)</a:t>
+            </a:r>
+          </a:p>
+        </p:txBody>
+      </p:sp>
+      <p:sp>
+        <p:nvSpPr>
+          <p:cNvPr id="11" name="Rectangle 10"/>
           <p:cNvSpPr/>
           <p:nvPr/>
         </p:nvSpPr>
         <p:spPr>
           <a:xfrm>
-            <a:off x="360000" y="5100000"/>
-            <a:ext cx="900000" cy="900000"/>
-          </a:xfrm>
-          <a:prstGeom prst="roundRect">
+            <a:off x="800000" y="5800000"/>
+            <a:ext cx="22800000" cy="1600000"/>
+          </a:xfrm>
+          <a:prstGeom prst="rect">
+            <a:avLst/>
+          </a:prstGeom>
+          <a:solidFill>
+            <a:srgbClr val="FFFFFF"/>
+          </a:solidFill>
+          <a:ln w="12700">
+            <a:solidFill>
+              <a:srgbClr val="E1E1E1"/>
+            </a:solidFill>
+          </a:ln>
+        </p:spPr>
+        <p:style>
+          <a:lnRef idx="1">
+            <a:schemeClr val="accent1"/>
+          </a:lnRef>
+          <a:fillRef idx="3">
+            <a:schemeClr val="accent1"/>
+          </a:fillRef>
+          <a:effectRef idx="2">
+            <a:schemeClr val="accent1"/>
+          </a:effectRef>
+          <a:fontRef idx="minor">
+            <a:schemeClr val="lt1"/>
+          </a:fontRef>
+        </p:style>
+        <p:txBody>
+          <a:bodyPr rtlCol="0" anchor="ctr"/>
+          <a:lstStyle/>
+          <a:p>
+            <a:pPr algn="ctr"/>
+          </a:p>
+        </p:txBody>
+      </p:sp>
+      <p:sp>
+        <p:nvSpPr>
+          <p:cNvPr id="12" name="Rectangle 11"/>
+          <p:cNvSpPr/>
+          <p:nvPr/>
+        </p:nvSpPr>
+        <p:spPr>
+          <a:xfrm>
+            <a:off x="800000" y="5800000"/>
+            <a:ext cx="120000" cy="1600000"/>
+          </a:xfrm>
+          <a:prstGeom prst="rect">
             <a:avLst/>
           </a:prstGeom>
           <a:solidFill>
@@ -7910,14 +5686,14 @@
       </p:sp>
       <p:sp>
         <p:nvSpPr>
-          <p:cNvPr id="12" name="TextBox 11"/>
+          <p:cNvPr id="13" name="TextBox 12"/>
           <p:cNvSpPr txBox="1"/>
           <p:nvPr/>
         </p:nvSpPr>
         <p:spPr>
           <a:xfrm>
-            <a:off x="360000" y="5100000"/>
-            <a:ext cx="900000" cy="900000"/>
+            <a:off x="1300000" y="6150000"/>
+            <a:ext cx="21500000" cy="900000"/>
           </a:xfrm>
           <a:prstGeom prst="rect">
             <a:avLst/>
@@ -7930,46 +5706,9 @@
           </a:bodyPr>
           <a:lstStyle/>
           <a:p>
-            <a:pPr algn="ctr"/>
-            <a:r>
-              <a:rPr sz="2200" b="1">
-                <a:solidFill>
-                  <a:srgbClr val="FFFFFF"/>
-                </a:solidFill>
-                <a:latin typeface="Open Sans"/>
-                <a:ea typeface="Open Sans"/>
-                <a:cs typeface="Open Sans"/>
-              </a:rPr>
-              <a:t>3</a:t>
-            </a:r>
-          </a:p>
-        </p:txBody>
-      </p:sp>
-      <p:sp>
-        <p:nvSpPr>
-          <p:cNvPr id="13" name="TextBox 12"/>
-          <p:cNvSpPr txBox="1"/>
-          <p:nvPr/>
-        </p:nvSpPr>
-        <p:spPr>
-          <a:xfrm>
-            <a:off x="1560000" y="5100000"/>
-            <a:ext cx="22464000" cy="900000"/>
-          </a:xfrm>
-          <a:prstGeom prst="rect">
-            <a:avLst/>
-          </a:prstGeom>
-          <a:noFill/>
-        </p:spPr>
-        <p:txBody>
-          <a:bodyPr wrap="square" anchor="ctr">
-            <a:spAutoFit/>
-          </a:bodyPr>
-          <a:lstStyle/>
-          <a:p>
             <a:pPr algn="l"/>
             <a:r>
-              <a:rPr sz="3200" b="0">
+              <a:rPr sz="2800" b="0">
                 <a:solidFill>
                   <a:srgbClr val="333333"/>
                 </a:solidFill>
@@ -7977,23 +5716,68 @@
                 <a:ea typeface="Open Sans"/>
                 <a:cs typeface="Open Sans"/>
               </a:rPr>
-              <a:t>Производственные травмы</a:t>
-            </a:r>
-          </a:p>
-        </p:txBody>
-      </p:sp>
-      <p:sp>
-        <p:nvSpPr>
-          <p:cNvPr id="14" name="Rounded Rectangle 13"/>
+              <a:t>Сначала останавливаем кровь, затем подробный осмотр</a:t>
+            </a:r>
+          </a:p>
+        </p:txBody>
+      </p:sp>
+      <p:sp>
+        <p:nvSpPr>
+          <p:cNvPr id="14" name="Rectangle 13"/>
           <p:cNvSpPr/>
           <p:nvPr/>
         </p:nvSpPr>
         <p:spPr>
           <a:xfrm>
-            <a:off x="360000" y="6700000"/>
-            <a:ext cx="900000" cy="900000"/>
-          </a:xfrm>
-          <a:prstGeom prst="roundRect">
+            <a:off x="800000" y="7700000"/>
+            <a:ext cx="22800000" cy="1600000"/>
+          </a:xfrm>
+          <a:prstGeom prst="rect">
+            <a:avLst/>
+          </a:prstGeom>
+          <a:solidFill>
+            <a:srgbClr val="FFFFFF"/>
+          </a:solidFill>
+          <a:ln w="12700">
+            <a:solidFill>
+              <a:srgbClr val="E1E1E1"/>
+            </a:solidFill>
+          </a:ln>
+        </p:spPr>
+        <p:style>
+          <a:lnRef idx="1">
+            <a:schemeClr val="accent1"/>
+          </a:lnRef>
+          <a:fillRef idx="3">
+            <a:schemeClr val="accent1"/>
+          </a:fillRef>
+          <a:effectRef idx="2">
+            <a:schemeClr val="accent1"/>
+          </a:effectRef>
+          <a:fontRef idx="minor">
+            <a:schemeClr val="lt1"/>
+          </a:fontRef>
+        </p:style>
+        <p:txBody>
+          <a:bodyPr rtlCol="0" anchor="ctr"/>
+          <a:lstStyle/>
+          <a:p>
+            <a:pPr algn="ctr"/>
+          </a:p>
+        </p:txBody>
+      </p:sp>
+      <p:sp>
+        <p:nvSpPr>
+          <p:cNvPr id="15" name="Rectangle 14"/>
+          <p:cNvSpPr/>
+          <p:nvPr/>
+        </p:nvSpPr>
+        <p:spPr>
+          <a:xfrm>
+            <a:off x="800000" y="7700000"/>
+            <a:ext cx="120000" cy="1600000"/>
+          </a:xfrm>
+          <a:prstGeom prst="rect">
             <a:avLst/>
           </a:prstGeom>
           <a:solidFill>
@@ -8027,14 +5811,14 @@
       </p:sp>
       <p:sp>
         <p:nvSpPr>
-          <p:cNvPr id="15" name="TextBox 14"/>
+          <p:cNvPr id="16" name="TextBox 15"/>
           <p:cNvSpPr txBox="1"/>
           <p:nvPr/>
         </p:nvSpPr>
         <p:spPr>
           <a:xfrm>
-            <a:off x="360000" y="6700000"/>
-            <a:ext cx="900000" cy="900000"/>
+            <a:off x="1300000" y="8050000"/>
+            <a:ext cx="21500000" cy="900000"/>
           </a:xfrm>
           <a:prstGeom prst="rect">
             <a:avLst/>
@@ -8047,46 +5831,9 @@
           </a:bodyPr>
           <a:lstStyle/>
           <a:p>
-            <a:pPr algn="ctr"/>
-            <a:r>
-              <a:rPr sz="2200" b="1">
-                <a:solidFill>
-                  <a:srgbClr val="FFFFFF"/>
-                </a:solidFill>
-                <a:latin typeface="Open Sans"/>
-                <a:ea typeface="Open Sans"/>
-                <a:cs typeface="Open Sans"/>
-              </a:rPr>
-              <a:t>4</a:t>
-            </a:r>
-          </a:p>
-        </p:txBody>
-      </p:sp>
-      <p:sp>
-        <p:nvSpPr>
-          <p:cNvPr id="16" name="TextBox 15"/>
-          <p:cNvSpPr txBox="1"/>
-          <p:nvPr/>
-        </p:nvSpPr>
-        <p:spPr>
-          <a:xfrm>
-            <a:off x="1560000" y="6700000"/>
-            <a:ext cx="22464000" cy="900000"/>
-          </a:xfrm>
-          <a:prstGeom prst="rect">
-            <a:avLst/>
-          </a:prstGeom>
-          <a:noFill/>
-        </p:spPr>
-        <p:txBody>
-          <a:bodyPr wrap="square" anchor="ctr">
-            <a:spAutoFit/>
-          </a:bodyPr>
-          <a:lstStyle/>
-          <a:p>
             <a:pPr algn="l"/>
             <a:r>
-              <a:rPr sz="3200" b="0">
+              <a:rPr sz="2800" b="0">
                 <a:solidFill>
                   <a:srgbClr val="333333"/>
                 </a:solidFill>
@@ -8094,7 +5841,44 @@
                 <a:ea typeface="Open Sans"/>
                 <a:cs typeface="Open Sans"/>
               </a:rPr>
-              <a:t>Несколько пострадавших</a:t>
+              <a:t>Особенно важен при ДТП и падении с высоты</a:t>
+            </a:r>
+          </a:p>
+        </p:txBody>
+      </p:sp>
+      <p:sp>
+        <p:nvSpPr>
+          <p:cNvPr id="17" name="TextBox 16"/>
+          <p:cNvSpPr txBox="1"/>
+          <p:nvPr/>
+        </p:nvSpPr>
+        <p:spPr>
+          <a:xfrm>
+            <a:off x="800000" y="11500000"/>
+            <a:ext cx="22800000" cy="1000000"/>
+          </a:xfrm>
+          <a:prstGeom prst="rect">
+            <a:avLst/>
+          </a:prstGeom>
+          <a:noFill/>
+        </p:spPr>
+        <p:txBody>
+          <a:bodyPr wrap="square" anchor="t">
+            <a:spAutoFit/>
+          </a:bodyPr>
+          <a:lstStyle/>
+          <a:p>
+            <a:pPr algn="ctr"/>
+            <a:r>
+              <a:rPr sz="2600" b="1">
+                <a:solidFill>
+                  <a:srgbClr val="CC0000"/>
+                </a:solidFill>
+                <a:latin typeface="Open Sans"/>
+                <a:ea typeface="Open Sans"/>
+                <a:cs typeface="Open Sans"/>
+              </a:rPr>
+              <a:t>Время — критический фактор!</a:t>
             </a:r>
           </a:p>
         </p:txBody>
@@ -8117,12 +5901,20 @@
         <p:nvPr/>
       </p:nvGrpSpPr>
       <p:grpSpPr/>
-      <p:sp>
-        <p:nvSpPr>
-          <p:cNvPr id="2" name="Rectangle 1"/>
-          <p:cNvSpPr/>
+      <p:pic>
+        <p:nvPicPr>
+          <p:cNvPr id="2" name="Picture 1" descr="page_28.png"/>
+          <p:cNvPicPr>
+            <a:picLocks noChangeAspect="1"/>
+          </p:cNvPicPr>
           <p:nvPr/>
-        </p:nvSpPr>
+        </p:nvPicPr>
+        <p:blipFill>
+          <a:blip r:embed="rId2"/>
+          <a:stretch>
+            <a:fillRect/>
+          </a:stretch>
+        </p:blipFill>
         <p:spPr>
           <a:xfrm>
             <a:off x="0" y="0"/>
@@ -8131,620 +5923,8 @@
           <a:prstGeom prst="rect">
             <a:avLst/>
           </a:prstGeom>
-          <a:solidFill>
-            <a:srgbClr val="FFFFFF"/>
-          </a:solidFill>
-          <a:ln>
-            <a:noFill/>
-          </a:ln>
-        </p:spPr>
-        <p:style>
-          <a:lnRef idx="1">
-            <a:schemeClr val="accent1"/>
-          </a:lnRef>
-          <a:fillRef idx="3">
-            <a:schemeClr val="accent1"/>
-          </a:fillRef>
-          <a:effectRef idx="2">
-            <a:schemeClr val="accent1"/>
-          </a:effectRef>
-          <a:fontRef idx="minor">
-            <a:schemeClr val="lt1"/>
-          </a:fontRef>
-        </p:style>
-        <p:txBody>
-          <a:bodyPr rtlCol="0" anchor="ctr"/>
-          <a:lstStyle/>
-          <a:p>
-            <a:pPr algn="ctr"/>
-          </a:p>
-        </p:txBody>
-      </p:sp>
-      <p:sp>
-        <p:nvSpPr>
-          <p:cNvPr id="3" name="TextBox 2"/>
-          <p:cNvSpPr txBox="1"/>
-          <p:nvPr/>
-        </p:nvSpPr>
-        <p:spPr>
-          <a:xfrm>
-            <a:off x="360000" y="350000"/>
-            <a:ext cx="23664000" cy="1100000"/>
-          </a:xfrm>
-          <a:prstGeom prst="rect">
-            <a:avLst/>
-          </a:prstGeom>
-          <a:noFill/>
-        </p:spPr>
-        <p:txBody>
-          <a:bodyPr wrap="square" anchor="t">
-            <a:spAutoFit/>
-          </a:bodyPr>
-          <a:lstStyle/>
-          <a:p>
-            <a:pPr algn="ctr"/>
-            <a:r>
-              <a:rPr sz="4600" b="1">
-                <a:solidFill>
-                  <a:srgbClr val="333333"/>
-                </a:solidFill>
-                <a:latin typeface="Open Sans"/>
-                <a:ea typeface="Open Sans"/>
-                <a:cs typeface="Open Sans"/>
-              </a:rPr>
-              <a:t>Главное запомнить</a:t>
-            </a:r>
-          </a:p>
-        </p:txBody>
-      </p:sp>
-      <p:sp>
-        <p:nvSpPr>
-          <p:cNvPr id="4" name="Rectangle 3"/>
-          <p:cNvSpPr/>
-          <p:nvPr/>
-        </p:nvSpPr>
-        <p:spPr>
-          <a:xfrm>
-            <a:off x="360000" y="1450000"/>
-            <a:ext cx="23664000" cy="20000"/>
-          </a:xfrm>
-          <a:prstGeom prst="rect">
-            <a:avLst/>
-          </a:prstGeom>
-          <a:solidFill>
-            <a:srgbClr val="E1E1E1"/>
-          </a:solidFill>
-          <a:ln>
-            <a:noFill/>
-          </a:ln>
-        </p:spPr>
-        <p:style>
-          <a:lnRef idx="1">
-            <a:schemeClr val="accent1"/>
-          </a:lnRef>
-          <a:fillRef idx="3">
-            <a:schemeClr val="accent1"/>
-          </a:fillRef>
-          <a:effectRef idx="2">
-            <a:schemeClr val="accent1"/>
-          </a:effectRef>
-          <a:fontRef idx="minor">
-            <a:schemeClr val="lt1"/>
-          </a:fontRef>
-        </p:style>
-        <p:txBody>
-          <a:bodyPr rtlCol="0" anchor="ctr"/>
-          <a:lstStyle/>
-          <a:p>
-            <a:pPr algn="ctr"/>
-          </a:p>
-        </p:txBody>
-      </p:sp>
-      <p:sp>
-        <p:nvSpPr>
-          <p:cNvPr id="5" name="Oval 4"/>
-          <p:cNvSpPr/>
-          <p:nvPr/>
-        </p:nvSpPr>
-        <p:spPr>
-          <a:xfrm>
-            <a:off x="1860000" y="2150000"/>
-            <a:ext cx="600000" cy="600000"/>
-          </a:xfrm>
-          <a:prstGeom prst="ellipse">
-            <a:avLst/>
-          </a:prstGeom>
-          <a:solidFill>
-            <a:srgbClr val="0055AA"/>
-          </a:solidFill>
-          <a:ln>
-            <a:noFill/>
-          </a:ln>
-        </p:spPr>
-        <p:style>
-          <a:lnRef idx="1">
-            <a:schemeClr val="accent1"/>
-          </a:lnRef>
-          <a:fillRef idx="3">
-            <a:schemeClr val="accent1"/>
-          </a:fillRef>
-          <a:effectRef idx="2">
-            <a:schemeClr val="accent1"/>
-          </a:effectRef>
-          <a:fontRef idx="minor">
-            <a:schemeClr val="lt1"/>
-          </a:fontRef>
-        </p:style>
-        <p:txBody>
-          <a:bodyPr rtlCol="0" anchor="ctr"/>
-          <a:lstStyle/>
-          <a:p>
-            <a:pPr algn="ctr"/>
-          </a:p>
-        </p:txBody>
-      </p:sp>
-      <p:sp>
-        <p:nvSpPr>
-          <p:cNvPr id="6" name="TextBox 5"/>
-          <p:cNvSpPr txBox="1"/>
-          <p:nvPr/>
-        </p:nvSpPr>
-        <p:spPr>
-          <a:xfrm>
-            <a:off x="1860000" y="2150000"/>
-            <a:ext cx="600000" cy="600000"/>
-          </a:xfrm>
-          <a:prstGeom prst="rect">
-            <a:avLst/>
-          </a:prstGeom>
-          <a:noFill/>
-        </p:spPr>
-        <p:txBody>
-          <a:bodyPr wrap="square" anchor="ctr">
-            <a:spAutoFit/>
-          </a:bodyPr>
-          <a:lstStyle/>
-          <a:p>
-            <a:pPr algn="ctr"/>
-            <a:r>
-              <a:rPr sz="2400" b="1">
-                <a:solidFill>
-                  <a:srgbClr val="FFFFFF"/>
-                </a:solidFill>
-                <a:latin typeface="Open Sans"/>
-                <a:ea typeface="Open Sans"/>
-                <a:cs typeface="Open Sans"/>
-              </a:rPr>
-              <a:t>OK</a:t>
-            </a:r>
-          </a:p>
-        </p:txBody>
-      </p:sp>
-      <p:sp>
-        <p:nvSpPr>
-          <p:cNvPr id="7" name="TextBox 6"/>
-          <p:cNvSpPr txBox="1"/>
-          <p:nvPr/>
-        </p:nvSpPr>
-        <p:spPr>
-          <a:xfrm>
-            <a:off x="2860000" y="2000000"/>
-            <a:ext cx="18000000" cy="900000"/>
-          </a:xfrm>
-          <a:prstGeom prst="rect">
-            <a:avLst/>
-          </a:prstGeom>
-          <a:noFill/>
-        </p:spPr>
-        <p:txBody>
-          <a:bodyPr wrap="square" anchor="ctr">
-            <a:spAutoFit/>
-          </a:bodyPr>
-          <a:lstStyle/>
-          <a:p>
-            <a:pPr algn="l"/>
-            <a:r>
-              <a:rPr sz="2800" b="0">
-                <a:solidFill>
-                  <a:srgbClr val="333333"/>
-                </a:solidFill>
-                <a:latin typeface="Open Sans"/>
-                <a:ea typeface="Open Sans"/>
-                <a:cs typeface="Open Sans"/>
-              </a:rPr>
-              <a:t>Кровотечение — выход крови с риском острой кровопотери</a:t>
-            </a:r>
-          </a:p>
-        </p:txBody>
-      </p:sp>
-      <p:sp>
-        <p:nvSpPr>
-          <p:cNvPr id="8" name="Oval 7"/>
-          <p:cNvSpPr/>
-          <p:nvPr/>
-        </p:nvSpPr>
-        <p:spPr>
-          <a:xfrm>
-            <a:off x="1860000" y="3750000"/>
-            <a:ext cx="600000" cy="600000"/>
-          </a:xfrm>
-          <a:prstGeom prst="ellipse">
-            <a:avLst/>
-          </a:prstGeom>
-          <a:solidFill>
-            <a:srgbClr val="0055AA"/>
-          </a:solidFill>
-          <a:ln>
-            <a:noFill/>
-          </a:ln>
-        </p:spPr>
-        <p:style>
-          <a:lnRef idx="1">
-            <a:schemeClr val="accent1"/>
-          </a:lnRef>
-          <a:fillRef idx="3">
-            <a:schemeClr val="accent1"/>
-          </a:fillRef>
-          <a:effectRef idx="2">
-            <a:schemeClr val="accent1"/>
-          </a:effectRef>
-          <a:fontRef idx="minor">
-            <a:schemeClr val="lt1"/>
-          </a:fontRef>
-        </p:style>
-        <p:txBody>
-          <a:bodyPr rtlCol="0" anchor="ctr"/>
-          <a:lstStyle/>
-          <a:p>
-            <a:pPr algn="ctr"/>
-          </a:p>
-        </p:txBody>
-      </p:sp>
-      <p:sp>
-        <p:nvSpPr>
-          <p:cNvPr id="9" name="TextBox 8"/>
-          <p:cNvSpPr txBox="1"/>
-          <p:nvPr/>
-        </p:nvSpPr>
-        <p:spPr>
-          <a:xfrm>
-            <a:off x="1860000" y="3750000"/>
-            <a:ext cx="600000" cy="600000"/>
-          </a:xfrm>
-          <a:prstGeom prst="rect">
-            <a:avLst/>
-          </a:prstGeom>
-          <a:noFill/>
-        </p:spPr>
-        <p:txBody>
-          <a:bodyPr wrap="square" anchor="ctr">
-            <a:spAutoFit/>
-          </a:bodyPr>
-          <a:lstStyle/>
-          <a:p>
-            <a:pPr algn="ctr"/>
-            <a:r>
-              <a:rPr sz="2400" b="1">
-                <a:solidFill>
-                  <a:srgbClr val="FFFFFF"/>
-                </a:solidFill>
-                <a:latin typeface="Open Sans"/>
-                <a:ea typeface="Open Sans"/>
-                <a:cs typeface="Open Sans"/>
-              </a:rPr>
-              <a:t>OK</a:t>
-            </a:r>
-          </a:p>
-        </p:txBody>
-      </p:sp>
-      <p:sp>
-        <p:nvSpPr>
-          <p:cNvPr id="10" name="TextBox 9"/>
-          <p:cNvSpPr txBox="1"/>
-          <p:nvPr/>
-        </p:nvSpPr>
-        <p:spPr>
-          <a:xfrm>
-            <a:off x="2860000" y="3600000"/>
-            <a:ext cx="18000000" cy="900000"/>
-          </a:xfrm>
-          <a:prstGeom prst="rect">
-            <a:avLst/>
-          </a:prstGeom>
-          <a:noFill/>
-        </p:spPr>
-        <p:txBody>
-          <a:bodyPr wrap="square" anchor="ctr">
-            <a:spAutoFit/>
-          </a:bodyPr>
-          <a:lstStyle/>
-          <a:p>
-            <a:pPr algn="l"/>
-            <a:r>
-              <a:rPr sz="2800" b="0">
-                <a:solidFill>
-                  <a:srgbClr val="333333"/>
-                </a:solidFill>
-                <a:latin typeface="Open Sans"/>
-                <a:ea typeface="Open Sans"/>
-                <a:cs typeface="Open Sans"/>
-              </a:rPr>
-              <a:t>Обзорный осмотр — быстрый поиск кровотечения (1–2 с)</a:t>
-            </a:r>
-          </a:p>
-        </p:txBody>
-      </p:sp>
-      <p:sp>
-        <p:nvSpPr>
-          <p:cNvPr id="11" name="Oval 10"/>
-          <p:cNvSpPr/>
-          <p:nvPr/>
-        </p:nvSpPr>
-        <p:spPr>
-          <a:xfrm>
-            <a:off x="1860000" y="5350000"/>
-            <a:ext cx="600000" cy="600000"/>
-          </a:xfrm>
-          <a:prstGeom prst="ellipse">
-            <a:avLst/>
-          </a:prstGeom>
-          <a:solidFill>
-            <a:srgbClr val="0055AA"/>
-          </a:solidFill>
-          <a:ln>
-            <a:noFill/>
-          </a:ln>
-        </p:spPr>
-        <p:style>
-          <a:lnRef idx="1">
-            <a:schemeClr val="accent1"/>
-          </a:lnRef>
-          <a:fillRef idx="3">
-            <a:schemeClr val="accent1"/>
-          </a:fillRef>
-          <a:effectRef idx="2">
-            <a:schemeClr val="accent1"/>
-          </a:effectRef>
-          <a:fontRef idx="minor">
-            <a:schemeClr val="lt1"/>
-          </a:fontRef>
-        </p:style>
-        <p:txBody>
-          <a:bodyPr rtlCol="0" anchor="ctr"/>
-          <a:lstStyle/>
-          <a:p>
-            <a:pPr algn="ctr"/>
-          </a:p>
-        </p:txBody>
-      </p:sp>
-      <p:sp>
-        <p:nvSpPr>
-          <p:cNvPr id="12" name="TextBox 11"/>
-          <p:cNvSpPr txBox="1"/>
-          <p:nvPr/>
-        </p:nvSpPr>
-        <p:spPr>
-          <a:xfrm>
-            <a:off x="1860000" y="5350000"/>
-            <a:ext cx="600000" cy="600000"/>
-          </a:xfrm>
-          <a:prstGeom prst="rect">
-            <a:avLst/>
-          </a:prstGeom>
-          <a:noFill/>
-        </p:spPr>
-        <p:txBody>
-          <a:bodyPr wrap="square" anchor="ctr">
-            <a:spAutoFit/>
-          </a:bodyPr>
-          <a:lstStyle/>
-          <a:p>
-            <a:pPr algn="ctr"/>
-            <a:r>
-              <a:rPr sz="2400" b="1">
-                <a:solidFill>
-                  <a:srgbClr val="FFFFFF"/>
-                </a:solidFill>
-                <a:latin typeface="Open Sans"/>
-                <a:ea typeface="Open Sans"/>
-                <a:cs typeface="Open Sans"/>
-              </a:rPr>
-              <a:t>OK</a:t>
-            </a:r>
-          </a:p>
-        </p:txBody>
-      </p:sp>
-      <p:sp>
-        <p:nvSpPr>
-          <p:cNvPr id="13" name="TextBox 12"/>
-          <p:cNvSpPr txBox="1"/>
-          <p:nvPr/>
-        </p:nvSpPr>
-        <p:spPr>
-          <a:xfrm>
-            <a:off x="2860000" y="5200000"/>
-            <a:ext cx="18000000" cy="900000"/>
-          </a:xfrm>
-          <a:prstGeom prst="rect">
-            <a:avLst/>
-          </a:prstGeom>
-          <a:noFill/>
-        </p:spPr>
-        <p:txBody>
-          <a:bodyPr wrap="square" anchor="ctr">
-            <a:spAutoFit/>
-          </a:bodyPr>
-          <a:lstStyle/>
-          <a:p>
-            <a:pPr algn="l"/>
-            <a:r>
-              <a:rPr sz="2800" b="0">
-                <a:solidFill>
-                  <a:srgbClr val="333333"/>
-                </a:solidFill>
-                <a:latin typeface="Open Sans"/>
-                <a:ea typeface="Open Sans"/>
-                <a:cs typeface="Open Sans"/>
-              </a:rPr>
-              <a:t>Сначала останавливаем кровь, затем подробный осмотр</a:t>
-            </a:r>
-          </a:p>
-        </p:txBody>
-      </p:sp>
-      <p:sp>
-        <p:nvSpPr>
-          <p:cNvPr id="14" name="Oval 13"/>
-          <p:cNvSpPr/>
-          <p:nvPr/>
-        </p:nvSpPr>
-        <p:spPr>
-          <a:xfrm>
-            <a:off x="1860000" y="6950000"/>
-            <a:ext cx="600000" cy="600000"/>
-          </a:xfrm>
-          <a:prstGeom prst="ellipse">
-            <a:avLst/>
-          </a:prstGeom>
-          <a:solidFill>
-            <a:srgbClr val="0055AA"/>
-          </a:solidFill>
-          <a:ln>
-            <a:noFill/>
-          </a:ln>
-        </p:spPr>
-        <p:style>
-          <a:lnRef idx="1">
-            <a:schemeClr val="accent1"/>
-          </a:lnRef>
-          <a:fillRef idx="3">
-            <a:schemeClr val="accent1"/>
-          </a:fillRef>
-          <a:effectRef idx="2">
-            <a:schemeClr val="accent1"/>
-          </a:effectRef>
-          <a:fontRef idx="minor">
-            <a:schemeClr val="lt1"/>
-          </a:fontRef>
-        </p:style>
-        <p:txBody>
-          <a:bodyPr rtlCol="0" anchor="ctr"/>
-          <a:lstStyle/>
-          <a:p>
-            <a:pPr algn="ctr"/>
-          </a:p>
-        </p:txBody>
-      </p:sp>
-      <p:sp>
-        <p:nvSpPr>
-          <p:cNvPr id="15" name="TextBox 14"/>
-          <p:cNvSpPr txBox="1"/>
-          <p:nvPr/>
-        </p:nvSpPr>
-        <p:spPr>
-          <a:xfrm>
-            <a:off x="1860000" y="6950000"/>
-            <a:ext cx="600000" cy="600000"/>
-          </a:xfrm>
-          <a:prstGeom prst="rect">
-            <a:avLst/>
-          </a:prstGeom>
-          <a:noFill/>
-        </p:spPr>
-        <p:txBody>
-          <a:bodyPr wrap="square" anchor="ctr">
-            <a:spAutoFit/>
-          </a:bodyPr>
-          <a:lstStyle/>
-          <a:p>
-            <a:pPr algn="ctr"/>
-            <a:r>
-              <a:rPr sz="2400" b="1">
-                <a:solidFill>
-                  <a:srgbClr val="FFFFFF"/>
-                </a:solidFill>
-                <a:latin typeface="Open Sans"/>
-                <a:ea typeface="Open Sans"/>
-                <a:cs typeface="Open Sans"/>
-              </a:rPr>
-              <a:t>OK</a:t>
-            </a:r>
-          </a:p>
-        </p:txBody>
-      </p:sp>
-      <p:sp>
-        <p:nvSpPr>
-          <p:cNvPr id="16" name="TextBox 15"/>
-          <p:cNvSpPr txBox="1"/>
-          <p:nvPr/>
-        </p:nvSpPr>
-        <p:spPr>
-          <a:xfrm>
-            <a:off x="2860000" y="6800000"/>
-            <a:ext cx="18000000" cy="900000"/>
-          </a:xfrm>
-          <a:prstGeom prst="rect">
-            <a:avLst/>
-          </a:prstGeom>
-          <a:noFill/>
-        </p:spPr>
-        <p:txBody>
-          <a:bodyPr wrap="square" anchor="ctr">
-            <a:spAutoFit/>
-          </a:bodyPr>
-          <a:lstStyle/>
-          <a:p>
-            <a:pPr algn="l"/>
-            <a:r>
-              <a:rPr sz="2800" b="0">
-                <a:solidFill>
-                  <a:srgbClr val="333333"/>
-                </a:solidFill>
-                <a:latin typeface="Open Sans"/>
-                <a:ea typeface="Open Sans"/>
-                <a:cs typeface="Open Sans"/>
-              </a:rPr>
-              <a:t>Особенно важен при ДТП и падении с высоты</a:t>
-            </a:r>
-          </a:p>
-        </p:txBody>
-      </p:sp>
-      <p:sp>
-        <p:nvSpPr>
-          <p:cNvPr id="17" name="TextBox 16"/>
-          <p:cNvSpPr txBox="1"/>
-          <p:nvPr/>
-        </p:nvSpPr>
-        <p:spPr>
-          <a:xfrm>
-            <a:off x="360000" y="11200000"/>
-            <a:ext cx="23664000" cy="1200000"/>
-          </a:xfrm>
-          <a:prstGeom prst="rect">
-            <a:avLst/>
-          </a:prstGeom>
-          <a:noFill/>
-        </p:spPr>
-        <p:txBody>
-          <a:bodyPr wrap="square" anchor="t">
-            <a:spAutoFit/>
-          </a:bodyPr>
-          <a:lstStyle/>
-          <a:p>
-            <a:pPr algn="ctr"/>
-            <a:r>
-              <a:rPr sz="2600" b="1">
-                <a:solidFill>
-                  <a:srgbClr val="CC0000"/>
-                </a:solidFill>
-                <a:latin typeface="Open Sans"/>
-                <a:ea typeface="Open Sans"/>
-                <a:cs typeface="Open Sans"/>
-              </a:rPr>
-              <a:t>Время — критический фактор!</a:t>
-            </a:r>
-          </a:p>
-        </p:txBody>
-      </p:sp>
+        </p:spPr>
+      </p:pic>
     </p:spTree>
   </p:cSld>
   <p:clrMapOvr>

--- a/tema2_bleeding/Кровотечение_и_обзорный_осмотр.pptx
+++ b/tema2_bleeding/Кровотечение_и_обзорный_осмотр.pptx
@@ -3096,20 +3096,12 @@
         <p:nvPr/>
       </p:nvGrpSpPr>
       <p:grpSpPr/>
-      <p:pic>
-        <p:nvPicPr>
-          <p:cNvPr id="2" name="Picture 1" descr="page_01.png"/>
-          <p:cNvPicPr>
-            <a:picLocks noChangeAspect="1"/>
-          </p:cNvPicPr>
-          <p:nvPr/>
-        </p:nvPicPr>
-        <p:blipFill>
-          <a:blip r:embed="rId2"/>
-          <a:stretch>
-            <a:fillRect/>
-          </a:stretch>
-        </p:blipFill>
+      <p:sp>
+        <p:nvSpPr>
+          <p:cNvPr id="2" name="Rectangle 1"/>
+          <p:cNvSpPr/>
+          <p:nvPr/>
+        </p:nvSpPr>
         <p:spPr>
           <a:xfrm>
             <a:off x="0" y="0"/>
@@ -3118,8 +3110,202 @@
           <a:prstGeom prst="rect">
             <a:avLst/>
           </a:prstGeom>
-        </p:spPr>
-      </p:pic>
+          <a:solidFill>
+            <a:srgbClr val="FFFFFF"/>
+          </a:solidFill>
+          <a:ln>
+            <a:noFill/>
+          </a:ln>
+        </p:spPr>
+        <p:style>
+          <a:lnRef idx="1">
+            <a:schemeClr val="accent1"/>
+          </a:lnRef>
+          <a:fillRef idx="3">
+            <a:schemeClr val="accent1"/>
+          </a:fillRef>
+          <a:effectRef idx="2">
+            <a:schemeClr val="accent1"/>
+          </a:effectRef>
+          <a:fontRef idx="minor">
+            <a:schemeClr val="lt1"/>
+          </a:fontRef>
+        </p:style>
+        <p:txBody>
+          <a:bodyPr rtlCol="0" anchor="ctr"/>
+          <a:lstStyle/>
+          <a:p>
+            <a:pPr algn="ctr"/>
+          </a:p>
+        </p:txBody>
+      </p:sp>
+      <p:sp>
+        <p:nvSpPr>
+          <p:cNvPr id="3" name="Rectangle 2"/>
+          <p:cNvSpPr/>
+          <p:nvPr/>
+        </p:nvSpPr>
+        <p:spPr>
+          <a:xfrm>
+            <a:off x="0" y="4200000"/>
+            <a:ext cx="4000000" cy="2800000"/>
+          </a:xfrm>
+          <a:prstGeom prst="rect">
+            <a:avLst/>
+          </a:prstGeom>
+          <a:solidFill>
+            <a:srgbClr val="DDDDDD"/>
+          </a:solidFill>
+          <a:ln>
+            <a:noFill/>
+          </a:ln>
+        </p:spPr>
+        <p:style>
+          <a:lnRef idx="1">
+            <a:schemeClr val="accent1"/>
+          </a:lnRef>
+          <a:fillRef idx="3">
+            <a:schemeClr val="accent1"/>
+          </a:fillRef>
+          <a:effectRef idx="2">
+            <a:schemeClr val="accent1"/>
+          </a:effectRef>
+          <a:fontRef idx="minor">
+            <a:schemeClr val="lt1"/>
+          </a:fontRef>
+        </p:style>
+        <p:txBody>
+          <a:bodyPr rtlCol="0" anchor="ctr"/>
+          <a:lstStyle/>
+          <a:p>
+            <a:pPr algn="ctr"/>
+          </a:p>
+        </p:txBody>
+      </p:sp>
+      <p:sp>
+        <p:nvSpPr>
+          <p:cNvPr id="4" name="Rectangle 3"/>
+          <p:cNvSpPr/>
+          <p:nvPr/>
+        </p:nvSpPr>
+        <p:spPr>
+          <a:xfrm>
+            <a:off x="23000000" y="0"/>
+            <a:ext cx="1384000" cy="13716000"/>
+          </a:xfrm>
+          <a:prstGeom prst="rect">
+            <a:avLst/>
+          </a:prstGeom>
+          <a:solidFill>
+            <a:srgbClr val="DDDDDD"/>
+          </a:solidFill>
+          <a:ln>
+            <a:noFill/>
+          </a:ln>
+        </p:spPr>
+        <p:style>
+          <a:lnRef idx="1">
+            <a:schemeClr val="accent1"/>
+          </a:lnRef>
+          <a:fillRef idx="3">
+            <a:schemeClr val="accent1"/>
+          </a:fillRef>
+          <a:effectRef idx="2">
+            <a:schemeClr val="accent1"/>
+          </a:effectRef>
+          <a:fontRef idx="minor">
+            <a:schemeClr val="lt1"/>
+          </a:fontRef>
+        </p:style>
+        <p:txBody>
+          <a:bodyPr rtlCol="0" anchor="ctr"/>
+          <a:lstStyle/>
+          <a:p>
+            <a:pPr algn="ctr"/>
+          </a:p>
+        </p:txBody>
+      </p:sp>
+      <p:sp>
+        <p:nvSpPr>
+          <p:cNvPr id="5" name="TextBox 4"/>
+          <p:cNvSpPr txBox="1"/>
+          <p:nvPr/>
+        </p:nvSpPr>
+        <p:spPr>
+          <a:xfrm>
+            <a:off x="700000" y="4800000"/>
+            <a:ext cx="21000000" cy="1800000"/>
+          </a:xfrm>
+          <a:prstGeom prst="rect">
+            <a:avLst/>
+          </a:prstGeom>
+          <a:noFill/>
+        </p:spPr>
+        <p:txBody>
+          <a:bodyPr wrap="square" anchor="t">
+            <a:spAutoFit/>
+          </a:bodyPr>
+          <a:lstStyle/>
+          <a:p>
+            <a:pPr algn="l"/>
+            <a:r>
+              <a:rPr sz="3600" b="1">
+                <a:solidFill>
+                  <a:srgbClr val="333333"/>
+                </a:solidFill>
+                <a:latin typeface="Open Sans"/>
+                <a:ea typeface="Open Sans"/>
+                <a:cs typeface="Open Sans"/>
+              </a:rPr>
+              <a:t>ОКАЗАНИЕ ПЕРВОЙ ПОМОЩИ ПРИ НАРУЖНЫХ
+КРОВОТЕЧЕНИЯХ И ТРАВМАХ</a:t>
+            </a:r>
+          </a:p>
+        </p:txBody>
+      </p:sp>
+      <p:sp>
+        <p:nvSpPr>
+          <p:cNvPr id="6" name="Rectangle 5"/>
+          <p:cNvSpPr/>
+          <p:nvPr/>
+        </p:nvSpPr>
+        <p:spPr>
+          <a:xfrm>
+            <a:off x="700000" y="6800000"/>
+            <a:ext cx="14000000" cy="25000"/>
+          </a:xfrm>
+          <a:prstGeom prst="rect">
+            <a:avLst/>
+          </a:prstGeom>
+          <a:solidFill>
+            <a:srgbClr val="333333"/>
+          </a:solidFill>
+          <a:ln>
+            <a:noFill/>
+          </a:ln>
+        </p:spPr>
+        <p:style>
+          <a:lnRef idx="1">
+            <a:schemeClr val="accent1"/>
+          </a:lnRef>
+          <a:fillRef idx="3">
+            <a:schemeClr val="accent1"/>
+          </a:fillRef>
+          <a:effectRef idx="2">
+            <a:schemeClr val="accent1"/>
+          </a:effectRef>
+          <a:fontRef idx="minor">
+            <a:schemeClr val="lt1"/>
+          </a:fontRef>
+        </p:style>
+        <p:txBody>
+          <a:bodyPr rtlCol="0" anchor="ctr"/>
+          <a:lstStyle/>
+          <a:p>
+            <a:pPr algn="ctr"/>
+          </a:p>
+        </p:txBody>
+      </p:sp>
     </p:spTree>
   </p:cSld>
   <p:clrMapOvr>
@@ -3189,8 +3375,8 @@
         </p:nvSpPr>
         <p:spPr>
           <a:xfrm>
-            <a:off x="800000" y="400000"/>
-            <a:ext cx="22800000" cy="1000000"/>
+            <a:off x="700000" y="300000"/>
+            <a:ext cx="23000000" cy="1100000"/>
           </a:xfrm>
           <a:prstGeom prst="rect">
             <a:avLst/>
@@ -3226,8 +3412,8 @@
         </p:nvSpPr>
         <p:spPr>
           <a:xfrm>
-            <a:off x="800000" y="1500000"/>
-            <a:ext cx="22800000" cy="20000"/>
+            <a:off x="700000" y="1500000"/>
+            <a:ext cx="23000000" cy="20000"/>
           </a:xfrm>
           <a:prstGeom prst="rect">
             <a:avLst/>
@@ -3269,7 +3455,7 @@
         </p:nvSpPr>
         <p:spPr>
           <a:xfrm>
-            <a:off x="800000" y="2000000"/>
+            <a:off x="700000" y="1900000"/>
             <a:ext cx="800000" cy="800000"/>
           </a:xfrm>
           <a:prstGeom prst="ellipse">
@@ -3312,7 +3498,7 @@
         </p:nvSpPr>
         <p:spPr>
           <a:xfrm>
-            <a:off x="800000" y="2000000"/>
+            <a:off x="700000" y="1900000"/>
             <a:ext cx="800000" cy="800000"/>
           </a:xfrm>
           <a:prstGeom prst="rect">
@@ -3349,7 +3535,7 @@
         </p:nvSpPr>
         <p:spPr>
           <a:xfrm>
-            <a:off x="1900000" y="2000000"/>
+            <a:off x="1800000" y="1900000"/>
             <a:ext cx="20500000" cy="800000"/>
           </a:xfrm>
           <a:prstGeom prst="rect">
@@ -3394,7 +3580,7 @@
         </p:nvSpPr>
         <p:spPr>
           <a:xfrm>
-            <a:off x="2200000" y="2000000"/>
+            <a:off x="2100000" y="1900000"/>
             <a:ext cx="19500000" cy="800000"/>
           </a:xfrm>
           <a:prstGeom prst="rect">
@@ -3410,7 +3596,7 @@
           <a:p>
             <a:pPr algn="l"/>
             <a:r>
-              <a:rPr sz="3200" b="0">
+              <a:rPr sz="2800" b="0">
                 <a:solidFill>
                   <a:srgbClr val="333333"/>
                 </a:solidFill>
@@ -3431,7 +3617,7 @@
         </p:nvSpPr>
         <p:spPr>
           <a:xfrm>
-            <a:off x="800000" y="3400000"/>
+            <a:off x="700000" y="3300000"/>
             <a:ext cx="800000" cy="800000"/>
           </a:xfrm>
           <a:prstGeom prst="ellipse">
@@ -3474,7 +3660,7 @@
         </p:nvSpPr>
         <p:spPr>
           <a:xfrm>
-            <a:off x="800000" y="3400000"/>
+            <a:off x="700000" y="3300000"/>
             <a:ext cx="800000" cy="800000"/>
           </a:xfrm>
           <a:prstGeom prst="rect">
@@ -3511,7 +3697,7 @@
         </p:nvSpPr>
         <p:spPr>
           <a:xfrm>
-            <a:off x="1900000" y="3400000"/>
+            <a:off x="1800000" y="3300000"/>
             <a:ext cx="20500000" cy="800000"/>
           </a:xfrm>
           <a:prstGeom prst="rect">
@@ -3556,7 +3742,7 @@
         </p:nvSpPr>
         <p:spPr>
           <a:xfrm>
-            <a:off x="2200000" y="3400000"/>
+            <a:off x="2100000" y="3300000"/>
             <a:ext cx="19500000" cy="800000"/>
           </a:xfrm>
           <a:prstGeom prst="rect">
@@ -3572,7 +3758,7 @@
           <a:p>
             <a:pPr algn="l"/>
             <a:r>
-              <a:rPr sz="3200" b="0">
+              <a:rPr sz="2800" b="0">
                 <a:solidFill>
                   <a:srgbClr val="333333"/>
                 </a:solidFill>
@@ -3593,7 +3779,7 @@
         </p:nvSpPr>
         <p:spPr>
           <a:xfrm>
-            <a:off x="800000" y="4800000"/>
+            <a:off x="700000" y="4700000"/>
             <a:ext cx="800000" cy="800000"/>
           </a:xfrm>
           <a:prstGeom prst="ellipse">
@@ -3636,7 +3822,7 @@
         </p:nvSpPr>
         <p:spPr>
           <a:xfrm>
-            <a:off x="800000" y="4800000"/>
+            <a:off x="700000" y="4700000"/>
             <a:ext cx="800000" cy="800000"/>
           </a:xfrm>
           <a:prstGeom prst="rect">
@@ -3673,7 +3859,7 @@
         </p:nvSpPr>
         <p:spPr>
           <a:xfrm>
-            <a:off x="1900000" y="4800000"/>
+            <a:off x="1800000" y="4700000"/>
             <a:ext cx="20500000" cy="800000"/>
           </a:xfrm>
           <a:prstGeom prst="rect">
@@ -3718,7 +3904,7 @@
         </p:nvSpPr>
         <p:spPr>
           <a:xfrm>
-            <a:off x="2200000" y="4800000"/>
+            <a:off x="2100000" y="4700000"/>
             <a:ext cx="19500000" cy="800000"/>
           </a:xfrm>
           <a:prstGeom prst="rect">
@@ -3734,7 +3920,7 @@
           <a:p>
             <a:pPr algn="l"/>
             <a:r>
-              <a:rPr sz="3200" b="0">
+              <a:rPr sz="2800" b="0">
                 <a:solidFill>
                   <a:srgbClr val="333333"/>
                 </a:solidFill>
@@ -3755,7 +3941,7 @@
         </p:nvSpPr>
         <p:spPr>
           <a:xfrm>
-            <a:off x="800000" y="6200000"/>
+            <a:off x="700000" y="6100000"/>
             <a:ext cx="800000" cy="800000"/>
           </a:xfrm>
           <a:prstGeom prst="ellipse">
@@ -3798,7 +3984,7 @@
         </p:nvSpPr>
         <p:spPr>
           <a:xfrm>
-            <a:off x="800000" y="6200000"/>
+            <a:off x="700000" y="6100000"/>
             <a:ext cx="800000" cy="800000"/>
           </a:xfrm>
           <a:prstGeom prst="rect">
@@ -3835,7 +4021,7 @@
         </p:nvSpPr>
         <p:spPr>
           <a:xfrm>
-            <a:off x="1900000" y="6200000"/>
+            <a:off x="1800000" y="6100000"/>
             <a:ext cx="20500000" cy="800000"/>
           </a:xfrm>
           <a:prstGeom prst="rect">
@@ -3880,7 +4066,7 @@
         </p:nvSpPr>
         <p:spPr>
           <a:xfrm>
-            <a:off x="2200000" y="6200000"/>
+            <a:off x="2100000" y="6100000"/>
             <a:ext cx="19500000" cy="800000"/>
           </a:xfrm>
           <a:prstGeom prst="rect">
@@ -3896,7 +4082,7 @@
           <a:p>
             <a:pPr algn="l"/>
             <a:r>
-              <a:rPr sz="3200" b="0">
+              <a:rPr sz="2800" b="0">
                 <a:solidFill>
                   <a:srgbClr val="333333"/>
                 </a:solidFill>
@@ -3927,20 +4113,12 @@
         <p:nvPr/>
       </p:nvGrpSpPr>
       <p:grpSpPr/>
-      <p:pic>
-        <p:nvPicPr>
-          <p:cNvPr id="2" name="Picture 1" descr="page_02.png"/>
-          <p:cNvPicPr>
-            <a:picLocks noChangeAspect="1"/>
-          </p:cNvPicPr>
-          <p:nvPr/>
-        </p:nvPicPr>
-        <p:blipFill>
-          <a:blip r:embed="rId2"/>
-          <a:stretch>
-            <a:fillRect/>
-          </a:stretch>
-        </p:blipFill>
+      <p:sp>
+        <p:nvSpPr>
+          <p:cNvPr id="2" name="Rectangle 1"/>
+          <p:cNvSpPr/>
+          <p:nvPr/>
+        </p:nvSpPr>
         <p:spPr>
           <a:xfrm>
             <a:off x="0" y="0"/>
@@ -3949,8 +4127,436 @@
           <a:prstGeom prst="rect">
             <a:avLst/>
           </a:prstGeom>
-        </p:spPr>
-      </p:pic>
+          <a:solidFill>
+            <a:srgbClr val="FFFFFF"/>
+          </a:solidFill>
+          <a:ln>
+            <a:noFill/>
+          </a:ln>
+        </p:spPr>
+        <p:style>
+          <a:lnRef idx="1">
+            <a:schemeClr val="accent1"/>
+          </a:lnRef>
+          <a:fillRef idx="3">
+            <a:schemeClr val="accent1"/>
+          </a:fillRef>
+          <a:effectRef idx="2">
+            <a:schemeClr val="accent1"/>
+          </a:effectRef>
+          <a:fontRef idx="minor">
+            <a:schemeClr val="lt1"/>
+          </a:fontRef>
+        </p:style>
+        <p:txBody>
+          <a:bodyPr rtlCol="0" anchor="ctr"/>
+          <a:lstStyle/>
+          <a:p>
+            <a:pPr algn="ctr"/>
+          </a:p>
+        </p:txBody>
+      </p:sp>
+      <p:sp>
+        <p:nvSpPr>
+          <p:cNvPr id="3" name="TextBox 2"/>
+          <p:cNvSpPr txBox="1"/>
+          <p:nvPr/>
+        </p:nvSpPr>
+        <p:spPr>
+          <a:xfrm>
+            <a:off x="700000" y="300000"/>
+            <a:ext cx="22000000" cy="900000"/>
+          </a:xfrm>
+          <a:prstGeom prst="rect">
+            <a:avLst/>
+          </a:prstGeom>
+          <a:noFill/>
+        </p:spPr>
+        <p:txBody>
+          <a:bodyPr wrap="square" anchor="t">
+            <a:spAutoFit/>
+          </a:bodyPr>
+          <a:lstStyle/>
+          <a:p>
+            <a:pPr algn="l"/>
+            <a:r>
+              <a:rPr sz="3200" b="1">
+                <a:solidFill>
+                  <a:srgbClr val="333333"/>
+                </a:solidFill>
+                <a:latin typeface="Open Sans"/>
+                <a:ea typeface="Open Sans"/>
+                <a:cs typeface="Open Sans"/>
+              </a:rPr>
+              <a:t>ПОНЯТИЕ «КРОВОТЕЧЕНИЕ»</a:t>
+            </a:r>
+          </a:p>
+        </p:txBody>
+      </p:sp>
+      <p:sp>
+        <p:nvSpPr>
+          <p:cNvPr id="4" name="Rectangle 3"/>
+          <p:cNvSpPr/>
+          <p:nvPr/>
+        </p:nvSpPr>
+        <p:spPr>
+          <a:xfrm>
+            <a:off x="700000" y="1250000"/>
+            <a:ext cx="22000000" cy="20000"/>
+          </a:xfrm>
+          <a:prstGeom prst="rect">
+            <a:avLst/>
+          </a:prstGeom>
+          <a:solidFill>
+            <a:srgbClr val="E1E1E1"/>
+          </a:solidFill>
+          <a:ln>
+            <a:noFill/>
+          </a:ln>
+        </p:spPr>
+        <p:style>
+          <a:lnRef idx="1">
+            <a:schemeClr val="accent1"/>
+          </a:lnRef>
+          <a:fillRef idx="3">
+            <a:schemeClr val="accent1"/>
+          </a:fillRef>
+          <a:effectRef idx="2">
+            <a:schemeClr val="accent1"/>
+          </a:effectRef>
+          <a:fontRef idx="minor">
+            <a:schemeClr val="lt1"/>
+          </a:fontRef>
+        </p:style>
+        <p:txBody>
+          <a:bodyPr rtlCol="0" anchor="ctr"/>
+          <a:lstStyle/>
+          <a:p>
+            <a:pPr algn="ctr"/>
+          </a:p>
+        </p:txBody>
+      </p:sp>
+      <p:sp>
+        <p:nvSpPr>
+          <p:cNvPr id="5" name="TextBox 4"/>
+          <p:cNvSpPr txBox="1"/>
+          <p:nvPr/>
+        </p:nvSpPr>
+        <p:spPr>
+          <a:xfrm>
+            <a:off x="700000" y="1350000"/>
+            <a:ext cx="22000000" cy="450000"/>
+          </a:xfrm>
+          <a:prstGeom prst="rect">
+            <a:avLst/>
+          </a:prstGeom>
+          <a:noFill/>
+        </p:spPr>
+        <p:txBody>
+          <a:bodyPr wrap="square" anchor="t">
+            <a:spAutoFit/>
+          </a:bodyPr>
+          <a:lstStyle/>
+          <a:p>
+            <a:pPr algn="l"/>
+            <a:r>
+              <a:rPr sz="1600" b="0">
+                <a:solidFill>
+                  <a:srgbClr val="666666"/>
+                </a:solidFill>
+                <a:latin typeface="Open Sans"/>
+                <a:ea typeface="Open Sans"/>
+                <a:cs typeface="Open Sans"/>
+              </a:rPr>
+              <a:t>Оказание первой помощи при наружных кровотечениях и травмах</a:t>
+            </a:r>
+          </a:p>
+        </p:txBody>
+      </p:sp>
+      <p:sp>
+        <p:nvSpPr>
+          <p:cNvPr id="6" name="Rounded Rectangle 5"/>
+          <p:cNvSpPr/>
+          <p:nvPr/>
+        </p:nvSpPr>
+        <p:spPr>
+          <a:xfrm>
+            <a:off x="700000" y="2000000"/>
+            <a:ext cx="10000000" cy="4500000"/>
+          </a:xfrm>
+          <a:prstGeom prst="roundRect">
+            <a:avLst/>
+          </a:prstGeom>
+          <a:solidFill>
+            <a:srgbClr val="F5F0E1"/>
+          </a:solidFill>
+          <a:ln>
+            <a:noFill/>
+          </a:ln>
+        </p:spPr>
+        <p:style>
+          <a:lnRef idx="1">
+            <a:schemeClr val="accent1"/>
+          </a:lnRef>
+          <a:fillRef idx="3">
+            <a:schemeClr val="accent1"/>
+          </a:fillRef>
+          <a:effectRef idx="2">
+            <a:schemeClr val="accent1"/>
+          </a:effectRef>
+          <a:fontRef idx="minor">
+            <a:schemeClr val="lt1"/>
+          </a:fontRef>
+        </p:style>
+        <p:txBody>
+          <a:bodyPr rtlCol="0" anchor="ctr"/>
+          <a:lstStyle/>
+          <a:p>
+            <a:pPr algn="ctr"/>
+          </a:p>
+        </p:txBody>
+      </p:sp>
+      <p:sp>
+        <p:nvSpPr>
+          <p:cNvPr id="7" name="TextBox 6"/>
+          <p:cNvSpPr txBox="1"/>
+          <p:nvPr/>
+        </p:nvSpPr>
+        <p:spPr>
+          <a:xfrm>
+            <a:off x="1100000" y="2300000"/>
+            <a:ext cx="9200000" cy="3800000"/>
+          </a:xfrm>
+          <a:prstGeom prst="rect">
+            <a:avLst/>
+          </a:prstGeom>
+          <a:noFill/>
+        </p:spPr>
+        <p:txBody>
+          <a:bodyPr wrap="square" anchor="t">
+            <a:spAutoFit/>
+          </a:bodyPr>
+          <a:lstStyle/>
+          <a:p>
+            <a:pPr algn="l"/>
+            <a:r>
+              <a:rPr sz="2400" b="0">
+                <a:solidFill>
+                  <a:srgbClr val="333333"/>
+                </a:solidFill>
+                <a:latin typeface="Open Sans"/>
+                <a:ea typeface="Open Sans"/>
+                <a:cs typeface="Open Sans"/>
+              </a:rPr>
+              <a:t>Под кровотечением понимают ситуацию, когда кровь по разным причинам покидает сосудистое русло, что приводит к острой кровопотере.</a:t>
+            </a:r>
+          </a:p>
+        </p:txBody>
+      </p:sp>
+      <p:sp>
+        <p:nvSpPr>
+          <p:cNvPr id="8" name="TextBox 7"/>
+          <p:cNvSpPr txBox="1"/>
+          <p:nvPr/>
+        </p:nvSpPr>
+        <p:spPr>
+          <a:xfrm>
+            <a:off x="11700000" y="2000000"/>
+            <a:ext cx="11000000" cy="600000"/>
+          </a:xfrm>
+          <a:prstGeom prst="rect">
+            <a:avLst/>
+          </a:prstGeom>
+          <a:noFill/>
+        </p:spPr>
+        <p:txBody>
+          <a:bodyPr wrap="square" anchor="t">
+            <a:spAutoFit/>
+          </a:bodyPr>
+          <a:lstStyle/>
+          <a:p>
+            <a:pPr algn="l"/>
+            <a:r>
+              <a:rPr sz="2400" b="1">
+                <a:solidFill>
+                  <a:srgbClr val="333333"/>
+                </a:solidFill>
+                <a:latin typeface="Open Sans"/>
+                <a:ea typeface="Open Sans"/>
+                <a:cs typeface="Open Sans"/>
+              </a:rPr>
+              <a:t>Основные признаки острой кровопотери:</a:t>
+            </a:r>
+          </a:p>
+        </p:txBody>
+      </p:sp>
+      <p:sp>
+        <p:nvSpPr>
+          <p:cNvPr id="9" name="TextBox 8"/>
+          <p:cNvSpPr txBox="1"/>
+          <p:nvPr/>
+        </p:nvSpPr>
+        <p:spPr>
+          <a:xfrm>
+            <a:off x="11700000" y="2700000"/>
+            <a:ext cx="11000000" cy="8500000"/>
+          </a:xfrm>
+          <a:prstGeom prst="rect">
+            <a:avLst/>
+          </a:prstGeom>
+          <a:noFill/>
+        </p:spPr>
+        <p:txBody>
+          <a:bodyPr wrap="square">
+            <a:spAutoFit/>
+          </a:bodyPr>
+          <a:lstStyle/>
+          <a:p>
+            <a:pPr algn="l">
+              <a:spcAft>
+                <a:spcPts val="1000"/>
+              </a:spcAft>
+            </a:pPr>
+            <a:r>
+              <a:rPr sz="2200" b="0">
+                <a:solidFill>
+                  <a:srgbClr val="333333"/>
+                </a:solidFill>
+                <a:latin typeface="Open Sans"/>
+                <a:ea typeface="Open Sans"/>
+                <a:cs typeface="Open Sans"/>
+              </a:rPr>
+              <a:t>☑  резкая общая слабость;</a:t>
+            </a:r>
+          </a:p>
+          <a:p>
+            <a:pPr algn="l">
+              <a:spcAft>
+                <a:spcPts val="1000"/>
+              </a:spcAft>
+            </a:pPr>
+            <a:r>
+              <a:rPr sz="2200" b="0">
+                <a:solidFill>
+                  <a:srgbClr val="333333"/>
+                </a:solidFill>
+                <a:latin typeface="Open Sans"/>
+                <a:ea typeface="Open Sans"/>
+                <a:cs typeface="Open Sans"/>
+              </a:rPr>
+              <a:t>☑  чувство жажды;</a:t>
+            </a:r>
+          </a:p>
+          <a:p>
+            <a:pPr algn="l">
+              <a:spcAft>
+                <a:spcPts val="1000"/>
+              </a:spcAft>
+            </a:pPr>
+            <a:r>
+              <a:rPr sz="2200" b="0">
+                <a:solidFill>
+                  <a:srgbClr val="333333"/>
+                </a:solidFill>
+                <a:latin typeface="Open Sans"/>
+                <a:ea typeface="Open Sans"/>
+                <a:cs typeface="Open Sans"/>
+              </a:rPr>
+              <a:t>☑  головокружение;</a:t>
+            </a:r>
+          </a:p>
+          <a:p>
+            <a:pPr algn="l">
+              <a:spcAft>
+                <a:spcPts val="1000"/>
+              </a:spcAft>
+            </a:pPr>
+            <a:r>
+              <a:rPr sz="2200" b="0">
+                <a:solidFill>
+                  <a:srgbClr val="333333"/>
+                </a:solidFill>
+                <a:latin typeface="Open Sans"/>
+                <a:ea typeface="Open Sans"/>
+                <a:cs typeface="Open Sans"/>
+              </a:rPr>
+              <a:t>☑  мелькание «мушек» перед глазами;</a:t>
+            </a:r>
+          </a:p>
+          <a:p>
+            <a:pPr algn="l">
+              <a:spcAft>
+                <a:spcPts val="1000"/>
+              </a:spcAft>
+            </a:pPr>
+            <a:r>
+              <a:rPr sz="2200" b="0">
+                <a:solidFill>
+                  <a:srgbClr val="333333"/>
+                </a:solidFill>
+                <a:latin typeface="Open Sans"/>
+                <a:ea typeface="Open Sans"/>
+                <a:cs typeface="Open Sans"/>
+              </a:rPr>
+              <a:t>☑  обморок, чаще при попытке встать;</a:t>
+            </a:r>
+          </a:p>
+          <a:p>
+            <a:pPr algn="l">
+              <a:spcAft>
+                <a:spcPts val="1000"/>
+              </a:spcAft>
+            </a:pPr>
+            <a:r>
+              <a:rPr sz="2200" b="0">
+                <a:solidFill>
+                  <a:srgbClr val="333333"/>
+                </a:solidFill>
+                <a:latin typeface="Open Sans"/>
+                <a:ea typeface="Open Sans"/>
+                <a:cs typeface="Open Sans"/>
+              </a:rPr>
+              <a:t>☑  бледная, влажная и холодная кожа;</a:t>
+            </a:r>
+          </a:p>
+          <a:p>
+            <a:pPr algn="l">
+              <a:spcAft>
+                <a:spcPts val="1000"/>
+              </a:spcAft>
+            </a:pPr>
+            <a:r>
+              <a:rPr sz="2200" b="0">
+                <a:solidFill>
+                  <a:srgbClr val="333333"/>
+                </a:solidFill>
+                <a:latin typeface="Open Sans"/>
+                <a:ea typeface="Open Sans"/>
+                <a:cs typeface="Open Sans"/>
+              </a:rPr>
+              <a:t>☑  учащённое сердцебиение;</a:t>
+            </a:r>
+          </a:p>
+          <a:p>
+            <a:pPr algn="l">
+              <a:spcAft>
+                <a:spcPts val="1000"/>
+              </a:spcAft>
+            </a:pPr>
+            <a:r>
+              <a:rPr sz="2200" b="0">
+                <a:solidFill>
+                  <a:srgbClr val="333333"/>
+                </a:solidFill>
+                <a:latin typeface="Open Sans"/>
+                <a:ea typeface="Open Sans"/>
+                <a:cs typeface="Open Sans"/>
+              </a:rPr>
+              <a:t>☑  частое дыхание.</a:t>
+            </a:r>
+          </a:p>
+        </p:txBody>
+      </p:sp>
     </p:spTree>
   </p:cSld>
   <p:clrMapOvr>
@@ -3969,9 +4575,251 @@
         <p:nvPr/>
       </p:nvGrpSpPr>
       <p:grpSpPr/>
+      <p:sp>
+        <p:nvSpPr>
+          <p:cNvPr id="2" name="Rectangle 1"/>
+          <p:cNvSpPr/>
+          <p:nvPr/>
+        </p:nvSpPr>
+        <p:spPr>
+          <a:xfrm>
+            <a:off x="0" y="0"/>
+            <a:ext cx="24384000" cy="13716000"/>
+          </a:xfrm>
+          <a:prstGeom prst="rect">
+            <a:avLst/>
+          </a:prstGeom>
+          <a:solidFill>
+            <a:srgbClr val="FFFFFF"/>
+          </a:solidFill>
+          <a:ln>
+            <a:noFill/>
+          </a:ln>
+        </p:spPr>
+        <p:style>
+          <a:lnRef idx="1">
+            <a:schemeClr val="accent1"/>
+          </a:lnRef>
+          <a:fillRef idx="3">
+            <a:schemeClr val="accent1"/>
+          </a:fillRef>
+          <a:effectRef idx="2">
+            <a:schemeClr val="accent1"/>
+          </a:effectRef>
+          <a:fontRef idx="minor">
+            <a:schemeClr val="lt1"/>
+          </a:fontRef>
+        </p:style>
+        <p:txBody>
+          <a:bodyPr rtlCol="0" anchor="ctr"/>
+          <a:lstStyle/>
+          <a:p>
+            <a:pPr algn="ctr"/>
+          </a:p>
+        </p:txBody>
+      </p:sp>
+      <p:sp>
+        <p:nvSpPr>
+          <p:cNvPr id="3" name="TextBox 2"/>
+          <p:cNvSpPr txBox="1"/>
+          <p:nvPr/>
+        </p:nvSpPr>
+        <p:spPr>
+          <a:xfrm>
+            <a:off x="700000" y="300000"/>
+            <a:ext cx="22000000" cy="900000"/>
+          </a:xfrm>
+          <a:prstGeom prst="rect">
+            <a:avLst/>
+          </a:prstGeom>
+          <a:noFill/>
+        </p:spPr>
+        <p:txBody>
+          <a:bodyPr wrap="square" anchor="t">
+            <a:spAutoFit/>
+          </a:bodyPr>
+          <a:lstStyle/>
+          <a:p>
+            <a:pPr algn="l"/>
+            <a:r>
+              <a:rPr sz="3200" b="1">
+                <a:solidFill>
+                  <a:srgbClr val="333333"/>
+                </a:solidFill>
+                <a:latin typeface="Open Sans"/>
+                <a:ea typeface="Open Sans"/>
+                <a:cs typeface="Open Sans"/>
+              </a:rPr>
+              <a:t>ОБЗОРНЫЙ ОСМОТР ПОСТРАДАВШЕГО</a:t>
+            </a:r>
+          </a:p>
+        </p:txBody>
+      </p:sp>
+      <p:sp>
+        <p:nvSpPr>
+          <p:cNvPr id="4" name="Rectangle 3"/>
+          <p:cNvSpPr/>
+          <p:nvPr/>
+        </p:nvSpPr>
+        <p:spPr>
+          <a:xfrm>
+            <a:off x="700000" y="1250000"/>
+            <a:ext cx="22000000" cy="20000"/>
+          </a:xfrm>
+          <a:prstGeom prst="rect">
+            <a:avLst/>
+          </a:prstGeom>
+          <a:solidFill>
+            <a:srgbClr val="E1E1E1"/>
+          </a:solidFill>
+          <a:ln>
+            <a:noFill/>
+          </a:ln>
+        </p:spPr>
+        <p:style>
+          <a:lnRef idx="1">
+            <a:schemeClr val="accent1"/>
+          </a:lnRef>
+          <a:fillRef idx="3">
+            <a:schemeClr val="accent1"/>
+          </a:fillRef>
+          <a:effectRef idx="2">
+            <a:schemeClr val="accent1"/>
+          </a:effectRef>
+          <a:fontRef idx="minor">
+            <a:schemeClr val="lt1"/>
+          </a:fontRef>
+        </p:style>
+        <p:txBody>
+          <a:bodyPr rtlCol="0" anchor="ctr"/>
+          <a:lstStyle/>
+          <a:p>
+            <a:pPr algn="ctr"/>
+          </a:p>
+        </p:txBody>
+      </p:sp>
+      <p:sp>
+        <p:nvSpPr>
+          <p:cNvPr id="5" name="TextBox 4"/>
+          <p:cNvSpPr txBox="1"/>
+          <p:nvPr/>
+        </p:nvSpPr>
+        <p:spPr>
+          <a:xfrm>
+            <a:off x="700000" y="1350000"/>
+            <a:ext cx="22000000" cy="450000"/>
+          </a:xfrm>
+          <a:prstGeom prst="rect">
+            <a:avLst/>
+          </a:prstGeom>
+          <a:noFill/>
+        </p:spPr>
+        <p:txBody>
+          <a:bodyPr wrap="square" anchor="t">
+            <a:spAutoFit/>
+          </a:bodyPr>
+          <a:lstStyle/>
+          <a:p>
+            <a:pPr algn="l"/>
+            <a:r>
+              <a:rPr sz="1600" b="0">
+                <a:solidFill>
+                  <a:srgbClr val="666666"/>
+                </a:solidFill>
+                <a:latin typeface="Open Sans"/>
+                <a:ea typeface="Open Sans"/>
+                <a:cs typeface="Open Sans"/>
+              </a:rPr>
+              <a:t>Оказание первой помощи при наружных кровотечениях и травмах</a:t>
+            </a:r>
+          </a:p>
+        </p:txBody>
+      </p:sp>
+      <p:sp>
+        <p:nvSpPr>
+          <p:cNvPr id="6" name="TextBox 5"/>
+          <p:cNvSpPr txBox="1"/>
+          <p:nvPr/>
+        </p:nvSpPr>
+        <p:spPr>
+          <a:xfrm>
+            <a:off x="700000" y="2200000"/>
+            <a:ext cx="11000000" cy="3500000"/>
+          </a:xfrm>
+          <a:prstGeom prst="rect">
+            <a:avLst/>
+          </a:prstGeom>
+          <a:noFill/>
+        </p:spPr>
+        <p:txBody>
+          <a:bodyPr wrap="square" anchor="t">
+            <a:spAutoFit/>
+          </a:bodyPr>
+          <a:lstStyle/>
+          <a:p>
+            <a:pPr algn="l"/>
+            <a:r>
+              <a:rPr sz="2800" b="1">
+                <a:solidFill>
+                  <a:srgbClr val="333333"/>
+                </a:solidFill>
+                <a:latin typeface="Open Sans"/>
+                <a:ea typeface="Open Sans"/>
+                <a:cs typeface="Open Sans"/>
+              </a:rPr>
+              <a:t>Обзорный осмотр производится очень быстро, в течение 1-2 секунд, с головы до ног</a:t>
+            </a:r>
+          </a:p>
+        </p:txBody>
+      </p:sp>
+      <p:sp>
+        <p:nvSpPr>
+          <p:cNvPr id="7" name="Rectangle 6"/>
+          <p:cNvSpPr/>
+          <p:nvPr/>
+        </p:nvSpPr>
+        <p:spPr>
+          <a:xfrm>
+            <a:off x="12700000" y="2000000"/>
+            <a:ext cx="10000000" cy="9500000"/>
+          </a:xfrm>
+          <a:prstGeom prst="rect">
+            <a:avLst/>
+          </a:prstGeom>
+          <a:solidFill>
+            <a:srgbClr val="FFFFFF"/>
+          </a:solidFill>
+          <a:ln w="12700">
+            <a:solidFill>
+              <a:srgbClr val="E1E1E1"/>
+            </a:solidFill>
+          </a:ln>
+        </p:spPr>
+        <p:style>
+          <a:lnRef idx="1">
+            <a:schemeClr val="accent1"/>
+          </a:lnRef>
+          <a:fillRef idx="3">
+            <a:schemeClr val="accent1"/>
+          </a:fillRef>
+          <a:effectRef idx="2">
+            <a:schemeClr val="accent1"/>
+          </a:effectRef>
+          <a:fontRef idx="minor">
+            <a:schemeClr val="lt1"/>
+          </a:fontRef>
+        </p:style>
+        <p:txBody>
+          <a:bodyPr rtlCol="0" anchor="ctr"/>
+          <a:lstStyle/>
+          <a:p>
+            <a:pPr algn="ctr"/>
+          </a:p>
+        </p:txBody>
+      </p:sp>
       <p:pic>
         <p:nvPicPr>
-          <p:cNvPr id="2" name="Picture 1" descr="page_04.png"/>
+          <p:cNvPr id="8" name="Picture 7" descr="overview_exam.png"/>
           <p:cNvPicPr>
             <a:picLocks noChangeAspect="1"/>
           </p:cNvPicPr>
@@ -3985,8 +4833,8 @@
         </p:blipFill>
         <p:spPr>
           <a:xfrm>
-            <a:off x="0" y="0"/>
-            <a:ext cx="24384000" cy="13716000"/>
+            <a:off x="12900000" y="2960526"/>
+            <a:ext cx="9600000" cy="7578947"/>
           </a:xfrm>
           <a:prstGeom prst="rect">
             <a:avLst/>
@@ -4062,8 +4910,8 @@
         </p:nvSpPr>
         <p:spPr>
           <a:xfrm>
-            <a:off x="800000" y="400000"/>
-            <a:ext cx="22800000" cy="1000000"/>
+            <a:off x="700000" y="300000"/>
+            <a:ext cx="23000000" cy="1100000"/>
           </a:xfrm>
           <a:prstGeom prst="rect">
             <a:avLst/>
@@ -4099,8 +4947,8 @@
         </p:nvSpPr>
         <p:spPr>
           <a:xfrm>
-            <a:off x="800000" y="1500000"/>
-            <a:ext cx="22800000" cy="20000"/>
+            <a:off x="700000" y="1500000"/>
+            <a:ext cx="23000000" cy="20000"/>
           </a:xfrm>
           <a:prstGeom prst="rect">
             <a:avLst/>
@@ -4142,8 +4990,8 @@
         </p:nvSpPr>
         <p:spPr>
           <a:xfrm>
-            <a:off x="800000" y="1900000"/>
-            <a:ext cx="22800000" cy="6500000"/>
+            <a:off x="700000" y="1900000"/>
+            <a:ext cx="23000000" cy="6500000"/>
           </a:xfrm>
           <a:prstGeom prst="rect">
             <a:avLst/>
@@ -4158,7 +5006,7 @@
           <a:p>
             <a:pPr algn="l">
               <a:spcAft>
-                <a:spcPts val="1200"/>
+                <a:spcPts val="1000"/>
               </a:spcAft>
             </a:pPr>
             <a:r>
@@ -4176,7 +5024,7 @@
           <a:p>
             <a:pPr algn="l">
               <a:spcAft>
-                <a:spcPts val="1200"/>
+                <a:spcPts val="1000"/>
               </a:spcAft>
             </a:pPr>
             <a:r>
@@ -4194,7 +5042,7 @@
           <a:p>
             <a:pPr algn="l">
               <a:spcAft>
-                <a:spcPts val="1200"/>
+                <a:spcPts val="1000"/>
               </a:spcAft>
             </a:pPr>
             <a:r>
@@ -4212,7 +5060,7 @@
           <a:p>
             <a:pPr algn="l">
               <a:spcAft>
-                <a:spcPts val="1200"/>
+                <a:spcPts val="1000"/>
               </a:spcAft>
             </a:pPr>
             <a:r>
@@ -4230,7 +5078,7 @@
           <a:p>
             <a:pPr algn="l">
               <a:spcAft>
-                <a:spcPts val="1200"/>
+                <a:spcPts val="1000"/>
               </a:spcAft>
             </a:pPr>
             <a:r>
@@ -4255,8 +5103,8 @@
         </p:nvSpPr>
         <p:spPr>
           <a:xfrm>
-            <a:off x="800000" y="11000000"/>
-            <a:ext cx="22800000" cy="1600000"/>
+            <a:off x="700000" y="11000000"/>
+            <a:ext cx="23000000" cy="1600000"/>
           </a:xfrm>
           <a:prstGeom prst="roundRect">
             <a:avLst/>
@@ -4298,7 +5146,7 @@
         </p:nvSpPr>
         <p:spPr>
           <a:xfrm>
-            <a:off x="800000" y="11000000"/>
+            <a:off x="700000" y="11000000"/>
             <a:ext cx="120000" cy="1600000"/>
           </a:xfrm>
           <a:prstGeom prst="rect">
@@ -4341,8 +5189,8 @@
         </p:nvSpPr>
         <p:spPr>
           <a:xfrm>
-            <a:off x="1200000" y="11200000"/>
-            <a:ext cx="21800000" cy="1200000"/>
+            <a:off x="1100000" y="11200000"/>
+            <a:ext cx="22000000" cy="1200000"/>
           </a:xfrm>
           <a:prstGeom prst="rect">
             <a:avLst/>
@@ -4439,8 +5287,8 @@
         </p:nvSpPr>
         <p:spPr>
           <a:xfrm>
-            <a:off x="800000" y="400000"/>
-            <a:ext cx="22800000" cy="1000000"/>
+            <a:off x="700000" y="300000"/>
+            <a:ext cx="23000000" cy="1100000"/>
           </a:xfrm>
           <a:prstGeom prst="rect">
             <a:avLst/>
@@ -4476,8 +5324,8 @@
         </p:nvSpPr>
         <p:spPr>
           <a:xfrm>
-            <a:off x="800000" y="1500000"/>
-            <a:ext cx="22800000" cy="20000"/>
+            <a:off x="700000" y="1500000"/>
+            <a:ext cx="23000000" cy="20000"/>
           </a:xfrm>
           <a:prstGeom prst="rect">
             <a:avLst/>
@@ -4519,8 +5367,8 @@
         </p:nvSpPr>
         <p:spPr>
           <a:xfrm>
-            <a:off x="800000" y="1900000"/>
-            <a:ext cx="10800000" cy="9500000"/>
+            <a:off x="700000" y="1900000"/>
+            <a:ext cx="11000000" cy="9500000"/>
           </a:xfrm>
           <a:prstGeom prst="rect">
             <a:avLst/>
@@ -4564,8 +5412,8 @@
         </p:nvSpPr>
         <p:spPr>
           <a:xfrm>
-            <a:off x="12800000" y="1900000"/>
-            <a:ext cx="10800000" cy="9500000"/>
+            <a:off x="12500000" y="1900000"/>
+            <a:ext cx="11000000" cy="9500000"/>
           </a:xfrm>
           <a:prstGeom prst="rect">
             <a:avLst/>
@@ -4609,8 +5457,8 @@
         </p:nvSpPr>
         <p:spPr>
           <a:xfrm>
-            <a:off x="800000" y="1900000"/>
-            <a:ext cx="10800000" cy="1000000"/>
+            <a:off x="700000" y="1900000"/>
+            <a:ext cx="11000000" cy="1000000"/>
           </a:xfrm>
           <a:prstGeom prst="rect">
             <a:avLst/>
@@ -4652,8 +5500,8 @@
         </p:nvSpPr>
         <p:spPr>
           <a:xfrm>
-            <a:off x="12800000" y="1900000"/>
-            <a:ext cx="10800000" cy="1000000"/>
+            <a:off x="12500000" y="1900000"/>
+            <a:ext cx="11000000" cy="1000000"/>
           </a:xfrm>
           <a:prstGeom prst="rect">
             <a:avLst/>
@@ -4695,8 +5543,8 @@
         </p:nvSpPr>
         <p:spPr>
           <a:xfrm>
-            <a:off x="1000000" y="2050000"/>
-            <a:ext cx="10400000" cy="700000"/>
+            <a:off x="900000" y="2050000"/>
+            <a:ext cx="10600000" cy="700000"/>
           </a:xfrm>
           <a:prstGeom prst="rect">
             <a:avLst/>
@@ -4732,8 +5580,8 @@
         </p:nvSpPr>
         <p:spPr>
           <a:xfrm>
-            <a:off x="13000000" y="2050000"/>
-            <a:ext cx="10400000" cy="700000"/>
+            <a:off x="12700000" y="2050000"/>
+            <a:ext cx="10600000" cy="700000"/>
           </a:xfrm>
           <a:prstGeom prst="rect">
             <a:avLst/>
@@ -4785,7 +5633,7 @@
           <a:p>
             <a:pPr algn="l">
               <a:spcAft>
-                <a:spcPts val="1200"/>
+                <a:spcPts val="1000"/>
               </a:spcAft>
             </a:pPr>
             <a:r>
@@ -4803,7 +5651,7 @@
           <a:p>
             <a:pPr algn="l">
               <a:spcAft>
-                <a:spcPts val="1200"/>
+                <a:spcPts val="1000"/>
               </a:spcAft>
             </a:pPr>
             <a:r>
@@ -4821,7 +5669,7 @@
           <a:p>
             <a:pPr algn="l">
               <a:spcAft>
-                <a:spcPts val="1200"/>
+                <a:spcPts val="1000"/>
               </a:spcAft>
             </a:pPr>
             <a:r>
@@ -4839,7 +5687,7 @@
           <a:p>
             <a:pPr algn="l">
               <a:spcAft>
-                <a:spcPts val="1200"/>
+                <a:spcPts val="1000"/>
               </a:spcAft>
             </a:pPr>
             <a:r>
@@ -4864,7 +5712,7 @@
         </p:nvSpPr>
         <p:spPr>
           <a:xfrm>
-            <a:off x="13100000" y="3200000"/>
+            <a:off x="12900000" y="3200000"/>
             <a:ext cx="10000000" cy="7800000"/>
           </a:xfrm>
           <a:prstGeom prst="rect">
@@ -4880,7 +5728,7 @@
           <a:p>
             <a:pPr algn="l">
               <a:spcAft>
-                <a:spcPts val="1200"/>
+                <a:spcPts val="1000"/>
               </a:spcAft>
             </a:pPr>
             <a:r>
@@ -4898,7 +5746,7 @@
           <a:p>
             <a:pPr algn="l">
               <a:spcAft>
-                <a:spcPts val="1200"/>
+                <a:spcPts val="1000"/>
               </a:spcAft>
             </a:pPr>
             <a:r>
@@ -4916,7 +5764,7 @@
           <a:p>
             <a:pPr algn="l">
               <a:spcAft>
-                <a:spcPts val="1200"/>
+                <a:spcPts val="1000"/>
               </a:spcAft>
             </a:pPr>
             <a:r>
@@ -4934,7 +5782,7 @@
           <a:p>
             <a:pPr algn="l">
               <a:spcAft>
-                <a:spcPts val="1200"/>
+                <a:spcPts val="1000"/>
               </a:spcAft>
             </a:pPr>
             <a:r>
@@ -5020,8 +5868,8 @@
         </p:nvSpPr>
         <p:spPr>
           <a:xfrm>
-            <a:off x="800000" y="400000"/>
-            <a:ext cx="22800000" cy="1000000"/>
+            <a:off x="700000" y="300000"/>
+            <a:ext cx="23000000" cy="1100000"/>
           </a:xfrm>
           <a:prstGeom prst="rect">
             <a:avLst/>
@@ -5057,8 +5905,8 @@
         </p:nvSpPr>
         <p:spPr>
           <a:xfrm>
-            <a:off x="800000" y="1500000"/>
-            <a:ext cx="22800000" cy="20000"/>
+            <a:off x="700000" y="1500000"/>
+            <a:ext cx="23000000" cy="20000"/>
           </a:xfrm>
           <a:prstGeom prst="rect">
             <a:avLst/>
@@ -5100,8 +5948,8 @@
         </p:nvSpPr>
         <p:spPr>
           <a:xfrm>
-            <a:off x="800000" y="1900000"/>
-            <a:ext cx="22800000" cy="8000000"/>
+            <a:off x="700000" y="1900000"/>
+            <a:ext cx="23000000" cy="8000000"/>
           </a:xfrm>
           <a:prstGeom prst="rect">
             <a:avLst/>
@@ -5116,7 +5964,7 @@
           <a:p>
             <a:pPr algn="l">
               <a:spcAft>
-                <a:spcPts val="1200"/>
+                <a:spcPts val="1000"/>
               </a:spcAft>
             </a:pPr>
             <a:r>
@@ -5134,7 +5982,7 @@
           <a:p>
             <a:pPr algn="l">
               <a:spcAft>
-                <a:spcPts val="1200"/>
+                <a:spcPts val="1000"/>
               </a:spcAft>
             </a:pPr>
             <a:r>
@@ -5152,7 +6000,7 @@
           <a:p>
             <a:pPr algn="l">
               <a:spcAft>
-                <a:spcPts val="1200"/>
+                <a:spcPts val="1000"/>
               </a:spcAft>
             </a:pPr>
             <a:r>
@@ -5170,7 +6018,7 @@
           <a:p>
             <a:pPr algn="l">
               <a:spcAft>
-                <a:spcPts val="1200"/>
+                <a:spcPts val="1000"/>
               </a:spcAft>
             </a:pPr>
             <a:r>
@@ -5183,24 +6031,6 @@
                 <a:cs typeface="Open Sans"/>
               </a:rPr>
               <a:t>•  ЧС с несколькими пострадавшими — быстрая сортировка</a:t>
-            </a:r>
-          </a:p>
-          <a:p>
-            <a:pPr algn="l">
-              <a:spcAft>
-                <a:spcPts val="1200"/>
-              </a:spcAft>
-            </a:pPr>
-            <a:r>
-              <a:rPr sz="3200" b="0">
-                <a:solidFill>
-                  <a:srgbClr val="333333"/>
-                </a:solidFill>
-                <a:latin typeface="Open Sans"/>
-                <a:ea typeface="Open Sans"/>
-                <a:cs typeface="Open Sans"/>
-              </a:rPr>
-              <a:t>•  Огнестрельные и колото-резаные ранения</a:t>
             </a:r>
           </a:p>
         </p:txBody>
@@ -5274,8 +6104,8 @@
         </p:nvSpPr>
         <p:spPr>
           <a:xfrm>
-            <a:off x="800000" y="400000"/>
-            <a:ext cx="22800000" cy="1000000"/>
+            <a:off x="700000" y="300000"/>
+            <a:ext cx="23000000" cy="1100000"/>
           </a:xfrm>
           <a:prstGeom prst="rect">
             <a:avLst/>
@@ -5311,8 +6141,8 @@
         </p:nvSpPr>
         <p:spPr>
           <a:xfrm>
-            <a:off x="800000" y="1500000"/>
-            <a:ext cx="22800000" cy="20000"/>
+            <a:off x="700000" y="1500000"/>
+            <a:ext cx="23000000" cy="20000"/>
           </a:xfrm>
           <a:prstGeom prst="rect">
             <a:avLst/>
@@ -5354,8 +6184,8 @@
         </p:nvSpPr>
         <p:spPr>
           <a:xfrm>
-            <a:off x="800000" y="2000000"/>
-            <a:ext cx="22800000" cy="1600000"/>
+            <a:off x="700000" y="1900000"/>
+            <a:ext cx="23000000" cy="1600000"/>
           </a:xfrm>
           <a:prstGeom prst="rect">
             <a:avLst/>
@@ -5399,7 +6229,7 @@
         </p:nvSpPr>
         <p:spPr>
           <a:xfrm>
-            <a:off x="800000" y="2000000"/>
+            <a:off x="700000" y="1900000"/>
             <a:ext cx="120000" cy="1600000"/>
           </a:xfrm>
           <a:prstGeom prst="rect">
@@ -5442,8 +6272,8 @@
         </p:nvSpPr>
         <p:spPr>
           <a:xfrm>
-            <a:off x="1300000" y="2350000"/>
-            <a:ext cx="21500000" cy="900000"/>
+            <a:off x="1200000" y="2250000"/>
+            <a:ext cx="22000000" cy="900000"/>
           </a:xfrm>
           <a:prstGeom prst="rect">
             <a:avLst/>
@@ -5479,8 +6309,8 @@
         </p:nvSpPr>
         <p:spPr>
           <a:xfrm>
-            <a:off x="800000" y="3900000"/>
-            <a:ext cx="22800000" cy="1600000"/>
+            <a:off x="700000" y="3750000"/>
+            <a:ext cx="23000000" cy="1600000"/>
           </a:xfrm>
           <a:prstGeom prst="rect">
             <a:avLst/>
@@ -5524,7 +6354,7 @@
         </p:nvSpPr>
         <p:spPr>
           <a:xfrm>
-            <a:off x="800000" y="3900000"/>
+            <a:off x="700000" y="3750000"/>
             <a:ext cx="120000" cy="1600000"/>
           </a:xfrm>
           <a:prstGeom prst="rect">
@@ -5567,8 +6397,8 @@
         </p:nvSpPr>
         <p:spPr>
           <a:xfrm>
-            <a:off x="1300000" y="4250000"/>
-            <a:ext cx="21500000" cy="900000"/>
+            <a:off x="1200000" y="4100000"/>
+            <a:ext cx="22000000" cy="900000"/>
           </a:xfrm>
           <a:prstGeom prst="rect">
             <a:avLst/>
@@ -5604,8 +6434,8 @@
         </p:nvSpPr>
         <p:spPr>
           <a:xfrm>
-            <a:off x="800000" y="5800000"/>
-            <a:ext cx="22800000" cy="1600000"/>
+            <a:off x="700000" y="5600000"/>
+            <a:ext cx="23000000" cy="1600000"/>
           </a:xfrm>
           <a:prstGeom prst="rect">
             <a:avLst/>
@@ -5649,7 +6479,7 @@
         </p:nvSpPr>
         <p:spPr>
           <a:xfrm>
-            <a:off x="800000" y="5800000"/>
+            <a:off x="700000" y="5600000"/>
             <a:ext cx="120000" cy="1600000"/>
           </a:xfrm>
           <a:prstGeom prst="rect">
@@ -5692,8 +6522,8 @@
         </p:nvSpPr>
         <p:spPr>
           <a:xfrm>
-            <a:off x="1300000" y="6150000"/>
-            <a:ext cx="21500000" cy="900000"/>
+            <a:off x="1200000" y="5950000"/>
+            <a:ext cx="22000000" cy="900000"/>
           </a:xfrm>
           <a:prstGeom prst="rect">
             <a:avLst/>
@@ -5729,8 +6559,8 @@
         </p:nvSpPr>
         <p:spPr>
           <a:xfrm>
-            <a:off x="800000" y="7700000"/>
-            <a:ext cx="22800000" cy="1600000"/>
+            <a:off x="700000" y="7450000"/>
+            <a:ext cx="23000000" cy="1600000"/>
           </a:xfrm>
           <a:prstGeom prst="rect">
             <a:avLst/>
@@ -5774,7 +6604,7 @@
         </p:nvSpPr>
         <p:spPr>
           <a:xfrm>
-            <a:off x="800000" y="7700000"/>
+            <a:off x="700000" y="7450000"/>
             <a:ext cx="120000" cy="1600000"/>
           </a:xfrm>
           <a:prstGeom prst="rect">
@@ -5817,8 +6647,8 @@
         </p:nvSpPr>
         <p:spPr>
           <a:xfrm>
-            <a:off x="1300000" y="8050000"/>
-            <a:ext cx="21500000" cy="900000"/>
+            <a:off x="1200000" y="7800000"/>
+            <a:ext cx="22000000" cy="900000"/>
           </a:xfrm>
           <a:prstGeom prst="rect">
             <a:avLst/>
@@ -5854,8 +6684,8 @@
         </p:nvSpPr>
         <p:spPr>
           <a:xfrm>
-            <a:off x="800000" y="11500000"/>
-            <a:ext cx="22800000" cy="1000000"/>
+            <a:off x="700000" y="11500000"/>
+            <a:ext cx="23000000" cy="1000000"/>
           </a:xfrm>
           <a:prstGeom prst="rect">
             <a:avLst/>
@@ -5901,20 +6731,12 @@
         <p:nvPr/>
       </p:nvGrpSpPr>
       <p:grpSpPr/>
-      <p:pic>
-        <p:nvPicPr>
-          <p:cNvPr id="2" name="Picture 1" descr="page_28.png"/>
-          <p:cNvPicPr>
-            <a:picLocks noChangeAspect="1"/>
-          </p:cNvPicPr>
-          <p:nvPr/>
-        </p:nvPicPr>
-        <p:blipFill>
-          <a:blip r:embed="rId2"/>
-          <a:stretch>
-            <a:fillRect/>
-          </a:stretch>
-        </p:blipFill>
+      <p:sp>
+        <p:nvSpPr>
+          <p:cNvPr id="2" name="Rectangle 1"/>
+          <p:cNvSpPr/>
+          <p:nvPr/>
+        </p:nvSpPr>
         <p:spPr>
           <a:xfrm>
             <a:off x="0" y="0"/>
@@ -5923,8 +6745,158 @@
           <a:prstGeom prst="rect">
             <a:avLst/>
           </a:prstGeom>
-        </p:spPr>
-      </p:pic>
+          <a:solidFill>
+            <a:srgbClr val="FFFFFF"/>
+          </a:solidFill>
+          <a:ln>
+            <a:noFill/>
+          </a:ln>
+        </p:spPr>
+        <p:style>
+          <a:lnRef idx="1">
+            <a:schemeClr val="accent1"/>
+          </a:lnRef>
+          <a:fillRef idx="3">
+            <a:schemeClr val="accent1"/>
+          </a:fillRef>
+          <a:effectRef idx="2">
+            <a:schemeClr val="accent1"/>
+          </a:effectRef>
+          <a:fontRef idx="minor">
+            <a:schemeClr val="lt1"/>
+          </a:fontRef>
+        </p:style>
+        <p:txBody>
+          <a:bodyPr rtlCol="0" anchor="ctr"/>
+          <a:lstStyle/>
+          <a:p>
+            <a:pPr algn="ctr"/>
+          </a:p>
+        </p:txBody>
+      </p:sp>
+      <p:sp>
+        <p:nvSpPr>
+          <p:cNvPr id="3" name="Rectangle 2"/>
+          <p:cNvSpPr/>
+          <p:nvPr/>
+        </p:nvSpPr>
+        <p:spPr>
+          <a:xfrm>
+            <a:off x="23000000" y="0"/>
+            <a:ext cx="1384000" cy="13716000"/>
+          </a:xfrm>
+          <a:prstGeom prst="rect">
+            <a:avLst/>
+          </a:prstGeom>
+          <a:solidFill>
+            <a:srgbClr val="DDDDDD"/>
+          </a:solidFill>
+          <a:ln>
+            <a:noFill/>
+          </a:ln>
+        </p:spPr>
+        <p:style>
+          <a:lnRef idx="1">
+            <a:schemeClr val="accent1"/>
+          </a:lnRef>
+          <a:fillRef idx="3">
+            <a:schemeClr val="accent1"/>
+          </a:fillRef>
+          <a:effectRef idx="2">
+            <a:schemeClr val="accent1"/>
+          </a:effectRef>
+          <a:fontRef idx="minor">
+            <a:schemeClr val="lt1"/>
+          </a:fontRef>
+        </p:style>
+        <p:txBody>
+          <a:bodyPr rtlCol="0" anchor="ctr"/>
+          <a:lstStyle/>
+          <a:p>
+            <a:pPr algn="ctr"/>
+          </a:p>
+        </p:txBody>
+      </p:sp>
+      <p:sp>
+        <p:nvSpPr>
+          <p:cNvPr id="4" name="TextBox 3"/>
+          <p:cNvSpPr txBox="1"/>
+          <p:nvPr/>
+        </p:nvSpPr>
+        <p:spPr>
+          <a:xfrm>
+            <a:off x="700000" y="5500000"/>
+            <a:ext cx="21000000" cy="1200000"/>
+          </a:xfrm>
+          <a:prstGeom prst="rect">
+            <a:avLst/>
+          </a:prstGeom>
+          <a:noFill/>
+        </p:spPr>
+        <p:txBody>
+          <a:bodyPr wrap="square" anchor="t">
+            <a:spAutoFit/>
+          </a:bodyPr>
+          <a:lstStyle/>
+          <a:p>
+            <a:pPr algn="l"/>
+            <a:r>
+              <a:rPr sz="4000" b="1">
+                <a:solidFill>
+                  <a:srgbClr val="333333"/>
+                </a:solidFill>
+                <a:latin typeface="Open Sans"/>
+                <a:ea typeface="Open Sans"/>
+                <a:cs typeface="Open Sans"/>
+              </a:rPr>
+              <a:t>БЛАГОДАРИМ ЗА ВНИМАНИЕ</a:t>
+            </a:r>
+          </a:p>
+        </p:txBody>
+      </p:sp>
+      <p:sp>
+        <p:nvSpPr>
+          <p:cNvPr id="5" name="Rectangle 4"/>
+          <p:cNvSpPr/>
+          <p:nvPr/>
+        </p:nvSpPr>
+        <p:spPr>
+          <a:xfrm>
+            <a:off x="700000" y="6900000"/>
+            <a:ext cx="10000000" cy="25000"/>
+          </a:xfrm>
+          <a:prstGeom prst="rect">
+            <a:avLst/>
+          </a:prstGeom>
+          <a:solidFill>
+            <a:srgbClr val="333333"/>
+          </a:solidFill>
+          <a:ln>
+            <a:noFill/>
+          </a:ln>
+        </p:spPr>
+        <p:style>
+          <a:lnRef idx="1">
+            <a:schemeClr val="accent1"/>
+          </a:lnRef>
+          <a:fillRef idx="3">
+            <a:schemeClr val="accent1"/>
+          </a:fillRef>
+          <a:effectRef idx="2">
+            <a:schemeClr val="accent1"/>
+          </a:effectRef>
+          <a:fontRef idx="minor">
+            <a:schemeClr val="lt1"/>
+          </a:fontRef>
+        </p:style>
+        <p:txBody>
+          <a:bodyPr rtlCol="0" anchor="ctr"/>
+          <a:lstStyle/>
+          <a:p>
+            <a:pPr algn="ctr"/>
+          </a:p>
+        </p:txBody>
+      </p:sp>
     </p:spTree>
   </p:cSld>
   <p:clrMapOvr>

--- a/tema2_bleeding/Кровотечение_и_обзорный_осмотр.pptx
+++ b/tema2_bleeding/Кровотечение_и_обзорный_осмотр.pptx
@@ -3111,7 +3111,7 @@
             <a:avLst/>
           </a:prstGeom>
           <a:solidFill>
-            <a:srgbClr val="FFFFFF"/>
+            <a:srgbClr val="F2F2F2"/>
           </a:solidFill>
           <a:ln>
             <a:noFill/>
@@ -3147,8 +3147,8 @@
         </p:nvSpPr>
         <p:spPr>
           <a:xfrm>
-            <a:off x="0" y="4200000"/>
-            <a:ext cx="4000000" cy="2800000"/>
+            <a:off x="17500000" y="0"/>
+            <a:ext cx="6884000" cy="13716000"/>
           </a:xfrm>
           <a:prstGeom prst="rect">
             <a:avLst/>
@@ -3190,8 +3190,8 @@
         </p:nvSpPr>
         <p:spPr>
           <a:xfrm>
-            <a:off x="23000000" y="0"/>
-            <a:ext cx="1384000" cy="13716000"/>
+            <a:off x="0" y="4500000"/>
+            <a:ext cx="4500000" cy="2800000"/>
           </a:xfrm>
           <a:prstGeom prst="rect">
             <a:avLst/>
@@ -3233,8 +3233,8 @@
         </p:nvSpPr>
         <p:spPr>
           <a:xfrm>
-            <a:off x="700000" y="4800000"/>
-            <a:ext cx="21000000" cy="1800000"/>
+            <a:off x="700000" y="5000000"/>
+            <a:ext cx="16500000" cy="1600000"/>
           </a:xfrm>
           <a:prstGeom prst="rect">
             <a:avLst/>
@@ -3249,7 +3249,7 @@
           <a:p>
             <a:pPr algn="l"/>
             <a:r>
-              <a:rPr sz="3600" b="1">
+              <a:rPr sz="3400" b="1">
                 <a:solidFill>
                   <a:srgbClr val="333333"/>
                 </a:solidFill>
@@ -3272,7 +3272,7 @@
         <p:spPr>
           <a:xfrm>
             <a:off x="700000" y="6800000"/>
-            <a:ext cx="14000000" cy="25000"/>
+            <a:ext cx="14000000" cy="35000"/>
           </a:xfrm>
           <a:prstGeom prst="rect">
             <a:avLst/>
@@ -4164,8 +4164,8 @@
         </p:nvSpPr>
         <p:spPr>
           <a:xfrm>
-            <a:off x="700000" y="300000"/>
-            <a:ext cx="22000000" cy="900000"/>
+            <a:off x="700000" y="280000"/>
+            <a:ext cx="22000000" cy="850000"/>
           </a:xfrm>
           <a:prstGeom prst="rect">
             <a:avLst/>
@@ -4180,7 +4180,7 @@
           <a:p>
             <a:pPr algn="l"/>
             <a:r>
-              <a:rPr sz="3200" b="1">
+              <a:rPr sz="3000" b="1">
                 <a:solidFill>
                   <a:srgbClr val="333333"/>
                 </a:solidFill>
@@ -4201,14 +4201,14 @@
         </p:nvSpPr>
         <p:spPr>
           <a:xfrm>
-            <a:off x="700000" y="1250000"/>
-            <a:ext cx="22000000" cy="20000"/>
+            <a:off x="700000" y="1150000"/>
+            <a:ext cx="16000000" cy="35000"/>
           </a:xfrm>
           <a:prstGeom prst="rect">
             <a:avLst/>
           </a:prstGeom>
           <a:solidFill>
-            <a:srgbClr val="E1E1E1"/>
+            <a:srgbClr val="555555"/>
           </a:solidFill>
           <a:ln>
             <a:noFill/>
@@ -4244,7 +4244,7 @@
         </p:nvSpPr>
         <p:spPr>
           <a:xfrm>
-            <a:off x="700000" y="1350000"/>
+            <a:off x="700000" y="1250000"/>
             <a:ext cx="22000000" cy="450000"/>
           </a:xfrm>
           <a:prstGeom prst="rect">
@@ -4260,7 +4260,7 @@
           <a:p>
             <a:pPr algn="l"/>
             <a:r>
-              <a:rPr sz="1600" b="0">
+              <a:rPr sz="1400" b="0">
                 <a:solidFill>
                   <a:srgbClr val="666666"/>
                 </a:solidFill>
@@ -4273,16 +4273,40 @@
           </a:p>
         </p:txBody>
       </p:sp>
-      <p:sp>
-        <p:nvSpPr>
-          <p:cNvPr id="6" name="Rounded Rectangle 5"/>
+      <p:pic>
+        <p:nvPicPr>
+          <p:cNvPr id="6" name="Picture 5" descr="def_man.png"/>
+          <p:cNvPicPr>
+            <a:picLocks noChangeAspect="1"/>
+          </p:cNvPicPr>
+          <p:nvPr/>
+        </p:nvPicPr>
+        <p:blipFill>
+          <a:blip r:embed="rId2"/>
+          <a:stretch>
+            <a:fillRect/>
+          </a:stretch>
+        </p:blipFill>
+        <p:spPr>
+          <a:xfrm>
+            <a:off x="700000" y="3068750"/>
+            <a:ext cx="7000000" cy="8362500"/>
+          </a:xfrm>
+          <a:prstGeom prst="rect">
+            <a:avLst/>
+          </a:prstGeom>
+        </p:spPr>
+      </p:pic>
+      <p:sp>
+        <p:nvSpPr>
+          <p:cNvPr id="7" name="Rounded Rectangle 6"/>
           <p:cNvSpPr/>
           <p:nvPr/>
         </p:nvSpPr>
         <p:spPr>
           <a:xfrm>
-            <a:off x="700000" y="2000000"/>
-            <a:ext cx="10000000" cy="4500000"/>
+            <a:off x="6900000" y="2100000"/>
+            <a:ext cx="7500000" cy="4200000"/>
           </a:xfrm>
           <a:prstGeom prst="roundRect">
             <a:avLst/>
@@ -4318,14 +4342,14 @@
       </p:sp>
       <p:sp>
         <p:nvSpPr>
-          <p:cNvPr id="7" name="TextBox 6"/>
+          <p:cNvPr id="8" name="TextBox 7"/>
           <p:cNvSpPr txBox="1"/>
           <p:nvPr/>
         </p:nvSpPr>
         <p:spPr>
           <a:xfrm>
-            <a:off x="1100000" y="2300000"/>
-            <a:ext cx="9200000" cy="3800000"/>
+            <a:off x="7300000" y="2400000"/>
+            <a:ext cx="6700000" cy="3600000"/>
           </a:xfrm>
           <a:prstGeom prst="rect">
             <a:avLst/>
@@ -4340,7 +4364,7 @@
           <a:p>
             <a:pPr algn="l"/>
             <a:r>
-              <a:rPr sz="2400" b="0">
+              <a:rPr sz="2200" b="0">
                 <a:solidFill>
                   <a:srgbClr val="333333"/>
                 </a:solidFill>
@@ -4355,14 +4379,14 @@
       </p:sp>
       <p:sp>
         <p:nvSpPr>
-          <p:cNvPr id="8" name="TextBox 7"/>
+          <p:cNvPr id="9" name="TextBox 8"/>
           <p:cNvSpPr txBox="1"/>
           <p:nvPr/>
         </p:nvSpPr>
         <p:spPr>
           <a:xfrm>
-            <a:off x="11700000" y="2000000"/>
-            <a:ext cx="11000000" cy="600000"/>
+            <a:off x="14700000" y="2000000"/>
+            <a:ext cx="9000000" cy="700000"/>
           </a:xfrm>
           <a:prstGeom prst="rect">
             <a:avLst/>
@@ -4377,7 +4401,7 @@
           <a:p>
             <a:pPr algn="l"/>
             <a:r>
-              <a:rPr sz="2400" b="1">
+              <a:rPr sz="2200" b="1">
                 <a:solidFill>
                   <a:srgbClr val="333333"/>
                 </a:solidFill>
@@ -4392,14 +4416,14 @@
       </p:sp>
       <p:sp>
         <p:nvSpPr>
-          <p:cNvPr id="9" name="TextBox 8"/>
+          <p:cNvPr id="10" name="TextBox 9"/>
           <p:cNvSpPr txBox="1"/>
           <p:nvPr/>
         </p:nvSpPr>
         <p:spPr>
           <a:xfrm>
-            <a:off x="11700000" y="2700000"/>
-            <a:ext cx="11000000" cy="8500000"/>
+            <a:off x="14700000" y="2800000"/>
+            <a:ext cx="9000000" cy="9000000"/>
           </a:xfrm>
           <a:prstGeom prst="rect">
             <a:avLst/>
@@ -4418,7 +4442,7 @@
               </a:spcAft>
             </a:pPr>
             <a:r>
-              <a:rPr sz="2200" b="0">
+              <a:rPr sz="2000" b="0">
                 <a:solidFill>
                   <a:srgbClr val="333333"/>
                 </a:solidFill>
@@ -4426,7 +4450,7 @@
                 <a:ea typeface="Open Sans"/>
                 <a:cs typeface="Open Sans"/>
               </a:rPr>
-              <a:t>☑  резкая общая слабость;</a:t>
+              <a:t>☐  резкая общая слабость;</a:t>
             </a:r>
           </a:p>
           <a:p>
@@ -4436,7 +4460,7 @@
               </a:spcAft>
             </a:pPr>
             <a:r>
-              <a:rPr sz="2200" b="0">
+              <a:rPr sz="2000" b="0">
                 <a:solidFill>
                   <a:srgbClr val="333333"/>
                 </a:solidFill>
@@ -4444,7 +4468,7 @@
                 <a:ea typeface="Open Sans"/>
                 <a:cs typeface="Open Sans"/>
               </a:rPr>
-              <a:t>☑  чувство жажды;</a:t>
+              <a:t>☐  чувство жажды;</a:t>
             </a:r>
           </a:p>
           <a:p>
@@ -4454,7 +4478,7 @@
               </a:spcAft>
             </a:pPr>
             <a:r>
-              <a:rPr sz="2200" b="0">
+              <a:rPr sz="2000" b="0">
                 <a:solidFill>
                   <a:srgbClr val="333333"/>
                 </a:solidFill>
@@ -4462,7 +4486,7 @@
                 <a:ea typeface="Open Sans"/>
                 <a:cs typeface="Open Sans"/>
               </a:rPr>
-              <a:t>☑  головокружение;</a:t>
+              <a:t>☐  головокружение;</a:t>
             </a:r>
           </a:p>
           <a:p>
@@ -4472,7 +4496,7 @@
               </a:spcAft>
             </a:pPr>
             <a:r>
-              <a:rPr sz="2200" b="0">
+              <a:rPr sz="2000" b="0">
                 <a:solidFill>
                   <a:srgbClr val="333333"/>
                 </a:solidFill>
@@ -4480,7 +4504,7 @@
                 <a:ea typeface="Open Sans"/>
                 <a:cs typeface="Open Sans"/>
               </a:rPr>
-              <a:t>☑  мелькание «мушек» перед глазами;</a:t>
+              <a:t>☐  мелькание «мушек» перед глазами;</a:t>
             </a:r>
           </a:p>
           <a:p>
@@ -4490,7 +4514,7 @@
               </a:spcAft>
             </a:pPr>
             <a:r>
-              <a:rPr sz="2200" b="0">
+              <a:rPr sz="2000" b="0">
                 <a:solidFill>
                   <a:srgbClr val="333333"/>
                 </a:solidFill>
@@ -4498,7 +4522,7 @@
                 <a:ea typeface="Open Sans"/>
                 <a:cs typeface="Open Sans"/>
               </a:rPr>
-              <a:t>☑  обморок, чаще при попытке встать;</a:t>
+              <a:t>☐  обморок, чаще при попытке встать;</a:t>
             </a:r>
           </a:p>
           <a:p>
@@ -4508,7 +4532,7 @@
               </a:spcAft>
             </a:pPr>
             <a:r>
-              <a:rPr sz="2200" b="0">
+              <a:rPr sz="2000" b="0">
                 <a:solidFill>
                   <a:srgbClr val="333333"/>
                 </a:solidFill>
@@ -4516,7 +4540,7 @@
                 <a:ea typeface="Open Sans"/>
                 <a:cs typeface="Open Sans"/>
               </a:rPr>
-              <a:t>☑  бледная, влажная и холодная кожа;</a:t>
+              <a:t>☐  бледная, влажная и холодная кожа;</a:t>
             </a:r>
           </a:p>
           <a:p>
@@ -4526,7 +4550,7 @@
               </a:spcAft>
             </a:pPr>
             <a:r>
-              <a:rPr sz="2200" b="0">
+              <a:rPr sz="2000" b="0">
                 <a:solidFill>
                   <a:srgbClr val="333333"/>
                 </a:solidFill>
@@ -4534,7 +4558,7 @@
                 <a:ea typeface="Open Sans"/>
                 <a:cs typeface="Open Sans"/>
               </a:rPr>
-              <a:t>☑  учащённое сердцебиение;</a:t>
+              <a:t>☐  учащённое сердцебиение;</a:t>
             </a:r>
           </a:p>
           <a:p>
@@ -4544,7 +4568,7 @@
               </a:spcAft>
             </a:pPr>
             <a:r>
-              <a:rPr sz="2200" b="0">
+              <a:rPr sz="2000" b="0">
                 <a:solidFill>
                   <a:srgbClr val="333333"/>
                 </a:solidFill>
@@ -4552,7 +4576,7 @@
                 <a:ea typeface="Open Sans"/>
                 <a:cs typeface="Open Sans"/>
               </a:rPr>
-              <a:t>☑  частое дыхание.</a:t>
+              <a:t>☐  частое дыхание.</a:t>
             </a:r>
           </a:p>
         </p:txBody>
@@ -4626,8 +4650,8 @@
         </p:nvSpPr>
         <p:spPr>
           <a:xfrm>
-            <a:off x="700000" y="300000"/>
-            <a:ext cx="22000000" cy="900000"/>
+            <a:off x="700000" y="280000"/>
+            <a:ext cx="22000000" cy="850000"/>
           </a:xfrm>
           <a:prstGeom prst="rect">
             <a:avLst/>
@@ -4642,7 +4666,7 @@
           <a:p>
             <a:pPr algn="l"/>
             <a:r>
-              <a:rPr sz="3200" b="1">
+              <a:rPr sz="3000" b="1">
                 <a:solidFill>
                   <a:srgbClr val="333333"/>
                 </a:solidFill>
@@ -4663,14 +4687,14 @@
         </p:nvSpPr>
         <p:spPr>
           <a:xfrm>
-            <a:off x="700000" y="1250000"/>
-            <a:ext cx="22000000" cy="20000"/>
+            <a:off x="700000" y="1150000"/>
+            <a:ext cx="16000000" cy="35000"/>
           </a:xfrm>
           <a:prstGeom prst="rect">
             <a:avLst/>
           </a:prstGeom>
           <a:solidFill>
-            <a:srgbClr val="E1E1E1"/>
+            <a:srgbClr val="555555"/>
           </a:solidFill>
           <a:ln>
             <a:noFill/>
@@ -4706,7 +4730,7 @@
         </p:nvSpPr>
         <p:spPr>
           <a:xfrm>
-            <a:off x="700000" y="1350000"/>
+            <a:off x="700000" y="1250000"/>
             <a:ext cx="22000000" cy="450000"/>
           </a:xfrm>
           <a:prstGeom prst="rect">
@@ -4722,7 +4746,7 @@
           <a:p>
             <a:pPr algn="l"/>
             <a:r>
-              <a:rPr sz="1600" b="0">
+              <a:rPr sz="1400" b="0">
                 <a:solidFill>
                   <a:srgbClr val="666666"/>
                 </a:solidFill>
@@ -4735,91 +4759,9 @@
           </a:p>
         </p:txBody>
       </p:sp>
-      <p:sp>
-        <p:nvSpPr>
-          <p:cNvPr id="6" name="TextBox 5"/>
-          <p:cNvSpPr txBox="1"/>
-          <p:nvPr/>
-        </p:nvSpPr>
-        <p:spPr>
-          <a:xfrm>
-            <a:off x="700000" y="2200000"/>
-            <a:ext cx="11000000" cy="3500000"/>
-          </a:xfrm>
-          <a:prstGeom prst="rect">
-            <a:avLst/>
-          </a:prstGeom>
-          <a:noFill/>
-        </p:spPr>
-        <p:txBody>
-          <a:bodyPr wrap="square" anchor="t">
-            <a:spAutoFit/>
-          </a:bodyPr>
-          <a:lstStyle/>
-          <a:p>
-            <a:pPr algn="l"/>
-            <a:r>
-              <a:rPr sz="2800" b="1">
-                <a:solidFill>
-                  <a:srgbClr val="333333"/>
-                </a:solidFill>
-                <a:latin typeface="Open Sans"/>
-                <a:ea typeface="Open Sans"/>
-                <a:cs typeface="Open Sans"/>
-              </a:rPr>
-              <a:t>Обзорный осмотр производится очень быстро, в течение 1-2 секунд, с головы до ног</a:t>
-            </a:r>
-          </a:p>
-        </p:txBody>
-      </p:sp>
-      <p:sp>
-        <p:nvSpPr>
-          <p:cNvPr id="7" name="Rectangle 6"/>
-          <p:cNvSpPr/>
-          <p:nvPr/>
-        </p:nvSpPr>
-        <p:spPr>
-          <a:xfrm>
-            <a:off x="12700000" y="2000000"/>
-            <a:ext cx="10000000" cy="9500000"/>
-          </a:xfrm>
-          <a:prstGeom prst="rect">
-            <a:avLst/>
-          </a:prstGeom>
-          <a:solidFill>
-            <a:srgbClr val="FFFFFF"/>
-          </a:solidFill>
-          <a:ln w="12700">
-            <a:solidFill>
-              <a:srgbClr val="E1E1E1"/>
-            </a:solidFill>
-          </a:ln>
-        </p:spPr>
-        <p:style>
-          <a:lnRef idx="1">
-            <a:schemeClr val="accent1"/>
-          </a:lnRef>
-          <a:fillRef idx="3">
-            <a:schemeClr val="accent1"/>
-          </a:fillRef>
-          <a:effectRef idx="2">
-            <a:schemeClr val="accent1"/>
-          </a:effectRef>
-          <a:fontRef idx="minor">
-            <a:schemeClr val="lt1"/>
-          </a:fontRef>
-        </p:style>
-        <p:txBody>
-          <a:bodyPr rtlCol="0" anchor="ctr"/>
-          <a:lstStyle/>
-          <a:p>
-            <a:pPr algn="ctr"/>
-          </a:p>
-        </p:txBody>
-      </p:sp>
       <p:pic>
         <p:nvPicPr>
-          <p:cNvPr id="8" name="Picture 7" descr="overview_exam.png"/>
+          <p:cNvPr id="6" name="Picture 5" descr="overview_exam.png"/>
           <p:cNvPicPr>
             <a:picLocks noChangeAspect="1"/>
           </p:cNvPicPr>
@@ -4833,14 +4775,51 @@
         </p:blipFill>
         <p:spPr>
           <a:xfrm>
-            <a:off x="12900000" y="2960526"/>
-            <a:ext cx="9600000" cy="7578947"/>
+            <a:off x="700000" y="3053077"/>
+            <a:ext cx="12000000" cy="8393846"/>
           </a:xfrm>
           <a:prstGeom prst="rect">
             <a:avLst/>
           </a:prstGeom>
         </p:spPr>
       </p:pic>
+      <p:sp>
+        <p:nvSpPr>
+          <p:cNvPr id="7" name="TextBox 6"/>
+          <p:cNvSpPr txBox="1"/>
+          <p:nvPr/>
+        </p:nvSpPr>
+        <p:spPr>
+          <a:xfrm>
+            <a:off x="13500000" y="4500000"/>
+            <a:ext cx="10000000" cy="4500000"/>
+          </a:xfrm>
+          <a:prstGeom prst="rect">
+            <a:avLst/>
+          </a:prstGeom>
+          <a:noFill/>
+        </p:spPr>
+        <p:txBody>
+          <a:bodyPr wrap="square" anchor="t">
+            <a:spAutoFit/>
+          </a:bodyPr>
+          <a:lstStyle/>
+          <a:p>
+            <a:pPr algn="l"/>
+            <a:r>
+              <a:rPr sz="2800" b="0">
+                <a:solidFill>
+                  <a:srgbClr val="333333"/>
+                </a:solidFill>
+                <a:latin typeface="Open Sans"/>
+                <a:ea typeface="Open Sans"/>
+                <a:cs typeface="Open Sans"/>
+              </a:rPr>
+              <a:t>Обзорный осмотр производится очень быстро, в течение 1-2 секунд, с головы до ног</a:t>
+            </a:r>
+          </a:p>
+        </p:txBody>
+      </p:sp>
     </p:spTree>
   </p:cSld>
   <p:clrMapOvr>
@@ -6746,7 +6725,7 @@
             <a:avLst/>
           </a:prstGeom>
           <a:solidFill>
-            <a:srgbClr val="FFFFFF"/>
+            <a:srgbClr val="F2F2F2"/>
           </a:solidFill>
           <a:ln>
             <a:noFill/>
@@ -6782,8 +6761,8 @@
         </p:nvSpPr>
         <p:spPr>
           <a:xfrm>
-            <a:off x="23000000" y="0"/>
-            <a:ext cx="1384000" cy="13716000"/>
+            <a:off x="17500000" y="0"/>
+            <a:ext cx="6884000" cy="13716000"/>
           </a:xfrm>
           <a:prstGeom prst="rect">
             <a:avLst/>
@@ -6826,7 +6805,7 @@
         <p:spPr>
           <a:xfrm>
             <a:off x="700000" y="5500000"/>
-            <a:ext cx="21000000" cy="1200000"/>
+            <a:ext cx="16000000" cy="1200000"/>
           </a:xfrm>
           <a:prstGeom prst="rect">
             <a:avLst/>
@@ -6863,7 +6842,7 @@
         <p:spPr>
           <a:xfrm>
             <a:off x="700000" y="6900000"/>
-            <a:ext cx="10000000" cy="25000"/>
+            <a:ext cx="10000000" cy="35000"/>
           </a:xfrm>
           <a:prstGeom prst="rect">
             <a:avLst/>

--- a/tema2_bleeding/Кровотечение_и_обзорный_осмотр.pptx
+++ b/tema2_bleeding/Кровотечение_и_обзорный_осмотр.pptx
@@ -4289,8 +4289,8 @@
         </p:blipFill>
         <p:spPr>
           <a:xfrm>
-            <a:off x="700000" y="3068750"/>
-            <a:ext cx="7000000" cy="8362500"/>
+            <a:off x="1430000" y="2000000"/>
+            <a:ext cx="5040000" cy="10500000"/>
           </a:xfrm>
           <a:prstGeom prst="rect">
             <a:avLst/>
@@ -4305,7 +4305,7 @@
         </p:nvSpPr>
         <p:spPr>
           <a:xfrm>
-            <a:off x="6900000" y="2100000"/>
+            <a:off x="6500000" y="2100000"/>
             <a:ext cx="7500000" cy="4200000"/>
           </a:xfrm>
           <a:prstGeom prst="roundRect">
@@ -4348,7 +4348,7 @@
         </p:nvSpPr>
         <p:spPr>
           <a:xfrm>
-            <a:off x="7300000" y="2400000"/>
+            <a:off x="6900000" y="2400000"/>
             <a:ext cx="6700000" cy="3600000"/>
           </a:xfrm>
           <a:prstGeom prst="rect">
@@ -4372,7 +4372,29 @@
                 <a:ea typeface="Open Sans"/>
                 <a:cs typeface="Open Sans"/>
               </a:rPr>
-              <a:t>Под кровотечением понимают ситуацию, когда кровь по разным причинам покидает сосудистое русло, что приводит к острой кровопотере.</a:t>
+              <a:t>Под </a:t>
+            </a:r>
+            <a:r>
+              <a:rPr sz="2200" b="1">
+                <a:solidFill>
+                  <a:srgbClr val="333333"/>
+                </a:solidFill>
+                <a:latin typeface="Open Sans"/>
+                <a:ea typeface="Open Sans"/>
+                <a:cs typeface="Open Sans"/>
+              </a:rPr>
+              <a:t>кровотечением понимают</a:t>
+            </a:r>
+            <a:r>
+              <a:rPr sz="2200" b="0">
+                <a:solidFill>
+                  <a:srgbClr val="333333"/>
+                </a:solidFill>
+                <a:latin typeface="Open Sans"/>
+                <a:ea typeface="Open Sans"/>
+                <a:cs typeface="Open Sans"/>
+              </a:rPr>
+              <a:t> ситуацию, когда кровь по разным причинам покидает сосудистое русло, что приводит к острой кровопотере.</a:t>
             </a:r>
           </a:p>
         </p:txBody>
@@ -4775,8 +4797,8 @@
         </p:blipFill>
         <p:spPr>
           <a:xfrm>
-            <a:off x="700000" y="3053077"/>
-            <a:ext cx="12000000" cy="8393846"/>
+            <a:off x="700000" y="2202222"/>
+            <a:ext cx="11800000" cy="10095555"/>
           </a:xfrm>
           <a:prstGeom prst="rect">
             <a:avLst/>
@@ -4791,8 +4813,8 @@
         </p:nvSpPr>
         <p:spPr>
           <a:xfrm>
-            <a:off x="13500000" y="4500000"/>
-            <a:ext cx="10000000" cy="4500000"/>
+            <a:off x="13300000" y="4200000"/>
+            <a:ext cx="10200000" cy="5000000"/>
           </a:xfrm>
           <a:prstGeom prst="rect">
             <a:avLst/>
@@ -4807,7 +4829,7 @@
           <a:p>
             <a:pPr algn="l"/>
             <a:r>
-              <a:rPr sz="2800" b="0">
+              <a:rPr sz="2800" b="1">
                 <a:solidFill>
                   <a:srgbClr val="333333"/>
                 </a:solidFill>
@@ -4815,7 +4837,40 @@
                 <a:ea typeface="Open Sans"/>
                 <a:cs typeface="Open Sans"/>
               </a:rPr>
-              <a:t>Обзорный осмотр производится очень быстро, в течение 1-2 секунд, с головы до ног</a:t>
+              <a:t>Обзорный осмотр</a:t>
+            </a:r>
+            <a:r>
+              <a:rPr sz="2800" b="0">
+                <a:solidFill>
+                  <a:srgbClr val="333333"/>
+                </a:solidFill>
+                <a:latin typeface="Open Sans"/>
+                <a:ea typeface="Open Sans"/>
+                <a:cs typeface="Open Sans"/>
+              </a:rPr>
+              <a:t> производится очень быстро, в течение </a:t>
+            </a:r>
+            <a:r>
+              <a:rPr sz="2800" b="1">
+                <a:solidFill>
+                  <a:srgbClr val="333333"/>
+                </a:solidFill>
+                <a:latin typeface="Open Sans"/>
+                <a:ea typeface="Open Sans"/>
+                <a:cs typeface="Open Sans"/>
+              </a:rPr>
+              <a:t>1-2 секунд</a:t>
+            </a:r>
+            <a:r>
+              <a:rPr sz="2800" b="0">
+                <a:solidFill>
+                  <a:srgbClr val="333333"/>
+                </a:solidFill>
+                <a:latin typeface="Open Sans"/>
+                <a:ea typeface="Open Sans"/>
+                <a:cs typeface="Open Sans"/>
+              </a:rPr>
+              <a:t>, с головы до ног</a:t>
             </a:r>
           </a:p>
         </p:txBody>
